--- a/output/wordlabs-like-3day.pptx
+++ b/output/wordlabs-like-3day.pptx
@@ -4279,7 +4279,7 @@
                 <a:ea typeface="Calibri" pitchFamily="34" charset="-122"/>
                 <a:cs typeface="Calibri" pitchFamily="34" charset="-120"/>
               </a:rPr>
-              <a:t>Origin: Old English: gelic</a:t>
+              <a:t>Origin: Latin: similis</a:t>
             </a:r>
             <a:endParaRPr lang="en-US" sz="1300" dirty="0"/>
           </a:p>
@@ -6057,7 +6057,7 @@
                 <a:ea typeface="Calibri" pitchFamily="34" charset="-122"/>
                 <a:cs typeface="Calibri" pitchFamily="34" charset="-120"/>
               </a:rPr>
-              <a:t>warlike</a:t>
+              <a:t>lifelike</a:t>
             </a:r>
             <a:pPr algn="l" indent="0" marL="0">
               <a:buNone/>
@@ -6071,7 +6071,7 @@
                 <a:ea typeface="Calibri" pitchFamily="34" charset="-122"/>
                 <a:cs typeface="Calibri" pitchFamily="34" charset="-120"/>
               </a:rPr>
-              <a:t> tribe painted their shields with </a:t>
+              <a:t> puppet moved in such a </a:t>
             </a:r>
             <a:pPr algn="l" indent="0" marL="0">
               <a:buNone/>
@@ -6088,7 +6088,7 @@
                 <a:ea typeface="Calibri" pitchFamily="34" charset="-122"/>
                 <a:cs typeface="Calibri" pitchFamily="34" charset="-120"/>
               </a:rPr>
-              <a:t>lifelike</a:t>
+              <a:t>godlike</a:t>
             </a:r>
             <a:pPr algn="l" indent="0" marL="0">
               <a:buNone/>
@@ -6102,7 +6102,7 @@
                 <a:ea typeface="Calibri" pitchFamily="34" charset="-122"/>
                 <a:cs typeface="Calibri" pitchFamily="34" charset="-120"/>
               </a:rPr>
-              <a:t> animals to frighten their enemies.</a:t>
+              <a:t> way that the audience gasped with amazement.</a:t>
             </a:r>
             <a:endParaRPr lang="en-US" sz="1800" dirty="0"/>
           </a:p>
@@ -6257,7 +6257,7 @@
                 <a:ea typeface="Trebuchet MS" pitchFamily="34" charset="-122"/>
                 <a:cs typeface="Trebuchet MS" pitchFamily="34" charset="-120"/>
               </a:rPr>
-              <a:t>warlike</a:t>
+              <a:t>lifelike</a:t>
             </a:r>
             <a:endParaRPr lang="en-US" sz="1400" dirty="0"/>
           </a:p>
@@ -6385,7 +6385,7 @@
                 <a:ea typeface="Trebuchet MS" pitchFamily="34" charset="-122"/>
                 <a:cs typeface="Trebuchet MS" pitchFamily="34" charset="-120"/>
               </a:rPr>
-              <a:t>lifelike</a:t>
+              <a:t>godlike</a:t>
             </a:r>
             <a:endParaRPr lang="en-US" sz="1400" dirty="0"/>
           </a:p>
@@ -6855,7 +6855,7 @@
                 <a:ea typeface="Trebuchet MS" pitchFamily="34" charset="-122"/>
                 <a:cs typeface="Trebuchet MS" pitchFamily="34" charset="-120"/>
               </a:rPr>
-              <a:t>warlike</a:t>
+              <a:t>lifelike</a:t>
             </a:r>
             <a:endParaRPr lang="en-US" sz="2800" dirty="0"/>
           </a:p>
@@ -7682,7 +7682,7 @@
                 <a:ea typeface="Trebuchet MS" pitchFamily="34" charset="-122"/>
                 <a:cs typeface="Trebuchet MS" pitchFamily="34" charset="-120"/>
               </a:rPr>
-              <a:t>warlike</a:t>
+              <a:t>lifelike</a:t>
             </a:r>
             <a:endParaRPr lang="en-US" sz="2800" dirty="0"/>
           </a:p>
@@ -7821,7 +7821,7 @@
                 <a:ea typeface="Trebuchet MS" pitchFamily="34" charset="-122"/>
                 <a:cs typeface="Trebuchet MS" pitchFamily="34" charset="-120"/>
               </a:rPr>
-              <a:t>war</a:t>
+              <a:t>life</a:t>
             </a:r>
             <a:endParaRPr lang="en-US" sz="1300" dirty="0"/>
           </a:p>
@@ -7860,7 +7860,7 @@
                 <a:ea typeface="Calibri" pitchFamily="34" charset="-122"/>
                 <a:cs typeface="Calibri" pitchFamily="34" charset="-120"/>
               </a:rPr>
-              <a:t>battle or fighting</a:t>
+              <a:t>living existence</a:t>
             </a:r>
             <a:endParaRPr lang="en-US" sz="850" dirty="0"/>
           </a:p>
@@ -8667,7 +8667,7 @@
                 <a:ea typeface="Trebuchet MS" pitchFamily="34" charset="-122"/>
                 <a:cs typeface="Trebuchet MS" pitchFamily="34" charset="-120"/>
               </a:rPr>
-              <a:t>warlike</a:t>
+              <a:t>lifelike</a:t>
             </a:r>
             <a:endParaRPr lang="en-US" sz="2800" dirty="0"/>
           </a:p>
@@ -8806,7 +8806,7 @@
                 <a:ea typeface="Trebuchet MS" pitchFamily="34" charset="-122"/>
                 <a:cs typeface="Trebuchet MS" pitchFamily="34" charset="-120"/>
               </a:rPr>
-              <a:t>war</a:t>
+              <a:t>life</a:t>
             </a:r>
             <a:endParaRPr lang="en-US" sz="1300" dirty="0"/>
           </a:p>
@@ -8845,7 +8845,7 @@
                 <a:ea typeface="Calibri" pitchFamily="34" charset="-122"/>
                 <a:cs typeface="Calibri" pitchFamily="34" charset="-120"/>
               </a:rPr>
-              <a:t>battle or fighting</a:t>
+              <a:t>living existence</a:t>
             </a:r>
             <a:endParaRPr lang="en-US" sz="850" dirty="0"/>
           </a:p>
@@ -9116,7 +9116,7 @@
                 <a:ea typeface="Trebuchet MS" pitchFamily="34" charset="-122"/>
                 <a:cs typeface="Trebuchet MS" pitchFamily="34" charset="-120"/>
               </a:rPr>
-              <a:t>war</a:t>
+              <a:t>life</a:t>
             </a:r>
             <a:endParaRPr lang="en-US" sz="1400" dirty="0"/>
           </a:p>
@@ -9784,7 +9784,7 @@
                 <a:ea typeface="Trebuchet MS" pitchFamily="34" charset="-122"/>
                 <a:cs typeface="Trebuchet MS" pitchFamily="34" charset="-120"/>
               </a:rPr>
-              <a:t>warlike</a:t>
+              <a:t>lifelike</a:t>
             </a:r>
             <a:endParaRPr lang="en-US" sz="2800" dirty="0"/>
           </a:p>
@@ -9923,7 +9923,7 @@
                 <a:ea typeface="Trebuchet MS" pitchFamily="34" charset="-122"/>
                 <a:cs typeface="Trebuchet MS" pitchFamily="34" charset="-120"/>
               </a:rPr>
-              <a:t>war</a:t>
+              <a:t>life</a:t>
             </a:r>
             <a:endParaRPr lang="en-US" sz="1300" dirty="0"/>
           </a:p>
@@ -9962,7 +9962,7 @@
                 <a:ea typeface="Calibri" pitchFamily="34" charset="-122"/>
                 <a:cs typeface="Calibri" pitchFamily="34" charset="-120"/>
               </a:rPr>
-              <a:t>battle or fighting</a:t>
+              <a:t>living existence</a:t>
             </a:r>
             <a:endParaRPr lang="en-US" sz="850" dirty="0"/>
           </a:p>
@@ -10233,7 +10233,7 @@
                 <a:ea typeface="Trebuchet MS" pitchFamily="34" charset="-122"/>
                 <a:cs typeface="Trebuchet MS" pitchFamily="34" charset="-120"/>
               </a:rPr>
-              <a:t>war</a:t>
+              <a:t>life</a:t>
             </a:r>
             <a:endParaRPr lang="en-US" sz="1400" dirty="0"/>
           </a:p>
@@ -10445,7 +10445,7 @@
         </p:nvSpPr>
         <p:spPr>
           <a:xfrm>
-            <a:off x="2254649" y="4169664"/>
+            <a:off x="2023872" y="4169664"/>
             <a:ext cx="685800" cy="475488"/>
           </a:xfrm>
           <a:prstGeom prst="rect">
@@ -10472,7 +10472,7 @@
         </p:nvSpPr>
         <p:spPr>
           <a:xfrm>
-            <a:off x="2254649" y="4169664"/>
+            <a:off x="2023872" y="4169664"/>
             <a:ext cx="685800" cy="475488"/>
           </a:xfrm>
           <a:prstGeom prst="rect">
@@ -10497,7 +10497,7 @@
                 <a:ea typeface="Trebuchet MS" pitchFamily="34" charset="-122"/>
                 <a:cs typeface="Trebuchet MS" pitchFamily="34" charset="-120"/>
               </a:rPr>
-              <a:t>w</a:t>
+              <a:t>l</a:t>
             </a:r>
             <a:endParaRPr lang="en-US" sz="900" dirty="0"/>
           </a:p>
@@ -10511,7 +10511,7 @@
         </p:nvSpPr>
         <p:spPr>
           <a:xfrm>
-            <a:off x="3293146" y="4169664"/>
+            <a:off x="2831592" y="4169664"/>
             <a:ext cx="685800" cy="475488"/>
           </a:xfrm>
           <a:prstGeom prst="rect">
@@ -10538,7 +10538,7 @@
         </p:nvSpPr>
         <p:spPr>
           <a:xfrm>
-            <a:off x="3293146" y="4169664"/>
+            <a:off x="2831592" y="4169664"/>
             <a:ext cx="685800" cy="475488"/>
           </a:xfrm>
           <a:prstGeom prst="rect">
@@ -10563,7 +10563,7 @@
                 <a:ea typeface="Trebuchet MS" pitchFamily="34" charset="-122"/>
                 <a:cs typeface="Trebuchet MS" pitchFamily="34" charset="-120"/>
               </a:rPr>
-              <a:t>ar</a:t>
+              <a:t>i</a:t>
             </a:r>
             <a:endParaRPr lang="en-US" sz="900" dirty="0"/>
           </a:p>
@@ -10577,7 +10577,7 @@
         </p:nvSpPr>
         <p:spPr>
           <a:xfrm>
-            <a:off x="4331643" y="4169664"/>
+            <a:off x="3639312" y="4169664"/>
             <a:ext cx="685800" cy="475488"/>
           </a:xfrm>
           <a:prstGeom prst="rect">
@@ -10604,7 +10604,7 @@
         </p:nvSpPr>
         <p:spPr>
           <a:xfrm>
-            <a:off x="4331643" y="4169664"/>
+            <a:off x="3639312" y="4169664"/>
             <a:ext cx="685800" cy="475488"/>
           </a:xfrm>
           <a:prstGeom prst="rect">
@@ -10629,7 +10629,7 @@
                 <a:ea typeface="Trebuchet MS" pitchFamily="34" charset="-122"/>
                 <a:cs typeface="Trebuchet MS" pitchFamily="34" charset="-120"/>
               </a:rPr>
-              <a:t>l</a:t>
+              <a:t>f</a:t>
             </a:r>
             <a:endParaRPr lang="en-US" sz="900" dirty="0"/>
           </a:p>
@@ -10643,7 +10643,7 @@
         </p:nvSpPr>
         <p:spPr>
           <a:xfrm>
-            <a:off x="5370141" y="4169664"/>
+            <a:off x="4447032" y="4169664"/>
             <a:ext cx="685800" cy="475488"/>
           </a:xfrm>
           <a:prstGeom prst="rect">
@@ -10670,7 +10670,7 @@
         </p:nvSpPr>
         <p:spPr>
           <a:xfrm>
-            <a:off x="5370141" y="4169664"/>
+            <a:off x="4447032" y="4169664"/>
             <a:ext cx="685800" cy="475488"/>
           </a:xfrm>
           <a:prstGeom prst="rect">
@@ -10695,7 +10695,7 @@
                 <a:ea typeface="Trebuchet MS" pitchFamily="34" charset="-122"/>
                 <a:cs typeface="Trebuchet MS" pitchFamily="34" charset="-120"/>
               </a:rPr>
-              <a:t>i</a:t>
+              <a:t>e</a:t>
             </a:r>
             <a:endParaRPr lang="en-US" sz="900" dirty="0"/>
           </a:p>
@@ -10709,7 +10709,7 @@
         </p:nvSpPr>
         <p:spPr>
           <a:xfrm>
-            <a:off x="6408638" y="4169664"/>
+            <a:off x="5254752" y="4169664"/>
             <a:ext cx="685800" cy="475488"/>
           </a:xfrm>
           <a:prstGeom prst="rect">
@@ -10736,7 +10736,7 @@
         </p:nvSpPr>
         <p:spPr>
           <a:xfrm>
-            <a:off x="6408638" y="4169664"/>
+            <a:off x="5254752" y="4169664"/>
             <a:ext cx="685800" cy="475488"/>
           </a:xfrm>
           <a:prstGeom prst="rect">
@@ -10761,7 +10761,7 @@
                 <a:ea typeface="Trebuchet MS" pitchFamily="34" charset="-122"/>
                 <a:cs typeface="Trebuchet MS" pitchFamily="34" charset="-120"/>
               </a:rPr>
-              <a:t>k</a:t>
+              <a:t>l</a:t>
             </a:r>
             <a:endParaRPr lang="en-US" sz="900" dirty="0"/>
           </a:p>
@@ -10775,7 +10775,7 @@
         </p:nvSpPr>
         <p:spPr>
           <a:xfrm>
-            <a:off x="7447135" y="4169664"/>
+            <a:off x="6062472" y="4169664"/>
             <a:ext cx="685800" cy="475488"/>
           </a:xfrm>
           <a:prstGeom prst="rect">
@@ -10802,7 +10802,139 @@
         </p:nvSpPr>
         <p:spPr>
           <a:xfrm>
-            <a:off x="7447135" y="4169664"/>
+            <a:off x="6062472" y="4169664"/>
+            <a:ext cx="685800" cy="475488"/>
+          </a:xfrm>
+          <a:prstGeom prst="rect">
+            <a:avLst/>
+          </a:prstGeom>
+          <a:noFill/>
+          <a:ln/>
+        </p:spPr>
+        <p:txBody>
+          <a:bodyPr wrap="square" lIns="0" tIns="0" rIns="0" bIns="0" rtlCol="0" anchor="ctr"/>
+          <a:lstStyle/>
+          <a:p>
+            <a:pPr algn="ctr" indent="0" marL="0">
+              <a:buNone/>
+            </a:pPr>
+            <a:r>
+              <a:rPr lang="en-US" sz="900" b="1" dirty="0">
+                <a:solidFill>
+                  <a:srgbClr val="9D174D"/>
+                </a:solidFill>
+                <a:latin typeface="Trebuchet MS" pitchFamily="34" charset="0"/>
+                <a:ea typeface="Trebuchet MS" pitchFamily="34" charset="-122"/>
+                <a:cs typeface="Trebuchet MS" pitchFamily="34" charset="-120"/>
+              </a:rPr>
+              <a:t>i</a:t>
+            </a:r>
+            <a:endParaRPr lang="en-US" sz="900" dirty="0"/>
+          </a:p>
+        </p:txBody>
+      </p:sp>
+      <p:sp>
+        <p:nvSpPr>
+          <p:cNvPr id="45" name="Shape 43"/>
+          <p:cNvSpPr/>
+          <p:nvPr/>
+        </p:nvSpPr>
+        <p:spPr>
+          <a:xfrm>
+            <a:off x="6870192" y="4169664"/>
+            <a:ext cx="685800" cy="475488"/>
+          </a:xfrm>
+          <a:prstGeom prst="rect">
+            <a:avLst>
+              <a:gd name="adj" fmla="val 7692"/>
+            </a:avLst>
+          </a:prstGeom>
+          <a:solidFill>
+            <a:srgbClr val="FFFFFF"/>
+          </a:solidFill>
+          <a:ln w="12700">
+            <a:solidFill>
+              <a:srgbClr val="DB2777"/>
+            </a:solidFill>
+            <a:prstDash val="solid"/>
+          </a:ln>
+        </p:spPr>
+      </p:sp>
+      <p:sp>
+        <p:nvSpPr>
+          <p:cNvPr id="46" name="Text 44"/>
+          <p:cNvSpPr/>
+          <p:nvPr/>
+        </p:nvSpPr>
+        <p:spPr>
+          <a:xfrm>
+            <a:off x="6870192" y="4169664"/>
+            <a:ext cx="685800" cy="475488"/>
+          </a:xfrm>
+          <a:prstGeom prst="rect">
+            <a:avLst/>
+          </a:prstGeom>
+          <a:noFill/>
+          <a:ln/>
+        </p:spPr>
+        <p:txBody>
+          <a:bodyPr wrap="square" lIns="0" tIns="0" rIns="0" bIns="0" rtlCol="0" anchor="ctr"/>
+          <a:lstStyle/>
+          <a:p>
+            <a:pPr algn="ctr" indent="0" marL="0">
+              <a:buNone/>
+            </a:pPr>
+            <a:r>
+              <a:rPr lang="en-US" sz="900" b="1" dirty="0">
+                <a:solidFill>
+                  <a:srgbClr val="9D174D"/>
+                </a:solidFill>
+                <a:latin typeface="Trebuchet MS" pitchFamily="34" charset="0"/>
+                <a:ea typeface="Trebuchet MS" pitchFamily="34" charset="-122"/>
+                <a:cs typeface="Trebuchet MS" pitchFamily="34" charset="-120"/>
+              </a:rPr>
+              <a:t>k</a:t>
+            </a:r>
+            <a:endParaRPr lang="en-US" sz="900" dirty="0"/>
+          </a:p>
+        </p:txBody>
+      </p:sp>
+      <p:sp>
+        <p:nvSpPr>
+          <p:cNvPr id="47" name="Shape 45"/>
+          <p:cNvSpPr/>
+          <p:nvPr/>
+        </p:nvSpPr>
+        <p:spPr>
+          <a:xfrm>
+            <a:off x="7677912" y="4169664"/>
+            <a:ext cx="685800" cy="475488"/>
+          </a:xfrm>
+          <a:prstGeom prst="rect">
+            <a:avLst>
+              <a:gd name="adj" fmla="val 7692"/>
+            </a:avLst>
+          </a:prstGeom>
+          <a:solidFill>
+            <a:srgbClr val="FFFFFF"/>
+          </a:solidFill>
+          <a:ln w="12700">
+            <a:solidFill>
+              <a:srgbClr val="DB2777"/>
+            </a:solidFill>
+            <a:prstDash val="solid"/>
+          </a:ln>
+        </p:spPr>
+      </p:sp>
+      <p:sp>
+        <p:nvSpPr>
+          <p:cNvPr id="48" name="Text 46"/>
+          <p:cNvSpPr/>
+          <p:nvPr/>
+        </p:nvSpPr>
+        <p:spPr>
+          <a:xfrm>
+            <a:off x="7677912" y="4169664"/>
             <a:ext cx="685800" cy="475488"/>
           </a:xfrm>
           <a:prstGeom prst="rect">
@@ -11258,7 +11390,7 @@
                 <a:ea typeface="Trebuchet MS" pitchFamily="34" charset="-122"/>
                 <a:cs typeface="Trebuchet MS" pitchFamily="34" charset="-120"/>
               </a:rPr>
-              <a:t>lifelike</a:t>
+              <a:t>godlike</a:t>
             </a:r>
             <a:endParaRPr lang="en-US" sz="2800" dirty="0"/>
           </a:p>
@@ -12085,7 +12217,7 @@
                 <a:ea typeface="Trebuchet MS" pitchFamily="34" charset="-122"/>
                 <a:cs typeface="Trebuchet MS" pitchFamily="34" charset="-120"/>
               </a:rPr>
-              <a:t>lifelike</a:t>
+              <a:t>godlike</a:t>
             </a:r>
             <a:endParaRPr lang="en-US" sz="2800" dirty="0"/>
           </a:p>
@@ -12224,7 +12356,7 @@
                 <a:ea typeface="Trebuchet MS" pitchFamily="34" charset="-122"/>
                 <a:cs typeface="Trebuchet MS" pitchFamily="34" charset="-120"/>
               </a:rPr>
-              <a:t>life</a:t>
+              <a:t>god</a:t>
             </a:r>
             <a:endParaRPr lang="en-US" sz="1300" dirty="0"/>
           </a:p>
@@ -12263,7 +12395,7 @@
                 <a:ea typeface="Calibri" pitchFamily="34" charset="-122"/>
                 <a:cs typeface="Calibri" pitchFamily="34" charset="-120"/>
               </a:rPr>
-              <a:t>alive, living</a:t>
+              <a:t>a divine being</a:t>
             </a:r>
             <a:endParaRPr lang="en-US" sz="850" dirty="0"/>
           </a:p>
@@ -13070,7 +13202,7 @@
                 <a:ea typeface="Trebuchet MS" pitchFamily="34" charset="-122"/>
                 <a:cs typeface="Trebuchet MS" pitchFamily="34" charset="-120"/>
               </a:rPr>
-              <a:t>lifelike</a:t>
+              <a:t>godlike</a:t>
             </a:r>
             <a:endParaRPr lang="en-US" sz="2800" dirty="0"/>
           </a:p>
@@ -13209,7 +13341,7 @@
                 <a:ea typeface="Trebuchet MS" pitchFamily="34" charset="-122"/>
                 <a:cs typeface="Trebuchet MS" pitchFamily="34" charset="-120"/>
               </a:rPr>
-              <a:t>life</a:t>
+              <a:t>god</a:t>
             </a:r>
             <a:endParaRPr lang="en-US" sz="1300" dirty="0"/>
           </a:p>
@@ -13248,7 +13380,7 @@
                 <a:ea typeface="Calibri" pitchFamily="34" charset="-122"/>
                 <a:cs typeface="Calibri" pitchFamily="34" charset="-120"/>
               </a:rPr>
-              <a:t>alive, living</a:t>
+              <a:t>a divine being</a:t>
             </a:r>
             <a:endParaRPr lang="en-US" sz="850" dirty="0"/>
           </a:p>
@@ -13519,7 +13651,7 @@
                 <a:ea typeface="Trebuchet MS" pitchFamily="34" charset="-122"/>
                 <a:cs typeface="Trebuchet MS" pitchFamily="34" charset="-120"/>
               </a:rPr>
-              <a:t>life</a:t>
+              <a:t>god</a:t>
             </a:r>
             <a:endParaRPr lang="en-US" sz="1400" dirty="0"/>
           </a:p>
@@ -14452,7 +14584,7 @@
                 <a:ea typeface="Trebuchet MS" pitchFamily="34" charset="-122"/>
                 <a:cs typeface="Trebuchet MS" pitchFamily="34" charset="-120"/>
               </a:rPr>
-              <a:t>lifelike</a:t>
+              <a:t>godlike</a:t>
             </a:r>
             <a:endParaRPr lang="en-US" sz="2800" dirty="0"/>
           </a:p>
@@ -14591,7 +14723,7 @@
                 <a:ea typeface="Trebuchet MS" pitchFamily="34" charset="-122"/>
                 <a:cs typeface="Trebuchet MS" pitchFamily="34" charset="-120"/>
               </a:rPr>
-              <a:t>life</a:t>
+              <a:t>god</a:t>
             </a:r>
             <a:endParaRPr lang="en-US" sz="1300" dirty="0"/>
           </a:p>
@@ -14630,7 +14762,7 @@
                 <a:ea typeface="Calibri" pitchFamily="34" charset="-122"/>
                 <a:cs typeface="Calibri" pitchFamily="34" charset="-120"/>
               </a:rPr>
-              <a:t>alive, living</a:t>
+              <a:t>a divine being</a:t>
             </a:r>
             <a:endParaRPr lang="en-US" sz="850" dirty="0"/>
           </a:p>
@@ -14901,7 +15033,7 @@
                 <a:ea typeface="Trebuchet MS" pitchFamily="34" charset="-122"/>
                 <a:cs typeface="Trebuchet MS" pitchFamily="34" charset="-120"/>
               </a:rPr>
-              <a:t>life</a:t>
+              <a:t>god</a:t>
             </a:r>
             <a:endParaRPr lang="en-US" sz="1400" dirty="0"/>
           </a:p>
@@ -15113,7 +15245,7 @@
         </p:nvSpPr>
         <p:spPr>
           <a:xfrm>
-            <a:off x="2023872" y="4169664"/>
+            <a:off x="2124837" y="4169664"/>
             <a:ext cx="685800" cy="475488"/>
           </a:xfrm>
           <a:prstGeom prst="rect">
@@ -15140,7 +15272,7 @@
         </p:nvSpPr>
         <p:spPr>
           <a:xfrm>
-            <a:off x="2023872" y="4169664"/>
+            <a:off x="2124837" y="4169664"/>
             <a:ext cx="685800" cy="475488"/>
           </a:xfrm>
           <a:prstGeom prst="rect">
@@ -15165,7 +15297,7 @@
                 <a:ea typeface="Trebuchet MS" pitchFamily="34" charset="-122"/>
                 <a:cs typeface="Trebuchet MS" pitchFamily="34" charset="-120"/>
               </a:rPr>
-              <a:t>l</a:t>
+              <a:t>g</a:t>
             </a:r>
             <a:endParaRPr lang="en-US" sz="900" dirty="0"/>
           </a:p>
@@ -15179,7 +15311,7 @@
         </p:nvSpPr>
         <p:spPr>
           <a:xfrm>
-            <a:off x="2831592" y="4169664"/>
+            <a:off x="3033522" y="4169664"/>
             <a:ext cx="685800" cy="475488"/>
           </a:xfrm>
           <a:prstGeom prst="rect">
@@ -15206,7 +15338,7 @@
         </p:nvSpPr>
         <p:spPr>
           <a:xfrm>
-            <a:off x="2831592" y="4169664"/>
+            <a:off x="3033522" y="4169664"/>
             <a:ext cx="685800" cy="475488"/>
           </a:xfrm>
           <a:prstGeom prst="rect">
@@ -15231,7 +15363,7 @@
                 <a:ea typeface="Trebuchet MS" pitchFamily="34" charset="-122"/>
                 <a:cs typeface="Trebuchet MS" pitchFamily="34" charset="-120"/>
               </a:rPr>
-              <a:t>i</a:t>
+              <a:t>o</a:t>
             </a:r>
             <a:endParaRPr lang="en-US" sz="900" dirty="0"/>
           </a:p>
@@ -15245,7 +15377,7 @@
         </p:nvSpPr>
         <p:spPr>
           <a:xfrm>
-            <a:off x="3639312" y="4169664"/>
+            <a:off x="3942207" y="4169664"/>
             <a:ext cx="685800" cy="475488"/>
           </a:xfrm>
           <a:prstGeom prst="rect">
@@ -15272,7 +15404,7 @@
         </p:nvSpPr>
         <p:spPr>
           <a:xfrm>
-            <a:off x="3639312" y="4169664"/>
+            <a:off x="3942207" y="4169664"/>
             <a:ext cx="685800" cy="475488"/>
           </a:xfrm>
           <a:prstGeom prst="rect">
@@ -15297,7 +15429,7 @@
                 <a:ea typeface="Trebuchet MS" pitchFamily="34" charset="-122"/>
                 <a:cs typeface="Trebuchet MS" pitchFamily="34" charset="-120"/>
               </a:rPr>
-              <a:t>f</a:t>
+              <a:t>d</a:t>
             </a:r>
             <a:endParaRPr lang="en-US" sz="900" dirty="0"/>
           </a:p>
@@ -15311,7 +15443,7 @@
         </p:nvSpPr>
         <p:spPr>
           <a:xfrm>
-            <a:off x="4447032" y="4169664"/>
+            <a:off x="4850892" y="4169664"/>
             <a:ext cx="685800" cy="475488"/>
           </a:xfrm>
           <a:prstGeom prst="rect">
@@ -15338,7 +15470,7 @@
         </p:nvSpPr>
         <p:spPr>
           <a:xfrm>
-            <a:off x="4447032" y="4169664"/>
+            <a:off x="4850892" y="4169664"/>
             <a:ext cx="685800" cy="475488"/>
           </a:xfrm>
           <a:prstGeom prst="rect">
@@ -15363,7 +15495,7 @@
                 <a:ea typeface="Trebuchet MS" pitchFamily="34" charset="-122"/>
                 <a:cs typeface="Trebuchet MS" pitchFamily="34" charset="-120"/>
               </a:rPr>
-              <a:t>e</a:t>
+              <a:t>l</a:t>
             </a:r>
             <a:endParaRPr lang="en-US" sz="900" dirty="0"/>
           </a:p>
@@ -15377,7 +15509,7 @@
         </p:nvSpPr>
         <p:spPr>
           <a:xfrm>
-            <a:off x="5254752" y="4169664"/>
+            <a:off x="5759577" y="4169664"/>
             <a:ext cx="685800" cy="475488"/>
           </a:xfrm>
           <a:prstGeom prst="rect">
@@ -15404,7 +15536,7 @@
         </p:nvSpPr>
         <p:spPr>
           <a:xfrm>
-            <a:off x="5254752" y="4169664"/>
+            <a:off x="5759577" y="4169664"/>
             <a:ext cx="685800" cy="475488"/>
           </a:xfrm>
           <a:prstGeom prst="rect">
@@ -15429,7 +15561,7 @@
                 <a:ea typeface="Trebuchet MS" pitchFamily="34" charset="-122"/>
                 <a:cs typeface="Trebuchet MS" pitchFamily="34" charset="-120"/>
               </a:rPr>
-              <a:t>l</a:t>
+              <a:t>i</a:t>
             </a:r>
             <a:endParaRPr lang="en-US" sz="900" dirty="0"/>
           </a:p>
@@ -15443,7 +15575,7 @@
         </p:nvSpPr>
         <p:spPr>
           <a:xfrm>
-            <a:off x="6062472" y="4169664"/>
+            <a:off x="6668262" y="4169664"/>
             <a:ext cx="685800" cy="475488"/>
           </a:xfrm>
           <a:prstGeom prst="rect">
@@ -15470,7 +15602,7 @@
         </p:nvSpPr>
         <p:spPr>
           <a:xfrm>
-            <a:off x="6062472" y="4169664"/>
+            <a:off x="6668262" y="4169664"/>
             <a:ext cx="685800" cy="475488"/>
           </a:xfrm>
           <a:prstGeom prst="rect">
@@ -15495,7 +15627,7 @@
                 <a:ea typeface="Trebuchet MS" pitchFamily="34" charset="-122"/>
                 <a:cs typeface="Trebuchet MS" pitchFamily="34" charset="-120"/>
               </a:rPr>
-              <a:t>i</a:t>
+              <a:t>k</a:t>
             </a:r>
             <a:endParaRPr lang="en-US" sz="900" dirty="0"/>
           </a:p>
@@ -15509,7 +15641,7 @@
         </p:nvSpPr>
         <p:spPr>
           <a:xfrm>
-            <a:off x="6870192" y="4169664"/>
+            <a:off x="7576947" y="4169664"/>
             <a:ext cx="685800" cy="475488"/>
           </a:xfrm>
           <a:prstGeom prst="rect">
@@ -15536,73 +15668,7 @@
         </p:nvSpPr>
         <p:spPr>
           <a:xfrm>
-            <a:off x="6870192" y="4169664"/>
-            <a:ext cx="685800" cy="475488"/>
-          </a:xfrm>
-          <a:prstGeom prst="rect">
-            <a:avLst/>
-          </a:prstGeom>
-          <a:noFill/>
-          <a:ln/>
-        </p:spPr>
-        <p:txBody>
-          <a:bodyPr wrap="square" lIns="0" tIns="0" rIns="0" bIns="0" rtlCol="0" anchor="ctr"/>
-          <a:lstStyle/>
-          <a:p>
-            <a:pPr algn="ctr" indent="0" marL="0">
-              <a:buNone/>
-            </a:pPr>
-            <a:r>
-              <a:rPr lang="en-US" sz="900" b="1" dirty="0">
-                <a:solidFill>
-                  <a:srgbClr val="9D174D"/>
-                </a:solidFill>
-                <a:latin typeface="Trebuchet MS" pitchFamily="34" charset="0"/>
-                <a:ea typeface="Trebuchet MS" pitchFamily="34" charset="-122"/>
-                <a:cs typeface="Trebuchet MS" pitchFamily="34" charset="-120"/>
-              </a:rPr>
-              <a:t>k</a:t>
-            </a:r>
-            <a:endParaRPr lang="en-US" sz="900" dirty="0"/>
-          </a:p>
-        </p:txBody>
-      </p:sp>
-      <p:sp>
-        <p:nvSpPr>
-          <p:cNvPr id="47" name="Shape 45"/>
-          <p:cNvSpPr/>
-          <p:nvPr/>
-        </p:nvSpPr>
-        <p:spPr>
-          <a:xfrm>
-            <a:off x="7677912" y="4169664"/>
-            <a:ext cx="685800" cy="475488"/>
-          </a:xfrm>
-          <a:prstGeom prst="rect">
-            <a:avLst>
-              <a:gd name="adj" fmla="val 7692"/>
-            </a:avLst>
-          </a:prstGeom>
-          <a:solidFill>
-            <a:srgbClr val="FFFFFF"/>
-          </a:solidFill>
-          <a:ln w="12700">
-            <a:solidFill>
-              <a:srgbClr val="DB2777"/>
-            </a:solidFill>
-            <a:prstDash val="solid"/>
-          </a:ln>
-        </p:spPr>
-      </p:sp>
-      <p:sp>
-        <p:nvSpPr>
-          <p:cNvPr id="48" name="Text 46"/>
-          <p:cNvSpPr/>
-          <p:nvPr/>
-        </p:nvSpPr>
-        <p:spPr>
-          <a:xfrm>
-            <a:off x="7677912" y="4169664"/>
+            <a:off x="7576947" y="4169664"/>
             <a:ext cx="685800" cy="475488"/>
           </a:xfrm>
           <a:prstGeom prst="rect">
@@ -16984,7 +17050,7 @@
                 <a:ea typeface="Calibri" pitchFamily="34" charset="-122"/>
                 <a:cs typeface="Calibri" pitchFamily="34" charset="-120"/>
               </a:rPr>
-              <a:t> of spiders, Maya drew a </a:t>
+              <a:t> of spiders, the </a:t>
             </a:r>
             <a:pPr algn="l" indent="0" marL="0">
               <a:buNone/>
@@ -17001,7 +17067,7 @@
                 <a:ea typeface="Calibri" pitchFamily="34" charset="-122"/>
                 <a:cs typeface="Calibri" pitchFamily="34" charset="-120"/>
               </a:rPr>
-              <a:t>lifelike</a:t>
+              <a:t>childlike</a:t>
             </a:r>
             <a:pPr algn="l" indent="0" marL="0">
               <a:buNone/>
@@ -17015,7 +17081,7 @@
                 <a:ea typeface="Calibri" pitchFamily="34" charset="-122"/>
                 <a:cs typeface="Calibri" pitchFamily="34" charset="-120"/>
               </a:rPr>
-              <a:t> spider with </a:t>
+              <a:t> curiosity in her eyes was unmistakable; </a:t>
             </a:r>
             <a:pPr algn="l" indent="0" marL="0">
               <a:buNone/>
@@ -17032,7 +17098,7 @@
                 <a:ea typeface="Calibri" pitchFamily="34" charset="-122"/>
                 <a:cs typeface="Calibri" pitchFamily="34" charset="-120"/>
               </a:rPr>
-              <a:t>childlike</a:t>
+              <a:t>likewise</a:t>
             </a:r>
             <a:pPr algn="l" indent="0" marL="0">
               <a:buNone/>
@@ -17046,7 +17112,7 @@
                 <a:ea typeface="Calibri" pitchFamily="34" charset="-122"/>
                 <a:cs typeface="Calibri" pitchFamily="34" charset="-120"/>
               </a:rPr>
-              <a:t> delight.</a:t>
+              <a:t>, her little brother stared in wonder.</a:t>
             </a:r>
             <a:endParaRPr lang="en-US" sz="1800" dirty="0"/>
           </a:p>
@@ -17329,7 +17395,7 @@
                 <a:ea typeface="Trebuchet MS" pitchFamily="34" charset="-122"/>
                 <a:cs typeface="Trebuchet MS" pitchFamily="34" charset="-120"/>
               </a:rPr>
-              <a:t>lifelike</a:t>
+              <a:t>childlike</a:t>
             </a:r>
             <a:endParaRPr lang="en-US" sz="1400" dirty="0"/>
           </a:p>
@@ -17457,7 +17523,7 @@
                 <a:ea typeface="Trebuchet MS" pitchFamily="34" charset="-122"/>
                 <a:cs typeface="Trebuchet MS" pitchFamily="34" charset="-120"/>
               </a:rPr>
-              <a:t>childlike</a:t>
+              <a:t>likewise</a:t>
             </a:r>
             <a:endParaRPr lang="en-US" sz="1400" dirty="0"/>
           </a:p>
@@ -19044,7 +19110,7 @@
                 <a:ea typeface="Calibri" pitchFamily="34" charset="-122"/>
                 <a:cs typeface="Calibri" pitchFamily="34" charset="-120"/>
               </a:rPr>
-              <a:t>to find pleasing, similar to</a:t>
+              <a:t>resembling, similar to; to enjoy</a:t>
             </a:r>
             <a:endParaRPr lang="en-US" sz="850" dirty="0"/>
           </a:p>
@@ -20029,7 +20095,7 @@
                 <a:ea typeface="Calibri" pitchFamily="34" charset="-122"/>
                 <a:cs typeface="Calibri" pitchFamily="34" charset="-120"/>
               </a:rPr>
-              <a:t>to find pleasing, similar to</a:t>
+              <a:t>resembling, similar to; to enjoy</a:t>
             </a:r>
             <a:endParaRPr lang="en-US" sz="850" dirty="0"/>
           </a:p>
@@ -21146,7 +21212,7 @@
                 <a:ea typeface="Calibri" pitchFamily="34" charset="-122"/>
                 <a:cs typeface="Calibri" pitchFamily="34" charset="-120"/>
               </a:rPr>
-              <a:t>to find pleasing, similar to</a:t>
+              <a:t>resembling, similar to; to enjoy</a:t>
             </a:r>
             <a:endParaRPr lang="en-US" sz="850" dirty="0"/>
           </a:p>
@@ -22396,7 +22462,7 @@
                 <a:ea typeface="Trebuchet MS" pitchFamily="34" charset="-122"/>
                 <a:cs typeface="Trebuchet MS" pitchFamily="34" charset="-120"/>
               </a:rPr>
-              <a:t>lifelike</a:t>
+              <a:t>childlike</a:t>
             </a:r>
             <a:endParaRPr lang="en-US" sz="2800" dirty="0"/>
           </a:p>
@@ -23223,7 +23289,7 @@
                 <a:ea typeface="Trebuchet MS" pitchFamily="34" charset="-122"/>
                 <a:cs typeface="Trebuchet MS" pitchFamily="34" charset="-120"/>
               </a:rPr>
-              <a:t>lifelike</a:t>
+              <a:t>childlike</a:t>
             </a:r>
             <a:endParaRPr lang="en-US" sz="2800" dirty="0"/>
           </a:p>
@@ -23362,7 +23428,7 @@
                 <a:ea typeface="Trebuchet MS" pitchFamily="34" charset="-122"/>
                 <a:cs typeface="Trebuchet MS" pitchFamily="34" charset="-120"/>
               </a:rPr>
-              <a:t>life</a:t>
+              <a:t>child</a:t>
             </a:r>
             <a:endParaRPr lang="en-US" sz="1300" dirty="0"/>
           </a:p>
@@ -23401,7 +23467,7 @@
                 <a:ea typeface="Calibri" pitchFamily="34" charset="-122"/>
                 <a:cs typeface="Calibri" pitchFamily="34" charset="-120"/>
               </a:rPr>
-              <a:t>alive, living</a:t>
+              <a:t>a young person</a:t>
             </a:r>
             <a:endParaRPr lang="en-US" sz="850" dirty="0"/>
           </a:p>
@@ -24927,7 +24993,7 @@
                 <a:ea typeface="Trebuchet MS" pitchFamily="34" charset="-122"/>
                 <a:cs typeface="Trebuchet MS" pitchFamily="34" charset="-120"/>
               </a:rPr>
-              <a:t>lifelike</a:t>
+              <a:t>childlike</a:t>
             </a:r>
             <a:endParaRPr lang="en-US" sz="2800" dirty="0"/>
           </a:p>
@@ -25066,7 +25132,7 @@
                 <a:ea typeface="Trebuchet MS" pitchFamily="34" charset="-122"/>
                 <a:cs typeface="Trebuchet MS" pitchFamily="34" charset="-120"/>
               </a:rPr>
-              <a:t>life</a:t>
+              <a:t>child</a:t>
             </a:r>
             <a:endParaRPr lang="en-US" sz="1300" dirty="0"/>
           </a:p>
@@ -25105,7 +25171,7 @@
                 <a:ea typeface="Calibri" pitchFamily="34" charset="-122"/>
                 <a:cs typeface="Calibri" pitchFamily="34" charset="-120"/>
               </a:rPr>
-              <a:t>alive, living</a:t>
+              <a:t>a young person</a:t>
             </a:r>
             <a:endParaRPr lang="en-US" sz="850" dirty="0"/>
           </a:p>
@@ -25376,7 +25442,7 @@
                 <a:ea typeface="Trebuchet MS" pitchFamily="34" charset="-122"/>
                 <a:cs typeface="Trebuchet MS" pitchFamily="34" charset="-120"/>
               </a:rPr>
-              <a:t>life</a:t>
+              <a:t>child</a:t>
             </a:r>
             <a:endParaRPr lang="en-US" sz="1400" dirty="0"/>
           </a:p>
@@ -26044,7 +26110,7 @@
                 <a:ea typeface="Trebuchet MS" pitchFamily="34" charset="-122"/>
                 <a:cs typeface="Trebuchet MS" pitchFamily="34" charset="-120"/>
               </a:rPr>
-              <a:t>lifelike</a:t>
+              <a:t>childlike</a:t>
             </a:r>
             <a:endParaRPr lang="en-US" sz="2800" dirty="0"/>
           </a:p>
@@ -26183,7 +26249,7 @@
                 <a:ea typeface="Trebuchet MS" pitchFamily="34" charset="-122"/>
                 <a:cs typeface="Trebuchet MS" pitchFamily="34" charset="-120"/>
               </a:rPr>
-              <a:t>life</a:t>
+              <a:t>child</a:t>
             </a:r>
             <a:endParaRPr lang="en-US" sz="1300" dirty="0"/>
           </a:p>
@@ -26222,7 +26288,7 @@
                 <a:ea typeface="Calibri" pitchFamily="34" charset="-122"/>
                 <a:cs typeface="Calibri" pitchFamily="34" charset="-120"/>
               </a:rPr>
-              <a:t>alive, living</a:t>
+              <a:t>a young person</a:t>
             </a:r>
             <a:endParaRPr lang="en-US" sz="850" dirty="0"/>
           </a:p>
@@ -26493,7 +26559,7 @@
                 <a:ea typeface="Trebuchet MS" pitchFamily="34" charset="-122"/>
                 <a:cs typeface="Trebuchet MS" pitchFamily="34" charset="-120"/>
               </a:rPr>
-              <a:t>life</a:t>
+              <a:t>child</a:t>
             </a:r>
             <a:endParaRPr lang="en-US" sz="1400" dirty="0"/>
           </a:p>
@@ -26757,7 +26823,7 @@
                 <a:ea typeface="Trebuchet MS" pitchFamily="34" charset="-122"/>
                 <a:cs typeface="Trebuchet MS" pitchFamily="34" charset="-120"/>
               </a:rPr>
-              <a:t>l</a:t>
+              <a:t>ch</a:t>
             </a:r>
             <a:endParaRPr lang="en-US" sz="900" dirty="0"/>
           </a:p>
@@ -26889,7 +26955,7 @@
                 <a:ea typeface="Trebuchet MS" pitchFamily="34" charset="-122"/>
                 <a:cs typeface="Trebuchet MS" pitchFamily="34" charset="-120"/>
               </a:rPr>
-              <a:t>f</a:t>
+              <a:t>l</a:t>
             </a:r>
             <a:endParaRPr lang="en-US" sz="900" dirty="0"/>
           </a:p>
@@ -26955,7 +27021,7 @@
                 <a:ea typeface="Trebuchet MS" pitchFamily="34" charset="-122"/>
                 <a:cs typeface="Trebuchet MS" pitchFamily="34" charset="-120"/>
               </a:rPr>
-              <a:t>e</a:t>
+              <a:t>d</a:t>
             </a:r>
             <a:endParaRPr lang="en-US" sz="900" dirty="0"/>
           </a:p>
@@ -27650,7 +27716,7 @@
                 <a:ea typeface="Trebuchet MS" pitchFamily="34" charset="-122"/>
                 <a:cs typeface="Trebuchet MS" pitchFamily="34" charset="-120"/>
               </a:rPr>
-              <a:t>childlike</a:t>
+              <a:t>likewise</a:t>
             </a:r>
             <a:endParaRPr lang="en-US" sz="2800" dirty="0"/>
           </a:p>
@@ -28477,7 +28543,7 @@
                 <a:ea typeface="Trebuchet MS" pitchFamily="34" charset="-122"/>
                 <a:cs typeface="Trebuchet MS" pitchFamily="34" charset="-120"/>
               </a:rPr>
-              <a:t>childlike</a:t>
+              <a:t>likewise</a:t>
             </a:r>
             <a:endParaRPr lang="en-US" sz="2800" dirty="0"/>
           </a:p>
@@ -28566,11 +28632,11 @@
             </a:avLst>
           </a:prstGeom>
           <a:solidFill>
-            <a:srgbClr val="DDD6FE"/>
+            <a:srgbClr val="CCFBF1"/>
           </a:solidFill>
           <a:ln w="19050">
             <a:solidFill>
-              <a:srgbClr val="7C3AED"/>
+              <a:srgbClr val="0D9488"/>
             </a:solidFill>
             <a:prstDash val="solid"/>
           </a:ln>
@@ -28610,13 +28676,13 @@
             <a:r>
               <a:rPr lang="en-US" sz="1300" b="1" dirty="0">
                 <a:solidFill>
-                  <a:srgbClr val="4C1D95"/>
+                  <a:srgbClr val="0F766E"/>
                 </a:solidFill>
                 <a:latin typeface="Trebuchet MS" pitchFamily="34" charset="0"/>
                 <a:ea typeface="Trebuchet MS" pitchFamily="34" charset="-122"/>
                 <a:cs typeface="Trebuchet MS" pitchFamily="34" charset="-120"/>
               </a:rPr>
-              <a:t>child</a:t>
+              <a:t>like</a:t>
             </a:r>
             <a:endParaRPr lang="en-US" sz="1300" dirty="0"/>
           </a:p>
@@ -28655,7 +28721,7 @@
                 <a:ea typeface="Calibri" pitchFamily="34" charset="-122"/>
                 <a:cs typeface="Calibri" pitchFamily="34" charset="-120"/>
               </a:rPr>
-              <a:t>a young person</a:t>
+              <a:t>resembling, similar to</a:t>
             </a:r>
             <a:endParaRPr lang="en-US" sz="850" dirty="0"/>
           </a:p>
@@ -28678,11 +28744,11 @@
             </a:avLst>
           </a:prstGeom>
           <a:solidFill>
-            <a:srgbClr val="CCFBF1"/>
+            <a:srgbClr val="FCE7F3"/>
           </a:solidFill>
           <a:ln w="19050">
             <a:solidFill>
-              <a:srgbClr val="0D9488"/>
+              <a:srgbClr val="DB2777"/>
             </a:solidFill>
             <a:prstDash val="solid"/>
           </a:ln>
@@ -28722,13 +28788,13 @@
             <a:r>
               <a:rPr lang="en-US" sz="1300" b="1" dirty="0">
                 <a:solidFill>
-                  <a:srgbClr val="0F766E"/>
+                  <a:srgbClr val="9D174D"/>
                 </a:solidFill>
                 <a:latin typeface="Trebuchet MS" pitchFamily="34" charset="0"/>
                 <a:ea typeface="Trebuchet MS" pitchFamily="34" charset="-122"/>
                 <a:cs typeface="Trebuchet MS" pitchFamily="34" charset="-120"/>
               </a:rPr>
-              <a:t>like</a:t>
+              <a:t>wise</a:t>
             </a:r>
             <a:endParaRPr lang="en-US" sz="1300" dirty="0"/>
           </a:p>
@@ -28767,7 +28833,7 @@
                 <a:ea typeface="Calibri" pitchFamily="34" charset="-122"/>
                 <a:cs typeface="Calibri" pitchFamily="34" charset="-120"/>
               </a:rPr>
-              <a:t>resembling, similar to</a:t>
+              <a:t>manner, way</a:t>
             </a:r>
             <a:endParaRPr lang="en-US" sz="850" dirty="0"/>
           </a:p>
@@ -29462,7 +29528,7 @@
                 <a:ea typeface="Trebuchet MS" pitchFamily="34" charset="-122"/>
                 <a:cs typeface="Trebuchet MS" pitchFamily="34" charset="-120"/>
               </a:rPr>
-              <a:t>childlike</a:t>
+              <a:t>likewise</a:t>
             </a:r>
             <a:endParaRPr lang="en-US" sz="2800" dirty="0"/>
           </a:p>
@@ -29551,11 +29617,11 @@
             </a:avLst>
           </a:prstGeom>
           <a:solidFill>
-            <a:srgbClr val="DDD6FE"/>
+            <a:srgbClr val="CCFBF1"/>
           </a:solidFill>
           <a:ln w="19050">
             <a:solidFill>
-              <a:srgbClr val="7C3AED"/>
+              <a:srgbClr val="0D9488"/>
             </a:solidFill>
             <a:prstDash val="solid"/>
           </a:ln>
@@ -29595,13 +29661,13 @@
             <a:r>
               <a:rPr lang="en-US" sz="1300" b="1" dirty="0">
                 <a:solidFill>
-                  <a:srgbClr val="4C1D95"/>
+                  <a:srgbClr val="0F766E"/>
                 </a:solidFill>
                 <a:latin typeface="Trebuchet MS" pitchFamily="34" charset="0"/>
                 <a:ea typeface="Trebuchet MS" pitchFamily="34" charset="-122"/>
                 <a:cs typeface="Trebuchet MS" pitchFamily="34" charset="-120"/>
               </a:rPr>
-              <a:t>child</a:t>
+              <a:t>like</a:t>
             </a:r>
             <a:endParaRPr lang="en-US" sz="1300" dirty="0"/>
           </a:p>
@@ -29640,7 +29706,7 @@
                 <a:ea typeface="Calibri" pitchFamily="34" charset="-122"/>
                 <a:cs typeface="Calibri" pitchFamily="34" charset="-120"/>
               </a:rPr>
-              <a:t>a young person</a:t>
+              <a:t>resembling, similar to</a:t>
             </a:r>
             <a:endParaRPr lang="en-US" sz="850" dirty="0"/>
           </a:p>
@@ -29663,11 +29729,11 @@
             </a:avLst>
           </a:prstGeom>
           <a:solidFill>
-            <a:srgbClr val="CCFBF1"/>
+            <a:srgbClr val="FCE7F3"/>
           </a:solidFill>
           <a:ln w="19050">
             <a:solidFill>
-              <a:srgbClr val="0D9488"/>
+              <a:srgbClr val="DB2777"/>
             </a:solidFill>
             <a:prstDash val="solid"/>
           </a:ln>
@@ -29707,13 +29773,13 @@
             <a:r>
               <a:rPr lang="en-US" sz="1300" b="1" dirty="0">
                 <a:solidFill>
-                  <a:srgbClr val="0F766E"/>
+                  <a:srgbClr val="9D174D"/>
                 </a:solidFill>
                 <a:latin typeface="Trebuchet MS" pitchFamily="34" charset="0"/>
                 <a:ea typeface="Trebuchet MS" pitchFamily="34" charset="-122"/>
                 <a:cs typeface="Trebuchet MS" pitchFamily="34" charset="-120"/>
               </a:rPr>
-              <a:t>like</a:t>
+              <a:t>wise</a:t>
             </a:r>
             <a:endParaRPr lang="en-US" sz="1300" dirty="0"/>
           </a:p>
@@ -29752,7 +29818,7 @@
                 <a:ea typeface="Calibri" pitchFamily="34" charset="-122"/>
                 <a:cs typeface="Calibri" pitchFamily="34" charset="-120"/>
               </a:rPr>
-              <a:t>resembling, similar to</a:t>
+              <a:t>manner, way</a:t>
             </a:r>
             <a:endParaRPr lang="en-US" sz="850" dirty="0"/>
           </a:p>
@@ -29911,7 +29977,7 @@
                 <a:ea typeface="Trebuchet MS" pitchFamily="34" charset="-122"/>
                 <a:cs typeface="Trebuchet MS" pitchFamily="34" charset="-120"/>
               </a:rPr>
-              <a:t>child</a:t>
+              <a:t>like</a:t>
             </a:r>
             <a:endParaRPr lang="en-US" sz="1400" dirty="0"/>
           </a:p>
@@ -30016,7 +30082,7 @@
                 <a:ea typeface="Trebuchet MS" pitchFamily="34" charset="-122"/>
                 <a:cs typeface="Trebuchet MS" pitchFamily="34" charset="-120"/>
               </a:rPr>
-              <a:t>like</a:t>
+              <a:t>wise</a:t>
             </a:r>
             <a:endParaRPr lang="en-US" sz="1400" dirty="0"/>
           </a:p>
@@ -30579,7 +30645,7 @@
                 <a:ea typeface="Trebuchet MS" pitchFamily="34" charset="-122"/>
                 <a:cs typeface="Trebuchet MS" pitchFamily="34" charset="-120"/>
               </a:rPr>
-              <a:t>childlike</a:t>
+              <a:t>likewise</a:t>
             </a:r>
             <a:endParaRPr lang="en-US" sz="2800" dirty="0"/>
           </a:p>
@@ -30668,11 +30734,11 @@
             </a:avLst>
           </a:prstGeom>
           <a:solidFill>
-            <a:srgbClr val="DDD6FE"/>
+            <a:srgbClr val="CCFBF1"/>
           </a:solidFill>
           <a:ln w="19050">
             <a:solidFill>
-              <a:srgbClr val="7C3AED"/>
+              <a:srgbClr val="0D9488"/>
             </a:solidFill>
             <a:prstDash val="solid"/>
           </a:ln>
@@ -30712,13 +30778,13 @@
             <a:r>
               <a:rPr lang="en-US" sz="1300" b="1" dirty="0">
                 <a:solidFill>
-                  <a:srgbClr val="4C1D95"/>
+                  <a:srgbClr val="0F766E"/>
                 </a:solidFill>
                 <a:latin typeface="Trebuchet MS" pitchFamily="34" charset="0"/>
                 <a:ea typeface="Trebuchet MS" pitchFamily="34" charset="-122"/>
                 <a:cs typeface="Trebuchet MS" pitchFamily="34" charset="-120"/>
               </a:rPr>
-              <a:t>child</a:t>
+              <a:t>like</a:t>
             </a:r>
             <a:endParaRPr lang="en-US" sz="1300" dirty="0"/>
           </a:p>
@@ -30757,7 +30823,7 @@
                 <a:ea typeface="Calibri" pitchFamily="34" charset="-122"/>
                 <a:cs typeface="Calibri" pitchFamily="34" charset="-120"/>
               </a:rPr>
-              <a:t>a young person</a:t>
+              <a:t>resembling, similar to</a:t>
             </a:r>
             <a:endParaRPr lang="en-US" sz="850" dirty="0"/>
           </a:p>
@@ -30780,11 +30846,11 @@
             </a:avLst>
           </a:prstGeom>
           <a:solidFill>
-            <a:srgbClr val="CCFBF1"/>
+            <a:srgbClr val="FCE7F3"/>
           </a:solidFill>
           <a:ln w="19050">
             <a:solidFill>
-              <a:srgbClr val="0D9488"/>
+              <a:srgbClr val="DB2777"/>
             </a:solidFill>
             <a:prstDash val="solid"/>
           </a:ln>
@@ -30824,13 +30890,13 @@
             <a:r>
               <a:rPr lang="en-US" sz="1300" b="1" dirty="0">
                 <a:solidFill>
-                  <a:srgbClr val="0F766E"/>
+                  <a:srgbClr val="9D174D"/>
                 </a:solidFill>
                 <a:latin typeface="Trebuchet MS" pitchFamily="34" charset="0"/>
                 <a:ea typeface="Trebuchet MS" pitchFamily="34" charset="-122"/>
                 <a:cs typeface="Trebuchet MS" pitchFamily="34" charset="-120"/>
               </a:rPr>
-              <a:t>like</a:t>
+              <a:t>wise</a:t>
             </a:r>
             <a:endParaRPr lang="en-US" sz="1300" dirty="0"/>
           </a:p>
@@ -30869,7 +30935,7 @@
                 <a:ea typeface="Calibri" pitchFamily="34" charset="-122"/>
                 <a:cs typeface="Calibri" pitchFamily="34" charset="-120"/>
               </a:rPr>
-              <a:t>resembling, similar to</a:t>
+              <a:t>manner, way</a:t>
             </a:r>
             <a:endParaRPr lang="en-US" sz="850" dirty="0"/>
           </a:p>
@@ -31028,7 +31094,7 @@
                 <a:ea typeface="Trebuchet MS" pitchFamily="34" charset="-122"/>
                 <a:cs typeface="Trebuchet MS" pitchFamily="34" charset="-120"/>
               </a:rPr>
-              <a:t>child</a:t>
+              <a:t>like</a:t>
             </a:r>
             <a:endParaRPr lang="en-US" sz="1400" dirty="0"/>
           </a:p>
@@ -31133,7 +31199,7 @@
                 <a:ea typeface="Trebuchet MS" pitchFamily="34" charset="-122"/>
                 <a:cs typeface="Trebuchet MS" pitchFamily="34" charset="-120"/>
               </a:rPr>
-              <a:t>like</a:t>
+              <a:t>wise</a:t>
             </a:r>
             <a:endParaRPr lang="en-US" sz="1400" dirty="0"/>
           </a:p>
@@ -31292,7 +31358,7 @@
                 <a:ea typeface="Trebuchet MS" pitchFamily="34" charset="-122"/>
                 <a:cs typeface="Trebuchet MS" pitchFamily="34" charset="-120"/>
               </a:rPr>
-              <a:t>ch</a:t>
+              <a:t>l</a:t>
             </a:r>
             <a:endParaRPr lang="en-US" sz="900" dirty="0"/>
           </a:p>
@@ -31424,7 +31490,7 @@
                 <a:ea typeface="Trebuchet MS" pitchFamily="34" charset="-122"/>
                 <a:cs typeface="Trebuchet MS" pitchFamily="34" charset="-120"/>
               </a:rPr>
-              <a:t>l</a:t>
+              <a:t>k</a:t>
             </a:r>
             <a:endParaRPr lang="en-US" sz="900" dirty="0"/>
           </a:p>
@@ -31490,7 +31556,7 @@
                 <a:ea typeface="Trebuchet MS" pitchFamily="34" charset="-122"/>
                 <a:cs typeface="Trebuchet MS" pitchFamily="34" charset="-120"/>
               </a:rPr>
-              <a:t>d</a:t>
+              <a:t>e</a:t>
             </a:r>
             <a:endParaRPr lang="en-US" sz="900" dirty="0"/>
           </a:p>
@@ -31556,7 +31622,7 @@
                 <a:ea typeface="Trebuchet MS" pitchFamily="34" charset="-122"/>
                 <a:cs typeface="Trebuchet MS" pitchFamily="34" charset="-120"/>
               </a:rPr>
-              <a:t>l</a:t>
+              <a:t>w</a:t>
             </a:r>
             <a:endParaRPr lang="en-US" sz="900" dirty="0"/>
           </a:p>
@@ -31688,7 +31754,7 @@
                 <a:ea typeface="Trebuchet MS" pitchFamily="34" charset="-122"/>
                 <a:cs typeface="Trebuchet MS" pitchFamily="34" charset="-120"/>
               </a:rPr>
-              <a:t>k</a:t>
+              <a:t>z</a:t>
             </a:r>
             <a:endParaRPr lang="en-US" sz="900" dirty="0"/>
           </a:p>
@@ -34014,7 +34080,7 @@
                 <a:ea typeface="Trebuchet MS" pitchFamily="34" charset="-122"/>
                 <a:cs typeface="Trebuchet MS" pitchFamily="34" charset="-120"/>
               </a:rPr>
-              <a:t>god-</a:t>
+              <a:t>child-</a:t>
             </a:r>
             <a:endParaRPr lang="en-US" sz="1300" dirty="0"/>
           </a:p>
@@ -34167,7 +34233,7 @@
                 <a:ea typeface="Trebuchet MS" pitchFamily="34" charset="-122"/>
                 <a:cs typeface="Trebuchet MS" pitchFamily="34" charset="-120"/>
               </a:rPr>
-              <a:t>child-</a:t>
+              <a:t>life-</a:t>
             </a:r>
             <a:endParaRPr lang="en-US" sz="1300" dirty="0"/>
           </a:p>
@@ -34256,7 +34322,7 @@
                 <a:ea typeface="Trebuchet MS" pitchFamily="34" charset="-122"/>
                 <a:cs typeface="Trebuchet MS" pitchFamily="34" charset="-120"/>
               </a:rPr>
-              <a:t>-minded</a:t>
+              <a:t>-able</a:t>
             </a:r>
             <a:endParaRPr lang="en-US" sz="1300" dirty="0"/>
           </a:p>
@@ -34427,7 +34493,7 @@
                 <a:ea typeface="Trebuchet MS" pitchFamily="34" charset="-122"/>
                 <a:cs typeface="Trebuchet MS" pitchFamily="34" charset="-120"/>
               </a:rPr>
-              <a:t>unlikely</a:t>
+              <a:t>lifelike</a:t>
             </a:r>
             <a:endParaRPr lang="en-US" sz="1200" dirty="0"/>
           </a:p>
@@ -34493,7 +34559,7 @@
                 <a:ea typeface="Trebuchet MS" pitchFamily="34" charset="-122"/>
                 <a:cs typeface="Trebuchet MS" pitchFamily="34" charset="-120"/>
               </a:rPr>
-              <a:t>lifelike</a:t>
+              <a:t>childlike</a:t>
             </a:r>
             <a:endParaRPr lang="en-US" sz="1200" dirty="0"/>
           </a:p>
@@ -34559,7 +34625,7 @@
                 <a:ea typeface="Trebuchet MS" pitchFamily="34" charset="-122"/>
                 <a:cs typeface="Trebuchet MS" pitchFamily="34" charset="-120"/>
               </a:rPr>
-              <a:t>childlike</a:t>
+              <a:t>dislike</a:t>
             </a:r>
             <a:endParaRPr lang="en-US" sz="1200" dirty="0"/>
           </a:p>
@@ -34625,7 +34691,7 @@
                 <a:ea typeface="Trebuchet MS" pitchFamily="34" charset="-122"/>
                 <a:cs typeface="Trebuchet MS" pitchFamily="34" charset="-120"/>
               </a:rPr>
-              <a:t>godlike</a:t>
+              <a:t>unlikely</a:t>
             </a:r>
             <a:endParaRPr lang="en-US" sz="1200" dirty="0"/>
           </a:p>
@@ -34757,7 +34823,7 @@
                 <a:ea typeface="Trebuchet MS" pitchFamily="34" charset="-122"/>
                 <a:cs typeface="Trebuchet MS" pitchFamily="34" charset="-120"/>
               </a:rPr>
-              <a:t>dislike</a:t>
+              <a:t>godlike</a:t>
             </a:r>
             <a:endParaRPr lang="en-US" sz="1200" dirty="0"/>
           </a:p>
@@ -36011,7 +36077,7 @@
                 <a:ea typeface="Calibri" pitchFamily="34" charset="-122"/>
                 <a:cs typeface="Calibri" pitchFamily="34" charset="-120"/>
               </a:rPr>
-              <a:t>1.  The word 'dislike' uses the prefix 'dis-' meaning 'not' or 'opposite of'.</a:t>
+              <a:t>1.  Adding 'un-' before 'likely' changes its meaning to 'not likely'.</a:t>
             </a:r>
             <a:endParaRPr lang="en-US" sz="1300" dirty="0"/>
           </a:p>
@@ -36150,7 +36216,7 @@
                 <a:ea typeface="Calibri" pitchFamily="34" charset="-122"/>
                 <a:cs typeface="Calibri" pitchFamily="34" charset="-120"/>
               </a:rPr>
-              <a:t>2.  The morpheme 'like' comes from the Latin language.</a:t>
+              <a:t>2.  The word 'dislike' means to enjoy something very much.</a:t>
             </a:r>
             <a:endParaRPr lang="en-US" sz="1300" dirty="0"/>
           </a:p>
@@ -36289,7 +36355,7 @@
                 <a:ea typeface="Calibri" pitchFamily="34" charset="-122"/>
                 <a:cs typeface="Calibri" pitchFamily="34" charset="-120"/>
               </a:rPr>
-              <a:t>3.  'Childlike' means having innocent or simple qualities similar to a child.</a:t>
+              <a:t>3.  The morpheme 'like' comes from a French word.</a:t>
             </a:r>
             <a:endParaRPr lang="en-US" sz="1300" dirty="0"/>
           </a:p>
@@ -36312,11 +36378,11 @@
             </a:avLst>
           </a:prstGeom>
           <a:solidFill>
-            <a:srgbClr val="DCFCE7"/>
-          </a:solidFill>
-          <a:ln w="12700">
-            <a:solidFill>
-              <a:srgbClr val="16A34A"/>
+            <a:srgbClr val="FEE2E2"/>
+          </a:solidFill>
+          <a:ln w="12700">
+            <a:solidFill>
+              <a:srgbClr val="DC2626"/>
             </a:solidFill>
             <a:prstDash val="solid"/>
           </a:ln>
@@ -36349,13 +36415,13 @@
             <a:r>
               <a:rPr lang="en-US" sz="1100" b="1" dirty="0">
                 <a:solidFill>
-                  <a:srgbClr val="16A34A"/>
+                  <a:srgbClr val="DC2626"/>
                 </a:solidFill>
                 <a:latin typeface="Trebuchet MS" pitchFamily="34" charset="0"/>
                 <a:ea typeface="Trebuchet MS" pitchFamily="34" charset="-122"/>
                 <a:cs typeface="Trebuchet MS" pitchFamily="34" charset="-120"/>
               </a:rPr>
-              <a:t>TRUE</a:t>
+              <a:t>FALSE</a:t>
             </a:r>
             <a:endParaRPr lang="en-US" sz="1100" dirty="0"/>
           </a:p>
@@ -36428,7 +36494,7 @@
                 <a:ea typeface="Calibri" pitchFamily="34" charset="-122"/>
                 <a:cs typeface="Calibri" pitchFamily="34" charset="-120"/>
               </a:rPr>
-              <a:t>4.  The word 'lifelike' contains the morpheme 'like' meaning resembling or similar to.</a:t>
+              <a:t>4.  The morpheme 'like' means resembling or similar to something.</a:t>
             </a:r>
             <a:endParaRPr lang="en-US" sz="1300" dirty="0"/>
           </a:p>
@@ -36567,7 +36633,7 @@
                 <a:ea typeface="Calibri" pitchFamily="34" charset="-122"/>
                 <a:cs typeface="Calibri" pitchFamily="34" charset="-120"/>
               </a:rPr>
-              <a:t>5.  'Likewise' means the opposite of what someone else has done.</a:t>
+              <a:t>5.  The word 'lifelike' contains the morpheme 'like'.</a:t>
             </a:r>
             <a:endParaRPr lang="en-US" sz="1300" dirty="0"/>
           </a:p>
@@ -36590,11 +36656,11 @@
             </a:avLst>
           </a:prstGeom>
           <a:solidFill>
-            <a:srgbClr val="FEE2E2"/>
-          </a:solidFill>
-          <a:ln w="12700">
-            <a:solidFill>
-              <a:srgbClr val="DC2626"/>
+            <a:srgbClr val="DCFCE7"/>
+          </a:solidFill>
+          <a:ln w="12700">
+            <a:solidFill>
+              <a:srgbClr val="16A34A"/>
             </a:solidFill>
             <a:prstDash val="solid"/>
           </a:ln>
@@ -36627,13 +36693,13 @@
             <a:r>
               <a:rPr lang="en-US" sz="1100" b="1" dirty="0">
                 <a:solidFill>
-                  <a:srgbClr val="DC2626"/>
+                  <a:srgbClr val="16A34A"/>
                 </a:solidFill>
                 <a:latin typeface="Trebuchet MS" pitchFamily="34" charset="0"/>
                 <a:ea typeface="Trebuchet MS" pitchFamily="34" charset="-122"/>
                 <a:cs typeface="Trebuchet MS" pitchFamily="34" charset="-120"/>
               </a:rPr>
-              <a:t>FALSE</a:t>
+              <a:t>TRUE</a:t>
             </a:r>
             <a:endParaRPr lang="en-US" sz="1100" dirty="0"/>
           </a:p>
@@ -37101,7 +37167,7 @@
                 <a:ea typeface="Calibri" pitchFamily="34" charset="-122"/>
                 <a:cs typeface="Calibri" pitchFamily="34" charset="-120"/>
               </a:rPr>
-              <a:t>Origin: Old English: gelic</a:t>
+              <a:t>Origin: Latin: similis</a:t>
             </a:r>
             <a:endParaRPr lang="en-US" sz="1100" dirty="0"/>
           </a:p>
@@ -37272,7 +37338,7 @@
                 <a:ea typeface="Trebuchet MS" pitchFamily="34" charset="-122"/>
                 <a:cs typeface="Trebuchet MS" pitchFamily="34" charset="-120"/>
               </a:rPr>
-              <a:t>unlikely</a:t>
+              <a:t>lifelike</a:t>
             </a:r>
             <a:endParaRPr lang="en-US" sz="1300" dirty="0"/>
           </a:p>
@@ -37338,7 +37404,7 @@
                 <a:ea typeface="Trebuchet MS" pitchFamily="34" charset="-122"/>
                 <a:cs typeface="Trebuchet MS" pitchFamily="34" charset="-120"/>
               </a:rPr>
-              <a:t>lifelike</a:t>
+              <a:t>childlike</a:t>
             </a:r>
             <a:endParaRPr lang="en-US" sz="1300" dirty="0"/>
           </a:p>
@@ -37404,7 +37470,7 @@
                 <a:ea typeface="Trebuchet MS" pitchFamily="34" charset="-122"/>
                 <a:cs typeface="Trebuchet MS" pitchFamily="34" charset="-120"/>
               </a:rPr>
-              <a:t>childlike</a:t>
+              <a:t>dislike</a:t>
             </a:r>
             <a:endParaRPr lang="en-US" sz="1300" dirty="0"/>
           </a:p>
@@ -37470,7 +37536,7 @@
                 <a:ea typeface="Trebuchet MS" pitchFamily="34" charset="-122"/>
                 <a:cs typeface="Trebuchet MS" pitchFamily="34" charset="-120"/>
               </a:rPr>
-              <a:t>godlike</a:t>
+              <a:t>unlikely</a:t>
             </a:r>
             <a:endParaRPr lang="en-US" sz="1300" dirty="0"/>
           </a:p>
@@ -37602,7 +37668,7 @@
                 <a:ea typeface="Trebuchet MS" pitchFamily="34" charset="-122"/>
                 <a:cs typeface="Trebuchet MS" pitchFamily="34" charset="-120"/>
               </a:rPr>
-              <a:t>dislike</a:t>
+              <a:t>godlike</a:t>
             </a:r>
             <a:endParaRPr lang="en-US" sz="1300" dirty="0"/>
           </a:p>
@@ -38693,7 +38759,7 @@
                 <a:ea typeface="Trebuchet MS" pitchFamily="34" charset="-122"/>
                 <a:cs typeface="Trebuchet MS" pitchFamily="34" charset="-120"/>
               </a:rPr>
-              <a:t>god-</a:t>
+              <a:t>child-</a:t>
             </a:r>
             <a:endParaRPr lang="en-US" sz="1300" dirty="0"/>
           </a:p>
@@ -38846,7 +38912,7 @@
                 <a:ea typeface="Trebuchet MS" pitchFamily="34" charset="-122"/>
                 <a:cs typeface="Trebuchet MS" pitchFamily="34" charset="-120"/>
               </a:rPr>
-              <a:t>child-</a:t>
+              <a:t>life-</a:t>
             </a:r>
             <a:endParaRPr lang="en-US" sz="1300" dirty="0"/>
           </a:p>
@@ -38935,7 +39001,7 @@
                 <a:ea typeface="Trebuchet MS" pitchFamily="34" charset="-122"/>
                 <a:cs typeface="Trebuchet MS" pitchFamily="34" charset="-120"/>
               </a:rPr>
-              <a:t>-minded</a:t>
+              <a:t>-able</a:t>
             </a:r>
             <a:endParaRPr lang="en-US" sz="1300" dirty="0"/>
           </a:p>
@@ -39919,7 +39985,7 @@
                 <a:ea typeface="Trebuchet MS" pitchFamily="34" charset="-122"/>
                 <a:cs typeface="Trebuchet MS" pitchFamily="34" charset="-120"/>
               </a:rPr>
-              <a:t>unlikely</a:t>
+              <a:t>lifelike</a:t>
             </a:r>
             <a:endParaRPr lang="en-US" sz="1200" dirty="0"/>
           </a:p>
@@ -39985,7 +40051,7 @@
                 <a:ea typeface="Calibri" pitchFamily="34" charset="-122"/>
                 <a:cs typeface="Calibri" pitchFamily="34" charset="-120"/>
               </a:rPr>
-              <a:t>To not like something or someone.</a:t>
+              <a:t>Having qualities that seem as powerful or amazing as a god.</a:t>
             </a:r>
             <a:endParaRPr lang="en-US" sz="1200" dirty="0"/>
           </a:p>
@@ -40058,7 +40124,7 @@
                 <a:ea typeface="Trebuchet MS" pitchFamily="34" charset="-122"/>
                 <a:cs typeface="Trebuchet MS" pitchFamily="34" charset="-120"/>
               </a:rPr>
-              <a:t>lifelike</a:t>
+              <a:t>childlike</a:t>
             </a:r>
             <a:endParaRPr lang="en-US" sz="1200" dirty="0"/>
           </a:p>
@@ -40124,7 +40190,7 @@
                 <a:ea typeface="Calibri" pitchFamily="34" charset="-122"/>
                 <a:cs typeface="Calibri" pitchFamily="34" charset="-120"/>
               </a:rPr>
-              <a:t>Looking so real it seems to be alive.</a:t>
+              <a:t>Having the innocent, simple qualities of a young child.</a:t>
             </a:r>
             <a:endParaRPr lang="en-US" sz="1200" dirty="0"/>
           </a:p>
@@ -40197,7 +40263,7 @@
                 <a:ea typeface="Trebuchet MS" pitchFamily="34" charset="-122"/>
                 <a:cs typeface="Trebuchet MS" pitchFamily="34" charset="-120"/>
               </a:rPr>
-              <a:t>childlike</a:t>
+              <a:t>dislike</a:t>
             </a:r>
             <a:endParaRPr lang="en-US" sz="1200" dirty="0"/>
           </a:p>
@@ -40263,7 +40329,7 @@
                 <a:ea typeface="Calibri" pitchFamily="34" charset="-122"/>
                 <a:cs typeface="Calibri" pitchFamily="34" charset="-120"/>
               </a:rPr>
-              <a:t>Having qualities so impressive they seem like a god's.</a:t>
+              <a:t>Not likely to happen; probably not going to occur.</a:t>
             </a:r>
             <a:endParaRPr lang="en-US" sz="1200" dirty="0"/>
           </a:p>
@@ -40336,7 +40402,7 @@
                 <a:ea typeface="Trebuchet MS" pitchFamily="34" charset="-122"/>
                 <a:cs typeface="Trebuchet MS" pitchFamily="34" charset="-120"/>
               </a:rPr>
-              <a:t>godlike</a:t>
+              <a:t>unlikely</a:t>
             </a:r>
             <a:endParaRPr lang="en-US" sz="1200" dirty="0"/>
           </a:p>
@@ -40402,7 +40468,7 @@
                 <a:ea typeface="Calibri" pitchFamily="34" charset="-122"/>
                 <a:cs typeface="Calibri" pitchFamily="34" charset="-120"/>
               </a:rPr>
-              <a:t>Having the simple, innocent qualities of a child.</a:t>
+              <a:t>To not enjoy or have a bad feeling about something.</a:t>
             </a:r>
             <a:endParaRPr lang="en-US" sz="1200" dirty="0"/>
           </a:p>
@@ -40541,7 +40607,7 @@
                 <a:ea typeface="Calibri" pitchFamily="34" charset="-122"/>
                 <a:cs typeface="Calibri" pitchFamily="34" charset="-120"/>
               </a:rPr>
-              <a:t>Ready and eager for battle or fighting.</a:t>
+              <a:t>Ready and eager to fight; acting in an aggressive, fighting way.</a:t>
             </a:r>
             <a:endParaRPr lang="en-US" sz="1200" dirty="0"/>
           </a:p>
@@ -40614,7 +40680,7 @@
                 <a:ea typeface="Trebuchet MS" pitchFamily="34" charset="-122"/>
                 <a:cs typeface="Trebuchet MS" pitchFamily="34" charset="-120"/>
               </a:rPr>
-              <a:t>dislike</a:t>
+              <a:t>godlike</a:t>
             </a:r>
             <a:endParaRPr lang="en-US" sz="1200" dirty="0"/>
           </a:p>
@@ -40680,7 +40746,7 @@
                 <a:ea typeface="Calibri" pitchFamily="34" charset="-122"/>
                 <a:cs typeface="Calibri" pitchFamily="34" charset="-120"/>
               </a:rPr>
-              <a:t>Not likely to happen; something you wouldn't expect.</a:t>
+              <a:t>Looking so real it seems alive, like a very realistic painting or statue.</a:t>
             </a:r>
             <a:endParaRPr lang="en-US" sz="1200" dirty="0"/>
           </a:p>
@@ -41175,7 +41241,7 @@
                 <a:ea typeface="Calibri" pitchFamily="34" charset="-122"/>
                 <a:cs typeface="Calibri" pitchFamily="34" charset="-120"/>
               </a:rPr>
-              <a:t>The sculptor carved such a lifelike statue of a horse that visitors thought it was real.</a:t>
+              <a:t>The sculptor created a lifelike statue of a horse that looked as though it might gallop away.</a:t>
             </a:r>
             <a:endParaRPr lang="en-US" sz="1500" dirty="0"/>
           </a:p>
@@ -41339,7 +41405,7 @@
                 <a:ea typeface="Calibri" pitchFamily="34" charset="-122"/>
                 <a:cs typeface="Calibri" pitchFamily="34" charset="-120"/>
               </a:rPr>
-              <a:t>Emma said she loved the movie, and her brother felt likewise.</a:t>
+              <a:t>Sarah felt a childlike excitement when she arrived at the zoo for the very first time.</a:t>
             </a:r>
             <a:endParaRPr lang="en-US" sz="1500" dirty="0"/>
           </a:p>
@@ -41503,7 +41569,7 @@
                 <a:ea typeface="Calibri" pitchFamily="34" charset="-122"/>
                 <a:cs typeface="Calibri" pitchFamily="34" charset="-120"/>
               </a:rPr>
-              <a:t>The young puppy looked at the world with childlike wonder, curious about everything.</a:t>
+              <a:t>It is unlikely that we will have school on a Saturday, so enjoy your weekend!</a:t>
             </a:r>
             <a:endParaRPr lang="en-US" sz="1500" dirty="0"/>
           </a:p>

--- a/output/wordlabs-like-3day.pptx
+++ b/output/wordlabs-like-3day.pptx
@@ -31306,7 +31306,7 @@
         </p:nvSpPr>
         <p:spPr>
           <a:xfrm>
-            <a:off x="2023872" y="4169664"/>
+            <a:off x="2124837" y="4169664"/>
             <a:ext cx="685800" cy="475488"/>
           </a:xfrm>
           <a:prstGeom prst="rect">
@@ -31333,7 +31333,7 @@
         </p:nvSpPr>
         <p:spPr>
           <a:xfrm>
-            <a:off x="2023872" y="4169664"/>
+            <a:off x="2124837" y="4169664"/>
             <a:ext cx="685800" cy="475488"/>
           </a:xfrm>
           <a:prstGeom prst="rect">
@@ -31372,7 +31372,7 @@
         </p:nvSpPr>
         <p:spPr>
           <a:xfrm>
-            <a:off x="2831592" y="4169664"/>
+            <a:off x="3033522" y="4169664"/>
             <a:ext cx="685800" cy="475488"/>
           </a:xfrm>
           <a:prstGeom prst="rect">
@@ -31399,7 +31399,7 @@
         </p:nvSpPr>
         <p:spPr>
           <a:xfrm>
-            <a:off x="2831592" y="4169664"/>
+            <a:off x="3033522" y="4169664"/>
             <a:ext cx="685800" cy="475488"/>
           </a:xfrm>
           <a:prstGeom prst="rect">
@@ -31438,7 +31438,7 @@
         </p:nvSpPr>
         <p:spPr>
           <a:xfrm>
-            <a:off x="3639312" y="4169664"/>
+            <a:off x="3942207" y="4169664"/>
             <a:ext cx="685800" cy="475488"/>
           </a:xfrm>
           <a:prstGeom prst="rect">
@@ -31465,7 +31465,7 @@
         </p:nvSpPr>
         <p:spPr>
           <a:xfrm>
-            <a:off x="3639312" y="4169664"/>
+            <a:off x="3942207" y="4169664"/>
             <a:ext cx="685800" cy="475488"/>
           </a:xfrm>
           <a:prstGeom prst="rect">
@@ -31504,7 +31504,7 @@
         </p:nvSpPr>
         <p:spPr>
           <a:xfrm>
-            <a:off x="4447032" y="4169664"/>
+            <a:off x="4850892" y="4169664"/>
             <a:ext cx="685800" cy="475488"/>
           </a:xfrm>
           <a:prstGeom prst="rect">
@@ -31531,7 +31531,7 @@
         </p:nvSpPr>
         <p:spPr>
           <a:xfrm>
-            <a:off x="4447032" y="4169664"/>
+            <a:off x="4850892" y="4169664"/>
             <a:ext cx="685800" cy="475488"/>
           </a:xfrm>
           <a:prstGeom prst="rect">
@@ -31556,7 +31556,7 @@
                 <a:ea typeface="Trebuchet MS" pitchFamily="34" charset="-122"/>
                 <a:cs typeface="Trebuchet MS" pitchFamily="34" charset="-120"/>
               </a:rPr>
-              <a:t>e</a:t>
+              <a:t>ew</a:t>
             </a:r>
             <a:endParaRPr lang="en-US" sz="900" dirty="0"/>
           </a:p>
@@ -31570,7 +31570,7 @@
         </p:nvSpPr>
         <p:spPr>
           <a:xfrm>
-            <a:off x="5254752" y="4169664"/>
+            <a:off x="5759577" y="4169664"/>
             <a:ext cx="685800" cy="475488"/>
           </a:xfrm>
           <a:prstGeom prst="rect">
@@ -31597,7 +31597,7 @@
         </p:nvSpPr>
         <p:spPr>
           <a:xfrm>
-            <a:off x="5254752" y="4169664"/>
+            <a:off x="5759577" y="4169664"/>
             <a:ext cx="685800" cy="475488"/>
           </a:xfrm>
           <a:prstGeom prst="rect">
@@ -31622,7 +31622,7 @@
                 <a:ea typeface="Trebuchet MS" pitchFamily="34" charset="-122"/>
                 <a:cs typeface="Trebuchet MS" pitchFamily="34" charset="-120"/>
               </a:rPr>
-              <a:t>w</a:t>
+              <a:t>i</a:t>
             </a:r>
             <a:endParaRPr lang="en-US" sz="900" dirty="0"/>
           </a:p>
@@ -31636,7 +31636,7 @@
         </p:nvSpPr>
         <p:spPr>
           <a:xfrm>
-            <a:off x="6062472" y="4169664"/>
+            <a:off x="6668262" y="4169664"/>
             <a:ext cx="685800" cy="475488"/>
           </a:xfrm>
           <a:prstGeom prst="rect">
@@ -31663,7 +31663,7 @@
         </p:nvSpPr>
         <p:spPr>
           <a:xfrm>
-            <a:off x="6062472" y="4169664"/>
+            <a:off x="6668262" y="4169664"/>
             <a:ext cx="685800" cy="475488"/>
           </a:xfrm>
           <a:prstGeom prst="rect">
@@ -31688,7 +31688,7 @@
                 <a:ea typeface="Trebuchet MS" pitchFamily="34" charset="-122"/>
                 <a:cs typeface="Trebuchet MS" pitchFamily="34" charset="-120"/>
               </a:rPr>
-              <a:t>i</a:t>
+              <a:t>s</a:t>
             </a:r>
             <a:endParaRPr lang="en-US" sz="900" dirty="0"/>
           </a:p>
@@ -31702,7 +31702,7 @@
         </p:nvSpPr>
         <p:spPr>
           <a:xfrm>
-            <a:off x="6870192" y="4169664"/>
+            <a:off x="7576947" y="4169664"/>
             <a:ext cx="685800" cy="475488"/>
           </a:xfrm>
           <a:prstGeom prst="rect">
@@ -31729,73 +31729,7 @@
         </p:nvSpPr>
         <p:spPr>
           <a:xfrm>
-            <a:off x="6870192" y="4169664"/>
-            <a:ext cx="685800" cy="475488"/>
-          </a:xfrm>
-          <a:prstGeom prst="rect">
-            <a:avLst/>
-          </a:prstGeom>
-          <a:noFill/>
-          <a:ln/>
-        </p:spPr>
-        <p:txBody>
-          <a:bodyPr wrap="square" lIns="0" tIns="0" rIns="0" bIns="0" rtlCol="0" anchor="ctr"/>
-          <a:lstStyle/>
-          <a:p>
-            <a:pPr algn="ctr" indent="0" marL="0">
-              <a:buNone/>
-            </a:pPr>
-            <a:r>
-              <a:rPr lang="en-US" sz="900" b="1" dirty="0">
-                <a:solidFill>
-                  <a:srgbClr val="9D174D"/>
-                </a:solidFill>
-                <a:latin typeface="Trebuchet MS" pitchFamily="34" charset="0"/>
-                <a:ea typeface="Trebuchet MS" pitchFamily="34" charset="-122"/>
-                <a:cs typeface="Trebuchet MS" pitchFamily="34" charset="-120"/>
-              </a:rPr>
-              <a:t>z</a:t>
-            </a:r>
-            <a:endParaRPr lang="en-US" sz="900" dirty="0"/>
-          </a:p>
-        </p:txBody>
-      </p:sp>
-      <p:sp>
-        <p:nvSpPr>
-          <p:cNvPr id="47" name="Shape 45"/>
-          <p:cNvSpPr/>
-          <p:nvPr/>
-        </p:nvSpPr>
-        <p:spPr>
-          <a:xfrm>
-            <a:off x="7677912" y="4169664"/>
-            <a:ext cx="685800" cy="475488"/>
-          </a:xfrm>
-          <a:prstGeom prst="rect">
-            <a:avLst>
-              <a:gd name="adj" fmla="val 7692"/>
-            </a:avLst>
-          </a:prstGeom>
-          <a:solidFill>
-            <a:srgbClr val="FFFFFF"/>
-          </a:solidFill>
-          <a:ln w="12700">
-            <a:solidFill>
-              <a:srgbClr val="DB2777"/>
-            </a:solidFill>
-            <a:prstDash val="solid"/>
-          </a:ln>
-        </p:spPr>
-      </p:sp>
-      <p:sp>
-        <p:nvSpPr>
-          <p:cNvPr id="48" name="Text 46"/>
-          <p:cNvSpPr/>
-          <p:nvPr/>
-        </p:nvSpPr>
-        <p:spPr>
-          <a:xfrm>
-            <a:off x="7677912" y="4169664"/>
+            <a:off x="7576947" y="4169664"/>
             <a:ext cx="685800" cy="475488"/>
           </a:xfrm>
           <a:prstGeom prst="rect">
@@ -36077,7 +36011,7 @@
                 <a:ea typeface="Calibri" pitchFamily="34" charset="-122"/>
                 <a:cs typeface="Calibri" pitchFamily="34" charset="-120"/>
               </a:rPr>
-              <a:t>1.  Adding 'un-' before 'likely' changes its meaning to 'not likely'.</a:t>
+              <a:t>1.  The morpheme 'like' means resembling or similar to something.</a:t>
             </a:r>
             <a:endParaRPr lang="en-US" sz="1300" dirty="0"/>
           </a:p>
@@ -36216,7 +36150,7 @@
                 <a:ea typeface="Calibri" pitchFamily="34" charset="-122"/>
                 <a:cs typeface="Calibri" pitchFamily="34" charset="-120"/>
               </a:rPr>
-              <a:t>2.  The word 'dislike' means to enjoy something very much.</a:t>
+              <a:t>2.  The word 'lifelike' contains the morpheme 'like'.</a:t>
             </a:r>
             <a:endParaRPr lang="en-US" sz="1300" dirty="0"/>
           </a:p>
@@ -36239,11 +36173,11 @@
             </a:avLst>
           </a:prstGeom>
           <a:solidFill>
-            <a:srgbClr val="FEE2E2"/>
-          </a:solidFill>
-          <a:ln w="12700">
-            <a:solidFill>
-              <a:srgbClr val="DC2626"/>
+            <a:srgbClr val="DCFCE7"/>
+          </a:solidFill>
+          <a:ln w="12700">
+            <a:solidFill>
+              <a:srgbClr val="16A34A"/>
             </a:solidFill>
             <a:prstDash val="solid"/>
           </a:ln>
@@ -36276,13 +36210,13 @@
             <a:r>
               <a:rPr lang="en-US" sz="1100" b="1" dirty="0">
                 <a:solidFill>
-                  <a:srgbClr val="DC2626"/>
+                  <a:srgbClr val="16A34A"/>
                 </a:solidFill>
                 <a:latin typeface="Trebuchet MS" pitchFamily="34" charset="0"/>
                 <a:ea typeface="Trebuchet MS" pitchFamily="34" charset="-122"/>
                 <a:cs typeface="Trebuchet MS" pitchFamily="34" charset="-120"/>
               </a:rPr>
-              <a:t>FALSE</a:t>
+              <a:t>TRUE</a:t>
             </a:r>
             <a:endParaRPr lang="en-US" sz="1100" dirty="0"/>
           </a:p>
@@ -36355,7 +36289,7 @@
                 <a:ea typeface="Calibri" pitchFamily="34" charset="-122"/>
                 <a:cs typeface="Calibri" pitchFamily="34" charset="-120"/>
               </a:rPr>
-              <a:t>3.  The morpheme 'like' comes from a French word.</a:t>
+              <a:t>3.  Adding 'un-' before 'likely' changes its meaning to 'not likely'.</a:t>
             </a:r>
             <a:endParaRPr lang="en-US" sz="1300" dirty="0"/>
           </a:p>
@@ -36378,11 +36312,11 @@
             </a:avLst>
           </a:prstGeom>
           <a:solidFill>
-            <a:srgbClr val="FEE2E2"/>
-          </a:solidFill>
-          <a:ln w="12700">
-            <a:solidFill>
-              <a:srgbClr val="DC2626"/>
+            <a:srgbClr val="DCFCE7"/>
+          </a:solidFill>
+          <a:ln w="12700">
+            <a:solidFill>
+              <a:srgbClr val="16A34A"/>
             </a:solidFill>
             <a:prstDash val="solid"/>
           </a:ln>
@@ -36415,13 +36349,13 @@
             <a:r>
               <a:rPr lang="en-US" sz="1100" b="1" dirty="0">
                 <a:solidFill>
-                  <a:srgbClr val="DC2626"/>
+                  <a:srgbClr val="16A34A"/>
                 </a:solidFill>
                 <a:latin typeface="Trebuchet MS" pitchFamily="34" charset="0"/>
                 <a:ea typeface="Trebuchet MS" pitchFamily="34" charset="-122"/>
                 <a:cs typeface="Trebuchet MS" pitchFamily="34" charset="-120"/>
               </a:rPr>
-              <a:t>FALSE</a:t>
+              <a:t>TRUE</a:t>
             </a:r>
             <a:endParaRPr lang="en-US" sz="1100" dirty="0"/>
           </a:p>
@@ -36494,7 +36428,7 @@
                 <a:ea typeface="Calibri" pitchFamily="34" charset="-122"/>
                 <a:cs typeface="Calibri" pitchFamily="34" charset="-120"/>
               </a:rPr>
-              <a:t>4.  The morpheme 'like' means resembling or similar to something.</a:t>
+              <a:t>4.  The word 'dislike' means to enjoy something very much.</a:t>
             </a:r>
             <a:endParaRPr lang="en-US" sz="1300" dirty="0"/>
           </a:p>
@@ -36517,11 +36451,11 @@
             </a:avLst>
           </a:prstGeom>
           <a:solidFill>
-            <a:srgbClr val="DCFCE7"/>
-          </a:solidFill>
-          <a:ln w="12700">
-            <a:solidFill>
-              <a:srgbClr val="16A34A"/>
+            <a:srgbClr val="FEE2E2"/>
+          </a:solidFill>
+          <a:ln w="12700">
+            <a:solidFill>
+              <a:srgbClr val="DC2626"/>
             </a:solidFill>
             <a:prstDash val="solid"/>
           </a:ln>
@@ -36554,13 +36488,13 @@
             <a:r>
               <a:rPr lang="en-US" sz="1100" b="1" dirty="0">
                 <a:solidFill>
-                  <a:srgbClr val="16A34A"/>
+                  <a:srgbClr val="DC2626"/>
                 </a:solidFill>
                 <a:latin typeface="Trebuchet MS" pitchFamily="34" charset="0"/>
                 <a:ea typeface="Trebuchet MS" pitchFamily="34" charset="-122"/>
                 <a:cs typeface="Trebuchet MS" pitchFamily="34" charset="-120"/>
               </a:rPr>
-              <a:t>TRUE</a:t>
+              <a:t>FALSE</a:t>
             </a:r>
             <a:endParaRPr lang="en-US" sz="1100" dirty="0"/>
           </a:p>
@@ -36633,7 +36567,7 @@
                 <a:ea typeface="Calibri" pitchFamily="34" charset="-122"/>
                 <a:cs typeface="Calibri" pitchFamily="34" charset="-120"/>
               </a:rPr>
-              <a:t>5.  The word 'lifelike' contains the morpheme 'like'.</a:t>
+              <a:t>5.  The morpheme 'like' comes from a French word.</a:t>
             </a:r>
             <a:endParaRPr lang="en-US" sz="1300" dirty="0"/>
           </a:p>
@@ -36656,11 +36590,11 @@
             </a:avLst>
           </a:prstGeom>
           <a:solidFill>
-            <a:srgbClr val="DCFCE7"/>
-          </a:solidFill>
-          <a:ln w="12700">
-            <a:solidFill>
-              <a:srgbClr val="16A34A"/>
+            <a:srgbClr val="FEE2E2"/>
+          </a:solidFill>
+          <a:ln w="12700">
+            <a:solidFill>
+              <a:srgbClr val="DC2626"/>
             </a:solidFill>
             <a:prstDash val="solid"/>
           </a:ln>
@@ -36693,13 +36627,13 @@
             <a:r>
               <a:rPr lang="en-US" sz="1100" b="1" dirty="0">
                 <a:solidFill>
-                  <a:srgbClr val="16A34A"/>
+                  <a:srgbClr val="DC2626"/>
                 </a:solidFill>
                 <a:latin typeface="Trebuchet MS" pitchFamily="34" charset="0"/>
                 <a:ea typeface="Trebuchet MS" pitchFamily="34" charset="-122"/>
                 <a:cs typeface="Trebuchet MS" pitchFamily="34" charset="-120"/>
               </a:rPr>
-              <a:t>TRUE</a:t>
+              <a:t>FALSE</a:t>
             </a:r>
             <a:endParaRPr lang="en-US" sz="1100" dirty="0"/>
           </a:p>

--- a/output/wordlabs-like-3day.pptx
+++ b/output/wordlabs-like-3day.pptx
@@ -4240,7 +4240,7 @@
                 <a:ea typeface="Calibri" pitchFamily="34" charset="-122"/>
                 <a:cs typeface="Calibri" pitchFamily="34" charset="-120"/>
               </a:rPr>
-              <a:t>"similar to, resembling"</a:t>
+              <a:t>"to enjoy; to prefer"</a:t>
             </a:r>
             <a:endParaRPr lang="en-US" sz="2200" dirty="0"/>
           </a:p>
@@ -4279,7 +4279,7 @@
                 <a:ea typeface="Calibri" pitchFamily="34" charset="-122"/>
                 <a:cs typeface="Calibri" pitchFamily="34" charset="-120"/>
               </a:rPr>
-              <a:t>Origin: Latin: similis</a:t>
+              <a:t>Origin: Anglo-Saxon (Old English) root</a:t>
             </a:r>
             <a:endParaRPr lang="en-US" sz="1300" dirty="0"/>
           </a:p>
@@ -5288,7 +5288,7 @@
                 <a:ea typeface="Calibri" pitchFamily="34" charset="-122"/>
                 <a:cs typeface="Calibri" pitchFamily="34" charset="-120"/>
               </a:rPr>
-              <a:t>Word Labs  •  wordlabs.app  •  Root: 'like' = similar to, resembling</a:t>
+              <a:t>Word Labs  •  wordlabs.app  •  Root: 'like' = to enjoy; to prefer</a:t>
             </a:r>
             <a:endParaRPr lang="en-US" sz="800" dirty="0"/>
           </a:p>
@@ -5928,7 +5928,7 @@
                 <a:ea typeface="Calibri" pitchFamily="34" charset="-122"/>
                 <a:cs typeface="Calibri" pitchFamily="34" charset="-120"/>
               </a:rPr>
-              <a:t>Word Labs  •  wordlabs.app  •  Root: 'like' = similar to, resembling</a:t>
+              <a:t>Word Labs  •  wordlabs.app  •  Root: 'like' = to enjoy; to prefer</a:t>
             </a:r>
             <a:endParaRPr lang="en-US" sz="800" dirty="0"/>
           </a:p>
@@ -6040,7 +6040,7 @@
                 <a:ea typeface="Calibri" pitchFamily="34" charset="-122"/>
                 <a:cs typeface="Calibri" pitchFamily="34" charset="-120"/>
               </a:rPr>
-              <a:t>The </a:t>
+              <a:t>There's a strong </a:t>
             </a:r>
             <a:pPr algn="l" indent="0" marL="0">
               <a:buNone/>
@@ -6057,7 +6057,7 @@
                 <a:ea typeface="Calibri" pitchFamily="34" charset="-122"/>
                 <a:cs typeface="Calibri" pitchFamily="34" charset="-120"/>
               </a:rPr>
-              <a:t>lifelike</a:t>
+              <a:t>likelihood</a:t>
             </a:r>
             <a:pPr algn="l" indent="0" marL="0">
               <a:buNone/>
@@ -6071,7 +6071,7 @@
                 <a:ea typeface="Calibri" pitchFamily="34" charset="-122"/>
                 <a:cs typeface="Calibri" pitchFamily="34" charset="-120"/>
               </a:rPr>
-              <a:t> puppet moved in such a </a:t>
+              <a:t> of rain this afternoon. Her </a:t>
             </a:r>
             <a:pPr algn="l" indent="0" marL="0">
               <a:buNone/>
@@ -6088,7 +6088,7 @@
                 <a:ea typeface="Calibri" pitchFamily="34" charset="-122"/>
                 <a:cs typeface="Calibri" pitchFamily="34" charset="-120"/>
               </a:rPr>
-              <a:t>godlike</a:t>
+              <a:t>likable</a:t>
             </a:r>
             <a:pPr algn="l" indent="0" marL="0">
               <a:buNone/>
@@ -6102,7 +6102,7 @@
                 <a:ea typeface="Calibri" pitchFamily="34" charset="-122"/>
                 <a:cs typeface="Calibri" pitchFamily="34" charset="-120"/>
               </a:rPr>
-              <a:t> way that the audience gasped with amazement.</a:t>
+              <a:t> personality made her popular with everyone.</a:t>
             </a:r>
             <a:endParaRPr lang="en-US" sz="1800" dirty="0"/>
           </a:p>
@@ -6257,7 +6257,7 @@
                 <a:ea typeface="Trebuchet MS" pitchFamily="34" charset="-122"/>
                 <a:cs typeface="Trebuchet MS" pitchFamily="34" charset="-120"/>
               </a:rPr>
-              <a:t>lifelike</a:t>
+              <a:t>likelihood</a:t>
             </a:r>
             <a:endParaRPr lang="en-US" sz="1400" dirty="0"/>
           </a:p>
@@ -6385,7 +6385,7 @@
                 <a:ea typeface="Trebuchet MS" pitchFamily="34" charset="-122"/>
                 <a:cs typeface="Trebuchet MS" pitchFamily="34" charset="-120"/>
               </a:rPr>
-              <a:t>godlike</a:t>
+              <a:t>likable</a:t>
             </a:r>
             <a:endParaRPr lang="en-US" sz="1400" dirty="0"/>
           </a:p>
@@ -6716,7 +6716,7 @@
                 <a:ea typeface="Calibri" pitchFamily="34" charset="-122"/>
                 <a:cs typeface="Calibri" pitchFamily="34" charset="-120"/>
               </a:rPr>
-              <a:t>Word Labs  •  wordlabs.app  •  Root: 'like' = similar to, resembling</a:t>
+              <a:t>Word Labs  •  wordlabs.app  •  Root: 'like' = to enjoy; to prefer</a:t>
             </a:r>
             <a:endParaRPr lang="en-US" sz="800" dirty="0"/>
           </a:p>
@@ -6855,7 +6855,7 @@
                 <a:ea typeface="Trebuchet MS" pitchFamily="34" charset="-122"/>
                 <a:cs typeface="Trebuchet MS" pitchFamily="34" charset="-120"/>
               </a:rPr>
-              <a:t>lifelike</a:t>
+              <a:t>likelihood</a:t>
             </a:r>
             <a:endParaRPr lang="en-US" sz="2800" dirty="0"/>
           </a:p>
@@ -7543,7 +7543,7 @@
                 <a:ea typeface="Calibri" pitchFamily="34" charset="-122"/>
                 <a:cs typeface="Calibri" pitchFamily="34" charset="-120"/>
               </a:rPr>
-              <a:t>Word Labs  •  wordlabs.app  •  Root: 'like' = similar to, resembling</a:t>
+              <a:t>Word Labs  •  wordlabs.app  •  Root: 'like' = to enjoy; to prefer</a:t>
             </a:r>
             <a:endParaRPr lang="en-US" sz="800" dirty="0"/>
           </a:p>
@@ -7682,7 +7682,7 @@
                 <a:ea typeface="Trebuchet MS" pitchFamily="34" charset="-122"/>
                 <a:cs typeface="Trebuchet MS" pitchFamily="34" charset="-120"/>
               </a:rPr>
-              <a:t>lifelike</a:t>
+              <a:t>likelihood</a:t>
             </a:r>
             <a:endParaRPr lang="en-US" sz="2800" dirty="0"/>
           </a:p>
@@ -7762,7 +7762,7 @@
         </p:nvSpPr>
         <p:spPr>
           <a:xfrm>
-            <a:off x="2938272" y="2258568"/>
+            <a:off x="2221992" y="2258568"/>
             <a:ext cx="1828800" cy="292608"/>
           </a:xfrm>
           <a:prstGeom prst="rect">
@@ -7771,11 +7771,11 @@
             </a:avLst>
           </a:prstGeom>
           <a:solidFill>
-            <a:srgbClr val="DDD6FE"/>
+            <a:srgbClr val="CCFBF1"/>
           </a:solidFill>
           <a:ln w="19050">
             <a:solidFill>
-              <a:srgbClr val="7C3AED"/>
+              <a:srgbClr val="0D9488"/>
             </a:solidFill>
             <a:prstDash val="solid"/>
           </a:ln>
@@ -7796,7 +7796,7 @@
         </p:nvSpPr>
         <p:spPr>
           <a:xfrm>
-            <a:off x="2938272" y="2258568"/>
+            <a:off x="2221992" y="2258568"/>
             <a:ext cx="1828800" cy="292608"/>
           </a:xfrm>
           <a:prstGeom prst="rect">
@@ -7815,13 +7815,13 @@
             <a:r>
               <a:rPr lang="en-US" sz="1300" b="1" dirty="0">
                 <a:solidFill>
-                  <a:srgbClr val="4C1D95"/>
+                  <a:srgbClr val="0F766E"/>
                 </a:solidFill>
                 <a:latin typeface="Trebuchet MS" pitchFamily="34" charset="0"/>
                 <a:ea typeface="Trebuchet MS" pitchFamily="34" charset="-122"/>
                 <a:cs typeface="Trebuchet MS" pitchFamily="34" charset="-120"/>
               </a:rPr>
-              <a:t>life</a:t>
+              <a:t>like</a:t>
             </a:r>
             <a:endParaRPr lang="en-US" sz="1300" dirty="0"/>
           </a:p>
@@ -7835,7 +7835,7 @@
         </p:nvSpPr>
         <p:spPr>
           <a:xfrm>
-            <a:off x="2938272" y="2569464"/>
+            <a:off x="2221992" y="2569464"/>
             <a:ext cx="1828800" cy="201168"/>
           </a:xfrm>
           <a:prstGeom prst="rect">
@@ -7860,7 +7860,7 @@
                 <a:ea typeface="Calibri" pitchFamily="34" charset="-122"/>
                 <a:cs typeface="Calibri" pitchFamily="34" charset="-120"/>
               </a:rPr>
-              <a:t>living existence</a:t>
+              <a:t>to enjoy; to prefer</a:t>
             </a:r>
             <a:endParaRPr lang="en-US" sz="850" dirty="0"/>
           </a:p>
@@ -7874,7 +7874,7 @@
         </p:nvSpPr>
         <p:spPr>
           <a:xfrm>
-            <a:off x="5803392" y="2258568"/>
+            <a:off x="4370832" y="2258568"/>
             <a:ext cx="1828800" cy="292608"/>
           </a:xfrm>
           <a:prstGeom prst="rect">
@@ -7883,11 +7883,11 @@
             </a:avLst>
           </a:prstGeom>
           <a:solidFill>
-            <a:srgbClr val="CCFBF1"/>
+            <a:srgbClr val="FCE7F3"/>
           </a:solidFill>
           <a:ln w="19050">
             <a:solidFill>
-              <a:srgbClr val="0D9488"/>
+              <a:srgbClr val="DB2777"/>
             </a:solidFill>
             <a:prstDash val="solid"/>
           </a:ln>
@@ -7908,7 +7908,7 @@
         </p:nvSpPr>
         <p:spPr>
           <a:xfrm>
-            <a:off x="5803392" y="2258568"/>
+            <a:off x="4370832" y="2258568"/>
             <a:ext cx="1828800" cy="292608"/>
           </a:xfrm>
           <a:prstGeom prst="rect">
@@ -7927,13 +7927,13 @@
             <a:r>
               <a:rPr lang="en-US" sz="1300" b="1" dirty="0">
                 <a:solidFill>
-                  <a:srgbClr val="0F766E"/>
+                  <a:srgbClr val="9D174D"/>
                 </a:solidFill>
                 <a:latin typeface="Trebuchet MS" pitchFamily="34" charset="0"/>
                 <a:ea typeface="Trebuchet MS" pitchFamily="34" charset="-122"/>
                 <a:cs typeface="Trebuchet MS" pitchFamily="34" charset="-120"/>
               </a:rPr>
-              <a:t>like</a:t>
+              <a:t>ly</a:t>
             </a:r>
             <a:endParaRPr lang="en-US" sz="1300" dirty="0"/>
           </a:p>
@@ -7947,7 +7947,7 @@
         </p:nvSpPr>
         <p:spPr>
           <a:xfrm>
-            <a:off x="5803392" y="2569464"/>
+            <a:off x="4370832" y="2569464"/>
             <a:ext cx="1828800" cy="201168"/>
           </a:xfrm>
           <a:prstGeom prst="rect">
@@ -7972,7 +7972,7 @@
                 <a:ea typeface="Calibri" pitchFamily="34" charset="-122"/>
                 <a:cs typeface="Calibri" pitchFamily="34" charset="-120"/>
               </a:rPr>
-              <a:t>resembling, similar to</a:t>
+              <a:t>in a way</a:t>
             </a:r>
             <a:endParaRPr lang="en-US" sz="850" dirty="0"/>
           </a:p>
@@ -7981,6 +7981,118 @@
       <p:sp>
         <p:nvSpPr>
           <p:cNvPr id="22" name="Shape 20"/>
+          <p:cNvSpPr/>
+          <p:nvPr/>
+        </p:nvSpPr>
+        <p:spPr>
+          <a:xfrm>
+            <a:off x="6519672" y="2258568"/>
+            <a:ext cx="1828800" cy="292608"/>
+          </a:xfrm>
+          <a:prstGeom prst="rect">
+            <a:avLst>
+              <a:gd name="adj" fmla="val 25000"/>
+            </a:avLst>
+          </a:prstGeom>
+          <a:solidFill>
+            <a:srgbClr val="FCE7F3"/>
+          </a:solidFill>
+          <a:ln w="19050">
+            <a:solidFill>
+              <a:srgbClr val="DB2777"/>
+            </a:solidFill>
+            <a:prstDash val="solid"/>
+          </a:ln>
+          <a:effectLst>
+            <a:outerShdw sx="100000" sy="100000" kx="0" ky="0" algn="bl" rotWithShape="0" blurRad="101600" dist="38100" dir="8100000">
+              <a:srgbClr val="000000">
+                <a:alpha val="12000"/>
+              </a:srgbClr>
+            </a:outerShdw>
+          </a:effectLst>
+        </p:spPr>
+      </p:sp>
+      <p:sp>
+        <p:nvSpPr>
+          <p:cNvPr id="23" name="Text 21"/>
+          <p:cNvSpPr/>
+          <p:nvPr/>
+        </p:nvSpPr>
+        <p:spPr>
+          <a:xfrm>
+            <a:off x="6519672" y="2258568"/>
+            <a:ext cx="1828800" cy="292608"/>
+          </a:xfrm>
+          <a:prstGeom prst="rect">
+            <a:avLst/>
+          </a:prstGeom>
+          <a:noFill/>
+          <a:ln/>
+        </p:spPr>
+        <p:txBody>
+          <a:bodyPr wrap="square" lIns="0" tIns="0" rIns="0" bIns="0" rtlCol="0" anchor="ctr"/>
+          <a:lstStyle/>
+          <a:p>
+            <a:pPr algn="ctr" indent="0" marL="0">
+              <a:buNone/>
+            </a:pPr>
+            <a:r>
+              <a:rPr lang="en-US" sz="1300" b="1" dirty="0">
+                <a:solidFill>
+                  <a:srgbClr val="9D174D"/>
+                </a:solidFill>
+                <a:latin typeface="Trebuchet MS" pitchFamily="34" charset="0"/>
+                <a:ea typeface="Trebuchet MS" pitchFamily="34" charset="-122"/>
+                <a:cs typeface="Trebuchet MS" pitchFamily="34" charset="-120"/>
+              </a:rPr>
+              <a:t>hood</a:t>
+            </a:r>
+            <a:endParaRPr lang="en-US" sz="1300" dirty="0"/>
+          </a:p>
+        </p:txBody>
+      </p:sp>
+      <p:sp>
+        <p:nvSpPr>
+          <p:cNvPr id="24" name="Text 22"/>
+          <p:cNvSpPr/>
+          <p:nvPr/>
+        </p:nvSpPr>
+        <p:spPr>
+          <a:xfrm>
+            <a:off x="6519672" y="2569464"/>
+            <a:ext cx="1828800" cy="201168"/>
+          </a:xfrm>
+          <a:prstGeom prst="rect">
+            <a:avLst/>
+          </a:prstGeom>
+          <a:noFill/>
+          <a:ln/>
+        </p:spPr>
+        <p:txBody>
+          <a:bodyPr wrap="square" lIns="0" tIns="0" rIns="0" bIns="0" rtlCol="0" anchor="t"/>
+          <a:lstStyle/>
+          <a:p>
+            <a:pPr algn="ctr" indent="0" marL="0">
+              <a:buNone/>
+            </a:pPr>
+            <a:r>
+              <a:rPr lang="en-US" sz="850" dirty="0">
+                <a:solidFill>
+                  <a:srgbClr val="475569"/>
+                </a:solidFill>
+                <a:latin typeface="Calibri" pitchFamily="34" charset="0"/>
+                <a:ea typeface="Calibri" pitchFamily="34" charset="-122"/>
+                <a:cs typeface="Calibri" pitchFamily="34" charset="-120"/>
+              </a:rPr>
+              <a:t>state of</a:t>
+            </a:r>
+            <a:endParaRPr lang="en-US" sz="850" dirty="0"/>
+          </a:p>
+        </p:txBody>
+      </p:sp>
+      <p:sp>
+        <p:nvSpPr>
+          <p:cNvPr id="25" name="Shape 23"/>
           <p:cNvSpPr/>
           <p:nvPr/>
         </p:nvSpPr>
@@ -8007,7 +8119,7 @@
       </p:sp>
       <p:sp>
         <p:nvSpPr>
-          <p:cNvPr id="23" name="Text 21"/>
+          <p:cNvPr id="26" name="Text 24"/>
           <p:cNvSpPr/>
           <p:nvPr/>
         </p:nvSpPr>
@@ -8046,7 +8158,7 @@
       </p:sp>
       <p:sp>
         <p:nvSpPr>
-          <p:cNvPr id="24" name="Shape 22"/>
+          <p:cNvPr id="27" name="Shape 25"/>
           <p:cNvSpPr/>
           <p:nvPr/>
         </p:nvSpPr>
@@ -8073,7 +8185,7 @@
       </p:sp>
       <p:sp>
         <p:nvSpPr>
-          <p:cNvPr id="25" name="Text 23"/>
+          <p:cNvPr id="28" name="Text 26"/>
           <p:cNvSpPr/>
           <p:nvPr/>
         </p:nvSpPr>
@@ -8112,7 +8224,7 @@
       </p:sp>
       <p:sp>
         <p:nvSpPr>
-          <p:cNvPr id="26" name="Shape 24"/>
+          <p:cNvPr id="29" name="Shape 27"/>
           <p:cNvSpPr/>
           <p:nvPr/>
         </p:nvSpPr>
@@ -8139,7 +8251,7 @@
       </p:sp>
       <p:sp>
         <p:nvSpPr>
-          <p:cNvPr id="27" name="Text 25"/>
+          <p:cNvPr id="30" name="Text 28"/>
           <p:cNvSpPr/>
           <p:nvPr/>
         </p:nvSpPr>
@@ -8178,7 +8290,7 @@
       </p:sp>
       <p:sp>
         <p:nvSpPr>
-          <p:cNvPr id="28" name="Shape 26"/>
+          <p:cNvPr id="31" name="Shape 29"/>
           <p:cNvSpPr/>
           <p:nvPr/>
         </p:nvSpPr>
@@ -8205,7 +8317,7 @@
       </p:sp>
       <p:sp>
         <p:nvSpPr>
-          <p:cNvPr id="29" name="Text 27"/>
+          <p:cNvPr id="32" name="Text 30"/>
           <p:cNvSpPr/>
           <p:nvPr/>
         </p:nvSpPr>
@@ -8528,7 +8640,7 @@
                 <a:ea typeface="Calibri" pitchFamily="34" charset="-122"/>
                 <a:cs typeface="Calibri" pitchFamily="34" charset="-120"/>
               </a:rPr>
-              <a:t>Word Labs  •  wordlabs.app  •  Root: 'like' = similar to, resembling</a:t>
+              <a:t>Word Labs  •  wordlabs.app  •  Root: 'like' = to enjoy; to prefer</a:t>
             </a:r>
             <a:endParaRPr lang="en-US" sz="800" dirty="0"/>
           </a:p>
@@ -8667,7 +8779,7 @@
                 <a:ea typeface="Trebuchet MS" pitchFamily="34" charset="-122"/>
                 <a:cs typeface="Trebuchet MS" pitchFamily="34" charset="-120"/>
               </a:rPr>
-              <a:t>lifelike</a:t>
+              <a:t>likelihood</a:t>
             </a:r>
             <a:endParaRPr lang="en-US" sz="2800" dirty="0"/>
           </a:p>
@@ -8747,7 +8859,7 @@
         </p:nvSpPr>
         <p:spPr>
           <a:xfrm>
-            <a:off x="2938272" y="2258568"/>
+            <a:off x="2221992" y="2258568"/>
             <a:ext cx="1828800" cy="292608"/>
           </a:xfrm>
           <a:prstGeom prst="rect">
@@ -8756,11 +8868,11 @@
             </a:avLst>
           </a:prstGeom>
           <a:solidFill>
-            <a:srgbClr val="DDD6FE"/>
+            <a:srgbClr val="CCFBF1"/>
           </a:solidFill>
           <a:ln w="19050">
             <a:solidFill>
-              <a:srgbClr val="7C3AED"/>
+              <a:srgbClr val="0D9488"/>
             </a:solidFill>
             <a:prstDash val="solid"/>
           </a:ln>
@@ -8781,7 +8893,7 @@
         </p:nvSpPr>
         <p:spPr>
           <a:xfrm>
-            <a:off x="2938272" y="2258568"/>
+            <a:off x="2221992" y="2258568"/>
             <a:ext cx="1828800" cy="292608"/>
           </a:xfrm>
           <a:prstGeom prst="rect">
@@ -8800,13 +8912,13 @@
             <a:r>
               <a:rPr lang="en-US" sz="1300" b="1" dirty="0">
                 <a:solidFill>
-                  <a:srgbClr val="4C1D95"/>
+                  <a:srgbClr val="0F766E"/>
                 </a:solidFill>
                 <a:latin typeface="Trebuchet MS" pitchFamily="34" charset="0"/>
                 <a:ea typeface="Trebuchet MS" pitchFamily="34" charset="-122"/>
                 <a:cs typeface="Trebuchet MS" pitchFamily="34" charset="-120"/>
               </a:rPr>
-              <a:t>life</a:t>
+              <a:t>like</a:t>
             </a:r>
             <a:endParaRPr lang="en-US" sz="1300" dirty="0"/>
           </a:p>
@@ -8820,7 +8932,7 @@
         </p:nvSpPr>
         <p:spPr>
           <a:xfrm>
-            <a:off x="2938272" y="2569464"/>
+            <a:off x="2221992" y="2569464"/>
             <a:ext cx="1828800" cy="201168"/>
           </a:xfrm>
           <a:prstGeom prst="rect">
@@ -8845,7 +8957,7 @@
                 <a:ea typeface="Calibri" pitchFamily="34" charset="-122"/>
                 <a:cs typeface="Calibri" pitchFamily="34" charset="-120"/>
               </a:rPr>
-              <a:t>living existence</a:t>
+              <a:t>to enjoy; to prefer</a:t>
             </a:r>
             <a:endParaRPr lang="en-US" sz="850" dirty="0"/>
           </a:p>
@@ -8859,7 +8971,7 @@
         </p:nvSpPr>
         <p:spPr>
           <a:xfrm>
-            <a:off x="5803392" y="2258568"/>
+            <a:off x="4370832" y="2258568"/>
             <a:ext cx="1828800" cy="292608"/>
           </a:xfrm>
           <a:prstGeom prst="rect">
@@ -8868,11 +8980,11 @@
             </a:avLst>
           </a:prstGeom>
           <a:solidFill>
-            <a:srgbClr val="CCFBF1"/>
+            <a:srgbClr val="FCE7F3"/>
           </a:solidFill>
           <a:ln w="19050">
             <a:solidFill>
-              <a:srgbClr val="0D9488"/>
+              <a:srgbClr val="DB2777"/>
             </a:solidFill>
             <a:prstDash val="solid"/>
           </a:ln>
@@ -8893,7 +9005,7 @@
         </p:nvSpPr>
         <p:spPr>
           <a:xfrm>
-            <a:off x="5803392" y="2258568"/>
+            <a:off x="4370832" y="2258568"/>
             <a:ext cx="1828800" cy="292608"/>
           </a:xfrm>
           <a:prstGeom prst="rect">
@@ -8912,13 +9024,13 @@
             <a:r>
               <a:rPr lang="en-US" sz="1300" b="1" dirty="0">
                 <a:solidFill>
-                  <a:srgbClr val="0F766E"/>
+                  <a:srgbClr val="9D174D"/>
                 </a:solidFill>
                 <a:latin typeface="Trebuchet MS" pitchFamily="34" charset="0"/>
                 <a:ea typeface="Trebuchet MS" pitchFamily="34" charset="-122"/>
                 <a:cs typeface="Trebuchet MS" pitchFamily="34" charset="-120"/>
               </a:rPr>
-              <a:t>like</a:t>
+              <a:t>ly</a:t>
             </a:r>
             <a:endParaRPr lang="en-US" sz="1300" dirty="0"/>
           </a:p>
@@ -8932,7 +9044,7 @@
         </p:nvSpPr>
         <p:spPr>
           <a:xfrm>
-            <a:off x="5803392" y="2569464"/>
+            <a:off x="4370832" y="2569464"/>
             <a:ext cx="1828800" cy="201168"/>
           </a:xfrm>
           <a:prstGeom prst="rect">
@@ -8957,7 +9069,7 @@
                 <a:ea typeface="Calibri" pitchFamily="34" charset="-122"/>
                 <a:cs typeface="Calibri" pitchFamily="34" charset="-120"/>
               </a:rPr>
-              <a:t>resembling, similar to</a:t>
+              <a:t>in a way</a:t>
             </a:r>
             <a:endParaRPr lang="en-US" sz="850" dirty="0"/>
           </a:p>
@@ -8966,6 +9078,118 @@
       <p:sp>
         <p:nvSpPr>
           <p:cNvPr id="22" name="Shape 20"/>
+          <p:cNvSpPr/>
+          <p:nvPr/>
+        </p:nvSpPr>
+        <p:spPr>
+          <a:xfrm>
+            <a:off x="6519672" y="2258568"/>
+            <a:ext cx="1828800" cy="292608"/>
+          </a:xfrm>
+          <a:prstGeom prst="rect">
+            <a:avLst>
+              <a:gd name="adj" fmla="val 25000"/>
+            </a:avLst>
+          </a:prstGeom>
+          <a:solidFill>
+            <a:srgbClr val="FCE7F3"/>
+          </a:solidFill>
+          <a:ln w="19050">
+            <a:solidFill>
+              <a:srgbClr val="DB2777"/>
+            </a:solidFill>
+            <a:prstDash val="solid"/>
+          </a:ln>
+          <a:effectLst>
+            <a:outerShdw sx="100000" sy="100000" kx="0" ky="0" algn="bl" rotWithShape="0" blurRad="101600" dist="38100" dir="8100000">
+              <a:srgbClr val="000000">
+                <a:alpha val="12000"/>
+              </a:srgbClr>
+            </a:outerShdw>
+          </a:effectLst>
+        </p:spPr>
+      </p:sp>
+      <p:sp>
+        <p:nvSpPr>
+          <p:cNvPr id="23" name="Text 21"/>
+          <p:cNvSpPr/>
+          <p:nvPr/>
+        </p:nvSpPr>
+        <p:spPr>
+          <a:xfrm>
+            <a:off x="6519672" y="2258568"/>
+            <a:ext cx="1828800" cy="292608"/>
+          </a:xfrm>
+          <a:prstGeom prst="rect">
+            <a:avLst/>
+          </a:prstGeom>
+          <a:noFill/>
+          <a:ln/>
+        </p:spPr>
+        <p:txBody>
+          <a:bodyPr wrap="square" lIns="0" tIns="0" rIns="0" bIns="0" rtlCol="0" anchor="ctr"/>
+          <a:lstStyle/>
+          <a:p>
+            <a:pPr algn="ctr" indent="0" marL="0">
+              <a:buNone/>
+            </a:pPr>
+            <a:r>
+              <a:rPr lang="en-US" sz="1300" b="1" dirty="0">
+                <a:solidFill>
+                  <a:srgbClr val="9D174D"/>
+                </a:solidFill>
+                <a:latin typeface="Trebuchet MS" pitchFamily="34" charset="0"/>
+                <a:ea typeface="Trebuchet MS" pitchFamily="34" charset="-122"/>
+                <a:cs typeface="Trebuchet MS" pitchFamily="34" charset="-120"/>
+              </a:rPr>
+              <a:t>hood</a:t>
+            </a:r>
+            <a:endParaRPr lang="en-US" sz="1300" dirty="0"/>
+          </a:p>
+        </p:txBody>
+      </p:sp>
+      <p:sp>
+        <p:nvSpPr>
+          <p:cNvPr id="24" name="Text 22"/>
+          <p:cNvSpPr/>
+          <p:nvPr/>
+        </p:nvSpPr>
+        <p:spPr>
+          <a:xfrm>
+            <a:off x="6519672" y="2569464"/>
+            <a:ext cx="1828800" cy="201168"/>
+          </a:xfrm>
+          <a:prstGeom prst="rect">
+            <a:avLst/>
+          </a:prstGeom>
+          <a:noFill/>
+          <a:ln/>
+        </p:spPr>
+        <p:txBody>
+          <a:bodyPr wrap="square" lIns="0" tIns="0" rIns="0" bIns="0" rtlCol="0" anchor="t"/>
+          <a:lstStyle/>
+          <a:p>
+            <a:pPr algn="ctr" indent="0" marL="0">
+              <a:buNone/>
+            </a:pPr>
+            <a:r>
+              <a:rPr lang="en-US" sz="850" dirty="0">
+                <a:solidFill>
+                  <a:srgbClr val="475569"/>
+                </a:solidFill>
+                <a:latin typeface="Calibri" pitchFamily="34" charset="0"/>
+                <a:ea typeface="Calibri" pitchFamily="34" charset="-122"/>
+                <a:cs typeface="Calibri" pitchFamily="34" charset="-120"/>
+              </a:rPr>
+              <a:t>state of</a:t>
+            </a:r>
+            <a:endParaRPr lang="en-US" sz="850" dirty="0"/>
+          </a:p>
+        </p:txBody>
+      </p:sp>
+      <p:sp>
+        <p:nvSpPr>
+          <p:cNvPr id="25" name="Shape 23"/>
           <p:cNvSpPr/>
           <p:nvPr/>
         </p:nvSpPr>
@@ -8992,7 +9216,7 @@
       </p:sp>
       <p:sp>
         <p:nvSpPr>
-          <p:cNvPr id="23" name="Text 21"/>
+          <p:cNvPr id="26" name="Text 24"/>
           <p:cNvSpPr/>
           <p:nvPr/>
         </p:nvSpPr>
@@ -9031,7 +9255,7 @@
       </p:sp>
       <p:sp>
         <p:nvSpPr>
-          <p:cNvPr id="24" name="Shape 22"/>
+          <p:cNvPr id="27" name="Shape 25"/>
           <p:cNvSpPr/>
           <p:nvPr/>
         </p:nvSpPr>
@@ -9058,13 +9282,13 @@
       </p:sp>
       <p:sp>
         <p:nvSpPr>
-          <p:cNvPr id="25" name="Shape 23"/>
-          <p:cNvSpPr/>
-          <p:nvPr/>
-        </p:nvSpPr>
-        <p:spPr>
-          <a:xfrm>
-            <a:off x="2999232" y="3364992"/>
+          <p:cNvPr id="28" name="Shape 26"/>
+          <p:cNvSpPr/>
+          <p:nvPr/>
+        </p:nvSpPr>
+        <p:spPr>
+          <a:xfrm>
+            <a:off x="2313432" y="3364992"/>
             <a:ext cx="1645920" cy="475488"/>
           </a:xfrm>
           <a:prstGeom prst="rect">
@@ -9085,13 +9309,13 @@
       </p:sp>
       <p:sp>
         <p:nvSpPr>
-          <p:cNvPr id="26" name="Text 24"/>
-          <p:cNvSpPr/>
-          <p:nvPr/>
-        </p:nvSpPr>
-        <p:spPr>
-          <a:xfrm>
-            <a:off x="2999232" y="3364992"/>
+          <p:cNvPr id="29" name="Text 27"/>
+          <p:cNvSpPr/>
+          <p:nvPr/>
+        </p:nvSpPr>
+        <p:spPr>
+          <a:xfrm>
+            <a:off x="2313432" y="3364992"/>
             <a:ext cx="1645920" cy="475488"/>
           </a:xfrm>
           <a:prstGeom prst="rect">
@@ -9116,7 +9340,7 @@
                 <a:ea typeface="Trebuchet MS" pitchFamily="34" charset="-122"/>
                 <a:cs typeface="Trebuchet MS" pitchFamily="34" charset="-120"/>
               </a:rPr>
-              <a:t>life</a:t>
+              <a:t>like</a:t>
             </a:r>
             <a:endParaRPr lang="en-US" sz="1400" dirty="0"/>
           </a:p>
@@ -9124,14 +9348,14 @@
       </p:sp>
       <p:sp>
         <p:nvSpPr>
-          <p:cNvPr id="27" name="Text 25"/>
-          <p:cNvSpPr/>
-          <p:nvPr/>
-        </p:nvSpPr>
-        <p:spPr>
-          <a:xfrm>
-            <a:off x="4645152" y="3364992"/>
-            <a:ext cx="1097280" cy="475488"/>
+          <p:cNvPr id="30" name="Text 28"/>
+          <p:cNvSpPr/>
+          <p:nvPr/>
+        </p:nvSpPr>
+        <p:spPr>
+          <a:xfrm>
+            <a:off x="3959352" y="3364992"/>
+            <a:ext cx="411480" cy="475488"/>
           </a:xfrm>
           <a:prstGeom prst="rect">
             <a:avLst/>
@@ -9163,13 +9387,13 @@
       </p:sp>
       <p:sp>
         <p:nvSpPr>
-          <p:cNvPr id="28" name="Shape 26"/>
-          <p:cNvSpPr/>
-          <p:nvPr/>
-        </p:nvSpPr>
-        <p:spPr>
-          <a:xfrm>
-            <a:off x="5742432" y="3364992"/>
+          <p:cNvPr id="31" name="Shape 29"/>
+          <p:cNvSpPr/>
+          <p:nvPr/>
+        </p:nvSpPr>
+        <p:spPr>
+          <a:xfrm>
+            <a:off x="4370832" y="3364992"/>
             <a:ext cx="1645920" cy="475488"/>
           </a:xfrm>
           <a:prstGeom prst="rect">
@@ -9190,13 +9414,13 @@
       </p:sp>
       <p:sp>
         <p:nvSpPr>
-          <p:cNvPr id="29" name="Text 27"/>
-          <p:cNvSpPr/>
-          <p:nvPr/>
-        </p:nvSpPr>
-        <p:spPr>
-          <a:xfrm>
-            <a:off x="5742432" y="3364992"/>
+          <p:cNvPr id="32" name="Text 30"/>
+          <p:cNvSpPr/>
+          <p:nvPr/>
+        </p:nvSpPr>
+        <p:spPr>
+          <a:xfrm>
+            <a:off x="4370832" y="3364992"/>
             <a:ext cx="1645920" cy="475488"/>
           </a:xfrm>
           <a:prstGeom prst="rect">
@@ -9221,7 +9445,7 @@
                 <a:ea typeface="Trebuchet MS" pitchFamily="34" charset="-122"/>
                 <a:cs typeface="Trebuchet MS" pitchFamily="34" charset="-120"/>
               </a:rPr>
-              <a:t>like</a:t>
+              <a:t>li</a:t>
             </a:r>
             <a:endParaRPr lang="en-US" sz="1400" dirty="0"/>
           </a:p>
@@ -9229,7 +9453,112 @@
       </p:sp>
       <p:sp>
         <p:nvSpPr>
-          <p:cNvPr id="30" name="Shape 28"/>
+          <p:cNvPr id="33" name="Text 31"/>
+          <p:cNvSpPr/>
+          <p:nvPr/>
+        </p:nvSpPr>
+        <p:spPr>
+          <a:xfrm>
+            <a:off x="6016752" y="3364992"/>
+            <a:ext cx="411480" cy="475488"/>
+          </a:xfrm>
+          <a:prstGeom prst="rect">
+            <a:avLst/>
+          </a:prstGeom>
+          <a:noFill/>
+          <a:ln/>
+        </p:spPr>
+        <p:txBody>
+          <a:bodyPr wrap="square" lIns="0" tIns="0" rIns="0" bIns="0" rtlCol="0" anchor="ctr"/>
+          <a:lstStyle/>
+          <a:p>
+            <a:pPr algn="ctr" indent="0" marL="0">
+              <a:buNone/>
+            </a:pPr>
+            <a:r>
+              <a:rPr lang="en-US" sz="1600" b="1" dirty="0">
+                <a:solidFill>
+                  <a:srgbClr val="0D9488"/>
+                </a:solidFill>
+                <a:latin typeface="Trebuchet MS" pitchFamily="34" charset="0"/>
+                <a:ea typeface="Trebuchet MS" pitchFamily="34" charset="-122"/>
+                <a:cs typeface="Trebuchet MS" pitchFamily="34" charset="-120"/>
+              </a:rPr>
+              <a:t>·</a:t>
+            </a:r>
+            <a:endParaRPr lang="en-US" sz="1600" dirty="0"/>
+          </a:p>
+        </p:txBody>
+      </p:sp>
+      <p:sp>
+        <p:nvSpPr>
+          <p:cNvPr id="34" name="Shape 32"/>
+          <p:cNvSpPr/>
+          <p:nvPr/>
+        </p:nvSpPr>
+        <p:spPr>
+          <a:xfrm>
+            <a:off x="6428232" y="3364992"/>
+            <a:ext cx="1645920" cy="475488"/>
+          </a:xfrm>
+          <a:prstGeom prst="rect">
+            <a:avLst>
+              <a:gd name="adj" fmla="val 9615"/>
+            </a:avLst>
+          </a:prstGeom>
+          <a:solidFill>
+            <a:srgbClr val="FFFFFF"/>
+          </a:solidFill>
+          <a:ln w="12700">
+            <a:solidFill>
+              <a:srgbClr val="0D9488"/>
+            </a:solidFill>
+            <a:prstDash val="solid"/>
+          </a:ln>
+        </p:spPr>
+      </p:sp>
+      <p:sp>
+        <p:nvSpPr>
+          <p:cNvPr id="35" name="Text 33"/>
+          <p:cNvSpPr/>
+          <p:nvPr/>
+        </p:nvSpPr>
+        <p:spPr>
+          <a:xfrm>
+            <a:off x="6428232" y="3364992"/>
+            <a:ext cx="1645920" cy="475488"/>
+          </a:xfrm>
+          <a:prstGeom prst="rect">
+            <a:avLst/>
+          </a:prstGeom>
+          <a:noFill/>
+          <a:ln/>
+        </p:spPr>
+        <p:txBody>
+          <a:bodyPr wrap="square" lIns="0" tIns="0" rIns="0" bIns="0" rtlCol="0" anchor="ctr"/>
+          <a:lstStyle/>
+          <a:p>
+            <a:pPr algn="ctr" indent="0" marL="0">
+              <a:buNone/>
+            </a:pPr>
+            <a:r>
+              <a:rPr lang="en-US" sz="1400" b="1" dirty="0">
+                <a:solidFill>
+                  <a:srgbClr val="0D9488"/>
+                </a:solidFill>
+                <a:latin typeface="Trebuchet MS" pitchFamily="34" charset="0"/>
+                <a:ea typeface="Trebuchet MS" pitchFamily="34" charset="-122"/>
+                <a:cs typeface="Trebuchet MS" pitchFamily="34" charset="-120"/>
+              </a:rPr>
+              <a:t>hood</a:t>
+            </a:r>
+            <a:endParaRPr lang="en-US" sz="1400" dirty="0"/>
+          </a:p>
+        </p:txBody>
+      </p:sp>
+      <p:sp>
+        <p:nvSpPr>
+          <p:cNvPr id="36" name="Shape 34"/>
           <p:cNvSpPr/>
           <p:nvPr/>
         </p:nvSpPr>
@@ -9256,7 +9585,7 @@
       </p:sp>
       <p:sp>
         <p:nvSpPr>
-          <p:cNvPr id="31" name="Text 29"/>
+          <p:cNvPr id="37" name="Text 35"/>
           <p:cNvSpPr/>
           <p:nvPr/>
         </p:nvSpPr>
@@ -9295,7 +9624,7 @@
       </p:sp>
       <p:sp>
         <p:nvSpPr>
-          <p:cNvPr id="32" name="Shape 30"/>
+          <p:cNvPr id="38" name="Shape 36"/>
           <p:cNvSpPr/>
           <p:nvPr/>
         </p:nvSpPr>
@@ -9322,7 +9651,7 @@
       </p:sp>
       <p:sp>
         <p:nvSpPr>
-          <p:cNvPr id="33" name="Text 31"/>
+          <p:cNvPr id="39" name="Text 37"/>
           <p:cNvSpPr/>
           <p:nvPr/>
         </p:nvSpPr>
@@ -9645,7 +9974,7 @@
                 <a:ea typeface="Calibri" pitchFamily="34" charset="-122"/>
                 <a:cs typeface="Calibri" pitchFamily="34" charset="-120"/>
               </a:rPr>
-              <a:t>Word Labs  •  wordlabs.app  •  Root: 'like' = similar to, resembling</a:t>
+              <a:t>Word Labs  •  wordlabs.app  •  Root: 'like' = to enjoy; to prefer</a:t>
             </a:r>
             <a:endParaRPr lang="en-US" sz="800" dirty="0"/>
           </a:p>
@@ -9784,7 +10113,7 @@
                 <a:ea typeface="Trebuchet MS" pitchFamily="34" charset="-122"/>
                 <a:cs typeface="Trebuchet MS" pitchFamily="34" charset="-120"/>
               </a:rPr>
-              <a:t>lifelike</a:t>
+              <a:t>likelihood</a:t>
             </a:r>
             <a:endParaRPr lang="en-US" sz="2800" dirty="0"/>
           </a:p>
@@ -9864,7 +10193,7 @@
         </p:nvSpPr>
         <p:spPr>
           <a:xfrm>
-            <a:off x="2938272" y="2258568"/>
+            <a:off x="2221992" y="2258568"/>
             <a:ext cx="1828800" cy="292608"/>
           </a:xfrm>
           <a:prstGeom prst="rect">
@@ -9873,11 +10202,11 @@
             </a:avLst>
           </a:prstGeom>
           <a:solidFill>
-            <a:srgbClr val="DDD6FE"/>
+            <a:srgbClr val="CCFBF1"/>
           </a:solidFill>
           <a:ln w="19050">
             <a:solidFill>
-              <a:srgbClr val="7C3AED"/>
+              <a:srgbClr val="0D9488"/>
             </a:solidFill>
             <a:prstDash val="solid"/>
           </a:ln>
@@ -9898,7 +10227,7 @@
         </p:nvSpPr>
         <p:spPr>
           <a:xfrm>
-            <a:off x="2938272" y="2258568"/>
+            <a:off x="2221992" y="2258568"/>
             <a:ext cx="1828800" cy="292608"/>
           </a:xfrm>
           <a:prstGeom prst="rect">
@@ -9917,13 +10246,13 @@
             <a:r>
               <a:rPr lang="en-US" sz="1300" b="1" dirty="0">
                 <a:solidFill>
-                  <a:srgbClr val="4C1D95"/>
+                  <a:srgbClr val="0F766E"/>
                 </a:solidFill>
                 <a:latin typeface="Trebuchet MS" pitchFamily="34" charset="0"/>
                 <a:ea typeface="Trebuchet MS" pitchFamily="34" charset="-122"/>
                 <a:cs typeface="Trebuchet MS" pitchFamily="34" charset="-120"/>
               </a:rPr>
-              <a:t>life</a:t>
+              <a:t>like</a:t>
             </a:r>
             <a:endParaRPr lang="en-US" sz="1300" dirty="0"/>
           </a:p>
@@ -9937,7 +10266,7 @@
         </p:nvSpPr>
         <p:spPr>
           <a:xfrm>
-            <a:off x="2938272" y="2569464"/>
+            <a:off x="2221992" y="2569464"/>
             <a:ext cx="1828800" cy="201168"/>
           </a:xfrm>
           <a:prstGeom prst="rect">
@@ -9962,7 +10291,7 @@
                 <a:ea typeface="Calibri" pitchFamily="34" charset="-122"/>
                 <a:cs typeface="Calibri" pitchFamily="34" charset="-120"/>
               </a:rPr>
-              <a:t>living existence</a:t>
+              <a:t>to enjoy; to prefer</a:t>
             </a:r>
             <a:endParaRPr lang="en-US" sz="850" dirty="0"/>
           </a:p>
@@ -9976,7 +10305,7 @@
         </p:nvSpPr>
         <p:spPr>
           <a:xfrm>
-            <a:off x="5803392" y="2258568"/>
+            <a:off x="4370832" y="2258568"/>
             <a:ext cx="1828800" cy="292608"/>
           </a:xfrm>
           <a:prstGeom prst="rect">
@@ -9985,11 +10314,11 @@
             </a:avLst>
           </a:prstGeom>
           <a:solidFill>
-            <a:srgbClr val="CCFBF1"/>
+            <a:srgbClr val="FCE7F3"/>
           </a:solidFill>
           <a:ln w="19050">
             <a:solidFill>
-              <a:srgbClr val="0D9488"/>
+              <a:srgbClr val="DB2777"/>
             </a:solidFill>
             <a:prstDash val="solid"/>
           </a:ln>
@@ -10010,7 +10339,7 @@
         </p:nvSpPr>
         <p:spPr>
           <a:xfrm>
-            <a:off x="5803392" y="2258568"/>
+            <a:off x="4370832" y="2258568"/>
             <a:ext cx="1828800" cy="292608"/>
           </a:xfrm>
           <a:prstGeom prst="rect">
@@ -10029,13 +10358,13 @@
             <a:r>
               <a:rPr lang="en-US" sz="1300" b="1" dirty="0">
                 <a:solidFill>
-                  <a:srgbClr val="0F766E"/>
+                  <a:srgbClr val="9D174D"/>
                 </a:solidFill>
                 <a:latin typeface="Trebuchet MS" pitchFamily="34" charset="0"/>
                 <a:ea typeface="Trebuchet MS" pitchFamily="34" charset="-122"/>
                 <a:cs typeface="Trebuchet MS" pitchFamily="34" charset="-120"/>
               </a:rPr>
-              <a:t>like</a:t>
+              <a:t>ly</a:t>
             </a:r>
             <a:endParaRPr lang="en-US" sz="1300" dirty="0"/>
           </a:p>
@@ -10049,7 +10378,7 @@
         </p:nvSpPr>
         <p:spPr>
           <a:xfrm>
-            <a:off x="5803392" y="2569464"/>
+            <a:off x="4370832" y="2569464"/>
             <a:ext cx="1828800" cy="201168"/>
           </a:xfrm>
           <a:prstGeom prst="rect">
@@ -10074,7 +10403,7 @@
                 <a:ea typeface="Calibri" pitchFamily="34" charset="-122"/>
                 <a:cs typeface="Calibri" pitchFamily="34" charset="-120"/>
               </a:rPr>
-              <a:t>resembling, similar to</a:t>
+              <a:t>in a way</a:t>
             </a:r>
             <a:endParaRPr lang="en-US" sz="850" dirty="0"/>
           </a:p>
@@ -10083,6 +10412,118 @@
       <p:sp>
         <p:nvSpPr>
           <p:cNvPr id="22" name="Shape 20"/>
+          <p:cNvSpPr/>
+          <p:nvPr/>
+        </p:nvSpPr>
+        <p:spPr>
+          <a:xfrm>
+            <a:off x="6519672" y="2258568"/>
+            <a:ext cx="1828800" cy="292608"/>
+          </a:xfrm>
+          <a:prstGeom prst="rect">
+            <a:avLst>
+              <a:gd name="adj" fmla="val 25000"/>
+            </a:avLst>
+          </a:prstGeom>
+          <a:solidFill>
+            <a:srgbClr val="FCE7F3"/>
+          </a:solidFill>
+          <a:ln w="19050">
+            <a:solidFill>
+              <a:srgbClr val="DB2777"/>
+            </a:solidFill>
+            <a:prstDash val="solid"/>
+          </a:ln>
+          <a:effectLst>
+            <a:outerShdw sx="100000" sy="100000" kx="0" ky="0" algn="bl" rotWithShape="0" blurRad="101600" dist="38100" dir="8100000">
+              <a:srgbClr val="000000">
+                <a:alpha val="12000"/>
+              </a:srgbClr>
+            </a:outerShdw>
+          </a:effectLst>
+        </p:spPr>
+      </p:sp>
+      <p:sp>
+        <p:nvSpPr>
+          <p:cNvPr id="23" name="Text 21"/>
+          <p:cNvSpPr/>
+          <p:nvPr/>
+        </p:nvSpPr>
+        <p:spPr>
+          <a:xfrm>
+            <a:off x="6519672" y="2258568"/>
+            <a:ext cx="1828800" cy="292608"/>
+          </a:xfrm>
+          <a:prstGeom prst="rect">
+            <a:avLst/>
+          </a:prstGeom>
+          <a:noFill/>
+          <a:ln/>
+        </p:spPr>
+        <p:txBody>
+          <a:bodyPr wrap="square" lIns="0" tIns="0" rIns="0" bIns="0" rtlCol="0" anchor="ctr"/>
+          <a:lstStyle/>
+          <a:p>
+            <a:pPr algn="ctr" indent="0" marL="0">
+              <a:buNone/>
+            </a:pPr>
+            <a:r>
+              <a:rPr lang="en-US" sz="1300" b="1" dirty="0">
+                <a:solidFill>
+                  <a:srgbClr val="9D174D"/>
+                </a:solidFill>
+                <a:latin typeface="Trebuchet MS" pitchFamily="34" charset="0"/>
+                <a:ea typeface="Trebuchet MS" pitchFamily="34" charset="-122"/>
+                <a:cs typeface="Trebuchet MS" pitchFamily="34" charset="-120"/>
+              </a:rPr>
+              <a:t>hood</a:t>
+            </a:r>
+            <a:endParaRPr lang="en-US" sz="1300" dirty="0"/>
+          </a:p>
+        </p:txBody>
+      </p:sp>
+      <p:sp>
+        <p:nvSpPr>
+          <p:cNvPr id="24" name="Text 22"/>
+          <p:cNvSpPr/>
+          <p:nvPr/>
+        </p:nvSpPr>
+        <p:spPr>
+          <a:xfrm>
+            <a:off x="6519672" y="2569464"/>
+            <a:ext cx="1828800" cy="201168"/>
+          </a:xfrm>
+          <a:prstGeom prst="rect">
+            <a:avLst/>
+          </a:prstGeom>
+          <a:noFill/>
+          <a:ln/>
+        </p:spPr>
+        <p:txBody>
+          <a:bodyPr wrap="square" lIns="0" tIns="0" rIns="0" bIns="0" rtlCol="0" anchor="t"/>
+          <a:lstStyle/>
+          <a:p>
+            <a:pPr algn="ctr" indent="0" marL="0">
+              <a:buNone/>
+            </a:pPr>
+            <a:r>
+              <a:rPr lang="en-US" sz="850" dirty="0">
+                <a:solidFill>
+                  <a:srgbClr val="475569"/>
+                </a:solidFill>
+                <a:latin typeface="Calibri" pitchFamily="34" charset="0"/>
+                <a:ea typeface="Calibri" pitchFamily="34" charset="-122"/>
+                <a:cs typeface="Calibri" pitchFamily="34" charset="-120"/>
+              </a:rPr>
+              <a:t>state of</a:t>
+            </a:r>
+            <a:endParaRPr lang="en-US" sz="850" dirty="0"/>
+          </a:p>
+        </p:txBody>
+      </p:sp>
+      <p:sp>
+        <p:nvSpPr>
+          <p:cNvPr id="25" name="Shape 23"/>
           <p:cNvSpPr/>
           <p:nvPr/>
         </p:nvSpPr>
@@ -10109,7 +10550,7 @@
       </p:sp>
       <p:sp>
         <p:nvSpPr>
-          <p:cNvPr id="23" name="Text 21"/>
+          <p:cNvPr id="26" name="Text 24"/>
           <p:cNvSpPr/>
           <p:nvPr/>
         </p:nvSpPr>
@@ -10148,7 +10589,7 @@
       </p:sp>
       <p:sp>
         <p:nvSpPr>
-          <p:cNvPr id="24" name="Shape 22"/>
+          <p:cNvPr id="27" name="Shape 25"/>
           <p:cNvSpPr/>
           <p:nvPr/>
         </p:nvSpPr>
@@ -10175,13 +10616,13 @@
       </p:sp>
       <p:sp>
         <p:nvSpPr>
-          <p:cNvPr id="25" name="Shape 23"/>
-          <p:cNvSpPr/>
-          <p:nvPr/>
-        </p:nvSpPr>
-        <p:spPr>
-          <a:xfrm>
-            <a:off x="2999232" y="3364992"/>
+          <p:cNvPr id="28" name="Shape 26"/>
+          <p:cNvSpPr/>
+          <p:nvPr/>
+        </p:nvSpPr>
+        <p:spPr>
+          <a:xfrm>
+            <a:off x="2313432" y="3364992"/>
             <a:ext cx="1645920" cy="475488"/>
           </a:xfrm>
           <a:prstGeom prst="rect">
@@ -10202,13 +10643,13 @@
       </p:sp>
       <p:sp>
         <p:nvSpPr>
-          <p:cNvPr id="26" name="Text 24"/>
-          <p:cNvSpPr/>
-          <p:nvPr/>
-        </p:nvSpPr>
-        <p:spPr>
-          <a:xfrm>
-            <a:off x="2999232" y="3364992"/>
+          <p:cNvPr id="29" name="Text 27"/>
+          <p:cNvSpPr/>
+          <p:nvPr/>
+        </p:nvSpPr>
+        <p:spPr>
+          <a:xfrm>
+            <a:off x="2313432" y="3364992"/>
             <a:ext cx="1645920" cy="475488"/>
           </a:xfrm>
           <a:prstGeom prst="rect">
@@ -10233,7 +10674,7 @@
                 <a:ea typeface="Trebuchet MS" pitchFamily="34" charset="-122"/>
                 <a:cs typeface="Trebuchet MS" pitchFamily="34" charset="-120"/>
               </a:rPr>
-              <a:t>life</a:t>
+              <a:t>like</a:t>
             </a:r>
             <a:endParaRPr lang="en-US" sz="1400" dirty="0"/>
           </a:p>
@@ -10241,14 +10682,14 @@
       </p:sp>
       <p:sp>
         <p:nvSpPr>
-          <p:cNvPr id="27" name="Text 25"/>
-          <p:cNvSpPr/>
-          <p:nvPr/>
-        </p:nvSpPr>
-        <p:spPr>
-          <a:xfrm>
-            <a:off x="4645152" y="3364992"/>
-            <a:ext cx="1097280" cy="475488"/>
+          <p:cNvPr id="30" name="Text 28"/>
+          <p:cNvSpPr/>
+          <p:nvPr/>
+        </p:nvSpPr>
+        <p:spPr>
+          <a:xfrm>
+            <a:off x="3959352" y="3364992"/>
+            <a:ext cx="411480" cy="475488"/>
           </a:xfrm>
           <a:prstGeom prst="rect">
             <a:avLst/>
@@ -10280,13 +10721,13 @@
       </p:sp>
       <p:sp>
         <p:nvSpPr>
-          <p:cNvPr id="28" name="Shape 26"/>
-          <p:cNvSpPr/>
-          <p:nvPr/>
-        </p:nvSpPr>
-        <p:spPr>
-          <a:xfrm>
-            <a:off x="5742432" y="3364992"/>
+          <p:cNvPr id="31" name="Shape 29"/>
+          <p:cNvSpPr/>
+          <p:nvPr/>
+        </p:nvSpPr>
+        <p:spPr>
+          <a:xfrm>
+            <a:off x="4370832" y="3364992"/>
             <a:ext cx="1645920" cy="475488"/>
           </a:xfrm>
           <a:prstGeom prst="rect">
@@ -10307,13 +10748,13 @@
       </p:sp>
       <p:sp>
         <p:nvSpPr>
-          <p:cNvPr id="29" name="Text 27"/>
-          <p:cNvSpPr/>
-          <p:nvPr/>
-        </p:nvSpPr>
-        <p:spPr>
-          <a:xfrm>
-            <a:off x="5742432" y="3364992"/>
+          <p:cNvPr id="32" name="Text 30"/>
+          <p:cNvSpPr/>
+          <p:nvPr/>
+        </p:nvSpPr>
+        <p:spPr>
+          <a:xfrm>
+            <a:off x="4370832" y="3364992"/>
             <a:ext cx="1645920" cy="475488"/>
           </a:xfrm>
           <a:prstGeom prst="rect">
@@ -10338,7 +10779,7 @@
                 <a:ea typeface="Trebuchet MS" pitchFamily="34" charset="-122"/>
                 <a:cs typeface="Trebuchet MS" pitchFamily="34" charset="-120"/>
               </a:rPr>
-              <a:t>like</a:t>
+              <a:t>li</a:t>
             </a:r>
             <a:endParaRPr lang="en-US" sz="1400" dirty="0"/>
           </a:p>
@@ -10346,7 +10787,112 @@
       </p:sp>
       <p:sp>
         <p:nvSpPr>
-          <p:cNvPr id="30" name="Shape 28"/>
+          <p:cNvPr id="33" name="Text 31"/>
+          <p:cNvSpPr/>
+          <p:nvPr/>
+        </p:nvSpPr>
+        <p:spPr>
+          <a:xfrm>
+            <a:off x="6016752" y="3364992"/>
+            <a:ext cx="411480" cy="475488"/>
+          </a:xfrm>
+          <a:prstGeom prst="rect">
+            <a:avLst/>
+          </a:prstGeom>
+          <a:noFill/>
+          <a:ln/>
+        </p:spPr>
+        <p:txBody>
+          <a:bodyPr wrap="square" lIns="0" tIns="0" rIns="0" bIns="0" rtlCol="0" anchor="ctr"/>
+          <a:lstStyle/>
+          <a:p>
+            <a:pPr algn="ctr" indent="0" marL="0">
+              <a:buNone/>
+            </a:pPr>
+            <a:r>
+              <a:rPr lang="en-US" sz="1600" b="1" dirty="0">
+                <a:solidFill>
+                  <a:srgbClr val="0D9488"/>
+                </a:solidFill>
+                <a:latin typeface="Trebuchet MS" pitchFamily="34" charset="0"/>
+                <a:ea typeface="Trebuchet MS" pitchFamily="34" charset="-122"/>
+                <a:cs typeface="Trebuchet MS" pitchFamily="34" charset="-120"/>
+              </a:rPr>
+              <a:t>·</a:t>
+            </a:r>
+            <a:endParaRPr lang="en-US" sz="1600" dirty="0"/>
+          </a:p>
+        </p:txBody>
+      </p:sp>
+      <p:sp>
+        <p:nvSpPr>
+          <p:cNvPr id="34" name="Shape 32"/>
+          <p:cNvSpPr/>
+          <p:nvPr/>
+        </p:nvSpPr>
+        <p:spPr>
+          <a:xfrm>
+            <a:off x="6428232" y="3364992"/>
+            <a:ext cx="1645920" cy="475488"/>
+          </a:xfrm>
+          <a:prstGeom prst="rect">
+            <a:avLst>
+              <a:gd name="adj" fmla="val 9615"/>
+            </a:avLst>
+          </a:prstGeom>
+          <a:solidFill>
+            <a:srgbClr val="FFFFFF"/>
+          </a:solidFill>
+          <a:ln w="12700">
+            <a:solidFill>
+              <a:srgbClr val="0D9488"/>
+            </a:solidFill>
+            <a:prstDash val="solid"/>
+          </a:ln>
+        </p:spPr>
+      </p:sp>
+      <p:sp>
+        <p:nvSpPr>
+          <p:cNvPr id="35" name="Text 33"/>
+          <p:cNvSpPr/>
+          <p:nvPr/>
+        </p:nvSpPr>
+        <p:spPr>
+          <a:xfrm>
+            <a:off x="6428232" y="3364992"/>
+            <a:ext cx="1645920" cy="475488"/>
+          </a:xfrm>
+          <a:prstGeom prst="rect">
+            <a:avLst/>
+          </a:prstGeom>
+          <a:noFill/>
+          <a:ln/>
+        </p:spPr>
+        <p:txBody>
+          <a:bodyPr wrap="square" lIns="0" tIns="0" rIns="0" bIns="0" rtlCol="0" anchor="ctr"/>
+          <a:lstStyle/>
+          <a:p>
+            <a:pPr algn="ctr" indent="0" marL="0">
+              <a:buNone/>
+            </a:pPr>
+            <a:r>
+              <a:rPr lang="en-US" sz="1400" b="1" dirty="0">
+                <a:solidFill>
+                  <a:srgbClr val="0D9488"/>
+                </a:solidFill>
+                <a:latin typeface="Trebuchet MS" pitchFamily="34" charset="0"/>
+                <a:ea typeface="Trebuchet MS" pitchFamily="34" charset="-122"/>
+                <a:cs typeface="Trebuchet MS" pitchFamily="34" charset="-120"/>
+              </a:rPr>
+              <a:t>hood</a:t>
+            </a:r>
+            <a:endParaRPr lang="en-US" sz="1400" dirty="0"/>
+          </a:p>
+        </p:txBody>
+      </p:sp>
+      <p:sp>
+        <p:nvSpPr>
+          <p:cNvPr id="36" name="Shape 34"/>
           <p:cNvSpPr/>
           <p:nvPr/>
         </p:nvSpPr>
@@ -10373,7 +10919,7 @@
       </p:sp>
       <p:sp>
         <p:nvSpPr>
-          <p:cNvPr id="31" name="Text 29"/>
+          <p:cNvPr id="37" name="Text 35"/>
           <p:cNvSpPr/>
           <p:nvPr/>
         </p:nvSpPr>
@@ -10412,7 +10958,7 @@
       </p:sp>
       <p:sp>
         <p:nvSpPr>
-          <p:cNvPr id="32" name="Shape 30"/>
+          <p:cNvPr id="38" name="Shape 36"/>
           <p:cNvSpPr/>
           <p:nvPr/>
         </p:nvSpPr>
@@ -10439,7 +10985,7 @@
       </p:sp>
       <p:sp>
         <p:nvSpPr>
-          <p:cNvPr id="33" name="Shape 31"/>
+          <p:cNvPr id="39" name="Shape 37"/>
           <p:cNvSpPr/>
           <p:nvPr/>
         </p:nvSpPr>
@@ -10466,7 +11012,7 @@
       </p:sp>
       <p:sp>
         <p:nvSpPr>
-          <p:cNvPr id="34" name="Text 32"/>
+          <p:cNvPr id="40" name="Text 38"/>
           <p:cNvSpPr/>
           <p:nvPr/>
         </p:nvSpPr>
@@ -10505,7 +11051,7 @@
       </p:sp>
       <p:sp>
         <p:nvSpPr>
-          <p:cNvPr id="35" name="Shape 33"/>
+          <p:cNvPr id="41" name="Shape 39"/>
           <p:cNvSpPr/>
           <p:nvPr/>
         </p:nvSpPr>
@@ -10532,7 +11078,7 @@
       </p:sp>
       <p:sp>
         <p:nvSpPr>
-          <p:cNvPr id="36" name="Text 34"/>
+          <p:cNvPr id="42" name="Text 40"/>
           <p:cNvSpPr/>
           <p:nvPr/>
         </p:nvSpPr>
@@ -10563,7 +11109,7 @@
                 <a:ea typeface="Trebuchet MS" pitchFamily="34" charset="-122"/>
                 <a:cs typeface="Trebuchet MS" pitchFamily="34" charset="-120"/>
               </a:rPr>
-              <a:t>i</a:t>
+              <a:t>i_e</a:t>
             </a:r>
             <a:endParaRPr lang="en-US" sz="900" dirty="0"/>
           </a:p>
@@ -10571,7 +11117,7 @@
       </p:sp>
       <p:sp>
         <p:nvSpPr>
-          <p:cNvPr id="37" name="Shape 35"/>
+          <p:cNvPr id="43" name="Shape 41"/>
           <p:cNvSpPr/>
           <p:nvPr/>
         </p:nvSpPr>
@@ -10598,7 +11144,7 @@
       </p:sp>
       <p:sp>
         <p:nvSpPr>
-          <p:cNvPr id="38" name="Text 36"/>
+          <p:cNvPr id="44" name="Text 42"/>
           <p:cNvSpPr/>
           <p:nvPr/>
         </p:nvSpPr>
@@ -10629,7 +11175,7 @@
                 <a:ea typeface="Trebuchet MS" pitchFamily="34" charset="-122"/>
                 <a:cs typeface="Trebuchet MS" pitchFamily="34" charset="-120"/>
               </a:rPr>
-              <a:t>f</a:t>
+              <a:t>k</a:t>
             </a:r>
             <a:endParaRPr lang="en-US" sz="900" dirty="0"/>
           </a:p>
@@ -10637,7 +11183,7 @@
       </p:sp>
       <p:sp>
         <p:nvSpPr>
-          <p:cNvPr id="39" name="Shape 37"/>
+          <p:cNvPr id="45" name="Shape 43"/>
           <p:cNvSpPr/>
           <p:nvPr/>
         </p:nvSpPr>
@@ -10664,7 +11210,7 @@
       </p:sp>
       <p:sp>
         <p:nvSpPr>
-          <p:cNvPr id="40" name="Text 38"/>
+          <p:cNvPr id="46" name="Text 44"/>
           <p:cNvSpPr/>
           <p:nvPr/>
         </p:nvSpPr>
@@ -10695,7 +11241,7 @@
                 <a:ea typeface="Trebuchet MS" pitchFamily="34" charset="-122"/>
                 <a:cs typeface="Trebuchet MS" pitchFamily="34" charset="-120"/>
               </a:rPr>
-              <a:t>e</a:t>
+              <a:t>l</a:t>
             </a:r>
             <a:endParaRPr lang="en-US" sz="900" dirty="0"/>
           </a:p>
@@ -10703,7 +11249,7 @@
       </p:sp>
       <p:sp>
         <p:nvSpPr>
-          <p:cNvPr id="41" name="Shape 39"/>
+          <p:cNvPr id="47" name="Shape 45"/>
           <p:cNvSpPr/>
           <p:nvPr/>
         </p:nvSpPr>
@@ -10730,7 +11276,7 @@
       </p:sp>
       <p:sp>
         <p:nvSpPr>
-          <p:cNvPr id="42" name="Text 40"/>
+          <p:cNvPr id="48" name="Text 46"/>
           <p:cNvSpPr/>
           <p:nvPr/>
         </p:nvSpPr>
@@ -10761,7 +11307,7 @@
                 <a:ea typeface="Trebuchet MS" pitchFamily="34" charset="-122"/>
                 <a:cs typeface="Trebuchet MS" pitchFamily="34" charset="-120"/>
               </a:rPr>
-              <a:t>l</a:t>
+              <a:t>i</a:t>
             </a:r>
             <a:endParaRPr lang="en-US" sz="900" dirty="0"/>
           </a:p>
@@ -10769,7 +11315,7 @@
       </p:sp>
       <p:sp>
         <p:nvSpPr>
-          <p:cNvPr id="43" name="Shape 41"/>
+          <p:cNvPr id="49" name="Shape 47"/>
           <p:cNvSpPr/>
           <p:nvPr/>
         </p:nvSpPr>
@@ -10796,7 +11342,7 @@
       </p:sp>
       <p:sp>
         <p:nvSpPr>
-          <p:cNvPr id="44" name="Text 42"/>
+          <p:cNvPr id="50" name="Text 48"/>
           <p:cNvSpPr/>
           <p:nvPr/>
         </p:nvSpPr>
@@ -10827,7 +11373,7 @@
                 <a:ea typeface="Trebuchet MS" pitchFamily="34" charset="-122"/>
                 <a:cs typeface="Trebuchet MS" pitchFamily="34" charset="-120"/>
               </a:rPr>
-              <a:t>i</a:t>
+              <a:t>h</a:t>
             </a:r>
             <a:endParaRPr lang="en-US" sz="900" dirty="0"/>
           </a:p>
@@ -10835,7 +11381,7 @@
       </p:sp>
       <p:sp>
         <p:nvSpPr>
-          <p:cNvPr id="45" name="Shape 43"/>
+          <p:cNvPr id="51" name="Shape 49"/>
           <p:cNvSpPr/>
           <p:nvPr/>
         </p:nvSpPr>
@@ -10862,7 +11408,7 @@
       </p:sp>
       <p:sp>
         <p:nvSpPr>
-          <p:cNvPr id="46" name="Text 44"/>
+          <p:cNvPr id="52" name="Text 50"/>
           <p:cNvSpPr/>
           <p:nvPr/>
         </p:nvSpPr>
@@ -10893,7 +11439,7 @@
                 <a:ea typeface="Trebuchet MS" pitchFamily="34" charset="-122"/>
                 <a:cs typeface="Trebuchet MS" pitchFamily="34" charset="-120"/>
               </a:rPr>
-              <a:t>k</a:t>
+              <a:t>oo</a:t>
             </a:r>
             <a:endParaRPr lang="en-US" sz="900" dirty="0"/>
           </a:p>
@@ -10901,7 +11447,7 @@
       </p:sp>
       <p:sp>
         <p:nvSpPr>
-          <p:cNvPr id="47" name="Shape 45"/>
+          <p:cNvPr id="53" name="Shape 51"/>
           <p:cNvSpPr/>
           <p:nvPr/>
         </p:nvSpPr>
@@ -10928,7 +11474,7 @@
       </p:sp>
       <p:sp>
         <p:nvSpPr>
-          <p:cNvPr id="48" name="Text 46"/>
+          <p:cNvPr id="54" name="Text 52"/>
           <p:cNvSpPr/>
           <p:nvPr/>
         </p:nvSpPr>
@@ -10959,7 +11505,7 @@
                 <a:ea typeface="Trebuchet MS" pitchFamily="34" charset="-122"/>
                 <a:cs typeface="Trebuchet MS" pitchFamily="34" charset="-120"/>
               </a:rPr>
-              <a:t>e</a:t>
+              <a:t>d</a:t>
             </a:r>
             <a:endParaRPr lang="en-US" sz="900" dirty="0"/>
           </a:p>
@@ -11251,7 +11797,7 @@
                 <a:ea typeface="Calibri" pitchFamily="34" charset="-122"/>
                 <a:cs typeface="Calibri" pitchFamily="34" charset="-120"/>
               </a:rPr>
-              <a:t>Word Labs  •  wordlabs.app  •  Root: 'like' = similar to, resembling</a:t>
+              <a:t>Word Labs  •  wordlabs.app  •  Root: 'like' = to enjoy; to prefer</a:t>
             </a:r>
             <a:endParaRPr lang="en-US" sz="800" dirty="0"/>
           </a:p>
@@ -11390,7 +11936,7 @@
                 <a:ea typeface="Trebuchet MS" pitchFamily="34" charset="-122"/>
                 <a:cs typeface="Trebuchet MS" pitchFamily="34" charset="-120"/>
               </a:rPr>
-              <a:t>godlike</a:t>
+              <a:t>likable</a:t>
             </a:r>
             <a:endParaRPr lang="en-US" sz="2800" dirty="0"/>
           </a:p>
@@ -12078,7 +12624,7 @@
                 <a:ea typeface="Calibri" pitchFamily="34" charset="-122"/>
                 <a:cs typeface="Calibri" pitchFamily="34" charset="-120"/>
               </a:rPr>
-              <a:t>Word Labs  •  wordlabs.app  •  Root: 'like' = similar to, resembling</a:t>
+              <a:t>Word Labs  •  wordlabs.app  •  Root: 'like' = to enjoy; to prefer</a:t>
             </a:r>
             <a:endParaRPr lang="en-US" sz="800" dirty="0"/>
           </a:p>
@@ -12217,7 +12763,7 @@
                 <a:ea typeface="Trebuchet MS" pitchFamily="34" charset="-122"/>
                 <a:cs typeface="Trebuchet MS" pitchFamily="34" charset="-120"/>
               </a:rPr>
-              <a:t>godlike</a:t>
+              <a:t>likable</a:t>
             </a:r>
             <a:endParaRPr lang="en-US" sz="2800" dirty="0"/>
           </a:p>
@@ -12306,11 +12852,11 @@
             </a:avLst>
           </a:prstGeom>
           <a:solidFill>
-            <a:srgbClr val="DDD6FE"/>
+            <a:srgbClr val="CCFBF1"/>
           </a:solidFill>
           <a:ln w="19050">
             <a:solidFill>
-              <a:srgbClr val="7C3AED"/>
+              <a:srgbClr val="0D9488"/>
             </a:solidFill>
             <a:prstDash val="solid"/>
           </a:ln>
@@ -12350,13 +12896,13 @@
             <a:r>
               <a:rPr lang="en-US" sz="1300" b="1" dirty="0">
                 <a:solidFill>
-                  <a:srgbClr val="4C1D95"/>
+                  <a:srgbClr val="0F766E"/>
                 </a:solidFill>
                 <a:latin typeface="Trebuchet MS" pitchFamily="34" charset="0"/>
                 <a:ea typeface="Trebuchet MS" pitchFamily="34" charset="-122"/>
                 <a:cs typeface="Trebuchet MS" pitchFamily="34" charset="-120"/>
               </a:rPr>
-              <a:t>god</a:t>
+              <a:t>like</a:t>
             </a:r>
             <a:endParaRPr lang="en-US" sz="1300" dirty="0"/>
           </a:p>
@@ -12395,7 +12941,7 @@
                 <a:ea typeface="Calibri" pitchFamily="34" charset="-122"/>
                 <a:cs typeface="Calibri" pitchFamily="34" charset="-120"/>
               </a:rPr>
-              <a:t>a divine being</a:t>
+              <a:t>to enjoy; to prefer</a:t>
             </a:r>
             <a:endParaRPr lang="en-US" sz="850" dirty="0"/>
           </a:p>
@@ -12418,11 +12964,11 @@
             </a:avLst>
           </a:prstGeom>
           <a:solidFill>
-            <a:srgbClr val="CCFBF1"/>
+            <a:srgbClr val="FCE7F3"/>
           </a:solidFill>
           <a:ln w="19050">
             <a:solidFill>
-              <a:srgbClr val="0D9488"/>
+              <a:srgbClr val="DB2777"/>
             </a:solidFill>
             <a:prstDash val="solid"/>
           </a:ln>
@@ -12462,13 +13008,13 @@
             <a:r>
               <a:rPr lang="en-US" sz="1300" b="1" dirty="0">
                 <a:solidFill>
-                  <a:srgbClr val="0F766E"/>
+                  <a:srgbClr val="9D174D"/>
                 </a:solidFill>
                 <a:latin typeface="Trebuchet MS" pitchFamily="34" charset="0"/>
                 <a:ea typeface="Trebuchet MS" pitchFamily="34" charset="-122"/>
                 <a:cs typeface="Trebuchet MS" pitchFamily="34" charset="-120"/>
               </a:rPr>
-              <a:t>like</a:t>
+              <a:t>able</a:t>
             </a:r>
             <a:endParaRPr lang="en-US" sz="1300" dirty="0"/>
           </a:p>
@@ -12507,7 +13053,7 @@
                 <a:ea typeface="Calibri" pitchFamily="34" charset="-122"/>
                 <a:cs typeface="Calibri" pitchFamily="34" charset="-120"/>
               </a:rPr>
-              <a:t>resembling, similar to</a:t>
+              <a:t>able to</a:t>
             </a:r>
             <a:endParaRPr lang="en-US" sz="850" dirty="0"/>
           </a:p>
@@ -13063,7 +13609,7 @@
                 <a:ea typeface="Calibri" pitchFamily="34" charset="-122"/>
                 <a:cs typeface="Calibri" pitchFamily="34" charset="-120"/>
               </a:rPr>
-              <a:t>Word Labs  •  wordlabs.app  •  Root: 'like' = similar to, resembling</a:t>
+              <a:t>Word Labs  •  wordlabs.app  •  Root: 'like' = to enjoy; to prefer</a:t>
             </a:r>
             <a:endParaRPr lang="en-US" sz="800" dirty="0"/>
           </a:p>
@@ -13202,7 +13748,7 @@
                 <a:ea typeface="Trebuchet MS" pitchFamily="34" charset="-122"/>
                 <a:cs typeface="Trebuchet MS" pitchFamily="34" charset="-120"/>
               </a:rPr>
-              <a:t>godlike</a:t>
+              <a:t>likable</a:t>
             </a:r>
             <a:endParaRPr lang="en-US" sz="2800" dirty="0"/>
           </a:p>
@@ -13291,11 +13837,11 @@
             </a:avLst>
           </a:prstGeom>
           <a:solidFill>
-            <a:srgbClr val="DDD6FE"/>
+            <a:srgbClr val="CCFBF1"/>
           </a:solidFill>
           <a:ln w="19050">
             <a:solidFill>
-              <a:srgbClr val="7C3AED"/>
+              <a:srgbClr val="0D9488"/>
             </a:solidFill>
             <a:prstDash val="solid"/>
           </a:ln>
@@ -13335,13 +13881,13 @@
             <a:r>
               <a:rPr lang="en-US" sz="1300" b="1" dirty="0">
                 <a:solidFill>
-                  <a:srgbClr val="4C1D95"/>
+                  <a:srgbClr val="0F766E"/>
                 </a:solidFill>
                 <a:latin typeface="Trebuchet MS" pitchFamily="34" charset="0"/>
                 <a:ea typeface="Trebuchet MS" pitchFamily="34" charset="-122"/>
                 <a:cs typeface="Trebuchet MS" pitchFamily="34" charset="-120"/>
               </a:rPr>
-              <a:t>god</a:t>
+              <a:t>like</a:t>
             </a:r>
             <a:endParaRPr lang="en-US" sz="1300" dirty="0"/>
           </a:p>
@@ -13380,7 +13926,7 @@
                 <a:ea typeface="Calibri" pitchFamily="34" charset="-122"/>
                 <a:cs typeface="Calibri" pitchFamily="34" charset="-120"/>
               </a:rPr>
-              <a:t>a divine being</a:t>
+              <a:t>to enjoy; to prefer</a:t>
             </a:r>
             <a:endParaRPr lang="en-US" sz="850" dirty="0"/>
           </a:p>
@@ -13403,11 +13949,11 @@
             </a:avLst>
           </a:prstGeom>
           <a:solidFill>
-            <a:srgbClr val="CCFBF1"/>
+            <a:srgbClr val="FCE7F3"/>
           </a:solidFill>
           <a:ln w="19050">
             <a:solidFill>
-              <a:srgbClr val="0D9488"/>
+              <a:srgbClr val="DB2777"/>
             </a:solidFill>
             <a:prstDash val="solid"/>
           </a:ln>
@@ -13447,13 +13993,13 @@
             <a:r>
               <a:rPr lang="en-US" sz="1300" b="1" dirty="0">
                 <a:solidFill>
-                  <a:srgbClr val="0F766E"/>
+                  <a:srgbClr val="9D174D"/>
                 </a:solidFill>
                 <a:latin typeface="Trebuchet MS" pitchFamily="34" charset="0"/>
                 <a:ea typeface="Trebuchet MS" pitchFamily="34" charset="-122"/>
                 <a:cs typeface="Trebuchet MS" pitchFamily="34" charset="-120"/>
               </a:rPr>
-              <a:t>like</a:t>
+              <a:t>able</a:t>
             </a:r>
             <a:endParaRPr lang="en-US" sz="1300" dirty="0"/>
           </a:p>
@@ -13492,7 +14038,7 @@
                 <a:ea typeface="Calibri" pitchFamily="34" charset="-122"/>
                 <a:cs typeface="Calibri" pitchFamily="34" charset="-120"/>
               </a:rPr>
-              <a:t>resembling, similar to</a:t>
+              <a:t>able to</a:t>
             </a:r>
             <a:endParaRPr lang="en-US" sz="850" dirty="0"/>
           </a:p>
@@ -13599,7 +14145,7 @@
         </p:nvSpPr>
         <p:spPr>
           <a:xfrm>
-            <a:off x="2999232" y="3364992"/>
+            <a:off x="2313432" y="3364992"/>
             <a:ext cx="1645920" cy="475488"/>
           </a:xfrm>
           <a:prstGeom prst="rect">
@@ -13626,7 +14172,7 @@
         </p:nvSpPr>
         <p:spPr>
           <a:xfrm>
-            <a:off x="2999232" y="3364992"/>
+            <a:off x="2313432" y="3364992"/>
             <a:ext cx="1645920" cy="475488"/>
           </a:xfrm>
           <a:prstGeom prst="rect">
@@ -13651,7 +14197,7 @@
                 <a:ea typeface="Trebuchet MS" pitchFamily="34" charset="-122"/>
                 <a:cs typeface="Trebuchet MS" pitchFamily="34" charset="-120"/>
               </a:rPr>
-              <a:t>god</a:t>
+              <a:t>lik</a:t>
             </a:r>
             <a:endParaRPr lang="en-US" sz="1400" dirty="0"/>
           </a:p>
@@ -13665,8 +14211,8 @@
         </p:nvSpPr>
         <p:spPr>
           <a:xfrm>
-            <a:off x="4645152" y="3364992"/>
-            <a:ext cx="1097280" cy="475488"/>
+            <a:off x="3959352" y="3364992"/>
+            <a:ext cx="411480" cy="475488"/>
           </a:xfrm>
           <a:prstGeom prst="rect">
             <a:avLst/>
@@ -13704,7 +14250,7 @@
         </p:nvSpPr>
         <p:spPr>
           <a:xfrm>
-            <a:off x="5742432" y="3364992"/>
+            <a:off x="4370832" y="3364992"/>
             <a:ext cx="1645920" cy="475488"/>
           </a:xfrm>
           <a:prstGeom prst="rect">
@@ -13731,7 +14277,7 @@
         </p:nvSpPr>
         <p:spPr>
           <a:xfrm>
-            <a:off x="5742432" y="3364992"/>
+            <a:off x="4370832" y="3364992"/>
             <a:ext cx="1645920" cy="475488"/>
           </a:xfrm>
           <a:prstGeom prst="rect">
@@ -13756,7 +14302,7 @@
                 <a:ea typeface="Trebuchet MS" pitchFamily="34" charset="-122"/>
                 <a:cs typeface="Trebuchet MS" pitchFamily="34" charset="-120"/>
               </a:rPr>
-              <a:t>like</a:t>
+              <a:t>a</a:t>
             </a:r>
             <a:endParaRPr lang="en-US" sz="1400" dirty="0"/>
           </a:p>
@@ -13764,7 +14310,112 @@
       </p:sp>
       <p:sp>
         <p:nvSpPr>
-          <p:cNvPr id="30" name="Shape 28"/>
+          <p:cNvPr id="30" name="Text 28"/>
+          <p:cNvSpPr/>
+          <p:nvPr/>
+        </p:nvSpPr>
+        <p:spPr>
+          <a:xfrm>
+            <a:off x="6016752" y="3364992"/>
+            <a:ext cx="411480" cy="475488"/>
+          </a:xfrm>
+          <a:prstGeom prst="rect">
+            <a:avLst/>
+          </a:prstGeom>
+          <a:noFill/>
+          <a:ln/>
+        </p:spPr>
+        <p:txBody>
+          <a:bodyPr wrap="square" lIns="0" tIns="0" rIns="0" bIns="0" rtlCol="0" anchor="ctr"/>
+          <a:lstStyle/>
+          <a:p>
+            <a:pPr algn="ctr" indent="0" marL="0">
+              <a:buNone/>
+            </a:pPr>
+            <a:r>
+              <a:rPr lang="en-US" sz="1600" b="1" dirty="0">
+                <a:solidFill>
+                  <a:srgbClr val="0D9488"/>
+                </a:solidFill>
+                <a:latin typeface="Trebuchet MS" pitchFamily="34" charset="0"/>
+                <a:ea typeface="Trebuchet MS" pitchFamily="34" charset="-122"/>
+                <a:cs typeface="Trebuchet MS" pitchFamily="34" charset="-120"/>
+              </a:rPr>
+              <a:t>·</a:t>
+            </a:r>
+            <a:endParaRPr lang="en-US" sz="1600" dirty="0"/>
+          </a:p>
+        </p:txBody>
+      </p:sp>
+      <p:sp>
+        <p:nvSpPr>
+          <p:cNvPr id="31" name="Shape 29"/>
+          <p:cNvSpPr/>
+          <p:nvPr/>
+        </p:nvSpPr>
+        <p:spPr>
+          <a:xfrm>
+            <a:off x="6428232" y="3364992"/>
+            <a:ext cx="1645920" cy="475488"/>
+          </a:xfrm>
+          <a:prstGeom prst="rect">
+            <a:avLst>
+              <a:gd name="adj" fmla="val 9615"/>
+            </a:avLst>
+          </a:prstGeom>
+          <a:solidFill>
+            <a:srgbClr val="FFFFFF"/>
+          </a:solidFill>
+          <a:ln w="12700">
+            <a:solidFill>
+              <a:srgbClr val="0D9488"/>
+            </a:solidFill>
+            <a:prstDash val="solid"/>
+          </a:ln>
+        </p:spPr>
+      </p:sp>
+      <p:sp>
+        <p:nvSpPr>
+          <p:cNvPr id="32" name="Text 30"/>
+          <p:cNvSpPr/>
+          <p:nvPr/>
+        </p:nvSpPr>
+        <p:spPr>
+          <a:xfrm>
+            <a:off x="6428232" y="3364992"/>
+            <a:ext cx="1645920" cy="475488"/>
+          </a:xfrm>
+          <a:prstGeom prst="rect">
+            <a:avLst/>
+          </a:prstGeom>
+          <a:noFill/>
+          <a:ln/>
+        </p:spPr>
+        <p:txBody>
+          <a:bodyPr wrap="square" lIns="0" tIns="0" rIns="0" bIns="0" rtlCol="0" anchor="ctr"/>
+          <a:lstStyle/>
+          <a:p>
+            <a:pPr algn="ctr" indent="0" marL="0">
+              <a:buNone/>
+            </a:pPr>
+            <a:r>
+              <a:rPr lang="en-US" sz="1400" b="1" dirty="0">
+                <a:solidFill>
+                  <a:srgbClr val="0D9488"/>
+                </a:solidFill>
+                <a:latin typeface="Trebuchet MS" pitchFamily="34" charset="0"/>
+                <a:ea typeface="Trebuchet MS" pitchFamily="34" charset="-122"/>
+                <a:cs typeface="Trebuchet MS" pitchFamily="34" charset="-120"/>
+              </a:rPr>
+              <a:t>ble</a:t>
+            </a:r>
+            <a:endParaRPr lang="en-US" sz="1400" dirty="0"/>
+          </a:p>
+        </p:txBody>
+      </p:sp>
+      <p:sp>
+        <p:nvSpPr>
+          <p:cNvPr id="33" name="Shape 31"/>
           <p:cNvSpPr/>
           <p:nvPr/>
         </p:nvSpPr>
@@ -13791,7 +14442,7 @@
       </p:sp>
       <p:sp>
         <p:nvSpPr>
-          <p:cNvPr id="31" name="Text 29"/>
+          <p:cNvPr id="34" name="Text 32"/>
           <p:cNvSpPr/>
           <p:nvPr/>
         </p:nvSpPr>
@@ -13830,7 +14481,7 @@
       </p:sp>
       <p:sp>
         <p:nvSpPr>
-          <p:cNvPr id="32" name="Shape 30"/>
+          <p:cNvPr id="35" name="Shape 33"/>
           <p:cNvSpPr/>
           <p:nvPr/>
         </p:nvSpPr>
@@ -13857,7 +14508,7 @@
       </p:sp>
       <p:sp>
         <p:nvSpPr>
-          <p:cNvPr id="33" name="Text 31"/>
+          <p:cNvPr id="36" name="Text 34"/>
           <p:cNvSpPr/>
           <p:nvPr/>
         </p:nvSpPr>
@@ -14089,7 +14740,7 @@
                 <a:ea typeface="Calibri" pitchFamily="34" charset="-122"/>
                 <a:cs typeface="Calibri" pitchFamily="34" charset="-120"/>
               </a:rPr>
-              <a:t>Root 'like' — similar to, resembling</a:t>
+              <a:t>Root 'like' — to enjoy; to prefer</a:t>
             </a:r>
             <a:endParaRPr lang="en-US" sz="1600" dirty="0"/>
           </a:p>
@@ -14445,7 +15096,7 @@
                 <a:ea typeface="Calibri" pitchFamily="34" charset="-122"/>
                 <a:cs typeface="Calibri" pitchFamily="34" charset="-120"/>
               </a:rPr>
-              <a:t>Word Labs  •  wordlabs.app  •  Root: 'like' = similar to, resembling</a:t>
+              <a:t>Word Labs  •  wordlabs.app  •  Root: 'like' = to enjoy; to prefer</a:t>
             </a:r>
             <a:endParaRPr lang="en-US" sz="800" dirty="0"/>
           </a:p>
@@ -14584,7 +15235,7 @@
                 <a:ea typeface="Trebuchet MS" pitchFamily="34" charset="-122"/>
                 <a:cs typeface="Trebuchet MS" pitchFamily="34" charset="-120"/>
               </a:rPr>
-              <a:t>godlike</a:t>
+              <a:t>likable</a:t>
             </a:r>
             <a:endParaRPr lang="en-US" sz="2800" dirty="0"/>
           </a:p>
@@ -14673,11 +15324,11 @@
             </a:avLst>
           </a:prstGeom>
           <a:solidFill>
-            <a:srgbClr val="DDD6FE"/>
+            <a:srgbClr val="CCFBF1"/>
           </a:solidFill>
           <a:ln w="19050">
             <a:solidFill>
-              <a:srgbClr val="7C3AED"/>
+              <a:srgbClr val="0D9488"/>
             </a:solidFill>
             <a:prstDash val="solid"/>
           </a:ln>
@@ -14717,13 +15368,13 @@
             <a:r>
               <a:rPr lang="en-US" sz="1300" b="1" dirty="0">
                 <a:solidFill>
-                  <a:srgbClr val="4C1D95"/>
+                  <a:srgbClr val="0F766E"/>
                 </a:solidFill>
                 <a:latin typeface="Trebuchet MS" pitchFamily="34" charset="0"/>
                 <a:ea typeface="Trebuchet MS" pitchFamily="34" charset="-122"/>
                 <a:cs typeface="Trebuchet MS" pitchFamily="34" charset="-120"/>
               </a:rPr>
-              <a:t>god</a:t>
+              <a:t>like</a:t>
             </a:r>
             <a:endParaRPr lang="en-US" sz="1300" dirty="0"/>
           </a:p>
@@ -14762,7 +15413,7 @@
                 <a:ea typeface="Calibri" pitchFamily="34" charset="-122"/>
                 <a:cs typeface="Calibri" pitchFamily="34" charset="-120"/>
               </a:rPr>
-              <a:t>a divine being</a:t>
+              <a:t>to enjoy; to prefer</a:t>
             </a:r>
             <a:endParaRPr lang="en-US" sz="850" dirty="0"/>
           </a:p>
@@ -14785,11 +15436,11 @@
             </a:avLst>
           </a:prstGeom>
           <a:solidFill>
-            <a:srgbClr val="CCFBF1"/>
+            <a:srgbClr val="FCE7F3"/>
           </a:solidFill>
           <a:ln w="19050">
             <a:solidFill>
-              <a:srgbClr val="0D9488"/>
+              <a:srgbClr val="DB2777"/>
             </a:solidFill>
             <a:prstDash val="solid"/>
           </a:ln>
@@ -14829,13 +15480,13 @@
             <a:r>
               <a:rPr lang="en-US" sz="1300" b="1" dirty="0">
                 <a:solidFill>
-                  <a:srgbClr val="0F766E"/>
+                  <a:srgbClr val="9D174D"/>
                 </a:solidFill>
                 <a:latin typeface="Trebuchet MS" pitchFamily="34" charset="0"/>
                 <a:ea typeface="Trebuchet MS" pitchFamily="34" charset="-122"/>
                 <a:cs typeface="Trebuchet MS" pitchFamily="34" charset="-120"/>
               </a:rPr>
-              <a:t>like</a:t>
+              <a:t>able</a:t>
             </a:r>
             <a:endParaRPr lang="en-US" sz="1300" dirty="0"/>
           </a:p>
@@ -14874,7 +15525,7 @@
                 <a:ea typeface="Calibri" pitchFamily="34" charset="-122"/>
                 <a:cs typeface="Calibri" pitchFamily="34" charset="-120"/>
               </a:rPr>
-              <a:t>resembling, similar to</a:t>
+              <a:t>able to</a:t>
             </a:r>
             <a:endParaRPr lang="en-US" sz="850" dirty="0"/>
           </a:p>
@@ -14981,7 +15632,7 @@
         </p:nvSpPr>
         <p:spPr>
           <a:xfrm>
-            <a:off x="2999232" y="3364992"/>
+            <a:off x="2313432" y="3364992"/>
             <a:ext cx="1645920" cy="475488"/>
           </a:xfrm>
           <a:prstGeom prst="rect">
@@ -15008,7 +15659,7 @@
         </p:nvSpPr>
         <p:spPr>
           <a:xfrm>
-            <a:off x="2999232" y="3364992"/>
+            <a:off x="2313432" y="3364992"/>
             <a:ext cx="1645920" cy="475488"/>
           </a:xfrm>
           <a:prstGeom prst="rect">
@@ -15033,7 +15684,7 @@
                 <a:ea typeface="Trebuchet MS" pitchFamily="34" charset="-122"/>
                 <a:cs typeface="Trebuchet MS" pitchFamily="34" charset="-120"/>
               </a:rPr>
-              <a:t>god</a:t>
+              <a:t>lik</a:t>
             </a:r>
             <a:endParaRPr lang="en-US" sz="1400" dirty="0"/>
           </a:p>
@@ -15047,8 +15698,8 @@
         </p:nvSpPr>
         <p:spPr>
           <a:xfrm>
-            <a:off x="4645152" y="3364992"/>
-            <a:ext cx="1097280" cy="475488"/>
+            <a:off x="3959352" y="3364992"/>
+            <a:ext cx="411480" cy="475488"/>
           </a:xfrm>
           <a:prstGeom prst="rect">
             <a:avLst/>
@@ -15086,7 +15737,7 @@
         </p:nvSpPr>
         <p:spPr>
           <a:xfrm>
-            <a:off x="5742432" y="3364992"/>
+            <a:off x="4370832" y="3364992"/>
             <a:ext cx="1645920" cy="475488"/>
           </a:xfrm>
           <a:prstGeom prst="rect">
@@ -15113,7 +15764,7 @@
         </p:nvSpPr>
         <p:spPr>
           <a:xfrm>
-            <a:off x="5742432" y="3364992"/>
+            <a:off x="4370832" y="3364992"/>
             <a:ext cx="1645920" cy="475488"/>
           </a:xfrm>
           <a:prstGeom prst="rect">
@@ -15138,7 +15789,7 @@
                 <a:ea typeface="Trebuchet MS" pitchFamily="34" charset="-122"/>
                 <a:cs typeface="Trebuchet MS" pitchFamily="34" charset="-120"/>
               </a:rPr>
-              <a:t>like</a:t>
+              <a:t>a</a:t>
             </a:r>
             <a:endParaRPr lang="en-US" sz="1400" dirty="0"/>
           </a:p>
@@ -15146,7 +15797,112 @@
       </p:sp>
       <p:sp>
         <p:nvSpPr>
-          <p:cNvPr id="30" name="Shape 28"/>
+          <p:cNvPr id="30" name="Text 28"/>
+          <p:cNvSpPr/>
+          <p:nvPr/>
+        </p:nvSpPr>
+        <p:spPr>
+          <a:xfrm>
+            <a:off x="6016752" y="3364992"/>
+            <a:ext cx="411480" cy="475488"/>
+          </a:xfrm>
+          <a:prstGeom prst="rect">
+            <a:avLst/>
+          </a:prstGeom>
+          <a:noFill/>
+          <a:ln/>
+        </p:spPr>
+        <p:txBody>
+          <a:bodyPr wrap="square" lIns="0" tIns="0" rIns="0" bIns="0" rtlCol="0" anchor="ctr"/>
+          <a:lstStyle/>
+          <a:p>
+            <a:pPr algn="ctr" indent="0" marL="0">
+              <a:buNone/>
+            </a:pPr>
+            <a:r>
+              <a:rPr lang="en-US" sz="1600" b="1" dirty="0">
+                <a:solidFill>
+                  <a:srgbClr val="0D9488"/>
+                </a:solidFill>
+                <a:latin typeface="Trebuchet MS" pitchFamily="34" charset="0"/>
+                <a:ea typeface="Trebuchet MS" pitchFamily="34" charset="-122"/>
+                <a:cs typeface="Trebuchet MS" pitchFamily="34" charset="-120"/>
+              </a:rPr>
+              <a:t>·</a:t>
+            </a:r>
+            <a:endParaRPr lang="en-US" sz="1600" dirty="0"/>
+          </a:p>
+        </p:txBody>
+      </p:sp>
+      <p:sp>
+        <p:nvSpPr>
+          <p:cNvPr id="31" name="Shape 29"/>
+          <p:cNvSpPr/>
+          <p:nvPr/>
+        </p:nvSpPr>
+        <p:spPr>
+          <a:xfrm>
+            <a:off x="6428232" y="3364992"/>
+            <a:ext cx="1645920" cy="475488"/>
+          </a:xfrm>
+          <a:prstGeom prst="rect">
+            <a:avLst>
+              <a:gd name="adj" fmla="val 9615"/>
+            </a:avLst>
+          </a:prstGeom>
+          <a:solidFill>
+            <a:srgbClr val="FFFFFF"/>
+          </a:solidFill>
+          <a:ln w="12700">
+            <a:solidFill>
+              <a:srgbClr val="0D9488"/>
+            </a:solidFill>
+            <a:prstDash val="solid"/>
+          </a:ln>
+        </p:spPr>
+      </p:sp>
+      <p:sp>
+        <p:nvSpPr>
+          <p:cNvPr id="32" name="Text 30"/>
+          <p:cNvSpPr/>
+          <p:nvPr/>
+        </p:nvSpPr>
+        <p:spPr>
+          <a:xfrm>
+            <a:off x="6428232" y="3364992"/>
+            <a:ext cx="1645920" cy="475488"/>
+          </a:xfrm>
+          <a:prstGeom prst="rect">
+            <a:avLst/>
+          </a:prstGeom>
+          <a:noFill/>
+          <a:ln/>
+        </p:spPr>
+        <p:txBody>
+          <a:bodyPr wrap="square" lIns="0" tIns="0" rIns="0" bIns="0" rtlCol="0" anchor="ctr"/>
+          <a:lstStyle/>
+          <a:p>
+            <a:pPr algn="ctr" indent="0" marL="0">
+              <a:buNone/>
+            </a:pPr>
+            <a:r>
+              <a:rPr lang="en-US" sz="1400" b="1" dirty="0">
+                <a:solidFill>
+                  <a:srgbClr val="0D9488"/>
+                </a:solidFill>
+                <a:latin typeface="Trebuchet MS" pitchFamily="34" charset="0"/>
+                <a:ea typeface="Trebuchet MS" pitchFamily="34" charset="-122"/>
+                <a:cs typeface="Trebuchet MS" pitchFamily="34" charset="-120"/>
+              </a:rPr>
+              <a:t>ble</a:t>
+            </a:r>
+            <a:endParaRPr lang="en-US" sz="1400" dirty="0"/>
+          </a:p>
+        </p:txBody>
+      </p:sp>
+      <p:sp>
+        <p:nvSpPr>
+          <p:cNvPr id="33" name="Shape 31"/>
           <p:cNvSpPr/>
           <p:nvPr/>
         </p:nvSpPr>
@@ -15173,7 +15929,7 @@
       </p:sp>
       <p:sp>
         <p:nvSpPr>
-          <p:cNvPr id="31" name="Text 29"/>
+          <p:cNvPr id="34" name="Text 32"/>
           <p:cNvSpPr/>
           <p:nvPr/>
         </p:nvSpPr>
@@ -15212,7 +15968,7 @@
       </p:sp>
       <p:sp>
         <p:nvSpPr>
-          <p:cNvPr id="32" name="Shape 30"/>
+          <p:cNvPr id="35" name="Shape 33"/>
           <p:cNvSpPr/>
           <p:nvPr/>
         </p:nvSpPr>
@@ -15239,13 +15995,13 @@
       </p:sp>
       <p:sp>
         <p:nvSpPr>
-          <p:cNvPr id="33" name="Shape 31"/>
-          <p:cNvSpPr/>
-          <p:nvPr/>
-        </p:nvSpPr>
-        <p:spPr>
-          <a:xfrm>
-            <a:off x="2124837" y="4169664"/>
+          <p:cNvPr id="36" name="Shape 34"/>
+          <p:cNvSpPr/>
+          <p:nvPr/>
+        </p:nvSpPr>
+        <p:spPr>
+          <a:xfrm>
+            <a:off x="2254649" y="4169664"/>
             <a:ext cx="685800" cy="475488"/>
           </a:xfrm>
           <a:prstGeom prst="rect">
@@ -15266,13 +16022,13 @@
       </p:sp>
       <p:sp>
         <p:nvSpPr>
-          <p:cNvPr id="34" name="Text 32"/>
-          <p:cNvSpPr/>
-          <p:nvPr/>
-        </p:nvSpPr>
-        <p:spPr>
-          <a:xfrm>
-            <a:off x="2124837" y="4169664"/>
+          <p:cNvPr id="37" name="Text 35"/>
+          <p:cNvSpPr/>
+          <p:nvPr/>
+        </p:nvSpPr>
+        <p:spPr>
+          <a:xfrm>
+            <a:off x="2254649" y="4169664"/>
             <a:ext cx="685800" cy="475488"/>
           </a:xfrm>
           <a:prstGeom prst="rect">
@@ -15297,7 +16053,7 @@
                 <a:ea typeface="Trebuchet MS" pitchFamily="34" charset="-122"/>
                 <a:cs typeface="Trebuchet MS" pitchFamily="34" charset="-120"/>
               </a:rPr>
-              <a:t>g</a:t>
+              <a:t>l</a:t>
             </a:r>
             <a:endParaRPr lang="en-US" sz="900" dirty="0"/>
           </a:p>
@@ -15305,13 +16061,13 @@
       </p:sp>
       <p:sp>
         <p:nvSpPr>
-          <p:cNvPr id="35" name="Shape 33"/>
-          <p:cNvSpPr/>
-          <p:nvPr/>
-        </p:nvSpPr>
-        <p:spPr>
-          <a:xfrm>
-            <a:off x="3033522" y="4169664"/>
+          <p:cNvPr id="38" name="Shape 36"/>
+          <p:cNvSpPr/>
+          <p:nvPr/>
+        </p:nvSpPr>
+        <p:spPr>
+          <a:xfrm>
+            <a:off x="3293146" y="4169664"/>
             <a:ext cx="685800" cy="475488"/>
           </a:xfrm>
           <a:prstGeom prst="rect">
@@ -15332,13 +16088,13 @@
       </p:sp>
       <p:sp>
         <p:nvSpPr>
-          <p:cNvPr id="36" name="Text 34"/>
-          <p:cNvSpPr/>
-          <p:nvPr/>
-        </p:nvSpPr>
-        <p:spPr>
-          <a:xfrm>
-            <a:off x="3033522" y="4169664"/>
+          <p:cNvPr id="39" name="Text 37"/>
+          <p:cNvSpPr/>
+          <p:nvPr/>
+        </p:nvSpPr>
+        <p:spPr>
+          <a:xfrm>
+            <a:off x="3293146" y="4169664"/>
             <a:ext cx="685800" cy="475488"/>
           </a:xfrm>
           <a:prstGeom prst="rect">
@@ -15363,7 +16119,7 @@
                 <a:ea typeface="Trebuchet MS" pitchFamily="34" charset="-122"/>
                 <a:cs typeface="Trebuchet MS" pitchFamily="34" charset="-120"/>
               </a:rPr>
-              <a:t>o</a:t>
+              <a:t>i</a:t>
             </a:r>
             <a:endParaRPr lang="en-US" sz="900" dirty="0"/>
           </a:p>
@@ -15371,13 +16127,13 @@
       </p:sp>
       <p:sp>
         <p:nvSpPr>
-          <p:cNvPr id="37" name="Shape 35"/>
-          <p:cNvSpPr/>
-          <p:nvPr/>
-        </p:nvSpPr>
-        <p:spPr>
-          <a:xfrm>
-            <a:off x="3942207" y="4169664"/>
+          <p:cNvPr id="40" name="Shape 38"/>
+          <p:cNvSpPr/>
+          <p:nvPr/>
+        </p:nvSpPr>
+        <p:spPr>
+          <a:xfrm>
+            <a:off x="4331643" y="4169664"/>
             <a:ext cx="685800" cy="475488"/>
           </a:xfrm>
           <a:prstGeom prst="rect">
@@ -15398,13 +16154,13 @@
       </p:sp>
       <p:sp>
         <p:nvSpPr>
-          <p:cNvPr id="38" name="Text 36"/>
-          <p:cNvSpPr/>
-          <p:nvPr/>
-        </p:nvSpPr>
-        <p:spPr>
-          <a:xfrm>
-            <a:off x="3942207" y="4169664"/>
+          <p:cNvPr id="41" name="Text 39"/>
+          <p:cNvSpPr/>
+          <p:nvPr/>
+        </p:nvSpPr>
+        <p:spPr>
+          <a:xfrm>
+            <a:off x="4331643" y="4169664"/>
             <a:ext cx="685800" cy="475488"/>
           </a:xfrm>
           <a:prstGeom prst="rect">
@@ -15429,7 +16185,7 @@
                 <a:ea typeface="Trebuchet MS" pitchFamily="34" charset="-122"/>
                 <a:cs typeface="Trebuchet MS" pitchFamily="34" charset="-120"/>
               </a:rPr>
-              <a:t>d</a:t>
+              <a:t>k</a:t>
             </a:r>
             <a:endParaRPr lang="en-US" sz="900" dirty="0"/>
           </a:p>
@@ -15437,13 +16193,13 @@
       </p:sp>
       <p:sp>
         <p:nvSpPr>
-          <p:cNvPr id="39" name="Shape 37"/>
-          <p:cNvSpPr/>
-          <p:nvPr/>
-        </p:nvSpPr>
-        <p:spPr>
-          <a:xfrm>
-            <a:off x="4850892" y="4169664"/>
+          <p:cNvPr id="42" name="Shape 40"/>
+          <p:cNvSpPr/>
+          <p:nvPr/>
+        </p:nvSpPr>
+        <p:spPr>
+          <a:xfrm>
+            <a:off x="5370141" y="4169664"/>
             <a:ext cx="685800" cy="475488"/>
           </a:xfrm>
           <a:prstGeom prst="rect">
@@ -15464,13 +16220,13 @@
       </p:sp>
       <p:sp>
         <p:nvSpPr>
-          <p:cNvPr id="40" name="Text 38"/>
-          <p:cNvSpPr/>
-          <p:nvPr/>
-        </p:nvSpPr>
-        <p:spPr>
-          <a:xfrm>
-            <a:off x="4850892" y="4169664"/>
+          <p:cNvPr id="43" name="Text 41"/>
+          <p:cNvSpPr/>
+          <p:nvPr/>
+        </p:nvSpPr>
+        <p:spPr>
+          <a:xfrm>
+            <a:off x="5370141" y="4169664"/>
             <a:ext cx="685800" cy="475488"/>
           </a:xfrm>
           <a:prstGeom prst="rect">
@@ -15495,7 +16251,7 @@
                 <a:ea typeface="Trebuchet MS" pitchFamily="34" charset="-122"/>
                 <a:cs typeface="Trebuchet MS" pitchFamily="34" charset="-120"/>
               </a:rPr>
-              <a:t>l</a:t>
+              <a:t>a</a:t>
             </a:r>
             <a:endParaRPr lang="en-US" sz="900" dirty="0"/>
           </a:p>
@@ -15503,13 +16259,13 @@
       </p:sp>
       <p:sp>
         <p:nvSpPr>
-          <p:cNvPr id="41" name="Shape 39"/>
-          <p:cNvSpPr/>
-          <p:nvPr/>
-        </p:nvSpPr>
-        <p:spPr>
-          <a:xfrm>
-            <a:off x="5759577" y="4169664"/>
+          <p:cNvPr id="44" name="Shape 42"/>
+          <p:cNvSpPr/>
+          <p:nvPr/>
+        </p:nvSpPr>
+        <p:spPr>
+          <a:xfrm>
+            <a:off x="6408638" y="4169664"/>
             <a:ext cx="685800" cy="475488"/>
           </a:xfrm>
           <a:prstGeom prst="rect">
@@ -15530,13 +16286,13 @@
       </p:sp>
       <p:sp>
         <p:nvSpPr>
-          <p:cNvPr id="42" name="Text 40"/>
-          <p:cNvSpPr/>
-          <p:nvPr/>
-        </p:nvSpPr>
-        <p:spPr>
-          <a:xfrm>
-            <a:off x="5759577" y="4169664"/>
+          <p:cNvPr id="45" name="Text 43"/>
+          <p:cNvSpPr/>
+          <p:nvPr/>
+        </p:nvSpPr>
+        <p:spPr>
+          <a:xfrm>
+            <a:off x="6408638" y="4169664"/>
             <a:ext cx="685800" cy="475488"/>
           </a:xfrm>
           <a:prstGeom prst="rect">
@@ -15561,7 +16317,7 @@
                 <a:ea typeface="Trebuchet MS" pitchFamily="34" charset="-122"/>
                 <a:cs typeface="Trebuchet MS" pitchFamily="34" charset="-120"/>
               </a:rPr>
-              <a:t>i</a:t>
+              <a:t>b</a:t>
             </a:r>
             <a:endParaRPr lang="en-US" sz="900" dirty="0"/>
           </a:p>
@@ -15569,13 +16325,13 @@
       </p:sp>
       <p:sp>
         <p:nvSpPr>
-          <p:cNvPr id="43" name="Shape 41"/>
-          <p:cNvSpPr/>
-          <p:nvPr/>
-        </p:nvSpPr>
-        <p:spPr>
-          <a:xfrm>
-            <a:off x="6668262" y="4169664"/>
+          <p:cNvPr id="46" name="Shape 44"/>
+          <p:cNvSpPr/>
+          <p:nvPr/>
+        </p:nvSpPr>
+        <p:spPr>
+          <a:xfrm>
+            <a:off x="7447135" y="4169664"/>
             <a:ext cx="685800" cy="475488"/>
           </a:xfrm>
           <a:prstGeom prst="rect">
@@ -15596,13 +16352,13 @@
       </p:sp>
       <p:sp>
         <p:nvSpPr>
-          <p:cNvPr id="44" name="Text 42"/>
-          <p:cNvSpPr/>
-          <p:nvPr/>
-        </p:nvSpPr>
-        <p:spPr>
-          <a:xfrm>
-            <a:off x="6668262" y="4169664"/>
+          <p:cNvPr id="47" name="Text 45"/>
+          <p:cNvSpPr/>
+          <p:nvPr/>
+        </p:nvSpPr>
+        <p:spPr>
+          <a:xfrm>
+            <a:off x="7447135" y="4169664"/>
             <a:ext cx="685800" cy="475488"/>
           </a:xfrm>
           <a:prstGeom prst="rect">
@@ -15627,73 +16383,7 @@
                 <a:ea typeface="Trebuchet MS" pitchFamily="34" charset="-122"/>
                 <a:cs typeface="Trebuchet MS" pitchFamily="34" charset="-120"/>
               </a:rPr>
-              <a:t>k</a:t>
-            </a:r>
-            <a:endParaRPr lang="en-US" sz="900" dirty="0"/>
-          </a:p>
-        </p:txBody>
-      </p:sp>
-      <p:sp>
-        <p:nvSpPr>
-          <p:cNvPr id="45" name="Shape 43"/>
-          <p:cNvSpPr/>
-          <p:nvPr/>
-        </p:nvSpPr>
-        <p:spPr>
-          <a:xfrm>
-            <a:off x="7576947" y="4169664"/>
-            <a:ext cx="685800" cy="475488"/>
-          </a:xfrm>
-          <a:prstGeom prst="rect">
-            <a:avLst>
-              <a:gd name="adj" fmla="val 7692"/>
-            </a:avLst>
-          </a:prstGeom>
-          <a:solidFill>
-            <a:srgbClr val="FFFFFF"/>
-          </a:solidFill>
-          <a:ln w="12700">
-            <a:solidFill>
-              <a:srgbClr val="DB2777"/>
-            </a:solidFill>
-            <a:prstDash val="solid"/>
-          </a:ln>
-        </p:spPr>
-      </p:sp>
-      <p:sp>
-        <p:nvSpPr>
-          <p:cNvPr id="46" name="Text 44"/>
-          <p:cNvSpPr/>
-          <p:nvPr/>
-        </p:nvSpPr>
-        <p:spPr>
-          <a:xfrm>
-            <a:off x="7576947" y="4169664"/>
-            <a:ext cx="685800" cy="475488"/>
-          </a:xfrm>
-          <a:prstGeom prst="rect">
-            <a:avLst/>
-          </a:prstGeom>
-          <a:noFill/>
-          <a:ln/>
-        </p:spPr>
-        <p:txBody>
-          <a:bodyPr wrap="square" lIns="0" tIns="0" rIns="0" bIns="0" rtlCol="0" anchor="ctr"/>
-          <a:lstStyle/>
-          <a:p>
-            <a:pPr algn="ctr" indent="0" marL="0">
-              <a:buNone/>
-            </a:pPr>
-            <a:r>
-              <a:rPr lang="en-US" sz="900" b="1" dirty="0">
-                <a:solidFill>
-                  <a:srgbClr val="9D174D"/>
-                </a:solidFill>
-                <a:latin typeface="Trebuchet MS" pitchFamily="34" charset="0"/>
-                <a:ea typeface="Trebuchet MS" pitchFamily="34" charset="-122"/>
-                <a:cs typeface="Trebuchet MS" pitchFamily="34" charset="-120"/>
-              </a:rPr>
-              <a:t>e</a:t>
+              <a:t>le</a:t>
             </a:r>
             <a:endParaRPr lang="en-US" sz="900" dirty="0"/>
           </a:p>
@@ -16267,7 +16957,7 @@
                 <a:ea typeface="Calibri" pitchFamily="34" charset="-122"/>
                 <a:cs typeface="Calibri" pitchFamily="34" charset="-120"/>
               </a:rPr>
-              <a:t>Word Labs  •  wordlabs.app  •  Root: 'like' = similar to, resembling</a:t>
+              <a:t>Word Labs  •  wordlabs.app  •  Root: 'like' = to enjoy; to prefer</a:t>
             </a:r>
             <a:endParaRPr lang="en-US" sz="800" dirty="0"/>
           </a:p>
@@ -16601,7 +17291,7 @@
                 <a:ea typeface="Trebuchet MS" pitchFamily="34" charset="-122"/>
                 <a:cs typeface="Trebuchet MS" pitchFamily="34" charset="-120"/>
               </a:rPr>
-              <a:t>2</a:t>
+              <a:t>0</a:t>
             </a:r>
             <a:pPr algn="ctr" indent="0" marL="0">
               <a:buNone/>
@@ -16615,7 +17305,7 @@
                 <a:ea typeface="Trebuchet MS" pitchFamily="34" charset="-122"/>
                 <a:cs typeface="Trebuchet MS" pitchFamily="34" charset="-120"/>
               </a:rPr>
-              <a:t>  punctuation marks</a:t>
+              <a:t>  punctuation mark</a:t>
             </a:r>
             <a:endParaRPr lang="en-US" sz="2800" dirty="0"/>
           </a:p>
@@ -16907,7 +17597,7 @@
                 <a:ea typeface="Calibri" pitchFamily="34" charset="-122"/>
                 <a:cs typeface="Calibri" pitchFamily="34" charset="-120"/>
               </a:rPr>
-              <a:t>Word Labs  •  wordlabs.app  •  Root: 'like' = similar to, resembling</a:t>
+              <a:t>Word Labs  •  wordlabs.app  •  Root: 'like' = to enjoy; to prefer</a:t>
             </a:r>
             <a:endParaRPr lang="en-US" sz="800" dirty="0"/>
           </a:p>
@@ -17019,7 +17709,7 @@
                 <a:ea typeface="Calibri" pitchFamily="34" charset="-122"/>
                 <a:cs typeface="Calibri" pitchFamily="34" charset="-120"/>
               </a:rPr>
-              <a:t>Although she had a </a:t>
+              <a:t>The </a:t>
             </a:r>
             <a:pPr algn="l" indent="0" marL="0">
               <a:buNone/>
@@ -17036,7 +17726,7 @@
                 <a:ea typeface="Calibri" pitchFamily="34" charset="-122"/>
                 <a:cs typeface="Calibri" pitchFamily="34" charset="-120"/>
               </a:rPr>
-              <a:t>dislike</a:t>
+              <a:t>unlikable</a:t>
             </a:r>
             <a:pPr algn="l" indent="0" marL="0">
               <a:buNone/>
@@ -17050,7 +17740,7 @@
                 <a:ea typeface="Calibri" pitchFamily="34" charset="-122"/>
                 <a:cs typeface="Calibri" pitchFamily="34" charset="-120"/>
               </a:rPr>
-              <a:t> of spiders, the </a:t>
+              <a:t> villain in the story never showed any kindness. He has a </a:t>
             </a:r>
             <a:pPr algn="l" indent="0" marL="0">
               <a:buNone/>
@@ -17067,7 +17757,7 @@
                 <a:ea typeface="Calibri" pitchFamily="34" charset="-122"/>
                 <a:cs typeface="Calibri" pitchFamily="34" charset="-120"/>
               </a:rPr>
-              <a:t>childlike</a:t>
+              <a:t>likeable</a:t>
             </a:r>
             <a:pPr algn="l" indent="0" marL="0">
               <a:buNone/>
@@ -17081,7 +17771,7 @@
                 <a:ea typeface="Calibri" pitchFamily="34" charset="-122"/>
                 <a:cs typeface="Calibri" pitchFamily="34" charset="-120"/>
               </a:rPr>
-              <a:t> curiosity in her eyes was unmistakable; </a:t>
+              <a:t> manner that puts people at ease. The two houses look </a:t>
             </a:r>
             <a:pPr algn="l" indent="0" marL="0">
               <a:buNone/>
@@ -17098,7 +17788,7 @@
                 <a:ea typeface="Calibri" pitchFamily="34" charset="-122"/>
                 <a:cs typeface="Calibri" pitchFamily="34" charset="-120"/>
               </a:rPr>
-              <a:t>likewise</a:t>
+              <a:t>alike</a:t>
             </a:r>
             <a:pPr algn="l" indent="0" marL="0">
               <a:buNone/>
@@ -17112,7 +17802,7 @@
                 <a:ea typeface="Calibri" pitchFamily="34" charset="-122"/>
                 <a:cs typeface="Calibri" pitchFamily="34" charset="-120"/>
               </a:rPr>
-              <a:t>, her little brother stared in wonder.</a:t>
+              <a:t> from the outside.</a:t>
             </a:r>
             <a:endParaRPr lang="en-US" sz="1800" dirty="0"/>
           </a:p>
@@ -17267,7 +17957,7 @@
                 <a:ea typeface="Trebuchet MS" pitchFamily="34" charset="-122"/>
                 <a:cs typeface="Trebuchet MS" pitchFamily="34" charset="-120"/>
               </a:rPr>
-              <a:t>dislike</a:t>
+              <a:t>unlikable</a:t>
             </a:r>
             <a:endParaRPr lang="en-US" sz="1400" dirty="0"/>
           </a:p>
@@ -17395,7 +18085,7 @@
                 <a:ea typeface="Trebuchet MS" pitchFamily="34" charset="-122"/>
                 <a:cs typeface="Trebuchet MS" pitchFamily="34" charset="-120"/>
               </a:rPr>
-              <a:t>childlike</a:t>
+              <a:t>likeable</a:t>
             </a:r>
             <a:endParaRPr lang="en-US" sz="1400" dirty="0"/>
           </a:p>
@@ -17523,7 +18213,7 @@
                 <a:ea typeface="Trebuchet MS" pitchFamily="34" charset="-122"/>
                 <a:cs typeface="Trebuchet MS" pitchFamily="34" charset="-120"/>
               </a:rPr>
-              <a:t>likewise</a:t>
+              <a:t>alike</a:t>
             </a:r>
             <a:endParaRPr lang="en-US" sz="1400" dirty="0"/>
           </a:p>
@@ -17854,7 +18544,7 @@
                 <a:ea typeface="Calibri" pitchFamily="34" charset="-122"/>
                 <a:cs typeface="Calibri" pitchFamily="34" charset="-120"/>
               </a:rPr>
-              <a:t>Word Labs  •  wordlabs.app  •  Root: 'like' = similar to, resembling</a:t>
+              <a:t>Word Labs  •  wordlabs.app  •  Root: 'like' = to enjoy; to prefer</a:t>
             </a:r>
             <a:endParaRPr lang="en-US" sz="800" dirty="0"/>
           </a:p>
@@ -17993,7 +18683,7 @@
                 <a:ea typeface="Trebuchet MS" pitchFamily="34" charset="-122"/>
                 <a:cs typeface="Trebuchet MS" pitchFamily="34" charset="-120"/>
               </a:rPr>
-              <a:t>dislike</a:t>
+              <a:t>unlikable</a:t>
             </a:r>
             <a:endParaRPr lang="en-US" sz="2800" dirty="0"/>
           </a:p>
@@ -18681,7 +19371,7 @@
                 <a:ea typeface="Calibri" pitchFamily="34" charset="-122"/>
                 <a:cs typeface="Calibri" pitchFamily="34" charset="-120"/>
               </a:rPr>
-              <a:t>Word Labs  •  wordlabs.app  •  Root: 'like' = similar to, resembling</a:t>
+              <a:t>Word Labs  •  wordlabs.app  •  Root: 'like' = to enjoy; to prefer</a:t>
             </a:r>
             <a:endParaRPr lang="en-US" sz="800" dirty="0"/>
           </a:p>
@@ -18820,7 +19510,7 @@
                 <a:ea typeface="Trebuchet MS" pitchFamily="34" charset="-122"/>
                 <a:cs typeface="Trebuchet MS" pitchFamily="34" charset="-120"/>
               </a:rPr>
-              <a:t>dislike</a:t>
+              <a:t>unlikable</a:t>
             </a:r>
             <a:endParaRPr lang="en-US" sz="2800" dirty="0"/>
           </a:p>
@@ -18900,7 +19590,7 @@
         </p:nvSpPr>
         <p:spPr>
           <a:xfrm>
-            <a:off x="2938272" y="2258568"/>
+            <a:off x="2221992" y="2258568"/>
             <a:ext cx="1828800" cy="292608"/>
           </a:xfrm>
           <a:prstGeom prst="rect">
@@ -18934,7 +19624,7 @@
         </p:nvSpPr>
         <p:spPr>
           <a:xfrm>
-            <a:off x="2938272" y="2258568"/>
+            <a:off x="2221992" y="2258568"/>
             <a:ext cx="1828800" cy="292608"/>
           </a:xfrm>
           <a:prstGeom prst="rect">
@@ -18959,7 +19649,7 @@
                 <a:ea typeface="Trebuchet MS" pitchFamily="34" charset="-122"/>
                 <a:cs typeface="Trebuchet MS" pitchFamily="34" charset="-120"/>
               </a:rPr>
-              <a:t>dis</a:t>
+              <a:t>un</a:t>
             </a:r>
             <a:endParaRPr lang="en-US" sz="1300" dirty="0"/>
           </a:p>
@@ -18973,7 +19663,7 @@
         </p:nvSpPr>
         <p:spPr>
           <a:xfrm>
-            <a:off x="2938272" y="2569464"/>
+            <a:off x="2221992" y="2569464"/>
             <a:ext cx="1828800" cy="201168"/>
           </a:xfrm>
           <a:prstGeom prst="rect">
@@ -18998,7 +19688,7 @@
                 <a:ea typeface="Calibri" pitchFamily="34" charset="-122"/>
                 <a:cs typeface="Calibri" pitchFamily="34" charset="-120"/>
               </a:rPr>
-              <a:t>not, opposite of</a:t>
+              <a:t>not</a:t>
             </a:r>
             <a:endParaRPr lang="en-US" sz="850" dirty="0"/>
           </a:p>
@@ -19012,7 +19702,7 @@
         </p:nvSpPr>
         <p:spPr>
           <a:xfrm>
-            <a:off x="5803392" y="2258568"/>
+            <a:off x="4370832" y="2258568"/>
             <a:ext cx="1828800" cy="292608"/>
           </a:xfrm>
           <a:prstGeom prst="rect">
@@ -19046,7 +19736,7 @@
         </p:nvSpPr>
         <p:spPr>
           <a:xfrm>
-            <a:off x="5803392" y="2258568"/>
+            <a:off x="4370832" y="2258568"/>
             <a:ext cx="1828800" cy="292608"/>
           </a:xfrm>
           <a:prstGeom prst="rect">
@@ -19085,7 +19775,7 @@
         </p:nvSpPr>
         <p:spPr>
           <a:xfrm>
-            <a:off x="5803392" y="2569464"/>
+            <a:off x="4370832" y="2569464"/>
             <a:ext cx="1828800" cy="201168"/>
           </a:xfrm>
           <a:prstGeom prst="rect">
@@ -19110,7 +19800,7 @@
                 <a:ea typeface="Calibri" pitchFamily="34" charset="-122"/>
                 <a:cs typeface="Calibri" pitchFamily="34" charset="-120"/>
               </a:rPr>
-              <a:t>resembling, similar to; to enjoy</a:t>
+              <a:t>to enjoy; to prefer</a:t>
             </a:r>
             <a:endParaRPr lang="en-US" sz="850" dirty="0"/>
           </a:p>
@@ -19119,6 +19809,118 @@
       <p:sp>
         <p:nvSpPr>
           <p:cNvPr id="22" name="Shape 20"/>
+          <p:cNvSpPr/>
+          <p:nvPr/>
+        </p:nvSpPr>
+        <p:spPr>
+          <a:xfrm>
+            <a:off x="6519672" y="2258568"/>
+            <a:ext cx="1828800" cy="292608"/>
+          </a:xfrm>
+          <a:prstGeom prst="rect">
+            <a:avLst>
+              <a:gd name="adj" fmla="val 25000"/>
+            </a:avLst>
+          </a:prstGeom>
+          <a:solidFill>
+            <a:srgbClr val="FCE7F3"/>
+          </a:solidFill>
+          <a:ln w="19050">
+            <a:solidFill>
+              <a:srgbClr val="DB2777"/>
+            </a:solidFill>
+            <a:prstDash val="solid"/>
+          </a:ln>
+          <a:effectLst>
+            <a:outerShdw sx="100000" sy="100000" kx="0" ky="0" algn="bl" rotWithShape="0" blurRad="101600" dist="38100" dir="8100000">
+              <a:srgbClr val="000000">
+                <a:alpha val="12000"/>
+              </a:srgbClr>
+            </a:outerShdw>
+          </a:effectLst>
+        </p:spPr>
+      </p:sp>
+      <p:sp>
+        <p:nvSpPr>
+          <p:cNvPr id="23" name="Text 21"/>
+          <p:cNvSpPr/>
+          <p:nvPr/>
+        </p:nvSpPr>
+        <p:spPr>
+          <a:xfrm>
+            <a:off x="6519672" y="2258568"/>
+            <a:ext cx="1828800" cy="292608"/>
+          </a:xfrm>
+          <a:prstGeom prst="rect">
+            <a:avLst/>
+          </a:prstGeom>
+          <a:noFill/>
+          <a:ln/>
+        </p:spPr>
+        <p:txBody>
+          <a:bodyPr wrap="square" lIns="0" tIns="0" rIns="0" bIns="0" rtlCol="0" anchor="ctr"/>
+          <a:lstStyle/>
+          <a:p>
+            <a:pPr algn="ctr" indent="0" marL="0">
+              <a:buNone/>
+            </a:pPr>
+            <a:r>
+              <a:rPr lang="en-US" sz="1300" b="1" dirty="0">
+                <a:solidFill>
+                  <a:srgbClr val="9D174D"/>
+                </a:solidFill>
+                <a:latin typeface="Trebuchet MS" pitchFamily="34" charset="0"/>
+                <a:ea typeface="Trebuchet MS" pitchFamily="34" charset="-122"/>
+                <a:cs typeface="Trebuchet MS" pitchFamily="34" charset="-120"/>
+              </a:rPr>
+              <a:t>able</a:t>
+            </a:r>
+            <a:endParaRPr lang="en-US" sz="1300" dirty="0"/>
+          </a:p>
+        </p:txBody>
+      </p:sp>
+      <p:sp>
+        <p:nvSpPr>
+          <p:cNvPr id="24" name="Text 22"/>
+          <p:cNvSpPr/>
+          <p:nvPr/>
+        </p:nvSpPr>
+        <p:spPr>
+          <a:xfrm>
+            <a:off x="6519672" y="2569464"/>
+            <a:ext cx="1828800" cy="201168"/>
+          </a:xfrm>
+          <a:prstGeom prst="rect">
+            <a:avLst/>
+          </a:prstGeom>
+          <a:noFill/>
+          <a:ln/>
+        </p:spPr>
+        <p:txBody>
+          <a:bodyPr wrap="square" lIns="0" tIns="0" rIns="0" bIns="0" rtlCol="0" anchor="t"/>
+          <a:lstStyle/>
+          <a:p>
+            <a:pPr algn="ctr" indent="0" marL="0">
+              <a:buNone/>
+            </a:pPr>
+            <a:r>
+              <a:rPr lang="en-US" sz="850" dirty="0">
+                <a:solidFill>
+                  <a:srgbClr val="475569"/>
+                </a:solidFill>
+                <a:latin typeface="Calibri" pitchFamily="34" charset="0"/>
+                <a:ea typeface="Calibri" pitchFamily="34" charset="-122"/>
+                <a:cs typeface="Calibri" pitchFamily="34" charset="-120"/>
+              </a:rPr>
+              <a:t>able to</a:t>
+            </a:r>
+            <a:endParaRPr lang="en-US" sz="850" dirty="0"/>
+          </a:p>
+        </p:txBody>
+      </p:sp>
+      <p:sp>
+        <p:nvSpPr>
+          <p:cNvPr id="25" name="Shape 23"/>
           <p:cNvSpPr/>
           <p:nvPr/>
         </p:nvSpPr>
@@ -19145,7 +19947,7 @@
       </p:sp>
       <p:sp>
         <p:nvSpPr>
-          <p:cNvPr id="23" name="Text 21"/>
+          <p:cNvPr id="26" name="Text 24"/>
           <p:cNvSpPr/>
           <p:nvPr/>
         </p:nvSpPr>
@@ -19184,7 +19986,7 @@
       </p:sp>
       <p:sp>
         <p:nvSpPr>
-          <p:cNvPr id="24" name="Shape 22"/>
+          <p:cNvPr id="27" name="Shape 25"/>
           <p:cNvSpPr/>
           <p:nvPr/>
         </p:nvSpPr>
@@ -19211,7 +20013,7 @@
       </p:sp>
       <p:sp>
         <p:nvSpPr>
-          <p:cNvPr id="25" name="Text 23"/>
+          <p:cNvPr id="28" name="Text 26"/>
           <p:cNvSpPr/>
           <p:nvPr/>
         </p:nvSpPr>
@@ -19250,7 +20052,7 @@
       </p:sp>
       <p:sp>
         <p:nvSpPr>
-          <p:cNvPr id="26" name="Shape 24"/>
+          <p:cNvPr id="29" name="Shape 27"/>
           <p:cNvSpPr/>
           <p:nvPr/>
         </p:nvSpPr>
@@ -19277,7 +20079,7 @@
       </p:sp>
       <p:sp>
         <p:nvSpPr>
-          <p:cNvPr id="27" name="Text 25"/>
+          <p:cNvPr id="30" name="Text 28"/>
           <p:cNvSpPr/>
           <p:nvPr/>
         </p:nvSpPr>
@@ -19316,7 +20118,7 @@
       </p:sp>
       <p:sp>
         <p:nvSpPr>
-          <p:cNvPr id="28" name="Shape 26"/>
+          <p:cNvPr id="31" name="Shape 29"/>
           <p:cNvSpPr/>
           <p:nvPr/>
         </p:nvSpPr>
@@ -19343,7 +20145,7 @@
       </p:sp>
       <p:sp>
         <p:nvSpPr>
-          <p:cNvPr id="29" name="Text 27"/>
+          <p:cNvPr id="32" name="Text 30"/>
           <p:cNvSpPr/>
           <p:nvPr/>
         </p:nvSpPr>
@@ -19666,7 +20468,7 @@
                 <a:ea typeface="Calibri" pitchFamily="34" charset="-122"/>
                 <a:cs typeface="Calibri" pitchFamily="34" charset="-120"/>
               </a:rPr>
-              <a:t>Word Labs  •  wordlabs.app  •  Root: 'like' = similar to, resembling</a:t>
+              <a:t>Word Labs  •  wordlabs.app  •  Root: 'like' = to enjoy; to prefer</a:t>
             </a:r>
             <a:endParaRPr lang="en-US" sz="800" dirty="0"/>
           </a:p>
@@ -19805,7 +20607,7 @@
                 <a:ea typeface="Trebuchet MS" pitchFamily="34" charset="-122"/>
                 <a:cs typeface="Trebuchet MS" pitchFamily="34" charset="-120"/>
               </a:rPr>
-              <a:t>dislike</a:t>
+              <a:t>unlikable</a:t>
             </a:r>
             <a:endParaRPr lang="en-US" sz="2800" dirty="0"/>
           </a:p>
@@ -19885,7 +20687,7 @@
         </p:nvSpPr>
         <p:spPr>
           <a:xfrm>
-            <a:off x="2938272" y="2258568"/>
+            <a:off x="2221992" y="2258568"/>
             <a:ext cx="1828800" cy="292608"/>
           </a:xfrm>
           <a:prstGeom prst="rect">
@@ -19919,7 +20721,7 @@
         </p:nvSpPr>
         <p:spPr>
           <a:xfrm>
-            <a:off x="2938272" y="2258568"/>
+            <a:off x="2221992" y="2258568"/>
             <a:ext cx="1828800" cy="292608"/>
           </a:xfrm>
           <a:prstGeom prst="rect">
@@ -19944,7 +20746,7 @@
                 <a:ea typeface="Trebuchet MS" pitchFamily="34" charset="-122"/>
                 <a:cs typeface="Trebuchet MS" pitchFamily="34" charset="-120"/>
               </a:rPr>
-              <a:t>dis</a:t>
+              <a:t>un</a:t>
             </a:r>
             <a:endParaRPr lang="en-US" sz="1300" dirty="0"/>
           </a:p>
@@ -19958,7 +20760,7 @@
         </p:nvSpPr>
         <p:spPr>
           <a:xfrm>
-            <a:off x="2938272" y="2569464"/>
+            <a:off x="2221992" y="2569464"/>
             <a:ext cx="1828800" cy="201168"/>
           </a:xfrm>
           <a:prstGeom prst="rect">
@@ -19983,7 +20785,7 @@
                 <a:ea typeface="Calibri" pitchFamily="34" charset="-122"/>
                 <a:cs typeface="Calibri" pitchFamily="34" charset="-120"/>
               </a:rPr>
-              <a:t>not, opposite of</a:t>
+              <a:t>not</a:t>
             </a:r>
             <a:endParaRPr lang="en-US" sz="850" dirty="0"/>
           </a:p>
@@ -19997,7 +20799,7 @@
         </p:nvSpPr>
         <p:spPr>
           <a:xfrm>
-            <a:off x="5803392" y="2258568"/>
+            <a:off x="4370832" y="2258568"/>
             <a:ext cx="1828800" cy="292608"/>
           </a:xfrm>
           <a:prstGeom prst="rect">
@@ -20031,7 +20833,7 @@
         </p:nvSpPr>
         <p:spPr>
           <a:xfrm>
-            <a:off x="5803392" y="2258568"/>
+            <a:off x="4370832" y="2258568"/>
             <a:ext cx="1828800" cy="292608"/>
           </a:xfrm>
           <a:prstGeom prst="rect">
@@ -20070,7 +20872,7 @@
         </p:nvSpPr>
         <p:spPr>
           <a:xfrm>
-            <a:off x="5803392" y="2569464"/>
+            <a:off x="4370832" y="2569464"/>
             <a:ext cx="1828800" cy="201168"/>
           </a:xfrm>
           <a:prstGeom prst="rect">
@@ -20095,7 +20897,7 @@
                 <a:ea typeface="Calibri" pitchFamily="34" charset="-122"/>
                 <a:cs typeface="Calibri" pitchFamily="34" charset="-120"/>
               </a:rPr>
-              <a:t>resembling, similar to; to enjoy</a:t>
+              <a:t>to enjoy; to prefer</a:t>
             </a:r>
             <a:endParaRPr lang="en-US" sz="850" dirty="0"/>
           </a:p>
@@ -20104,6 +20906,118 @@
       <p:sp>
         <p:nvSpPr>
           <p:cNvPr id="22" name="Shape 20"/>
+          <p:cNvSpPr/>
+          <p:nvPr/>
+        </p:nvSpPr>
+        <p:spPr>
+          <a:xfrm>
+            <a:off x="6519672" y="2258568"/>
+            <a:ext cx="1828800" cy="292608"/>
+          </a:xfrm>
+          <a:prstGeom prst="rect">
+            <a:avLst>
+              <a:gd name="adj" fmla="val 25000"/>
+            </a:avLst>
+          </a:prstGeom>
+          <a:solidFill>
+            <a:srgbClr val="FCE7F3"/>
+          </a:solidFill>
+          <a:ln w="19050">
+            <a:solidFill>
+              <a:srgbClr val="DB2777"/>
+            </a:solidFill>
+            <a:prstDash val="solid"/>
+          </a:ln>
+          <a:effectLst>
+            <a:outerShdw sx="100000" sy="100000" kx="0" ky="0" algn="bl" rotWithShape="0" blurRad="101600" dist="38100" dir="8100000">
+              <a:srgbClr val="000000">
+                <a:alpha val="12000"/>
+              </a:srgbClr>
+            </a:outerShdw>
+          </a:effectLst>
+        </p:spPr>
+      </p:sp>
+      <p:sp>
+        <p:nvSpPr>
+          <p:cNvPr id="23" name="Text 21"/>
+          <p:cNvSpPr/>
+          <p:nvPr/>
+        </p:nvSpPr>
+        <p:spPr>
+          <a:xfrm>
+            <a:off x="6519672" y="2258568"/>
+            <a:ext cx="1828800" cy="292608"/>
+          </a:xfrm>
+          <a:prstGeom prst="rect">
+            <a:avLst/>
+          </a:prstGeom>
+          <a:noFill/>
+          <a:ln/>
+        </p:spPr>
+        <p:txBody>
+          <a:bodyPr wrap="square" lIns="0" tIns="0" rIns="0" bIns="0" rtlCol="0" anchor="ctr"/>
+          <a:lstStyle/>
+          <a:p>
+            <a:pPr algn="ctr" indent="0" marL="0">
+              <a:buNone/>
+            </a:pPr>
+            <a:r>
+              <a:rPr lang="en-US" sz="1300" b="1" dirty="0">
+                <a:solidFill>
+                  <a:srgbClr val="9D174D"/>
+                </a:solidFill>
+                <a:latin typeface="Trebuchet MS" pitchFamily="34" charset="0"/>
+                <a:ea typeface="Trebuchet MS" pitchFamily="34" charset="-122"/>
+                <a:cs typeface="Trebuchet MS" pitchFamily="34" charset="-120"/>
+              </a:rPr>
+              <a:t>able</a:t>
+            </a:r>
+            <a:endParaRPr lang="en-US" sz="1300" dirty="0"/>
+          </a:p>
+        </p:txBody>
+      </p:sp>
+      <p:sp>
+        <p:nvSpPr>
+          <p:cNvPr id="24" name="Text 22"/>
+          <p:cNvSpPr/>
+          <p:nvPr/>
+        </p:nvSpPr>
+        <p:spPr>
+          <a:xfrm>
+            <a:off x="6519672" y="2569464"/>
+            <a:ext cx="1828800" cy="201168"/>
+          </a:xfrm>
+          <a:prstGeom prst="rect">
+            <a:avLst/>
+          </a:prstGeom>
+          <a:noFill/>
+          <a:ln/>
+        </p:spPr>
+        <p:txBody>
+          <a:bodyPr wrap="square" lIns="0" tIns="0" rIns="0" bIns="0" rtlCol="0" anchor="t"/>
+          <a:lstStyle/>
+          <a:p>
+            <a:pPr algn="ctr" indent="0" marL="0">
+              <a:buNone/>
+            </a:pPr>
+            <a:r>
+              <a:rPr lang="en-US" sz="850" dirty="0">
+                <a:solidFill>
+                  <a:srgbClr val="475569"/>
+                </a:solidFill>
+                <a:latin typeface="Calibri" pitchFamily="34" charset="0"/>
+                <a:ea typeface="Calibri" pitchFamily="34" charset="-122"/>
+                <a:cs typeface="Calibri" pitchFamily="34" charset="-120"/>
+              </a:rPr>
+              <a:t>able to</a:t>
+            </a:r>
+            <a:endParaRPr lang="en-US" sz="850" dirty="0"/>
+          </a:p>
+        </p:txBody>
+      </p:sp>
+      <p:sp>
+        <p:nvSpPr>
+          <p:cNvPr id="25" name="Shape 23"/>
           <p:cNvSpPr/>
           <p:nvPr/>
         </p:nvSpPr>
@@ -20130,7 +21044,7 @@
       </p:sp>
       <p:sp>
         <p:nvSpPr>
-          <p:cNvPr id="23" name="Text 21"/>
+          <p:cNvPr id="26" name="Text 24"/>
           <p:cNvSpPr/>
           <p:nvPr/>
         </p:nvSpPr>
@@ -20169,7 +21083,7 @@
       </p:sp>
       <p:sp>
         <p:nvSpPr>
-          <p:cNvPr id="24" name="Shape 22"/>
+          <p:cNvPr id="27" name="Shape 25"/>
           <p:cNvSpPr/>
           <p:nvPr/>
         </p:nvSpPr>
@@ -20196,14 +21110,14 @@
       </p:sp>
       <p:sp>
         <p:nvSpPr>
-          <p:cNvPr id="25" name="Shape 23"/>
-          <p:cNvSpPr/>
-          <p:nvPr/>
-        </p:nvSpPr>
-        <p:spPr>
-          <a:xfrm>
-            <a:off x="2999232" y="3364992"/>
-            <a:ext cx="1645920" cy="475488"/>
+          <p:cNvPr id="28" name="Shape 26"/>
+          <p:cNvSpPr/>
+          <p:nvPr/>
+        </p:nvSpPr>
+        <p:spPr>
+          <a:xfrm>
+            <a:off x="1975104" y="3364992"/>
+            <a:ext cx="1554480" cy="475488"/>
           </a:xfrm>
           <a:prstGeom prst="rect">
             <a:avLst>
@@ -20223,14 +21137,14 @@
       </p:sp>
       <p:sp>
         <p:nvSpPr>
-          <p:cNvPr id="26" name="Text 24"/>
-          <p:cNvSpPr/>
-          <p:nvPr/>
-        </p:nvSpPr>
-        <p:spPr>
-          <a:xfrm>
-            <a:off x="2999232" y="3364992"/>
-            <a:ext cx="1645920" cy="475488"/>
+          <p:cNvPr id="29" name="Text 27"/>
+          <p:cNvSpPr/>
+          <p:nvPr/>
+        </p:nvSpPr>
+        <p:spPr>
+          <a:xfrm>
+            <a:off x="1975104" y="3364992"/>
+            <a:ext cx="1554480" cy="475488"/>
           </a:xfrm>
           <a:prstGeom prst="rect">
             <a:avLst/>
@@ -20254,7 +21168,7 @@
                 <a:ea typeface="Trebuchet MS" pitchFamily="34" charset="-122"/>
                 <a:cs typeface="Trebuchet MS" pitchFamily="34" charset="-120"/>
               </a:rPr>
-              <a:t>dis</a:t>
+              <a:t>un</a:t>
             </a:r>
             <a:endParaRPr lang="en-US" sz="1400" dirty="0"/>
           </a:p>
@@ -20262,14 +21176,14 @@
       </p:sp>
       <p:sp>
         <p:nvSpPr>
-          <p:cNvPr id="27" name="Text 25"/>
-          <p:cNvSpPr/>
-          <p:nvPr/>
-        </p:nvSpPr>
-        <p:spPr>
-          <a:xfrm>
-            <a:off x="4645152" y="3364992"/>
-            <a:ext cx="1097280" cy="475488"/>
+          <p:cNvPr id="30" name="Text 28"/>
+          <p:cNvSpPr/>
+          <p:nvPr/>
+        </p:nvSpPr>
+        <p:spPr>
+          <a:xfrm>
+            <a:off x="3529584" y="3364992"/>
+            <a:ext cx="73152" cy="475488"/>
           </a:xfrm>
           <a:prstGeom prst="rect">
             <a:avLst/>
@@ -20301,14 +21215,14 @@
       </p:sp>
       <p:sp>
         <p:nvSpPr>
-          <p:cNvPr id="28" name="Shape 26"/>
-          <p:cNvSpPr/>
-          <p:nvPr/>
-        </p:nvSpPr>
-        <p:spPr>
-          <a:xfrm>
-            <a:off x="5742432" y="3364992"/>
-            <a:ext cx="1645920" cy="475488"/>
+          <p:cNvPr id="31" name="Shape 29"/>
+          <p:cNvSpPr/>
+          <p:nvPr/>
+        </p:nvSpPr>
+        <p:spPr>
+          <a:xfrm>
+            <a:off x="3602736" y="3364992"/>
+            <a:ext cx="1554480" cy="475488"/>
           </a:xfrm>
           <a:prstGeom prst="rect">
             <a:avLst>
@@ -20328,14 +21242,14 @@
       </p:sp>
       <p:sp>
         <p:nvSpPr>
-          <p:cNvPr id="29" name="Text 27"/>
-          <p:cNvSpPr/>
-          <p:nvPr/>
-        </p:nvSpPr>
-        <p:spPr>
-          <a:xfrm>
-            <a:off x="5742432" y="3364992"/>
-            <a:ext cx="1645920" cy="475488"/>
+          <p:cNvPr id="32" name="Text 30"/>
+          <p:cNvSpPr/>
+          <p:nvPr/>
+        </p:nvSpPr>
+        <p:spPr>
+          <a:xfrm>
+            <a:off x="3602736" y="3364992"/>
+            <a:ext cx="1554480" cy="475488"/>
           </a:xfrm>
           <a:prstGeom prst="rect">
             <a:avLst/>
@@ -20359,7 +21273,7 @@
                 <a:ea typeface="Trebuchet MS" pitchFamily="34" charset="-122"/>
                 <a:cs typeface="Trebuchet MS" pitchFamily="34" charset="-120"/>
               </a:rPr>
-              <a:t>like</a:t>
+              <a:t>lik</a:t>
             </a:r>
             <a:endParaRPr lang="en-US" sz="1400" dirty="0"/>
           </a:p>
@@ -20367,7 +21281,217 @@
       </p:sp>
       <p:sp>
         <p:nvSpPr>
-          <p:cNvPr id="30" name="Shape 28"/>
+          <p:cNvPr id="33" name="Text 31"/>
+          <p:cNvSpPr/>
+          <p:nvPr/>
+        </p:nvSpPr>
+        <p:spPr>
+          <a:xfrm>
+            <a:off x="5157216" y="3364992"/>
+            <a:ext cx="73152" cy="475488"/>
+          </a:xfrm>
+          <a:prstGeom prst="rect">
+            <a:avLst/>
+          </a:prstGeom>
+          <a:noFill/>
+          <a:ln/>
+        </p:spPr>
+        <p:txBody>
+          <a:bodyPr wrap="square" lIns="0" tIns="0" rIns="0" bIns="0" rtlCol="0" anchor="ctr"/>
+          <a:lstStyle/>
+          <a:p>
+            <a:pPr algn="ctr" indent="0" marL="0">
+              <a:buNone/>
+            </a:pPr>
+            <a:r>
+              <a:rPr lang="en-US" sz="1600" b="1" dirty="0">
+                <a:solidFill>
+                  <a:srgbClr val="0D9488"/>
+                </a:solidFill>
+                <a:latin typeface="Trebuchet MS" pitchFamily="34" charset="0"/>
+                <a:ea typeface="Trebuchet MS" pitchFamily="34" charset="-122"/>
+                <a:cs typeface="Trebuchet MS" pitchFamily="34" charset="-120"/>
+              </a:rPr>
+              <a:t>·</a:t>
+            </a:r>
+            <a:endParaRPr lang="en-US" sz="1600" dirty="0"/>
+          </a:p>
+        </p:txBody>
+      </p:sp>
+      <p:sp>
+        <p:nvSpPr>
+          <p:cNvPr id="34" name="Shape 32"/>
+          <p:cNvSpPr/>
+          <p:nvPr/>
+        </p:nvSpPr>
+        <p:spPr>
+          <a:xfrm>
+            <a:off x="5230368" y="3364992"/>
+            <a:ext cx="1554480" cy="475488"/>
+          </a:xfrm>
+          <a:prstGeom prst="rect">
+            <a:avLst>
+              <a:gd name="adj" fmla="val 9615"/>
+            </a:avLst>
+          </a:prstGeom>
+          <a:solidFill>
+            <a:srgbClr val="FFFFFF"/>
+          </a:solidFill>
+          <a:ln w="12700">
+            <a:solidFill>
+              <a:srgbClr val="0D9488"/>
+            </a:solidFill>
+            <a:prstDash val="solid"/>
+          </a:ln>
+        </p:spPr>
+      </p:sp>
+      <p:sp>
+        <p:nvSpPr>
+          <p:cNvPr id="35" name="Text 33"/>
+          <p:cNvSpPr/>
+          <p:nvPr/>
+        </p:nvSpPr>
+        <p:spPr>
+          <a:xfrm>
+            <a:off x="5230368" y="3364992"/>
+            <a:ext cx="1554480" cy="475488"/>
+          </a:xfrm>
+          <a:prstGeom prst="rect">
+            <a:avLst/>
+          </a:prstGeom>
+          <a:noFill/>
+          <a:ln/>
+        </p:spPr>
+        <p:txBody>
+          <a:bodyPr wrap="square" lIns="0" tIns="0" rIns="0" bIns="0" rtlCol="0" anchor="ctr"/>
+          <a:lstStyle/>
+          <a:p>
+            <a:pPr algn="ctr" indent="0" marL="0">
+              <a:buNone/>
+            </a:pPr>
+            <a:r>
+              <a:rPr lang="en-US" sz="1400" b="1" dirty="0">
+                <a:solidFill>
+                  <a:srgbClr val="0D9488"/>
+                </a:solidFill>
+                <a:latin typeface="Trebuchet MS" pitchFamily="34" charset="0"/>
+                <a:ea typeface="Trebuchet MS" pitchFamily="34" charset="-122"/>
+                <a:cs typeface="Trebuchet MS" pitchFamily="34" charset="-120"/>
+              </a:rPr>
+              <a:t>a</a:t>
+            </a:r>
+            <a:endParaRPr lang="en-US" sz="1400" dirty="0"/>
+          </a:p>
+        </p:txBody>
+      </p:sp>
+      <p:sp>
+        <p:nvSpPr>
+          <p:cNvPr id="36" name="Text 34"/>
+          <p:cNvSpPr/>
+          <p:nvPr/>
+        </p:nvSpPr>
+        <p:spPr>
+          <a:xfrm>
+            <a:off x="6784848" y="3364992"/>
+            <a:ext cx="73152" cy="475488"/>
+          </a:xfrm>
+          <a:prstGeom prst="rect">
+            <a:avLst/>
+          </a:prstGeom>
+          <a:noFill/>
+          <a:ln/>
+        </p:spPr>
+        <p:txBody>
+          <a:bodyPr wrap="square" lIns="0" tIns="0" rIns="0" bIns="0" rtlCol="0" anchor="ctr"/>
+          <a:lstStyle/>
+          <a:p>
+            <a:pPr algn="ctr" indent="0" marL="0">
+              <a:buNone/>
+            </a:pPr>
+            <a:r>
+              <a:rPr lang="en-US" sz="1600" b="1" dirty="0">
+                <a:solidFill>
+                  <a:srgbClr val="0D9488"/>
+                </a:solidFill>
+                <a:latin typeface="Trebuchet MS" pitchFamily="34" charset="0"/>
+                <a:ea typeface="Trebuchet MS" pitchFamily="34" charset="-122"/>
+                <a:cs typeface="Trebuchet MS" pitchFamily="34" charset="-120"/>
+              </a:rPr>
+              <a:t>·</a:t>
+            </a:r>
+            <a:endParaRPr lang="en-US" sz="1600" dirty="0"/>
+          </a:p>
+        </p:txBody>
+      </p:sp>
+      <p:sp>
+        <p:nvSpPr>
+          <p:cNvPr id="37" name="Shape 35"/>
+          <p:cNvSpPr/>
+          <p:nvPr/>
+        </p:nvSpPr>
+        <p:spPr>
+          <a:xfrm>
+            <a:off x="6858000" y="3364992"/>
+            <a:ext cx="1554480" cy="475488"/>
+          </a:xfrm>
+          <a:prstGeom prst="rect">
+            <a:avLst>
+              <a:gd name="adj" fmla="val 9615"/>
+            </a:avLst>
+          </a:prstGeom>
+          <a:solidFill>
+            <a:srgbClr val="FFFFFF"/>
+          </a:solidFill>
+          <a:ln w="12700">
+            <a:solidFill>
+              <a:srgbClr val="0D9488"/>
+            </a:solidFill>
+            <a:prstDash val="solid"/>
+          </a:ln>
+        </p:spPr>
+      </p:sp>
+      <p:sp>
+        <p:nvSpPr>
+          <p:cNvPr id="38" name="Text 36"/>
+          <p:cNvSpPr/>
+          <p:nvPr/>
+        </p:nvSpPr>
+        <p:spPr>
+          <a:xfrm>
+            <a:off x="6858000" y="3364992"/>
+            <a:ext cx="1554480" cy="475488"/>
+          </a:xfrm>
+          <a:prstGeom prst="rect">
+            <a:avLst/>
+          </a:prstGeom>
+          <a:noFill/>
+          <a:ln/>
+        </p:spPr>
+        <p:txBody>
+          <a:bodyPr wrap="square" lIns="0" tIns="0" rIns="0" bIns="0" rtlCol="0" anchor="ctr"/>
+          <a:lstStyle/>
+          <a:p>
+            <a:pPr algn="ctr" indent="0" marL="0">
+              <a:buNone/>
+            </a:pPr>
+            <a:r>
+              <a:rPr lang="en-US" sz="1400" b="1" dirty="0">
+                <a:solidFill>
+                  <a:srgbClr val="0D9488"/>
+                </a:solidFill>
+                <a:latin typeface="Trebuchet MS" pitchFamily="34" charset="0"/>
+                <a:ea typeface="Trebuchet MS" pitchFamily="34" charset="-122"/>
+                <a:cs typeface="Trebuchet MS" pitchFamily="34" charset="-120"/>
+              </a:rPr>
+              <a:t>ble</a:t>
+            </a:r>
+            <a:endParaRPr lang="en-US" sz="1400" dirty="0"/>
+          </a:p>
+        </p:txBody>
+      </p:sp>
+      <p:sp>
+        <p:nvSpPr>
+          <p:cNvPr id="39" name="Shape 37"/>
           <p:cNvSpPr/>
           <p:nvPr/>
         </p:nvSpPr>
@@ -20394,7 +21518,7 @@
       </p:sp>
       <p:sp>
         <p:nvSpPr>
-          <p:cNvPr id="31" name="Text 29"/>
+          <p:cNvPr id="40" name="Text 38"/>
           <p:cNvSpPr/>
           <p:nvPr/>
         </p:nvSpPr>
@@ -20433,7 +21557,7 @@
       </p:sp>
       <p:sp>
         <p:nvSpPr>
-          <p:cNvPr id="32" name="Shape 30"/>
+          <p:cNvPr id="41" name="Shape 39"/>
           <p:cNvSpPr/>
           <p:nvPr/>
         </p:nvSpPr>
@@ -20460,7 +21584,7 @@
       </p:sp>
       <p:sp>
         <p:nvSpPr>
-          <p:cNvPr id="33" name="Text 31"/>
+          <p:cNvPr id="42" name="Text 40"/>
           <p:cNvSpPr/>
           <p:nvPr/>
         </p:nvSpPr>
@@ -20783,7 +21907,7 @@
                 <a:ea typeface="Calibri" pitchFamily="34" charset="-122"/>
                 <a:cs typeface="Calibri" pitchFamily="34" charset="-120"/>
               </a:rPr>
-              <a:t>Word Labs  •  wordlabs.app  •  Root: 'like' = similar to, resembling</a:t>
+              <a:t>Word Labs  •  wordlabs.app  •  Root: 'like' = to enjoy; to prefer</a:t>
             </a:r>
             <a:endParaRPr lang="en-US" sz="800" dirty="0"/>
           </a:p>
@@ -20922,7 +22046,7 @@
                 <a:ea typeface="Trebuchet MS" pitchFamily="34" charset="-122"/>
                 <a:cs typeface="Trebuchet MS" pitchFamily="34" charset="-120"/>
               </a:rPr>
-              <a:t>dislike</a:t>
+              <a:t>unlikable</a:t>
             </a:r>
             <a:endParaRPr lang="en-US" sz="2800" dirty="0"/>
           </a:p>
@@ -21002,7 +22126,7 @@
         </p:nvSpPr>
         <p:spPr>
           <a:xfrm>
-            <a:off x="2938272" y="2258568"/>
+            <a:off x="2221992" y="2258568"/>
             <a:ext cx="1828800" cy="292608"/>
           </a:xfrm>
           <a:prstGeom prst="rect">
@@ -21036,7 +22160,7 @@
         </p:nvSpPr>
         <p:spPr>
           <a:xfrm>
-            <a:off x="2938272" y="2258568"/>
+            <a:off x="2221992" y="2258568"/>
             <a:ext cx="1828800" cy="292608"/>
           </a:xfrm>
           <a:prstGeom prst="rect">
@@ -21061,7 +22185,7 @@
                 <a:ea typeface="Trebuchet MS" pitchFamily="34" charset="-122"/>
                 <a:cs typeface="Trebuchet MS" pitchFamily="34" charset="-120"/>
               </a:rPr>
-              <a:t>dis</a:t>
+              <a:t>un</a:t>
             </a:r>
             <a:endParaRPr lang="en-US" sz="1300" dirty="0"/>
           </a:p>
@@ -21075,7 +22199,7 @@
         </p:nvSpPr>
         <p:spPr>
           <a:xfrm>
-            <a:off x="2938272" y="2569464"/>
+            <a:off x="2221992" y="2569464"/>
             <a:ext cx="1828800" cy="201168"/>
           </a:xfrm>
           <a:prstGeom prst="rect">
@@ -21100,7 +22224,7 @@
                 <a:ea typeface="Calibri" pitchFamily="34" charset="-122"/>
                 <a:cs typeface="Calibri" pitchFamily="34" charset="-120"/>
               </a:rPr>
-              <a:t>not, opposite of</a:t>
+              <a:t>not</a:t>
             </a:r>
             <a:endParaRPr lang="en-US" sz="850" dirty="0"/>
           </a:p>
@@ -21114,7 +22238,7 @@
         </p:nvSpPr>
         <p:spPr>
           <a:xfrm>
-            <a:off x="5803392" y="2258568"/>
+            <a:off x="4370832" y="2258568"/>
             <a:ext cx="1828800" cy="292608"/>
           </a:xfrm>
           <a:prstGeom prst="rect">
@@ -21148,7 +22272,7 @@
         </p:nvSpPr>
         <p:spPr>
           <a:xfrm>
-            <a:off x="5803392" y="2258568"/>
+            <a:off x="4370832" y="2258568"/>
             <a:ext cx="1828800" cy="292608"/>
           </a:xfrm>
           <a:prstGeom prst="rect">
@@ -21187,7 +22311,7 @@
         </p:nvSpPr>
         <p:spPr>
           <a:xfrm>
-            <a:off x="5803392" y="2569464"/>
+            <a:off x="4370832" y="2569464"/>
             <a:ext cx="1828800" cy="201168"/>
           </a:xfrm>
           <a:prstGeom prst="rect">
@@ -21212,7 +22336,7 @@
                 <a:ea typeface="Calibri" pitchFamily="34" charset="-122"/>
                 <a:cs typeface="Calibri" pitchFamily="34" charset="-120"/>
               </a:rPr>
-              <a:t>resembling, similar to; to enjoy</a:t>
+              <a:t>to enjoy; to prefer</a:t>
             </a:r>
             <a:endParaRPr lang="en-US" sz="850" dirty="0"/>
           </a:p>
@@ -21221,6 +22345,118 @@
       <p:sp>
         <p:nvSpPr>
           <p:cNvPr id="22" name="Shape 20"/>
+          <p:cNvSpPr/>
+          <p:nvPr/>
+        </p:nvSpPr>
+        <p:spPr>
+          <a:xfrm>
+            <a:off x="6519672" y="2258568"/>
+            <a:ext cx="1828800" cy="292608"/>
+          </a:xfrm>
+          <a:prstGeom prst="rect">
+            <a:avLst>
+              <a:gd name="adj" fmla="val 25000"/>
+            </a:avLst>
+          </a:prstGeom>
+          <a:solidFill>
+            <a:srgbClr val="FCE7F3"/>
+          </a:solidFill>
+          <a:ln w="19050">
+            <a:solidFill>
+              <a:srgbClr val="DB2777"/>
+            </a:solidFill>
+            <a:prstDash val="solid"/>
+          </a:ln>
+          <a:effectLst>
+            <a:outerShdw sx="100000" sy="100000" kx="0" ky="0" algn="bl" rotWithShape="0" blurRad="101600" dist="38100" dir="8100000">
+              <a:srgbClr val="000000">
+                <a:alpha val="12000"/>
+              </a:srgbClr>
+            </a:outerShdw>
+          </a:effectLst>
+        </p:spPr>
+      </p:sp>
+      <p:sp>
+        <p:nvSpPr>
+          <p:cNvPr id="23" name="Text 21"/>
+          <p:cNvSpPr/>
+          <p:nvPr/>
+        </p:nvSpPr>
+        <p:spPr>
+          <a:xfrm>
+            <a:off x="6519672" y="2258568"/>
+            <a:ext cx="1828800" cy="292608"/>
+          </a:xfrm>
+          <a:prstGeom prst="rect">
+            <a:avLst/>
+          </a:prstGeom>
+          <a:noFill/>
+          <a:ln/>
+        </p:spPr>
+        <p:txBody>
+          <a:bodyPr wrap="square" lIns="0" tIns="0" rIns="0" bIns="0" rtlCol="0" anchor="ctr"/>
+          <a:lstStyle/>
+          <a:p>
+            <a:pPr algn="ctr" indent="0" marL="0">
+              <a:buNone/>
+            </a:pPr>
+            <a:r>
+              <a:rPr lang="en-US" sz="1300" b="1" dirty="0">
+                <a:solidFill>
+                  <a:srgbClr val="9D174D"/>
+                </a:solidFill>
+                <a:latin typeface="Trebuchet MS" pitchFamily="34" charset="0"/>
+                <a:ea typeface="Trebuchet MS" pitchFamily="34" charset="-122"/>
+                <a:cs typeface="Trebuchet MS" pitchFamily="34" charset="-120"/>
+              </a:rPr>
+              <a:t>able</a:t>
+            </a:r>
+            <a:endParaRPr lang="en-US" sz="1300" dirty="0"/>
+          </a:p>
+        </p:txBody>
+      </p:sp>
+      <p:sp>
+        <p:nvSpPr>
+          <p:cNvPr id="24" name="Text 22"/>
+          <p:cNvSpPr/>
+          <p:nvPr/>
+        </p:nvSpPr>
+        <p:spPr>
+          <a:xfrm>
+            <a:off x="6519672" y="2569464"/>
+            <a:ext cx="1828800" cy="201168"/>
+          </a:xfrm>
+          <a:prstGeom prst="rect">
+            <a:avLst/>
+          </a:prstGeom>
+          <a:noFill/>
+          <a:ln/>
+        </p:spPr>
+        <p:txBody>
+          <a:bodyPr wrap="square" lIns="0" tIns="0" rIns="0" bIns="0" rtlCol="0" anchor="t"/>
+          <a:lstStyle/>
+          <a:p>
+            <a:pPr algn="ctr" indent="0" marL="0">
+              <a:buNone/>
+            </a:pPr>
+            <a:r>
+              <a:rPr lang="en-US" sz="850" dirty="0">
+                <a:solidFill>
+                  <a:srgbClr val="475569"/>
+                </a:solidFill>
+                <a:latin typeface="Calibri" pitchFamily="34" charset="0"/>
+                <a:ea typeface="Calibri" pitchFamily="34" charset="-122"/>
+                <a:cs typeface="Calibri" pitchFamily="34" charset="-120"/>
+              </a:rPr>
+              <a:t>able to</a:t>
+            </a:r>
+            <a:endParaRPr lang="en-US" sz="850" dirty="0"/>
+          </a:p>
+        </p:txBody>
+      </p:sp>
+      <p:sp>
+        <p:nvSpPr>
+          <p:cNvPr id="25" name="Shape 23"/>
           <p:cNvSpPr/>
           <p:nvPr/>
         </p:nvSpPr>
@@ -21247,7 +22483,7 @@
       </p:sp>
       <p:sp>
         <p:nvSpPr>
-          <p:cNvPr id="23" name="Text 21"/>
+          <p:cNvPr id="26" name="Text 24"/>
           <p:cNvSpPr/>
           <p:nvPr/>
         </p:nvSpPr>
@@ -21286,7 +22522,7 @@
       </p:sp>
       <p:sp>
         <p:nvSpPr>
-          <p:cNvPr id="24" name="Shape 22"/>
+          <p:cNvPr id="27" name="Shape 25"/>
           <p:cNvSpPr/>
           <p:nvPr/>
         </p:nvSpPr>
@@ -21313,14 +22549,14 @@
       </p:sp>
       <p:sp>
         <p:nvSpPr>
-          <p:cNvPr id="25" name="Shape 23"/>
-          <p:cNvSpPr/>
-          <p:nvPr/>
-        </p:nvSpPr>
-        <p:spPr>
-          <a:xfrm>
-            <a:off x="2999232" y="3364992"/>
-            <a:ext cx="1645920" cy="475488"/>
+          <p:cNvPr id="28" name="Shape 26"/>
+          <p:cNvSpPr/>
+          <p:nvPr/>
+        </p:nvSpPr>
+        <p:spPr>
+          <a:xfrm>
+            <a:off x="1975104" y="3364992"/>
+            <a:ext cx="1554480" cy="475488"/>
           </a:xfrm>
           <a:prstGeom prst="rect">
             <a:avLst>
@@ -21340,14 +22576,14 @@
       </p:sp>
       <p:sp>
         <p:nvSpPr>
-          <p:cNvPr id="26" name="Text 24"/>
-          <p:cNvSpPr/>
-          <p:nvPr/>
-        </p:nvSpPr>
-        <p:spPr>
-          <a:xfrm>
-            <a:off x="2999232" y="3364992"/>
-            <a:ext cx="1645920" cy="475488"/>
+          <p:cNvPr id="29" name="Text 27"/>
+          <p:cNvSpPr/>
+          <p:nvPr/>
+        </p:nvSpPr>
+        <p:spPr>
+          <a:xfrm>
+            <a:off x="1975104" y="3364992"/>
+            <a:ext cx="1554480" cy="475488"/>
           </a:xfrm>
           <a:prstGeom prst="rect">
             <a:avLst/>
@@ -21371,7 +22607,7 @@
                 <a:ea typeface="Trebuchet MS" pitchFamily="34" charset="-122"/>
                 <a:cs typeface="Trebuchet MS" pitchFamily="34" charset="-120"/>
               </a:rPr>
-              <a:t>dis</a:t>
+              <a:t>un</a:t>
             </a:r>
             <a:endParaRPr lang="en-US" sz="1400" dirty="0"/>
           </a:p>
@@ -21379,14 +22615,14 @@
       </p:sp>
       <p:sp>
         <p:nvSpPr>
-          <p:cNvPr id="27" name="Text 25"/>
-          <p:cNvSpPr/>
-          <p:nvPr/>
-        </p:nvSpPr>
-        <p:spPr>
-          <a:xfrm>
-            <a:off x="4645152" y="3364992"/>
-            <a:ext cx="1097280" cy="475488"/>
+          <p:cNvPr id="30" name="Text 28"/>
+          <p:cNvSpPr/>
+          <p:nvPr/>
+        </p:nvSpPr>
+        <p:spPr>
+          <a:xfrm>
+            <a:off x="3529584" y="3364992"/>
+            <a:ext cx="73152" cy="475488"/>
           </a:xfrm>
           <a:prstGeom prst="rect">
             <a:avLst/>
@@ -21418,14 +22654,14 @@
       </p:sp>
       <p:sp>
         <p:nvSpPr>
-          <p:cNvPr id="28" name="Shape 26"/>
-          <p:cNvSpPr/>
-          <p:nvPr/>
-        </p:nvSpPr>
-        <p:spPr>
-          <a:xfrm>
-            <a:off x="5742432" y="3364992"/>
-            <a:ext cx="1645920" cy="475488"/>
+          <p:cNvPr id="31" name="Shape 29"/>
+          <p:cNvSpPr/>
+          <p:nvPr/>
+        </p:nvSpPr>
+        <p:spPr>
+          <a:xfrm>
+            <a:off x="3602736" y="3364992"/>
+            <a:ext cx="1554480" cy="475488"/>
           </a:xfrm>
           <a:prstGeom prst="rect">
             <a:avLst>
@@ -21445,14 +22681,14 @@
       </p:sp>
       <p:sp>
         <p:nvSpPr>
-          <p:cNvPr id="29" name="Text 27"/>
-          <p:cNvSpPr/>
-          <p:nvPr/>
-        </p:nvSpPr>
-        <p:spPr>
-          <a:xfrm>
-            <a:off x="5742432" y="3364992"/>
-            <a:ext cx="1645920" cy="475488"/>
+          <p:cNvPr id="32" name="Text 30"/>
+          <p:cNvSpPr/>
+          <p:nvPr/>
+        </p:nvSpPr>
+        <p:spPr>
+          <a:xfrm>
+            <a:off x="3602736" y="3364992"/>
+            <a:ext cx="1554480" cy="475488"/>
           </a:xfrm>
           <a:prstGeom prst="rect">
             <a:avLst/>
@@ -21476,7 +22712,7 @@
                 <a:ea typeface="Trebuchet MS" pitchFamily="34" charset="-122"/>
                 <a:cs typeface="Trebuchet MS" pitchFamily="34" charset="-120"/>
               </a:rPr>
-              <a:t>like</a:t>
+              <a:t>lik</a:t>
             </a:r>
             <a:endParaRPr lang="en-US" sz="1400" dirty="0"/>
           </a:p>
@@ -21484,7 +22720,217 @@
       </p:sp>
       <p:sp>
         <p:nvSpPr>
-          <p:cNvPr id="30" name="Shape 28"/>
+          <p:cNvPr id="33" name="Text 31"/>
+          <p:cNvSpPr/>
+          <p:nvPr/>
+        </p:nvSpPr>
+        <p:spPr>
+          <a:xfrm>
+            <a:off x="5157216" y="3364992"/>
+            <a:ext cx="73152" cy="475488"/>
+          </a:xfrm>
+          <a:prstGeom prst="rect">
+            <a:avLst/>
+          </a:prstGeom>
+          <a:noFill/>
+          <a:ln/>
+        </p:spPr>
+        <p:txBody>
+          <a:bodyPr wrap="square" lIns="0" tIns="0" rIns="0" bIns="0" rtlCol="0" anchor="ctr"/>
+          <a:lstStyle/>
+          <a:p>
+            <a:pPr algn="ctr" indent="0" marL="0">
+              <a:buNone/>
+            </a:pPr>
+            <a:r>
+              <a:rPr lang="en-US" sz="1600" b="1" dirty="0">
+                <a:solidFill>
+                  <a:srgbClr val="0D9488"/>
+                </a:solidFill>
+                <a:latin typeface="Trebuchet MS" pitchFamily="34" charset="0"/>
+                <a:ea typeface="Trebuchet MS" pitchFamily="34" charset="-122"/>
+                <a:cs typeface="Trebuchet MS" pitchFamily="34" charset="-120"/>
+              </a:rPr>
+              <a:t>·</a:t>
+            </a:r>
+            <a:endParaRPr lang="en-US" sz="1600" dirty="0"/>
+          </a:p>
+        </p:txBody>
+      </p:sp>
+      <p:sp>
+        <p:nvSpPr>
+          <p:cNvPr id="34" name="Shape 32"/>
+          <p:cNvSpPr/>
+          <p:nvPr/>
+        </p:nvSpPr>
+        <p:spPr>
+          <a:xfrm>
+            <a:off x="5230368" y="3364992"/>
+            <a:ext cx="1554480" cy="475488"/>
+          </a:xfrm>
+          <a:prstGeom prst="rect">
+            <a:avLst>
+              <a:gd name="adj" fmla="val 9615"/>
+            </a:avLst>
+          </a:prstGeom>
+          <a:solidFill>
+            <a:srgbClr val="FFFFFF"/>
+          </a:solidFill>
+          <a:ln w="12700">
+            <a:solidFill>
+              <a:srgbClr val="0D9488"/>
+            </a:solidFill>
+            <a:prstDash val="solid"/>
+          </a:ln>
+        </p:spPr>
+      </p:sp>
+      <p:sp>
+        <p:nvSpPr>
+          <p:cNvPr id="35" name="Text 33"/>
+          <p:cNvSpPr/>
+          <p:nvPr/>
+        </p:nvSpPr>
+        <p:spPr>
+          <a:xfrm>
+            <a:off x="5230368" y="3364992"/>
+            <a:ext cx="1554480" cy="475488"/>
+          </a:xfrm>
+          <a:prstGeom prst="rect">
+            <a:avLst/>
+          </a:prstGeom>
+          <a:noFill/>
+          <a:ln/>
+        </p:spPr>
+        <p:txBody>
+          <a:bodyPr wrap="square" lIns="0" tIns="0" rIns="0" bIns="0" rtlCol="0" anchor="ctr"/>
+          <a:lstStyle/>
+          <a:p>
+            <a:pPr algn="ctr" indent="0" marL="0">
+              <a:buNone/>
+            </a:pPr>
+            <a:r>
+              <a:rPr lang="en-US" sz="1400" b="1" dirty="0">
+                <a:solidFill>
+                  <a:srgbClr val="0D9488"/>
+                </a:solidFill>
+                <a:latin typeface="Trebuchet MS" pitchFamily="34" charset="0"/>
+                <a:ea typeface="Trebuchet MS" pitchFamily="34" charset="-122"/>
+                <a:cs typeface="Trebuchet MS" pitchFamily="34" charset="-120"/>
+              </a:rPr>
+              <a:t>a</a:t>
+            </a:r>
+            <a:endParaRPr lang="en-US" sz="1400" dirty="0"/>
+          </a:p>
+        </p:txBody>
+      </p:sp>
+      <p:sp>
+        <p:nvSpPr>
+          <p:cNvPr id="36" name="Text 34"/>
+          <p:cNvSpPr/>
+          <p:nvPr/>
+        </p:nvSpPr>
+        <p:spPr>
+          <a:xfrm>
+            <a:off x="6784848" y="3364992"/>
+            <a:ext cx="73152" cy="475488"/>
+          </a:xfrm>
+          <a:prstGeom prst="rect">
+            <a:avLst/>
+          </a:prstGeom>
+          <a:noFill/>
+          <a:ln/>
+        </p:spPr>
+        <p:txBody>
+          <a:bodyPr wrap="square" lIns="0" tIns="0" rIns="0" bIns="0" rtlCol="0" anchor="ctr"/>
+          <a:lstStyle/>
+          <a:p>
+            <a:pPr algn="ctr" indent="0" marL="0">
+              <a:buNone/>
+            </a:pPr>
+            <a:r>
+              <a:rPr lang="en-US" sz="1600" b="1" dirty="0">
+                <a:solidFill>
+                  <a:srgbClr val="0D9488"/>
+                </a:solidFill>
+                <a:latin typeface="Trebuchet MS" pitchFamily="34" charset="0"/>
+                <a:ea typeface="Trebuchet MS" pitchFamily="34" charset="-122"/>
+                <a:cs typeface="Trebuchet MS" pitchFamily="34" charset="-120"/>
+              </a:rPr>
+              <a:t>·</a:t>
+            </a:r>
+            <a:endParaRPr lang="en-US" sz="1600" dirty="0"/>
+          </a:p>
+        </p:txBody>
+      </p:sp>
+      <p:sp>
+        <p:nvSpPr>
+          <p:cNvPr id="37" name="Shape 35"/>
+          <p:cNvSpPr/>
+          <p:nvPr/>
+        </p:nvSpPr>
+        <p:spPr>
+          <a:xfrm>
+            <a:off x="6858000" y="3364992"/>
+            <a:ext cx="1554480" cy="475488"/>
+          </a:xfrm>
+          <a:prstGeom prst="rect">
+            <a:avLst>
+              <a:gd name="adj" fmla="val 9615"/>
+            </a:avLst>
+          </a:prstGeom>
+          <a:solidFill>
+            <a:srgbClr val="FFFFFF"/>
+          </a:solidFill>
+          <a:ln w="12700">
+            <a:solidFill>
+              <a:srgbClr val="0D9488"/>
+            </a:solidFill>
+            <a:prstDash val="solid"/>
+          </a:ln>
+        </p:spPr>
+      </p:sp>
+      <p:sp>
+        <p:nvSpPr>
+          <p:cNvPr id="38" name="Text 36"/>
+          <p:cNvSpPr/>
+          <p:nvPr/>
+        </p:nvSpPr>
+        <p:spPr>
+          <a:xfrm>
+            <a:off x="6858000" y="3364992"/>
+            <a:ext cx="1554480" cy="475488"/>
+          </a:xfrm>
+          <a:prstGeom prst="rect">
+            <a:avLst/>
+          </a:prstGeom>
+          <a:noFill/>
+          <a:ln/>
+        </p:spPr>
+        <p:txBody>
+          <a:bodyPr wrap="square" lIns="0" tIns="0" rIns="0" bIns="0" rtlCol="0" anchor="ctr"/>
+          <a:lstStyle/>
+          <a:p>
+            <a:pPr algn="ctr" indent="0" marL="0">
+              <a:buNone/>
+            </a:pPr>
+            <a:r>
+              <a:rPr lang="en-US" sz="1400" b="1" dirty="0">
+                <a:solidFill>
+                  <a:srgbClr val="0D9488"/>
+                </a:solidFill>
+                <a:latin typeface="Trebuchet MS" pitchFamily="34" charset="0"/>
+                <a:ea typeface="Trebuchet MS" pitchFamily="34" charset="-122"/>
+                <a:cs typeface="Trebuchet MS" pitchFamily="34" charset="-120"/>
+              </a:rPr>
+              <a:t>ble</a:t>
+            </a:r>
+            <a:endParaRPr lang="en-US" sz="1400" dirty="0"/>
+          </a:p>
+        </p:txBody>
+      </p:sp>
+      <p:sp>
+        <p:nvSpPr>
+          <p:cNvPr id="39" name="Shape 37"/>
           <p:cNvSpPr/>
           <p:nvPr/>
         </p:nvSpPr>
@@ -21511,7 +22957,7 @@
       </p:sp>
       <p:sp>
         <p:nvSpPr>
-          <p:cNvPr id="31" name="Text 29"/>
+          <p:cNvPr id="40" name="Text 38"/>
           <p:cNvSpPr/>
           <p:nvPr/>
         </p:nvSpPr>
@@ -21550,7 +22996,7 @@
       </p:sp>
       <p:sp>
         <p:nvSpPr>
-          <p:cNvPr id="32" name="Shape 30"/>
+          <p:cNvPr id="41" name="Shape 39"/>
           <p:cNvSpPr/>
           <p:nvPr/>
         </p:nvSpPr>
@@ -21577,13 +23023,13 @@
       </p:sp>
       <p:sp>
         <p:nvSpPr>
-          <p:cNvPr id="33" name="Shape 31"/>
-          <p:cNvSpPr/>
-          <p:nvPr/>
-        </p:nvSpPr>
-        <p:spPr>
-          <a:xfrm>
-            <a:off x="2124837" y="4169664"/>
+          <p:cNvPr id="42" name="Shape 40"/>
+          <p:cNvSpPr/>
+          <p:nvPr/>
+        </p:nvSpPr>
+        <p:spPr>
+          <a:xfrm>
+            <a:off x="2023872" y="4169664"/>
             <a:ext cx="685800" cy="475488"/>
           </a:xfrm>
           <a:prstGeom prst="rect">
@@ -21604,13 +23050,13 @@
       </p:sp>
       <p:sp>
         <p:nvSpPr>
-          <p:cNvPr id="34" name="Text 32"/>
-          <p:cNvSpPr/>
-          <p:nvPr/>
-        </p:nvSpPr>
-        <p:spPr>
-          <a:xfrm>
-            <a:off x="2124837" y="4169664"/>
+          <p:cNvPr id="43" name="Text 41"/>
+          <p:cNvSpPr/>
+          <p:nvPr/>
+        </p:nvSpPr>
+        <p:spPr>
+          <a:xfrm>
+            <a:off x="2023872" y="4169664"/>
             <a:ext cx="685800" cy="475488"/>
           </a:xfrm>
           <a:prstGeom prst="rect">
@@ -21635,7 +23081,7 @@
                 <a:ea typeface="Trebuchet MS" pitchFamily="34" charset="-122"/>
                 <a:cs typeface="Trebuchet MS" pitchFamily="34" charset="-120"/>
               </a:rPr>
-              <a:t>d</a:t>
+              <a:t>u</a:t>
             </a:r>
             <a:endParaRPr lang="en-US" sz="900" dirty="0"/>
           </a:p>
@@ -21643,13 +23089,13 @@
       </p:sp>
       <p:sp>
         <p:nvSpPr>
-          <p:cNvPr id="35" name="Shape 33"/>
-          <p:cNvSpPr/>
-          <p:nvPr/>
-        </p:nvSpPr>
-        <p:spPr>
-          <a:xfrm>
-            <a:off x="3033522" y="4169664"/>
+          <p:cNvPr id="44" name="Shape 42"/>
+          <p:cNvSpPr/>
+          <p:nvPr/>
+        </p:nvSpPr>
+        <p:spPr>
+          <a:xfrm>
+            <a:off x="2831592" y="4169664"/>
             <a:ext cx="685800" cy="475488"/>
           </a:xfrm>
           <a:prstGeom prst="rect">
@@ -21670,13 +23116,13 @@
       </p:sp>
       <p:sp>
         <p:nvSpPr>
-          <p:cNvPr id="36" name="Text 34"/>
-          <p:cNvSpPr/>
-          <p:nvPr/>
-        </p:nvSpPr>
-        <p:spPr>
-          <a:xfrm>
-            <a:off x="3033522" y="4169664"/>
+          <p:cNvPr id="45" name="Text 43"/>
+          <p:cNvSpPr/>
+          <p:nvPr/>
+        </p:nvSpPr>
+        <p:spPr>
+          <a:xfrm>
+            <a:off x="2831592" y="4169664"/>
             <a:ext cx="685800" cy="475488"/>
           </a:xfrm>
           <a:prstGeom prst="rect">
@@ -21701,7 +23147,7 @@
                 <a:ea typeface="Trebuchet MS" pitchFamily="34" charset="-122"/>
                 <a:cs typeface="Trebuchet MS" pitchFamily="34" charset="-120"/>
               </a:rPr>
-              <a:t>i</a:t>
+              <a:t>n</a:t>
             </a:r>
             <a:endParaRPr lang="en-US" sz="900" dirty="0"/>
           </a:p>
@@ -21709,13 +23155,13 @@
       </p:sp>
       <p:sp>
         <p:nvSpPr>
-          <p:cNvPr id="37" name="Shape 35"/>
-          <p:cNvSpPr/>
-          <p:nvPr/>
-        </p:nvSpPr>
-        <p:spPr>
-          <a:xfrm>
-            <a:off x="3942207" y="4169664"/>
+          <p:cNvPr id="46" name="Shape 44"/>
+          <p:cNvSpPr/>
+          <p:nvPr/>
+        </p:nvSpPr>
+        <p:spPr>
+          <a:xfrm>
+            <a:off x="3639312" y="4169664"/>
             <a:ext cx="685800" cy="475488"/>
           </a:xfrm>
           <a:prstGeom prst="rect">
@@ -21736,13 +23182,13 @@
       </p:sp>
       <p:sp>
         <p:nvSpPr>
-          <p:cNvPr id="38" name="Text 36"/>
-          <p:cNvSpPr/>
-          <p:nvPr/>
-        </p:nvSpPr>
-        <p:spPr>
-          <a:xfrm>
-            <a:off x="3942207" y="4169664"/>
+          <p:cNvPr id="47" name="Text 45"/>
+          <p:cNvSpPr/>
+          <p:nvPr/>
+        </p:nvSpPr>
+        <p:spPr>
+          <a:xfrm>
+            <a:off x="3639312" y="4169664"/>
             <a:ext cx="685800" cy="475488"/>
           </a:xfrm>
           <a:prstGeom prst="rect">
@@ -21767,7 +23213,7 @@
                 <a:ea typeface="Trebuchet MS" pitchFamily="34" charset="-122"/>
                 <a:cs typeface="Trebuchet MS" pitchFamily="34" charset="-120"/>
               </a:rPr>
-              <a:t>s</a:t>
+              <a:t>l</a:t>
             </a:r>
             <a:endParaRPr lang="en-US" sz="900" dirty="0"/>
           </a:p>
@@ -21775,13 +23221,13 @@
       </p:sp>
       <p:sp>
         <p:nvSpPr>
-          <p:cNvPr id="39" name="Shape 37"/>
-          <p:cNvSpPr/>
-          <p:nvPr/>
-        </p:nvSpPr>
-        <p:spPr>
-          <a:xfrm>
-            <a:off x="4850892" y="4169664"/>
+          <p:cNvPr id="48" name="Shape 46"/>
+          <p:cNvSpPr/>
+          <p:nvPr/>
+        </p:nvSpPr>
+        <p:spPr>
+          <a:xfrm>
+            <a:off x="4447032" y="4169664"/>
             <a:ext cx="685800" cy="475488"/>
           </a:xfrm>
           <a:prstGeom prst="rect">
@@ -21802,13 +23248,13 @@
       </p:sp>
       <p:sp>
         <p:nvSpPr>
-          <p:cNvPr id="40" name="Text 38"/>
-          <p:cNvSpPr/>
-          <p:nvPr/>
-        </p:nvSpPr>
-        <p:spPr>
-          <a:xfrm>
-            <a:off x="4850892" y="4169664"/>
+          <p:cNvPr id="49" name="Text 47"/>
+          <p:cNvSpPr/>
+          <p:nvPr/>
+        </p:nvSpPr>
+        <p:spPr>
+          <a:xfrm>
+            <a:off x="4447032" y="4169664"/>
             <a:ext cx="685800" cy="475488"/>
           </a:xfrm>
           <a:prstGeom prst="rect">
@@ -21833,7 +23279,7 @@
                 <a:ea typeface="Trebuchet MS" pitchFamily="34" charset="-122"/>
                 <a:cs typeface="Trebuchet MS" pitchFamily="34" charset="-120"/>
               </a:rPr>
-              <a:t>l</a:t>
+              <a:t>i</a:t>
             </a:r>
             <a:endParaRPr lang="en-US" sz="900" dirty="0"/>
           </a:p>
@@ -21841,13 +23287,13 @@
       </p:sp>
       <p:sp>
         <p:nvSpPr>
-          <p:cNvPr id="41" name="Shape 39"/>
-          <p:cNvSpPr/>
-          <p:nvPr/>
-        </p:nvSpPr>
-        <p:spPr>
-          <a:xfrm>
-            <a:off x="5759577" y="4169664"/>
+          <p:cNvPr id="50" name="Shape 48"/>
+          <p:cNvSpPr/>
+          <p:nvPr/>
+        </p:nvSpPr>
+        <p:spPr>
+          <a:xfrm>
+            <a:off x="5254752" y="4169664"/>
             <a:ext cx="685800" cy="475488"/>
           </a:xfrm>
           <a:prstGeom prst="rect">
@@ -21868,13 +23314,13 @@
       </p:sp>
       <p:sp>
         <p:nvSpPr>
-          <p:cNvPr id="42" name="Text 40"/>
-          <p:cNvSpPr/>
-          <p:nvPr/>
-        </p:nvSpPr>
-        <p:spPr>
-          <a:xfrm>
-            <a:off x="5759577" y="4169664"/>
+          <p:cNvPr id="51" name="Text 49"/>
+          <p:cNvSpPr/>
+          <p:nvPr/>
+        </p:nvSpPr>
+        <p:spPr>
+          <a:xfrm>
+            <a:off x="5254752" y="4169664"/>
             <a:ext cx="685800" cy="475488"/>
           </a:xfrm>
           <a:prstGeom prst="rect">
@@ -21899,7 +23345,7 @@
                 <a:ea typeface="Trebuchet MS" pitchFamily="34" charset="-122"/>
                 <a:cs typeface="Trebuchet MS" pitchFamily="34" charset="-120"/>
               </a:rPr>
-              <a:t>i</a:t>
+              <a:t>k</a:t>
             </a:r>
             <a:endParaRPr lang="en-US" sz="900" dirty="0"/>
           </a:p>
@@ -21907,13 +23353,13 @@
       </p:sp>
       <p:sp>
         <p:nvSpPr>
-          <p:cNvPr id="43" name="Shape 41"/>
-          <p:cNvSpPr/>
-          <p:nvPr/>
-        </p:nvSpPr>
-        <p:spPr>
-          <a:xfrm>
-            <a:off x="6668262" y="4169664"/>
+          <p:cNvPr id="52" name="Shape 50"/>
+          <p:cNvSpPr/>
+          <p:nvPr/>
+        </p:nvSpPr>
+        <p:spPr>
+          <a:xfrm>
+            <a:off x="6062472" y="4169664"/>
             <a:ext cx="685800" cy="475488"/>
           </a:xfrm>
           <a:prstGeom prst="rect">
@@ -21934,13 +23380,13 @@
       </p:sp>
       <p:sp>
         <p:nvSpPr>
-          <p:cNvPr id="44" name="Text 42"/>
-          <p:cNvSpPr/>
-          <p:nvPr/>
-        </p:nvSpPr>
-        <p:spPr>
-          <a:xfrm>
-            <a:off x="6668262" y="4169664"/>
+          <p:cNvPr id="53" name="Text 51"/>
+          <p:cNvSpPr/>
+          <p:nvPr/>
+        </p:nvSpPr>
+        <p:spPr>
+          <a:xfrm>
+            <a:off x="6062472" y="4169664"/>
             <a:ext cx="685800" cy="475488"/>
           </a:xfrm>
           <a:prstGeom prst="rect">
@@ -21965,7 +23411,7 @@
                 <a:ea typeface="Trebuchet MS" pitchFamily="34" charset="-122"/>
                 <a:cs typeface="Trebuchet MS" pitchFamily="34" charset="-120"/>
               </a:rPr>
-              <a:t>k</a:t>
+              <a:t>a</a:t>
             </a:r>
             <a:endParaRPr lang="en-US" sz="900" dirty="0"/>
           </a:p>
@@ -21973,13 +23419,13 @@
       </p:sp>
       <p:sp>
         <p:nvSpPr>
-          <p:cNvPr id="45" name="Shape 43"/>
-          <p:cNvSpPr/>
-          <p:nvPr/>
-        </p:nvSpPr>
-        <p:spPr>
-          <a:xfrm>
-            <a:off x="7576947" y="4169664"/>
+          <p:cNvPr id="54" name="Shape 52"/>
+          <p:cNvSpPr/>
+          <p:nvPr/>
+        </p:nvSpPr>
+        <p:spPr>
+          <a:xfrm>
+            <a:off x="6870192" y="4169664"/>
             <a:ext cx="685800" cy="475488"/>
           </a:xfrm>
           <a:prstGeom prst="rect">
@@ -22000,13 +23446,13 @@
       </p:sp>
       <p:sp>
         <p:nvSpPr>
-          <p:cNvPr id="46" name="Text 44"/>
-          <p:cNvSpPr/>
-          <p:nvPr/>
-        </p:nvSpPr>
-        <p:spPr>
-          <a:xfrm>
-            <a:off x="7576947" y="4169664"/>
+          <p:cNvPr id="55" name="Text 53"/>
+          <p:cNvSpPr/>
+          <p:nvPr/>
+        </p:nvSpPr>
+        <p:spPr>
+          <a:xfrm>
+            <a:off x="6870192" y="4169664"/>
             <a:ext cx="685800" cy="475488"/>
           </a:xfrm>
           <a:prstGeom prst="rect">
@@ -22031,7 +23477,73 @@
                 <a:ea typeface="Trebuchet MS" pitchFamily="34" charset="-122"/>
                 <a:cs typeface="Trebuchet MS" pitchFamily="34" charset="-120"/>
               </a:rPr>
-              <a:t>e</a:t>
+              <a:t>b</a:t>
+            </a:r>
+            <a:endParaRPr lang="en-US" sz="900" dirty="0"/>
+          </a:p>
+        </p:txBody>
+      </p:sp>
+      <p:sp>
+        <p:nvSpPr>
+          <p:cNvPr id="56" name="Shape 54"/>
+          <p:cNvSpPr/>
+          <p:nvPr/>
+        </p:nvSpPr>
+        <p:spPr>
+          <a:xfrm>
+            <a:off x="7677912" y="4169664"/>
+            <a:ext cx="685800" cy="475488"/>
+          </a:xfrm>
+          <a:prstGeom prst="rect">
+            <a:avLst>
+              <a:gd name="adj" fmla="val 7692"/>
+            </a:avLst>
+          </a:prstGeom>
+          <a:solidFill>
+            <a:srgbClr val="FFFFFF"/>
+          </a:solidFill>
+          <a:ln w="12700">
+            <a:solidFill>
+              <a:srgbClr val="DB2777"/>
+            </a:solidFill>
+            <a:prstDash val="solid"/>
+          </a:ln>
+        </p:spPr>
+      </p:sp>
+      <p:sp>
+        <p:nvSpPr>
+          <p:cNvPr id="57" name="Text 55"/>
+          <p:cNvSpPr/>
+          <p:nvPr/>
+        </p:nvSpPr>
+        <p:spPr>
+          <a:xfrm>
+            <a:off x="7677912" y="4169664"/>
+            <a:ext cx="685800" cy="475488"/>
+          </a:xfrm>
+          <a:prstGeom prst="rect">
+            <a:avLst/>
+          </a:prstGeom>
+          <a:noFill/>
+          <a:ln/>
+        </p:spPr>
+        <p:txBody>
+          <a:bodyPr wrap="square" lIns="0" tIns="0" rIns="0" bIns="0" rtlCol="0" anchor="ctr"/>
+          <a:lstStyle/>
+          <a:p>
+            <a:pPr algn="ctr" indent="0" marL="0">
+              <a:buNone/>
+            </a:pPr>
+            <a:r>
+              <a:rPr lang="en-US" sz="900" b="1" dirty="0">
+                <a:solidFill>
+                  <a:srgbClr val="9D174D"/>
+                </a:solidFill>
+                <a:latin typeface="Trebuchet MS" pitchFamily="34" charset="0"/>
+                <a:ea typeface="Trebuchet MS" pitchFamily="34" charset="-122"/>
+                <a:cs typeface="Trebuchet MS" pitchFamily="34" charset="-120"/>
+              </a:rPr>
+              <a:t>le</a:t>
             </a:r>
             <a:endParaRPr lang="en-US" sz="900" dirty="0"/>
           </a:p>
@@ -22323,7 +23835,7 @@
                 <a:ea typeface="Calibri" pitchFamily="34" charset="-122"/>
                 <a:cs typeface="Calibri" pitchFamily="34" charset="-120"/>
               </a:rPr>
-              <a:t>Word Labs  •  wordlabs.app  •  Root: 'like' = similar to, resembling</a:t>
+              <a:t>Word Labs  •  wordlabs.app  •  Root: 'like' = to enjoy; to prefer</a:t>
             </a:r>
             <a:endParaRPr lang="en-US" sz="800" dirty="0"/>
           </a:p>
@@ -22462,7 +23974,7 @@
                 <a:ea typeface="Trebuchet MS" pitchFamily="34" charset="-122"/>
                 <a:cs typeface="Trebuchet MS" pitchFamily="34" charset="-120"/>
               </a:rPr>
-              <a:t>childlike</a:t>
+              <a:t>likeable</a:t>
             </a:r>
             <a:endParaRPr lang="en-US" sz="2800" dirty="0"/>
           </a:p>
@@ -23150,7 +24662,7 @@
                 <a:ea typeface="Calibri" pitchFamily="34" charset="-122"/>
                 <a:cs typeface="Calibri" pitchFamily="34" charset="-120"/>
               </a:rPr>
-              <a:t>Word Labs  •  wordlabs.app  •  Root: 'like' = similar to, resembling</a:t>
+              <a:t>Word Labs  •  wordlabs.app  •  Root: 'like' = to enjoy; to prefer</a:t>
             </a:r>
             <a:endParaRPr lang="en-US" sz="800" dirty="0"/>
           </a:p>
@@ -23289,7 +24801,7 @@
                 <a:ea typeface="Trebuchet MS" pitchFamily="34" charset="-122"/>
                 <a:cs typeface="Trebuchet MS" pitchFamily="34" charset="-120"/>
               </a:rPr>
-              <a:t>childlike</a:t>
+              <a:t>likeable</a:t>
             </a:r>
             <a:endParaRPr lang="en-US" sz="2800" dirty="0"/>
           </a:p>
@@ -23369,7 +24881,7 @@
         </p:nvSpPr>
         <p:spPr>
           <a:xfrm>
-            <a:off x="2938272" y="2258568"/>
+            <a:off x="2221992" y="2258568"/>
             <a:ext cx="1828800" cy="292608"/>
           </a:xfrm>
           <a:prstGeom prst="rect">
@@ -23378,11 +24890,11 @@
             </a:avLst>
           </a:prstGeom>
           <a:solidFill>
-            <a:srgbClr val="DDD6FE"/>
+            <a:srgbClr val="CCFBF1"/>
           </a:solidFill>
           <a:ln w="19050">
             <a:solidFill>
-              <a:srgbClr val="7C3AED"/>
+              <a:srgbClr val="0D9488"/>
             </a:solidFill>
             <a:prstDash val="solid"/>
           </a:ln>
@@ -23403,7 +24915,7 @@
         </p:nvSpPr>
         <p:spPr>
           <a:xfrm>
-            <a:off x="2938272" y="2258568"/>
+            <a:off x="2221992" y="2258568"/>
             <a:ext cx="1828800" cy="292608"/>
           </a:xfrm>
           <a:prstGeom prst="rect">
@@ -23422,13 +24934,13 @@
             <a:r>
               <a:rPr lang="en-US" sz="1300" b="1" dirty="0">
                 <a:solidFill>
-                  <a:srgbClr val="4C1D95"/>
+                  <a:srgbClr val="0F766E"/>
                 </a:solidFill>
                 <a:latin typeface="Trebuchet MS" pitchFamily="34" charset="0"/>
                 <a:ea typeface="Trebuchet MS" pitchFamily="34" charset="-122"/>
                 <a:cs typeface="Trebuchet MS" pitchFamily="34" charset="-120"/>
               </a:rPr>
-              <a:t>child</a:t>
+              <a:t>like</a:t>
             </a:r>
             <a:endParaRPr lang="en-US" sz="1300" dirty="0"/>
           </a:p>
@@ -23442,7 +24954,7 @@
         </p:nvSpPr>
         <p:spPr>
           <a:xfrm>
-            <a:off x="2938272" y="2569464"/>
+            <a:off x="2221992" y="2569464"/>
             <a:ext cx="1828800" cy="201168"/>
           </a:xfrm>
           <a:prstGeom prst="rect">
@@ -23467,7 +24979,7 @@
                 <a:ea typeface="Calibri" pitchFamily="34" charset="-122"/>
                 <a:cs typeface="Calibri" pitchFamily="34" charset="-120"/>
               </a:rPr>
-              <a:t>a young person</a:t>
+              <a:t>to enjoy; to prefer</a:t>
             </a:r>
             <a:endParaRPr lang="en-US" sz="850" dirty="0"/>
           </a:p>
@@ -23481,7 +24993,7 @@
         </p:nvSpPr>
         <p:spPr>
           <a:xfrm>
-            <a:off x="5803392" y="2258568"/>
+            <a:off x="4370832" y="2258568"/>
             <a:ext cx="1828800" cy="292608"/>
           </a:xfrm>
           <a:prstGeom prst="rect">
@@ -23490,11 +25002,11 @@
             </a:avLst>
           </a:prstGeom>
           <a:solidFill>
-            <a:srgbClr val="CCFBF1"/>
+            <a:srgbClr val="FCE7F3"/>
           </a:solidFill>
           <a:ln w="19050">
             <a:solidFill>
-              <a:srgbClr val="0D9488"/>
+              <a:srgbClr val="DB2777"/>
             </a:solidFill>
             <a:prstDash val="solid"/>
           </a:ln>
@@ -23515,7 +25027,7 @@
         </p:nvSpPr>
         <p:spPr>
           <a:xfrm>
-            <a:off x="5803392" y="2258568"/>
+            <a:off x="4370832" y="2258568"/>
             <a:ext cx="1828800" cy="292608"/>
           </a:xfrm>
           <a:prstGeom prst="rect">
@@ -23534,13 +25046,13 @@
             <a:r>
               <a:rPr lang="en-US" sz="1300" b="1" dirty="0">
                 <a:solidFill>
-                  <a:srgbClr val="0F766E"/>
+                  <a:srgbClr val="9D174D"/>
                 </a:solidFill>
                 <a:latin typeface="Trebuchet MS" pitchFamily="34" charset="0"/>
                 <a:ea typeface="Trebuchet MS" pitchFamily="34" charset="-122"/>
                 <a:cs typeface="Trebuchet MS" pitchFamily="34" charset="-120"/>
               </a:rPr>
-              <a:t>like</a:t>
+              <a:t>ee</a:t>
             </a:r>
             <a:endParaRPr lang="en-US" sz="1300" dirty="0"/>
           </a:p>
@@ -23554,7 +25066,7 @@
         </p:nvSpPr>
         <p:spPr>
           <a:xfrm>
-            <a:off x="5803392" y="2569464"/>
+            <a:off x="4370832" y="2569464"/>
             <a:ext cx="1828800" cy="201168"/>
           </a:xfrm>
           <a:prstGeom prst="rect">
@@ -23579,7 +25091,7 @@
                 <a:ea typeface="Calibri" pitchFamily="34" charset="-122"/>
                 <a:cs typeface="Calibri" pitchFamily="34" charset="-120"/>
               </a:rPr>
-              <a:t>resembling, similar to</a:t>
+              <a:t>person who receives</a:t>
             </a:r>
             <a:endParaRPr lang="en-US" sz="850" dirty="0"/>
           </a:p>
@@ -23588,6 +25100,118 @@
       <p:sp>
         <p:nvSpPr>
           <p:cNvPr id="22" name="Shape 20"/>
+          <p:cNvSpPr/>
+          <p:nvPr/>
+        </p:nvSpPr>
+        <p:spPr>
+          <a:xfrm>
+            <a:off x="6519672" y="2258568"/>
+            <a:ext cx="1828800" cy="292608"/>
+          </a:xfrm>
+          <a:prstGeom prst="rect">
+            <a:avLst>
+              <a:gd name="adj" fmla="val 25000"/>
+            </a:avLst>
+          </a:prstGeom>
+          <a:solidFill>
+            <a:srgbClr val="FCE7F3"/>
+          </a:solidFill>
+          <a:ln w="19050">
+            <a:solidFill>
+              <a:srgbClr val="DB2777"/>
+            </a:solidFill>
+            <a:prstDash val="solid"/>
+          </a:ln>
+          <a:effectLst>
+            <a:outerShdw sx="100000" sy="100000" kx="0" ky="0" algn="bl" rotWithShape="0" blurRad="101600" dist="38100" dir="8100000">
+              <a:srgbClr val="000000">
+                <a:alpha val="12000"/>
+              </a:srgbClr>
+            </a:outerShdw>
+          </a:effectLst>
+        </p:spPr>
+      </p:sp>
+      <p:sp>
+        <p:nvSpPr>
+          <p:cNvPr id="23" name="Text 21"/>
+          <p:cNvSpPr/>
+          <p:nvPr/>
+        </p:nvSpPr>
+        <p:spPr>
+          <a:xfrm>
+            <a:off x="6519672" y="2258568"/>
+            <a:ext cx="1828800" cy="292608"/>
+          </a:xfrm>
+          <a:prstGeom prst="rect">
+            <a:avLst/>
+          </a:prstGeom>
+          <a:noFill/>
+          <a:ln/>
+        </p:spPr>
+        <p:txBody>
+          <a:bodyPr wrap="square" lIns="0" tIns="0" rIns="0" bIns="0" rtlCol="0" anchor="ctr"/>
+          <a:lstStyle/>
+          <a:p>
+            <a:pPr algn="ctr" indent="0" marL="0">
+              <a:buNone/>
+            </a:pPr>
+            <a:r>
+              <a:rPr lang="en-US" sz="1300" b="1" dirty="0">
+                <a:solidFill>
+                  <a:srgbClr val="9D174D"/>
+                </a:solidFill>
+                <a:latin typeface="Trebuchet MS" pitchFamily="34" charset="0"/>
+                <a:ea typeface="Trebuchet MS" pitchFamily="34" charset="-122"/>
+                <a:cs typeface="Trebuchet MS" pitchFamily="34" charset="-120"/>
+              </a:rPr>
+              <a:t>able</a:t>
+            </a:r>
+            <a:endParaRPr lang="en-US" sz="1300" dirty="0"/>
+          </a:p>
+        </p:txBody>
+      </p:sp>
+      <p:sp>
+        <p:nvSpPr>
+          <p:cNvPr id="24" name="Text 22"/>
+          <p:cNvSpPr/>
+          <p:nvPr/>
+        </p:nvSpPr>
+        <p:spPr>
+          <a:xfrm>
+            <a:off x="6519672" y="2569464"/>
+            <a:ext cx="1828800" cy="201168"/>
+          </a:xfrm>
+          <a:prstGeom prst="rect">
+            <a:avLst/>
+          </a:prstGeom>
+          <a:noFill/>
+          <a:ln/>
+        </p:spPr>
+        <p:txBody>
+          <a:bodyPr wrap="square" lIns="0" tIns="0" rIns="0" bIns="0" rtlCol="0" anchor="t"/>
+          <a:lstStyle/>
+          <a:p>
+            <a:pPr algn="ctr" indent="0" marL="0">
+              <a:buNone/>
+            </a:pPr>
+            <a:r>
+              <a:rPr lang="en-US" sz="850" dirty="0">
+                <a:solidFill>
+                  <a:srgbClr val="475569"/>
+                </a:solidFill>
+                <a:latin typeface="Calibri" pitchFamily="34" charset="0"/>
+                <a:ea typeface="Calibri" pitchFamily="34" charset="-122"/>
+                <a:cs typeface="Calibri" pitchFamily="34" charset="-120"/>
+              </a:rPr>
+              <a:t>able to</a:t>
+            </a:r>
+            <a:endParaRPr lang="en-US" sz="850" dirty="0"/>
+          </a:p>
+        </p:txBody>
+      </p:sp>
+      <p:sp>
+        <p:nvSpPr>
+          <p:cNvPr id="25" name="Shape 23"/>
           <p:cNvSpPr/>
           <p:nvPr/>
         </p:nvSpPr>
@@ -23614,7 +25238,7 @@
       </p:sp>
       <p:sp>
         <p:nvSpPr>
-          <p:cNvPr id="23" name="Text 21"/>
+          <p:cNvPr id="26" name="Text 24"/>
           <p:cNvSpPr/>
           <p:nvPr/>
         </p:nvSpPr>
@@ -23653,7 +25277,7 @@
       </p:sp>
       <p:sp>
         <p:nvSpPr>
-          <p:cNvPr id="24" name="Shape 22"/>
+          <p:cNvPr id="27" name="Shape 25"/>
           <p:cNvSpPr/>
           <p:nvPr/>
         </p:nvSpPr>
@@ -23680,7 +25304,7 @@
       </p:sp>
       <p:sp>
         <p:nvSpPr>
-          <p:cNvPr id="25" name="Text 23"/>
+          <p:cNvPr id="28" name="Text 26"/>
           <p:cNvSpPr/>
           <p:nvPr/>
         </p:nvSpPr>
@@ -23719,7 +25343,7 @@
       </p:sp>
       <p:sp>
         <p:nvSpPr>
-          <p:cNvPr id="26" name="Shape 24"/>
+          <p:cNvPr id="29" name="Shape 27"/>
           <p:cNvSpPr/>
           <p:nvPr/>
         </p:nvSpPr>
@@ -23746,7 +25370,7 @@
       </p:sp>
       <p:sp>
         <p:nvSpPr>
-          <p:cNvPr id="27" name="Text 25"/>
+          <p:cNvPr id="30" name="Text 28"/>
           <p:cNvSpPr/>
           <p:nvPr/>
         </p:nvSpPr>
@@ -23785,7 +25409,7 @@
       </p:sp>
       <p:sp>
         <p:nvSpPr>
-          <p:cNvPr id="28" name="Shape 26"/>
+          <p:cNvPr id="31" name="Shape 29"/>
           <p:cNvSpPr/>
           <p:nvPr/>
         </p:nvSpPr>
@@ -23812,7 +25436,7 @@
       </p:sp>
       <p:sp>
         <p:nvSpPr>
-          <p:cNvPr id="29" name="Text 27"/>
+          <p:cNvPr id="32" name="Text 30"/>
           <p:cNvSpPr/>
           <p:nvPr/>
         </p:nvSpPr>
@@ -24135,7 +25759,7 @@
                 <a:ea typeface="Calibri" pitchFamily="34" charset="-122"/>
                 <a:cs typeface="Calibri" pitchFamily="34" charset="-120"/>
               </a:rPr>
-              <a:t>Word Labs  •  wordlabs.app  •  Root: 'like' = similar to, resembling</a:t>
+              <a:t>Word Labs  •  wordlabs.app  •  Root: 'like' = to enjoy; to prefer</a:t>
             </a:r>
             <a:endParaRPr lang="en-US" sz="800" dirty="0"/>
           </a:p>
@@ -24208,7 +25832,7 @@
                 <a:ea typeface="Trebuchet MS" pitchFamily="34" charset="-122"/>
                 <a:cs typeface="Trebuchet MS" pitchFamily="34" charset="-120"/>
               </a:rPr>
-              <a:t>We are learning that the root 'like' means 'similar to, resembling'.</a:t>
+              <a:t>We are learning that the root 'like' means 'to enjoy; to prefer'.</a:t>
             </a:r>
             <a:endParaRPr lang="en-US" sz="2000" dirty="0"/>
           </a:p>
@@ -24854,7 +26478,7 @@
                 <a:ea typeface="Calibri" pitchFamily="34" charset="-122"/>
                 <a:cs typeface="Calibri" pitchFamily="34" charset="-120"/>
               </a:rPr>
-              <a:t>Word Labs  •  wordlabs.app  •  Root: 'like' = similar to, resembling</a:t>
+              <a:t>Word Labs  •  wordlabs.app  •  Root: 'like' = to enjoy; to prefer</a:t>
             </a:r>
             <a:endParaRPr lang="en-US" sz="800" dirty="0"/>
           </a:p>
@@ -24993,7 +26617,7 @@
                 <a:ea typeface="Trebuchet MS" pitchFamily="34" charset="-122"/>
                 <a:cs typeface="Trebuchet MS" pitchFamily="34" charset="-120"/>
               </a:rPr>
-              <a:t>childlike</a:t>
+              <a:t>likeable</a:t>
             </a:r>
             <a:endParaRPr lang="en-US" sz="2800" dirty="0"/>
           </a:p>
@@ -25073,7 +26697,7 @@
         </p:nvSpPr>
         <p:spPr>
           <a:xfrm>
-            <a:off x="2938272" y="2258568"/>
+            <a:off x="2221992" y="2258568"/>
             <a:ext cx="1828800" cy="292608"/>
           </a:xfrm>
           <a:prstGeom prst="rect">
@@ -25082,11 +26706,11 @@
             </a:avLst>
           </a:prstGeom>
           <a:solidFill>
-            <a:srgbClr val="DDD6FE"/>
+            <a:srgbClr val="CCFBF1"/>
           </a:solidFill>
           <a:ln w="19050">
             <a:solidFill>
-              <a:srgbClr val="7C3AED"/>
+              <a:srgbClr val="0D9488"/>
             </a:solidFill>
             <a:prstDash val="solid"/>
           </a:ln>
@@ -25107,7 +26731,7 @@
         </p:nvSpPr>
         <p:spPr>
           <a:xfrm>
-            <a:off x="2938272" y="2258568"/>
+            <a:off x="2221992" y="2258568"/>
             <a:ext cx="1828800" cy="292608"/>
           </a:xfrm>
           <a:prstGeom prst="rect">
@@ -25126,13 +26750,13 @@
             <a:r>
               <a:rPr lang="en-US" sz="1300" b="1" dirty="0">
                 <a:solidFill>
-                  <a:srgbClr val="4C1D95"/>
+                  <a:srgbClr val="0F766E"/>
                 </a:solidFill>
                 <a:latin typeface="Trebuchet MS" pitchFamily="34" charset="0"/>
                 <a:ea typeface="Trebuchet MS" pitchFamily="34" charset="-122"/>
                 <a:cs typeface="Trebuchet MS" pitchFamily="34" charset="-120"/>
               </a:rPr>
-              <a:t>child</a:t>
+              <a:t>like</a:t>
             </a:r>
             <a:endParaRPr lang="en-US" sz="1300" dirty="0"/>
           </a:p>
@@ -25146,7 +26770,7 @@
         </p:nvSpPr>
         <p:spPr>
           <a:xfrm>
-            <a:off x="2938272" y="2569464"/>
+            <a:off x="2221992" y="2569464"/>
             <a:ext cx="1828800" cy="201168"/>
           </a:xfrm>
           <a:prstGeom prst="rect">
@@ -25171,7 +26795,7 @@
                 <a:ea typeface="Calibri" pitchFamily="34" charset="-122"/>
                 <a:cs typeface="Calibri" pitchFamily="34" charset="-120"/>
               </a:rPr>
-              <a:t>a young person</a:t>
+              <a:t>to enjoy; to prefer</a:t>
             </a:r>
             <a:endParaRPr lang="en-US" sz="850" dirty="0"/>
           </a:p>
@@ -25185,7 +26809,7 @@
         </p:nvSpPr>
         <p:spPr>
           <a:xfrm>
-            <a:off x="5803392" y="2258568"/>
+            <a:off x="4370832" y="2258568"/>
             <a:ext cx="1828800" cy="292608"/>
           </a:xfrm>
           <a:prstGeom prst="rect">
@@ -25194,11 +26818,11 @@
             </a:avLst>
           </a:prstGeom>
           <a:solidFill>
-            <a:srgbClr val="CCFBF1"/>
+            <a:srgbClr val="FCE7F3"/>
           </a:solidFill>
           <a:ln w="19050">
             <a:solidFill>
-              <a:srgbClr val="0D9488"/>
+              <a:srgbClr val="DB2777"/>
             </a:solidFill>
             <a:prstDash val="solid"/>
           </a:ln>
@@ -25219,7 +26843,7 @@
         </p:nvSpPr>
         <p:spPr>
           <a:xfrm>
-            <a:off x="5803392" y="2258568"/>
+            <a:off x="4370832" y="2258568"/>
             <a:ext cx="1828800" cy="292608"/>
           </a:xfrm>
           <a:prstGeom prst="rect">
@@ -25238,13 +26862,13 @@
             <a:r>
               <a:rPr lang="en-US" sz="1300" b="1" dirty="0">
                 <a:solidFill>
-                  <a:srgbClr val="0F766E"/>
+                  <a:srgbClr val="9D174D"/>
                 </a:solidFill>
                 <a:latin typeface="Trebuchet MS" pitchFamily="34" charset="0"/>
                 <a:ea typeface="Trebuchet MS" pitchFamily="34" charset="-122"/>
                 <a:cs typeface="Trebuchet MS" pitchFamily="34" charset="-120"/>
               </a:rPr>
-              <a:t>like</a:t>
+              <a:t>ee</a:t>
             </a:r>
             <a:endParaRPr lang="en-US" sz="1300" dirty="0"/>
           </a:p>
@@ -25258,7 +26882,7 @@
         </p:nvSpPr>
         <p:spPr>
           <a:xfrm>
-            <a:off x="5803392" y="2569464"/>
+            <a:off x="4370832" y="2569464"/>
             <a:ext cx="1828800" cy="201168"/>
           </a:xfrm>
           <a:prstGeom prst="rect">
@@ -25283,7 +26907,7 @@
                 <a:ea typeface="Calibri" pitchFamily="34" charset="-122"/>
                 <a:cs typeface="Calibri" pitchFamily="34" charset="-120"/>
               </a:rPr>
-              <a:t>resembling, similar to</a:t>
+              <a:t>person who receives</a:t>
             </a:r>
             <a:endParaRPr lang="en-US" sz="850" dirty="0"/>
           </a:p>
@@ -25292,6 +26916,118 @@
       <p:sp>
         <p:nvSpPr>
           <p:cNvPr id="22" name="Shape 20"/>
+          <p:cNvSpPr/>
+          <p:nvPr/>
+        </p:nvSpPr>
+        <p:spPr>
+          <a:xfrm>
+            <a:off x="6519672" y="2258568"/>
+            <a:ext cx="1828800" cy="292608"/>
+          </a:xfrm>
+          <a:prstGeom prst="rect">
+            <a:avLst>
+              <a:gd name="adj" fmla="val 25000"/>
+            </a:avLst>
+          </a:prstGeom>
+          <a:solidFill>
+            <a:srgbClr val="FCE7F3"/>
+          </a:solidFill>
+          <a:ln w="19050">
+            <a:solidFill>
+              <a:srgbClr val="DB2777"/>
+            </a:solidFill>
+            <a:prstDash val="solid"/>
+          </a:ln>
+          <a:effectLst>
+            <a:outerShdw sx="100000" sy="100000" kx="0" ky="0" algn="bl" rotWithShape="0" blurRad="101600" dist="38100" dir="8100000">
+              <a:srgbClr val="000000">
+                <a:alpha val="12000"/>
+              </a:srgbClr>
+            </a:outerShdw>
+          </a:effectLst>
+        </p:spPr>
+      </p:sp>
+      <p:sp>
+        <p:nvSpPr>
+          <p:cNvPr id="23" name="Text 21"/>
+          <p:cNvSpPr/>
+          <p:nvPr/>
+        </p:nvSpPr>
+        <p:spPr>
+          <a:xfrm>
+            <a:off x="6519672" y="2258568"/>
+            <a:ext cx="1828800" cy="292608"/>
+          </a:xfrm>
+          <a:prstGeom prst="rect">
+            <a:avLst/>
+          </a:prstGeom>
+          <a:noFill/>
+          <a:ln/>
+        </p:spPr>
+        <p:txBody>
+          <a:bodyPr wrap="square" lIns="0" tIns="0" rIns="0" bIns="0" rtlCol="0" anchor="ctr"/>
+          <a:lstStyle/>
+          <a:p>
+            <a:pPr algn="ctr" indent="0" marL="0">
+              <a:buNone/>
+            </a:pPr>
+            <a:r>
+              <a:rPr lang="en-US" sz="1300" b="1" dirty="0">
+                <a:solidFill>
+                  <a:srgbClr val="9D174D"/>
+                </a:solidFill>
+                <a:latin typeface="Trebuchet MS" pitchFamily="34" charset="0"/>
+                <a:ea typeface="Trebuchet MS" pitchFamily="34" charset="-122"/>
+                <a:cs typeface="Trebuchet MS" pitchFamily="34" charset="-120"/>
+              </a:rPr>
+              <a:t>able</a:t>
+            </a:r>
+            <a:endParaRPr lang="en-US" sz="1300" dirty="0"/>
+          </a:p>
+        </p:txBody>
+      </p:sp>
+      <p:sp>
+        <p:nvSpPr>
+          <p:cNvPr id="24" name="Text 22"/>
+          <p:cNvSpPr/>
+          <p:nvPr/>
+        </p:nvSpPr>
+        <p:spPr>
+          <a:xfrm>
+            <a:off x="6519672" y="2569464"/>
+            <a:ext cx="1828800" cy="201168"/>
+          </a:xfrm>
+          <a:prstGeom prst="rect">
+            <a:avLst/>
+          </a:prstGeom>
+          <a:noFill/>
+          <a:ln/>
+        </p:spPr>
+        <p:txBody>
+          <a:bodyPr wrap="square" lIns="0" tIns="0" rIns="0" bIns="0" rtlCol="0" anchor="t"/>
+          <a:lstStyle/>
+          <a:p>
+            <a:pPr algn="ctr" indent="0" marL="0">
+              <a:buNone/>
+            </a:pPr>
+            <a:r>
+              <a:rPr lang="en-US" sz="850" dirty="0">
+                <a:solidFill>
+                  <a:srgbClr val="475569"/>
+                </a:solidFill>
+                <a:latin typeface="Calibri" pitchFamily="34" charset="0"/>
+                <a:ea typeface="Calibri" pitchFamily="34" charset="-122"/>
+                <a:cs typeface="Calibri" pitchFamily="34" charset="-120"/>
+              </a:rPr>
+              <a:t>able to</a:t>
+            </a:r>
+            <a:endParaRPr lang="en-US" sz="850" dirty="0"/>
+          </a:p>
+        </p:txBody>
+      </p:sp>
+      <p:sp>
+        <p:nvSpPr>
+          <p:cNvPr id="25" name="Shape 23"/>
           <p:cNvSpPr/>
           <p:nvPr/>
         </p:nvSpPr>
@@ -25318,7 +27054,7 @@
       </p:sp>
       <p:sp>
         <p:nvSpPr>
-          <p:cNvPr id="23" name="Text 21"/>
+          <p:cNvPr id="26" name="Text 24"/>
           <p:cNvSpPr/>
           <p:nvPr/>
         </p:nvSpPr>
@@ -25357,7 +27093,7 @@
       </p:sp>
       <p:sp>
         <p:nvSpPr>
-          <p:cNvPr id="24" name="Shape 22"/>
+          <p:cNvPr id="27" name="Shape 25"/>
           <p:cNvSpPr/>
           <p:nvPr/>
         </p:nvSpPr>
@@ -25384,13 +27120,13 @@
       </p:sp>
       <p:sp>
         <p:nvSpPr>
-          <p:cNvPr id="25" name="Shape 23"/>
-          <p:cNvSpPr/>
-          <p:nvPr/>
-        </p:nvSpPr>
-        <p:spPr>
-          <a:xfrm>
-            <a:off x="2999232" y="3364992"/>
+          <p:cNvPr id="28" name="Shape 26"/>
+          <p:cNvSpPr/>
+          <p:nvPr/>
+        </p:nvSpPr>
+        <p:spPr>
+          <a:xfrm>
+            <a:off x="2313432" y="3364992"/>
             <a:ext cx="1645920" cy="475488"/>
           </a:xfrm>
           <a:prstGeom prst="rect">
@@ -25411,13 +27147,13 @@
       </p:sp>
       <p:sp>
         <p:nvSpPr>
-          <p:cNvPr id="26" name="Text 24"/>
-          <p:cNvSpPr/>
-          <p:nvPr/>
-        </p:nvSpPr>
-        <p:spPr>
-          <a:xfrm>
-            <a:off x="2999232" y="3364992"/>
+          <p:cNvPr id="29" name="Text 27"/>
+          <p:cNvSpPr/>
+          <p:nvPr/>
+        </p:nvSpPr>
+        <p:spPr>
+          <a:xfrm>
+            <a:off x="2313432" y="3364992"/>
             <a:ext cx="1645920" cy="475488"/>
           </a:xfrm>
           <a:prstGeom prst="rect">
@@ -25442,7 +27178,7 @@
                 <a:ea typeface="Trebuchet MS" pitchFamily="34" charset="-122"/>
                 <a:cs typeface="Trebuchet MS" pitchFamily="34" charset="-120"/>
               </a:rPr>
-              <a:t>child</a:t>
+              <a:t>like</a:t>
             </a:r>
             <a:endParaRPr lang="en-US" sz="1400" dirty="0"/>
           </a:p>
@@ -25450,14 +27186,14 @@
       </p:sp>
       <p:sp>
         <p:nvSpPr>
-          <p:cNvPr id="27" name="Text 25"/>
-          <p:cNvSpPr/>
-          <p:nvPr/>
-        </p:nvSpPr>
-        <p:spPr>
-          <a:xfrm>
-            <a:off x="4645152" y="3364992"/>
-            <a:ext cx="1097280" cy="475488"/>
+          <p:cNvPr id="30" name="Text 28"/>
+          <p:cNvSpPr/>
+          <p:nvPr/>
+        </p:nvSpPr>
+        <p:spPr>
+          <a:xfrm>
+            <a:off x="3959352" y="3364992"/>
+            <a:ext cx="411480" cy="475488"/>
           </a:xfrm>
           <a:prstGeom prst="rect">
             <a:avLst/>
@@ -25489,13 +27225,13 @@
       </p:sp>
       <p:sp>
         <p:nvSpPr>
-          <p:cNvPr id="28" name="Shape 26"/>
-          <p:cNvSpPr/>
-          <p:nvPr/>
-        </p:nvSpPr>
-        <p:spPr>
-          <a:xfrm>
-            <a:off x="5742432" y="3364992"/>
+          <p:cNvPr id="31" name="Shape 29"/>
+          <p:cNvSpPr/>
+          <p:nvPr/>
+        </p:nvSpPr>
+        <p:spPr>
+          <a:xfrm>
+            <a:off x="4370832" y="3364992"/>
             <a:ext cx="1645920" cy="475488"/>
           </a:xfrm>
           <a:prstGeom prst="rect">
@@ -25516,13 +27252,13 @@
       </p:sp>
       <p:sp>
         <p:nvSpPr>
-          <p:cNvPr id="29" name="Text 27"/>
-          <p:cNvSpPr/>
-          <p:nvPr/>
-        </p:nvSpPr>
-        <p:spPr>
-          <a:xfrm>
-            <a:off x="5742432" y="3364992"/>
+          <p:cNvPr id="32" name="Text 30"/>
+          <p:cNvSpPr/>
+          <p:nvPr/>
+        </p:nvSpPr>
+        <p:spPr>
+          <a:xfrm>
+            <a:off x="4370832" y="3364992"/>
             <a:ext cx="1645920" cy="475488"/>
           </a:xfrm>
           <a:prstGeom prst="rect">
@@ -25547,7 +27283,7 @@
                 <a:ea typeface="Trebuchet MS" pitchFamily="34" charset="-122"/>
                 <a:cs typeface="Trebuchet MS" pitchFamily="34" charset="-120"/>
               </a:rPr>
-              <a:t>like</a:t>
+              <a:t>a</a:t>
             </a:r>
             <a:endParaRPr lang="en-US" sz="1400" dirty="0"/>
           </a:p>
@@ -25555,7 +27291,112 @@
       </p:sp>
       <p:sp>
         <p:nvSpPr>
-          <p:cNvPr id="30" name="Shape 28"/>
+          <p:cNvPr id="33" name="Text 31"/>
+          <p:cNvSpPr/>
+          <p:nvPr/>
+        </p:nvSpPr>
+        <p:spPr>
+          <a:xfrm>
+            <a:off x="6016752" y="3364992"/>
+            <a:ext cx="411480" cy="475488"/>
+          </a:xfrm>
+          <a:prstGeom prst="rect">
+            <a:avLst/>
+          </a:prstGeom>
+          <a:noFill/>
+          <a:ln/>
+        </p:spPr>
+        <p:txBody>
+          <a:bodyPr wrap="square" lIns="0" tIns="0" rIns="0" bIns="0" rtlCol="0" anchor="ctr"/>
+          <a:lstStyle/>
+          <a:p>
+            <a:pPr algn="ctr" indent="0" marL="0">
+              <a:buNone/>
+            </a:pPr>
+            <a:r>
+              <a:rPr lang="en-US" sz="1600" b="1" dirty="0">
+                <a:solidFill>
+                  <a:srgbClr val="0D9488"/>
+                </a:solidFill>
+                <a:latin typeface="Trebuchet MS" pitchFamily="34" charset="0"/>
+                <a:ea typeface="Trebuchet MS" pitchFamily="34" charset="-122"/>
+                <a:cs typeface="Trebuchet MS" pitchFamily="34" charset="-120"/>
+              </a:rPr>
+              <a:t>·</a:t>
+            </a:r>
+            <a:endParaRPr lang="en-US" sz="1600" dirty="0"/>
+          </a:p>
+        </p:txBody>
+      </p:sp>
+      <p:sp>
+        <p:nvSpPr>
+          <p:cNvPr id="34" name="Shape 32"/>
+          <p:cNvSpPr/>
+          <p:nvPr/>
+        </p:nvSpPr>
+        <p:spPr>
+          <a:xfrm>
+            <a:off x="6428232" y="3364992"/>
+            <a:ext cx="1645920" cy="475488"/>
+          </a:xfrm>
+          <a:prstGeom prst="rect">
+            <a:avLst>
+              <a:gd name="adj" fmla="val 9615"/>
+            </a:avLst>
+          </a:prstGeom>
+          <a:solidFill>
+            <a:srgbClr val="FFFFFF"/>
+          </a:solidFill>
+          <a:ln w="12700">
+            <a:solidFill>
+              <a:srgbClr val="0D9488"/>
+            </a:solidFill>
+            <a:prstDash val="solid"/>
+          </a:ln>
+        </p:spPr>
+      </p:sp>
+      <p:sp>
+        <p:nvSpPr>
+          <p:cNvPr id="35" name="Text 33"/>
+          <p:cNvSpPr/>
+          <p:nvPr/>
+        </p:nvSpPr>
+        <p:spPr>
+          <a:xfrm>
+            <a:off x="6428232" y="3364992"/>
+            <a:ext cx="1645920" cy="475488"/>
+          </a:xfrm>
+          <a:prstGeom prst="rect">
+            <a:avLst/>
+          </a:prstGeom>
+          <a:noFill/>
+          <a:ln/>
+        </p:spPr>
+        <p:txBody>
+          <a:bodyPr wrap="square" lIns="0" tIns="0" rIns="0" bIns="0" rtlCol="0" anchor="ctr"/>
+          <a:lstStyle/>
+          <a:p>
+            <a:pPr algn="ctr" indent="0" marL="0">
+              <a:buNone/>
+            </a:pPr>
+            <a:r>
+              <a:rPr lang="en-US" sz="1400" b="1" dirty="0">
+                <a:solidFill>
+                  <a:srgbClr val="0D9488"/>
+                </a:solidFill>
+                <a:latin typeface="Trebuchet MS" pitchFamily="34" charset="0"/>
+                <a:ea typeface="Trebuchet MS" pitchFamily="34" charset="-122"/>
+                <a:cs typeface="Trebuchet MS" pitchFamily="34" charset="-120"/>
+              </a:rPr>
+              <a:t>ble</a:t>
+            </a:r>
+            <a:endParaRPr lang="en-US" sz="1400" dirty="0"/>
+          </a:p>
+        </p:txBody>
+      </p:sp>
+      <p:sp>
+        <p:nvSpPr>
+          <p:cNvPr id="36" name="Shape 34"/>
           <p:cNvSpPr/>
           <p:nvPr/>
         </p:nvSpPr>
@@ -25582,7 +27423,7 @@
       </p:sp>
       <p:sp>
         <p:nvSpPr>
-          <p:cNvPr id="31" name="Text 29"/>
+          <p:cNvPr id="37" name="Text 35"/>
           <p:cNvSpPr/>
           <p:nvPr/>
         </p:nvSpPr>
@@ -25621,7 +27462,7 @@
       </p:sp>
       <p:sp>
         <p:nvSpPr>
-          <p:cNvPr id="32" name="Shape 30"/>
+          <p:cNvPr id="38" name="Shape 36"/>
           <p:cNvSpPr/>
           <p:nvPr/>
         </p:nvSpPr>
@@ -25648,7 +27489,7 @@
       </p:sp>
       <p:sp>
         <p:nvSpPr>
-          <p:cNvPr id="33" name="Text 31"/>
+          <p:cNvPr id="39" name="Text 37"/>
           <p:cNvSpPr/>
           <p:nvPr/>
         </p:nvSpPr>
@@ -25971,7 +27812,7 @@
                 <a:ea typeface="Calibri" pitchFamily="34" charset="-122"/>
                 <a:cs typeface="Calibri" pitchFamily="34" charset="-120"/>
               </a:rPr>
-              <a:t>Word Labs  •  wordlabs.app  •  Root: 'like' = similar to, resembling</a:t>
+              <a:t>Word Labs  •  wordlabs.app  •  Root: 'like' = to enjoy; to prefer</a:t>
             </a:r>
             <a:endParaRPr lang="en-US" sz="800" dirty="0"/>
           </a:p>
@@ -26110,7 +27951,7 @@
                 <a:ea typeface="Trebuchet MS" pitchFamily="34" charset="-122"/>
                 <a:cs typeface="Trebuchet MS" pitchFamily="34" charset="-120"/>
               </a:rPr>
-              <a:t>childlike</a:t>
+              <a:t>likeable</a:t>
             </a:r>
             <a:endParaRPr lang="en-US" sz="2800" dirty="0"/>
           </a:p>
@@ -26190,7 +28031,7 @@
         </p:nvSpPr>
         <p:spPr>
           <a:xfrm>
-            <a:off x="2938272" y="2258568"/>
+            <a:off x="2221992" y="2258568"/>
             <a:ext cx="1828800" cy="292608"/>
           </a:xfrm>
           <a:prstGeom prst="rect">
@@ -26199,11 +28040,11 @@
             </a:avLst>
           </a:prstGeom>
           <a:solidFill>
-            <a:srgbClr val="DDD6FE"/>
+            <a:srgbClr val="CCFBF1"/>
           </a:solidFill>
           <a:ln w="19050">
             <a:solidFill>
-              <a:srgbClr val="7C3AED"/>
+              <a:srgbClr val="0D9488"/>
             </a:solidFill>
             <a:prstDash val="solid"/>
           </a:ln>
@@ -26224,7 +28065,7 @@
         </p:nvSpPr>
         <p:spPr>
           <a:xfrm>
-            <a:off x="2938272" y="2258568"/>
+            <a:off x="2221992" y="2258568"/>
             <a:ext cx="1828800" cy="292608"/>
           </a:xfrm>
           <a:prstGeom prst="rect">
@@ -26243,13 +28084,13 @@
             <a:r>
               <a:rPr lang="en-US" sz="1300" b="1" dirty="0">
                 <a:solidFill>
-                  <a:srgbClr val="4C1D95"/>
+                  <a:srgbClr val="0F766E"/>
                 </a:solidFill>
                 <a:latin typeface="Trebuchet MS" pitchFamily="34" charset="0"/>
                 <a:ea typeface="Trebuchet MS" pitchFamily="34" charset="-122"/>
                 <a:cs typeface="Trebuchet MS" pitchFamily="34" charset="-120"/>
               </a:rPr>
-              <a:t>child</a:t>
+              <a:t>like</a:t>
             </a:r>
             <a:endParaRPr lang="en-US" sz="1300" dirty="0"/>
           </a:p>
@@ -26263,7 +28104,7 @@
         </p:nvSpPr>
         <p:spPr>
           <a:xfrm>
-            <a:off x="2938272" y="2569464"/>
+            <a:off x="2221992" y="2569464"/>
             <a:ext cx="1828800" cy="201168"/>
           </a:xfrm>
           <a:prstGeom prst="rect">
@@ -26288,7 +28129,7 @@
                 <a:ea typeface="Calibri" pitchFamily="34" charset="-122"/>
                 <a:cs typeface="Calibri" pitchFamily="34" charset="-120"/>
               </a:rPr>
-              <a:t>a young person</a:t>
+              <a:t>to enjoy; to prefer</a:t>
             </a:r>
             <a:endParaRPr lang="en-US" sz="850" dirty="0"/>
           </a:p>
@@ -26302,7 +28143,7 @@
         </p:nvSpPr>
         <p:spPr>
           <a:xfrm>
-            <a:off x="5803392" y="2258568"/>
+            <a:off x="4370832" y="2258568"/>
             <a:ext cx="1828800" cy="292608"/>
           </a:xfrm>
           <a:prstGeom prst="rect">
@@ -26311,11 +28152,11 @@
             </a:avLst>
           </a:prstGeom>
           <a:solidFill>
-            <a:srgbClr val="CCFBF1"/>
+            <a:srgbClr val="FCE7F3"/>
           </a:solidFill>
           <a:ln w="19050">
             <a:solidFill>
-              <a:srgbClr val="0D9488"/>
+              <a:srgbClr val="DB2777"/>
             </a:solidFill>
             <a:prstDash val="solid"/>
           </a:ln>
@@ -26336,7 +28177,7 @@
         </p:nvSpPr>
         <p:spPr>
           <a:xfrm>
-            <a:off x="5803392" y="2258568"/>
+            <a:off x="4370832" y="2258568"/>
             <a:ext cx="1828800" cy="292608"/>
           </a:xfrm>
           <a:prstGeom prst="rect">
@@ -26355,13 +28196,13 @@
             <a:r>
               <a:rPr lang="en-US" sz="1300" b="1" dirty="0">
                 <a:solidFill>
-                  <a:srgbClr val="0F766E"/>
+                  <a:srgbClr val="9D174D"/>
                 </a:solidFill>
                 <a:latin typeface="Trebuchet MS" pitchFamily="34" charset="0"/>
                 <a:ea typeface="Trebuchet MS" pitchFamily="34" charset="-122"/>
                 <a:cs typeface="Trebuchet MS" pitchFamily="34" charset="-120"/>
               </a:rPr>
-              <a:t>like</a:t>
+              <a:t>ee</a:t>
             </a:r>
             <a:endParaRPr lang="en-US" sz="1300" dirty="0"/>
           </a:p>
@@ -26375,7 +28216,7 @@
         </p:nvSpPr>
         <p:spPr>
           <a:xfrm>
-            <a:off x="5803392" y="2569464"/>
+            <a:off x="4370832" y="2569464"/>
             <a:ext cx="1828800" cy="201168"/>
           </a:xfrm>
           <a:prstGeom prst="rect">
@@ -26400,7 +28241,7 @@
                 <a:ea typeface="Calibri" pitchFamily="34" charset="-122"/>
                 <a:cs typeface="Calibri" pitchFamily="34" charset="-120"/>
               </a:rPr>
-              <a:t>resembling, similar to</a:t>
+              <a:t>person who receives</a:t>
             </a:r>
             <a:endParaRPr lang="en-US" sz="850" dirty="0"/>
           </a:p>
@@ -26409,6 +28250,118 @@
       <p:sp>
         <p:nvSpPr>
           <p:cNvPr id="22" name="Shape 20"/>
+          <p:cNvSpPr/>
+          <p:nvPr/>
+        </p:nvSpPr>
+        <p:spPr>
+          <a:xfrm>
+            <a:off x="6519672" y="2258568"/>
+            <a:ext cx="1828800" cy="292608"/>
+          </a:xfrm>
+          <a:prstGeom prst="rect">
+            <a:avLst>
+              <a:gd name="adj" fmla="val 25000"/>
+            </a:avLst>
+          </a:prstGeom>
+          <a:solidFill>
+            <a:srgbClr val="FCE7F3"/>
+          </a:solidFill>
+          <a:ln w="19050">
+            <a:solidFill>
+              <a:srgbClr val="DB2777"/>
+            </a:solidFill>
+            <a:prstDash val="solid"/>
+          </a:ln>
+          <a:effectLst>
+            <a:outerShdw sx="100000" sy="100000" kx="0" ky="0" algn="bl" rotWithShape="0" blurRad="101600" dist="38100" dir="8100000">
+              <a:srgbClr val="000000">
+                <a:alpha val="12000"/>
+              </a:srgbClr>
+            </a:outerShdw>
+          </a:effectLst>
+        </p:spPr>
+      </p:sp>
+      <p:sp>
+        <p:nvSpPr>
+          <p:cNvPr id="23" name="Text 21"/>
+          <p:cNvSpPr/>
+          <p:nvPr/>
+        </p:nvSpPr>
+        <p:spPr>
+          <a:xfrm>
+            <a:off x="6519672" y="2258568"/>
+            <a:ext cx="1828800" cy="292608"/>
+          </a:xfrm>
+          <a:prstGeom prst="rect">
+            <a:avLst/>
+          </a:prstGeom>
+          <a:noFill/>
+          <a:ln/>
+        </p:spPr>
+        <p:txBody>
+          <a:bodyPr wrap="square" lIns="0" tIns="0" rIns="0" bIns="0" rtlCol="0" anchor="ctr"/>
+          <a:lstStyle/>
+          <a:p>
+            <a:pPr algn="ctr" indent="0" marL="0">
+              <a:buNone/>
+            </a:pPr>
+            <a:r>
+              <a:rPr lang="en-US" sz="1300" b="1" dirty="0">
+                <a:solidFill>
+                  <a:srgbClr val="9D174D"/>
+                </a:solidFill>
+                <a:latin typeface="Trebuchet MS" pitchFamily="34" charset="0"/>
+                <a:ea typeface="Trebuchet MS" pitchFamily="34" charset="-122"/>
+                <a:cs typeface="Trebuchet MS" pitchFamily="34" charset="-120"/>
+              </a:rPr>
+              <a:t>able</a:t>
+            </a:r>
+            <a:endParaRPr lang="en-US" sz="1300" dirty="0"/>
+          </a:p>
+        </p:txBody>
+      </p:sp>
+      <p:sp>
+        <p:nvSpPr>
+          <p:cNvPr id="24" name="Text 22"/>
+          <p:cNvSpPr/>
+          <p:nvPr/>
+        </p:nvSpPr>
+        <p:spPr>
+          <a:xfrm>
+            <a:off x="6519672" y="2569464"/>
+            <a:ext cx="1828800" cy="201168"/>
+          </a:xfrm>
+          <a:prstGeom prst="rect">
+            <a:avLst/>
+          </a:prstGeom>
+          <a:noFill/>
+          <a:ln/>
+        </p:spPr>
+        <p:txBody>
+          <a:bodyPr wrap="square" lIns="0" tIns="0" rIns="0" bIns="0" rtlCol="0" anchor="t"/>
+          <a:lstStyle/>
+          <a:p>
+            <a:pPr algn="ctr" indent="0" marL="0">
+              <a:buNone/>
+            </a:pPr>
+            <a:r>
+              <a:rPr lang="en-US" sz="850" dirty="0">
+                <a:solidFill>
+                  <a:srgbClr val="475569"/>
+                </a:solidFill>
+                <a:latin typeface="Calibri" pitchFamily="34" charset="0"/>
+                <a:ea typeface="Calibri" pitchFamily="34" charset="-122"/>
+                <a:cs typeface="Calibri" pitchFamily="34" charset="-120"/>
+              </a:rPr>
+              <a:t>able to</a:t>
+            </a:r>
+            <a:endParaRPr lang="en-US" sz="850" dirty="0"/>
+          </a:p>
+        </p:txBody>
+      </p:sp>
+      <p:sp>
+        <p:nvSpPr>
+          <p:cNvPr id="25" name="Shape 23"/>
           <p:cNvSpPr/>
           <p:nvPr/>
         </p:nvSpPr>
@@ -26435,7 +28388,7 @@
       </p:sp>
       <p:sp>
         <p:nvSpPr>
-          <p:cNvPr id="23" name="Text 21"/>
+          <p:cNvPr id="26" name="Text 24"/>
           <p:cNvSpPr/>
           <p:nvPr/>
         </p:nvSpPr>
@@ -26474,7 +28427,7 @@
       </p:sp>
       <p:sp>
         <p:nvSpPr>
-          <p:cNvPr id="24" name="Shape 22"/>
+          <p:cNvPr id="27" name="Shape 25"/>
           <p:cNvSpPr/>
           <p:nvPr/>
         </p:nvSpPr>
@@ -26501,13 +28454,13 @@
       </p:sp>
       <p:sp>
         <p:nvSpPr>
-          <p:cNvPr id="25" name="Shape 23"/>
-          <p:cNvSpPr/>
-          <p:nvPr/>
-        </p:nvSpPr>
-        <p:spPr>
-          <a:xfrm>
-            <a:off x="2999232" y="3364992"/>
+          <p:cNvPr id="28" name="Shape 26"/>
+          <p:cNvSpPr/>
+          <p:nvPr/>
+        </p:nvSpPr>
+        <p:spPr>
+          <a:xfrm>
+            <a:off x="2313432" y="3364992"/>
             <a:ext cx="1645920" cy="475488"/>
           </a:xfrm>
           <a:prstGeom prst="rect">
@@ -26528,13 +28481,13 @@
       </p:sp>
       <p:sp>
         <p:nvSpPr>
-          <p:cNvPr id="26" name="Text 24"/>
-          <p:cNvSpPr/>
-          <p:nvPr/>
-        </p:nvSpPr>
-        <p:spPr>
-          <a:xfrm>
-            <a:off x="2999232" y="3364992"/>
+          <p:cNvPr id="29" name="Text 27"/>
+          <p:cNvSpPr/>
+          <p:nvPr/>
+        </p:nvSpPr>
+        <p:spPr>
+          <a:xfrm>
+            <a:off x="2313432" y="3364992"/>
             <a:ext cx="1645920" cy="475488"/>
           </a:xfrm>
           <a:prstGeom prst="rect">
@@ -26559,7 +28512,7 @@
                 <a:ea typeface="Trebuchet MS" pitchFamily="34" charset="-122"/>
                 <a:cs typeface="Trebuchet MS" pitchFamily="34" charset="-120"/>
               </a:rPr>
-              <a:t>child</a:t>
+              <a:t>like</a:t>
             </a:r>
             <a:endParaRPr lang="en-US" sz="1400" dirty="0"/>
           </a:p>
@@ -26567,14 +28520,14 @@
       </p:sp>
       <p:sp>
         <p:nvSpPr>
-          <p:cNvPr id="27" name="Text 25"/>
-          <p:cNvSpPr/>
-          <p:nvPr/>
-        </p:nvSpPr>
-        <p:spPr>
-          <a:xfrm>
-            <a:off x="4645152" y="3364992"/>
-            <a:ext cx="1097280" cy="475488"/>
+          <p:cNvPr id="30" name="Text 28"/>
+          <p:cNvSpPr/>
+          <p:nvPr/>
+        </p:nvSpPr>
+        <p:spPr>
+          <a:xfrm>
+            <a:off x="3959352" y="3364992"/>
+            <a:ext cx="411480" cy="475488"/>
           </a:xfrm>
           <a:prstGeom prst="rect">
             <a:avLst/>
@@ -26606,13 +28559,13 @@
       </p:sp>
       <p:sp>
         <p:nvSpPr>
-          <p:cNvPr id="28" name="Shape 26"/>
-          <p:cNvSpPr/>
-          <p:nvPr/>
-        </p:nvSpPr>
-        <p:spPr>
-          <a:xfrm>
-            <a:off x="5742432" y="3364992"/>
+          <p:cNvPr id="31" name="Shape 29"/>
+          <p:cNvSpPr/>
+          <p:nvPr/>
+        </p:nvSpPr>
+        <p:spPr>
+          <a:xfrm>
+            <a:off x="4370832" y="3364992"/>
             <a:ext cx="1645920" cy="475488"/>
           </a:xfrm>
           <a:prstGeom prst="rect">
@@ -26633,13 +28586,13 @@
       </p:sp>
       <p:sp>
         <p:nvSpPr>
-          <p:cNvPr id="29" name="Text 27"/>
-          <p:cNvSpPr/>
-          <p:nvPr/>
-        </p:nvSpPr>
-        <p:spPr>
-          <a:xfrm>
-            <a:off x="5742432" y="3364992"/>
+          <p:cNvPr id="32" name="Text 30"/>
+          <p:cNvSpPr/>
+          <p:nvPr/>
+        </p:nvSpPr>
+        <p:spPr>
+          <a:xfrm>
+            <a:off x="4370832" y="3364992"/>
             <a:ext cx="1645920" cy="475488"/>
           </a:xfrm>
           <a:prstGeom prst="rect">
@@ -26664,7 +28617,7 @@
                 <a:ea typeface="Trebuchet MS" pitchFamily="34" charset="-122"/>
                 <a:cs typeface="Trebuchet MS" pitchFamily="34" charset="-120"/>
               </a:rPr>
-              <a:t>like</a:t>
+              <a:t>a</a:t>
             </a:r>
             <a:endParaRPr lang="en-US" sz="1400" dirty="0"/>
           </a:p>
@@ -26672,7 +28625,112 @@
       </p:sp>
       <p:sp>
         <p:nvSpPr>
-          <p:cNvPr id="30" name="Shape 28"/>
+          <p:cNvPr id="33" name="Text 31"/>
+          <p:cNvSpPr/>
+          <p:nvPr/>
+        </p:nvSpPr>
+        <p:spPr>
+          <a:xfrm>
+            <a:off x="6016752" y="3364992"/>
+            <a:ext cx="411480" cy="475488"/>
+          </a:xfrm>
+          <a:prstGeom prst="rect">
+            <a:avLst/>
+          </a:prstGeom>
+          <a:noFill/>
+          <a:ln/>
+        </p:spPr>
+        <p:txBody>
+          <a:bodyPr wrap="square" lIns="0" tIns="0" rIns="0" bIns="0" rtlCol="0" anchor="ctr"/>
+          <a:lstStyle/>
+          <a:p>
+            <a:pPr algn="ctr" indent="0" marL="0">
+              <a:buNone/>
+            </a:pPr>
+            <a:r>
+              <a:rPr lang="en-US" sz="1600" b="1" dirty="0">
+                <a:solidFill>
+                  <a:srgbClr val="0D9488"/>
+                </a:solidFill>
+                <a:latin typeface="Trebuchet MS" pitchFamily="34" charset="0"/>
+                <a:ea typeface="Trebuchet MS" pitchFamily="34" charset="-122"/>
+                <a:cs typeface="Trebuchet MS" pitchFamily="34" charset="-120"/>
+              </a:rPr>
+              <a:t>·</a:t>
+            </a:r>
+            <a:endParaRPr lang="en-US" sz="1600" dirty="0"/>
+          </a:p>
+        </p:txBody>
+      </p:sp>
+      <p:sp>
+        <p:nvSpPr>
+          <p:cNvPr id="34" name="Shape 32"/>
+          <p:cNvSpPr/>
+          <p:nvPr/>
+        </p:nvSpPr>
+        <p:spPr>
+          <a:xfrm>
+            <a:off x="6428232" y="3364992"/>
+            <a:ext cx="1645920" cy="475488"/>
+          </a:xfrm>
+          <a:prstGeom prst="rect">
+            <a:avLst>
+              <a:gd name="adj" fmla="val 9615"/>
+            </a:avLst>
+          </a:prstGeom>
+          <a:solidFill>
+            <a:srgbClr val="FFFFFF"/>
+          </a:solidFill>
+          <a:ln w="12700">
+            <a:solidFill>
+              <a:srgbClr val="0D9488"/>
+            </a:solidFill>
+            <a:prstDash val="solid"/>
+          </a:ln>
+        </p:spPr>
+      </p:sp>
+      <p:sp>
+        <p:nvSpPr>
+          <p:cNvPr id="35" name="Text 33"/>
+          <p:cNvSpPr/>
+          <p:nvPr/>
+        </p:nvSpPr>
+        <p:spPr>
+          <a:xfrm>
+            <a:off x="6428232" y="3364992"/>
+            <a:ext cx="1645920" cy="475488"/>
+          </a:xfrm>
+          <a:prstGeom prst="rect">
+            <a:avLst/>
+          </a:prstGeom>
+          <a:noFill/>
+          <a:ln/>
+        </p:spPr>
+        <p:txBody>
+          <a:bodyPr wrap="square" lIns="0" tIns="0" rIns="0" bIns="0" rtlCol="0" anchor="ctr"/>
+          <a:lstStyle/>
+          <a:p>
+            <a:pPr algn="ctr" indent="0" marL="0">
+              <a:buNone/>
+            </a:pPr>
+            <a:r>
+              <a:rPr lang="en-US" sz="1400" b="1" dirty="0">
+                <a:solidFill>
+                  <a:srgbClr val="0D9488"/>
+                </a:solidFill>
+                <a:latin typeface="Trebuchet MS" pitchFamily="34" charset="0"/>
+                <a:ea typeface="Trebuchet MS" pitchFamily="34" charset="-122"/>
+                <a:cs typeface="Trebuchet MS" pitchFamily="34" charset="-120"/>
+              </a:rPr>
+              <a:t>ble</a:t>
+            </a:r>
+            <a:endParaRPr lang="en-US" sz="1400" dirty="0"/>
+          </a:p>
+        </p:txBody>
+      </p:sp>
+      <p:sp>
+        <p:nvSpPr>
+          <p:cNvPr id="36" name="Shape 34"/>
           <p:cNvSpPr/>
           <p:nvPr/>
         </p:nvSpPr>
@@ -26699,7 +28757,7 @@
       </p:sp>
       <p:sp>
         <p:nvSpPr>
-          <p:cNvPr id="31" name="Text 29"/>
+          <p:cNvPr id="37" name="Text 35"/>
           <p:cNvSpPr/>
           <p:nvPr/>
         </p:nvSpPr>
@@ -26738,7 +28796,7 @@
       </p:sp>
       <p:sp>
         <p:nvSpPr>
-          <p:cNvPr id="32" name="Shape 30"/>
+          <p:cNvPr id="38" name="Shape 36"/>
           <p:cNvSpPr/>
           <p:nvPr/>
         </p:nvSpPr>
@@ -26765,13 +28823,13 @@
       </p:sp>
       <p:sp>
         <p:nvSpPr>
-          <p:cNvPr id="33" name="Shape 31"/>
-          <p:cNvSpPr/>
-          <p:nvPr/>
-        </p:nvSpPr>
-        <p:spPr>
-          <a:xfrm>
-            <a:off x="2023872" y="4169664"/>
+          <p:cNvPr id="39" name="Shape 37"/>
+          <p:cNvSpPr/>
+          <p:nvPr/>
+        </p:nvSpPr>
+        <p:spPr>
+          <a:xfrm>
+            <a:off x="2254649" y="4169664"/>
             <a:ext cx="685800" cy="475488"/>
           </a:xfrm>
           <a:prstGeom prst="rect">
@@ -26792,13 +28850,13 @@
       </p:sp>
       <p:sp>
         <p:nvSpPr>
-          <p:cNvPr id="34" name="Text 32"/>
-          <p:cNvSpPr/>
-          <p:nvPr/>
-        </p:nvSpPr>
-        <p:spPr>
-          <a:xfrm>
-            <a:off x="2023872" y="4169664"/>
+          <p:cNvPr id="40" name="Text 38"/>
+          <p:cNvSpPr/>
+          <p:nvPr/>
+        </p:nvSpPr>
+        <p:spPr>
+          <a:xfrm>
+            <a:off x="2254649" y="4169664"/>
             <a:ext cx="685800" cy="475488"/>
           </a:xfrm>
           <a:prstGeom prst="rect">
@@ -26823,7 +28881,7 @@
                 <a:ea typeface="Trebuchet MS" pitchFamily="34" charset="-122"/>
                 <a:cs typeface="Trebuchet MS" pitchFamily="34" charset="-120"/>
               </a:rPr>
-              <a:t>ch</a:t>
+              <a:t>l</a:t>
             </a:r>
             <a:endParaRPr lang="en-US" sz="900" dirty="0"/>
           </a:p>
@@ -26831,13 +28889,13 @@
       </p:sp>
       <p:sp>
         <p:nvSpPr>
-          <p:cNvPr id="35" name="Shape 33"/>
-          <p:cNvSpPr/>
-          <p:nvPr/>
-        </p:nvSpPr>
-        <p:spPr>
-          <a:xfrm>
-            <a:off x="2831592" y="4169664"/>
+          <p:cNvPr id="41" name="Shape 39"/>
+          <p:cNvSpPr/>
+          <p:nvPr/>
+        </p:nvSpPr>
+        <p:spPr>
+          <a:xfrm>
+            <a:off x="3293146" y="4169664"/>
             <a:ext cx="685800" cy="475488"/>
           </a:xfrm>
           <a:prstGeom prst="rect">
@@ -26858,13 +28916,13 @@
       </p:sp>
       <p:sp>
         <p:nvSpPr>
-          <p:cNvPr id="36" name="Text 34"/>
-          <p:cNvSpPr/>
-          <p:nvPr/>
-        </p:nvSpPr>
-        <p:spPr>
-          <a:xfrm>
-            <a:off x="2831592" y="4169664"/>
+          <p:cNvPr id="42" name="Text 40"/>
+          <p:cNvSpPr/>
+          <p:nvPr/>
+        </p:nvSpPr>
+        <p:spPr>
+          <a:xfrm>
+            <a:off x="3293146" y="4169664"/>
             <a:ext cx="685800" cy="475488"/>
           </a:xfrm>
           <a:prstGeom prst="rect">
@@ -26889,7 +28947,7 @@
                 <a:ea typeface="Trebuchet MS" pitchFamily="34" charset="-122"/>
                 <a:cs typeface="Trebuchet MS" pitchFamily="34" charset="-120"/>
               </a:rPr>
-              <a:t>i</a:t>
+              <a:t>i_e</a:t>
             </a:r>
             <a:endParaRPr lang="en-US" sz="900" dirty="0"/>
           </a:p>
@@ -26897,13 +28955,13 @@
       </p:sp>
       <p:sp>
         <p:nvSpPr>
-          <p:cNvPr id="37" name="Shape 35"/>
-          <p:cNvSpPr/>
-          <p:nvPr/>
-        </p:nvSpPr>
-        <p:spPr>
-          <a:xfrm>
-            <a:off x="3639312" y="4169664"/>
+          <p:cNvPr id="43" name="Shape 41"/>
+          <p:cNvSpPr/>
+          <p:nvPr/>
+        </p:nvSpPr>
+        <p:spPr>
+          <a:xfrm>
+            <a:off x="4331643" y="4169664"/>
             <a:ext cx="685800" cy="475488"/>
           </a:xfrm>
           <a:prstGeom prst="rect">
@@ -26924,13 +28982,13 @@
       </p:sp>
       <p:sp>
         <p:nvSpPr>
-          <p:cNvPr id="38" name="Text 36"/>
-          <p:cNvSpPr/>
-          <p:nvPr/>
-        </p:nvSpPr>
-        <p:spPr>
-          <a:xfrm>
-            <a:off x="3639312" y="4169664"/>
+          <p:cNvPr id="44" name="Text 42"/>
+          <p:cNvSpPr/>
+          <p:nvPr/>
+        </p:nvSpPr>
+        <p:spPr>
+          <a:xfrm>
+            <a:off x="4331643" y="4169664"/>
             <a:ext cx="685800" cy="475488"/>
           </a:xfrm>
           <a:prstGeom prst="rect">
@@ -26955,7 +29013,7 @@
                 <a:ea typeface="Trebuchet MS" pitchFamily="34" charset="-122"/>
                 <a:cs typeface="Trebuchet MS" pitchFamily="34" charset="-120"/>
               </a:rPr>
-              <a:t>l</a:t>
+              <a:t>k</a:t>
             </a:r>
             <a:endParaRPr lang="en-US" sz="900" dirty="0"/>
           </a:p>
@@ -26963,13 +29021,13 @@
       </p:sp>
       <p:sp>
         <p:nvSpPr>
-          <p:cNvPr id="39" name="Shape 37"/>
-          <p:cNvSpPr/>
-          <p:nvPr/>
-        </p:nvSpPr>
-        <p:spPr>
-          <a:xfrm>
-            <a:off x="4447032" y="4169664"/>
+          <p:cNvPr id="45" name="Shape 43"/>
+          <p:cNvSpPr/>
+          <p:nvPr/>
+        </p:nvSpPr>
+        <p:spPr>
+          <a:xfrm>
+            <a:off x="5370141" y="4169664"/>
             <a:ext cx="685800" cy="475488"/>
           </a:xfrm>
           <a:prstGeom prst="rect">
@@ -26990,13 +29048,13 @@
       </p:sp>
       <p:sp>
         <p:nvSpPr>
-          <p:cNvPr id="40" name="Text 38"/>
-          <p:cNvSpPr/>
-          <p:nvPr/>
-        </p:nvSpPr>
-        <p:spPr>
-          <a:xfrm>
-            <a:off x="4447032" y="4169664"/>
+          <p:cNvPr id="46" name="Text 44"/>
+          <p:cNvSpPr/>
+          <p:nvPr/>
+        </p:nvSpPr>
+        <p:spPr>
+          <a:xfrm>
+            <a:off x="5370141" y="4169664"/>
             <a:ext cx="685800" cy="475488"/>
           </a:xfrm>
           <a:prstGeom prst="rect">
@@ -27021,7 +29079,7 @@
                 <a:ea typeface="Trebuchet MS" pitchFamily="34" charset="-122"/>
                 <a:cs typeface="Trebuchet MS" pitchFamily="34" charset="-120"/>
               </a:rPr>
-              <a:t>d</a:t>
+              <a:t>a</a:t>
             </a:r>
             <a:endParaRPr lang="en-US" sz="900" dirty="0"/>
           </a:p>
@@ -27029,13 +29087,13 @@
       </p:sp>
       <p:sp>
         <p:nvSpPr>
-          <p:cNvPr id="41" name="Shape 39"/>
-          <p:cNvSpPr/>
-          <p:nvPr/>
-        </p:nvSpPr>
-        <p:spPr>
-          <a:xfrm>
-            <a:off x="5254752" y="4169664"/>
+          <p:cNvPr id="47" name="Shape 45"/>
+          <p:cNvSpPr/>
+          <p:nvPr/>
+        </p:nvSpPr>
+        <p:spPr>
+          <a:xfrm>
+            <a:off x="6408638" y="4169664"/>
             <a:ext cx="685800" cy="475488"/>
           </a:xfrm>
           <a:prstGeom prst="rect">
@@ -27056,13 +29114,13 @@
       </p:sp>
       <p:sp>
         <p:nvSpPr>
-          <p:cNvPr id="42" name="Text 40"/>
-          <p:cNvSpPr/>
-          <p:nvPr/>
-        </p:nvSpPr>
-        <p:spPr>
-          <a:xfrm>
-            <a:off x="5254752" y="4169664"/>
+          <p:cNvPr id="48" name="Text 46"/>
+          <p:cNvSpPr/>
+          <p:nvPr/>
+        </p:nvSpPr>
+        <p:spPr>
+          <a:xfrm>
+            <a:off x="6408638" y="4169664"/>
             <a:ext cx="685800" cy="475488"/>
           </a:xfrm>
           <a:prstGeom prst="rect">
@@ -27087,7 +29145,7 @@
                 <a:ea typeface="Trebuchet MS" pitchFamily="34" charset="-122"/>
                 <a:cs typeface="Trebuchet MS" pitchFamily="34" charset="-120"/>
               </a:rPr>
-              <a:t>l</a:t>
+              <a:t>b</a:t>
             </a:r>
             <a:endParaRPr lang="en-US" sz="900" dirty="0"/>
           </a:p>
@@ -27095,13 +29153,13 @@
       </p:sp>
       <p:sp>
         <p:nvSpPr>
-          <p:cNvPr id="43" name="Shape 41"/>
-          <p:cNvSpPr/>
-          <p:nvPr/>
-        </p:nvSpPr>
-        <p:spPr>
-          <a:xfrm>
-            <a:off x="6062472" y="4169664"/>
+          <p:cNvPr id="49" name="Shape 47"/>
+          <p:cNvSpPr/>
+          <p:nvPr/>
+        </p:nvSpPr>
+        <p:spPr>
+          <a:xfrm>
+            <a:off x="7447135" y="4169664"/>
             <a:ext cx="685800" cy="475488"/>
           </a:xfrm>
           <a:prstGeom prst="rect">
@@ -27122,13 +29180,13 @@
       </p:sp>
       <p:sp>
         <p:nvSpPr>
-          <p:cNvPr id="44" name="Text 42"/>
-          <p:cNvSpPr/>
-          <p:nvPr/>
-        </p:nvSpPr>
-        <p:spPr>
-          <a:xfrm>
-            <a:off x="6062472" y="4169664"/>
+          <p:cNvPr id="50" name="Text 48"/>
+          <p:cNvSpPr/>
+          <p:nvPr/>
+        </p:nvSpPr>
+        <p:spPr>
+          <a:xfrm>
+            <a:off x="7447135" y="4169664"/>
             <a:ext cx="685800" cy="475488"/>
           </a:xfrm>
           <a:prstGeom prst="rect">
@@ -27153,139 +29211,7 @@
                 <a:ea typeface="Trebuchet MS" pitchFamily="34" charset="-122"/>
                 <a:cs typeface="Trebuchet MS" pitchFamily="34" charset="-120"/>
               </a:rPr>
-              <a:t>i</a:t>
-            </a:r>
-            <a:endParaRPr lang="en-US" sz="900" dirty="0"/>
-          </a:p>
-        </p:txBody>
-      </p:sp>
-      <p:sp>
-        <p:nvSpPr>
-          <p:cNvPr id="45" name="Shape 43"/>
-          <p:cNvSpPr/>
-          <p:nvPr/>
-        </p:nvSpPr>
-        <p:spPr>
-          <a:xfrm>
-            <a:off x="6870192" y="4169664"/>
-            <a:ext cx="685800" cy="475488"/>
-          </a:xfrm>
-          <a:prstGeom prst="rect">
-            <a:avLst>
-              <a:gd name="adj" fmla="val 7692"/>
-            </a:avLst>
-          </a:prstGeom>
-          <a:solidFill>
-            <a:srgbClr val="FFFFFF"/>
-          </a:solidFill>
-          <a:ln w="12700">
-            <a:solidFill>
-              <a:srgbClr val="DB2777"/>
-            </a:solidFill>
-            <a:prstDash val="solid"/>
-          </a:ln>
-        </p:spPr>
-      </p:sp>
-      <p:sp>
-        <p:nvSpPr>
-          <p:cNvPr id="46" name="Text 44"/>
-          <p:cNvSpPr/>
-          <p:nvPr/>
-        </p:nvSpPr>
-        <p:spPr>
-          <a:xfrm>
-            <a:off x="6870192" y="4169664"/>
-            <a:ext cx="685800" cy="475488"/>
-          </a:xfrm>
-          <a:prstGeom prst="rect">
-            <a:avLst/>
-          </a:prstGeom>
-          <a:noFill/>
-          <a:ln/>
-        </p:spPr>
-        <p:txBody>
-          <a:bodyPr wrap="square" lIns="0" tIns="0" rIns="0" bIns="0" rtlCol="0" anchor="ctr"/>
-          <a:lstStyle/>
-          <a:p>
-            <a:pPr algn="ctr" indent="0" marL="0">
-              <a:buNone/>
-            </a:pPr>
-            <a:r>
-              <a:rPr lang="en-US" sz="900" b="1" dirty="0">
-                <a:solidFill>
-                  <a:srgbClr val="9D174D"/>
-                </a:solidFill>
-                <a:latin typeface="Trebuchet MS" pitchFamily="34" charset="0"/>
-                <a:ea typeface="Trebuchet MS" pitchFamily="34" charset="-122"/>
-                <a:cs typeface="Trebuchet MS" pitchFamily="34" charset="-120"/>
-              </a:rPr>
-              <a:t>k</a:t>
-            </a:r>
-            <a:endParaRPr lang="en-US" sz="900" dirty="0"/>
-          </a:p>
-        </p:txBody>
-      </p:sp>
-      <p:sp>
-        <p:nvSpPr>
-          <p:cNvPr id="47" name="Shape 45"/>
-          <p:cNvSpPr/>
-          <p:nvPr/>
-        </p:nvSpPr>
-        <p:spPr>
-          <a:xfrm>
-            <a:off x="7677912" y="4169664"/>
-            <a:ext cx="685800" cy="475488"/>
-          </a:xfrm>
-          <a:prstGeom prst="rect">
-            <a:avLst>
-              <a:gd name="adj" fmla="val 7692"/>
-            </a:avLst>
-          </a:prstGeom>
-          <a:solidFill>
-            <a:srgbClr val="FFFFFF"/>
-          </a:solidFill>
-          <a:ln w="12700">
-            <a:solidFill>
-              <a:srgbClr val="DB2777"/>
-            </a:solidFill>
-            <a:prstDash val="solid"/>
-          </a:ln>
-        </p:spPr>
-      </p:sp>
-      <p:sp>
-        <p:nvSpPr>
-          <p:cNvPr id="48" name="Text 46"/>
-          <p:cNvSpPr/>
-          <p:nvPr/>
-        </p:nvSpPr>
-        <p:spPr>
-          <a:xfrm>
-            <a:off x="7677912" y="4169664"/>
-            <a:ext cx="685800" cy="475488"/>
-          </a:xfrm>
-          <a:prstGeom prst="rect">
-            <a:avLst/>
-          </a:prstGeom>
-          <a:noFill/>
-          <a:ln/>
-        </p:spPr>
-        <p:txBody>
-          <a:bodyPr wrap="square" lIns="0" tIns="0" rIns="0" bIns="0" rtlCol="0" anchor="ctr"/>
-          <a:lstStyle/>
-          <a:p>
-            <a:pPr algn="ctr" indent="0" marL="0">
-              <a:buNone/>
-            </a:pPr>
-            <a:r>
-              <a:rPr lang="en-US" sz="900" b="1" dirty="0">
-                <a:solidFill>
-                  <a:srgbClr val="9D174D"/>
-                </a:solidFill>
-                <a:latin typeface="Trebuchet MS" pitchFamily="34" charset="0"/>
-                <a:ea typeface="Trebuchet MS" pitchFamily="34" charset="-122"/>
-                <a:cs typeface="Trebuchet MS" pitchFamily="34" charset="-120"/>
-              </a:rPr>
-              <a:t>e</a:t>
+              <a:t>le</a:t>
             </a:r>
             <a:endParaRPr lang="en-US" sz="900" dirty="0"/>
           </a:p>
@@ -27577,7 +29503,7 @@
                 <a:ea typeface="Calibri" pitchFamily="34" charset="-122"/>
                 <a:cs typeface="Calibri" pitchFamily="34" charset="-120"/>
               </a:rPr>
-              <a:t>Word Labs  •  wordlabs.app  •  Root: 'like' = similar to, resembling</a:t>
+              <a:t>Word Labs  •  wordlabs.app  •  Root: 'like' = to enjoy; to prefer</a:t>
             </a:r>
             <a:endParaRPr lang="en-US" sz="800" dirty="0"/>
           </a:p>
@@ -27716,7 +29642,7 @@
                 <a:ea typeface="Trebuchet MS" pitchFamily="34" charset="-122"/>
                 <a:cs typeface="Trebuchet MS" pitchFamily="34" charset="-120"/>
               </a:rPr>
-              <a:t>likewise</a:t>
+              <a:t>alike</a:t>
             </a:r>
             <a:endParaRPr lang="en-US" sz="2800" dirty="0"/>
           </a:p>
@@ -28404,7 +30330,7 @@
                 <a:ea typeface="Calibri" pitchFamily="34" charset="-122"/>
                 <a:cs typeface="Calibri" pitchFamily="34" charset="-120"/>
               </a:rPr>
-              <a:t>Word Labs  •  wordlabs.app  •  Root: 'like' = similar to, resembling</a:t>
+              <a:t>Word Labs  •  wordlabs.app  •  Root: 'like' = to enjoy; to prefer</a:t>
             </a:r>
             <a:endParaRPr lang="en-US" sz="800" dirty="0"/>
           </a:p>
@@ -28543,7 +30469,7 @@
                 <a:ea typeface="Trebuchet MS" pitchFamily="34" charset="-122"/>
                 <a:cs typeface="Trebuchet MS" pitchFamily="34" charset="-120"/>
               </a:rPr>
-              <a:t>likewise</a:t>
+              <a:t>alike</a:t>
             </a:r>
             <a:endParaRPr lang="en-US" sz="2800" dirty="0"/>
           </a:p>
@@ -28632,11 +30558,11 @@
             </a:avLst>
           </a:prstGeom>
           <a:solidFill>
-            <a:srgbClr val="CCFBF1"/>
+            <a:srgbClr val="DDD6FE"/>
           </a:solidFill>
           <a:ln w="19050">
             <a:solidFill>
-              <a:srgbClr val="0D9488"/>
+              <a:srgbClr val="7C3AED"/>
             </a:solidFill>
             <a:prstDash val="solid"/>
           </a:ln>
@@ -28676,13 +30602,13 @@
             <a:r>
               <a:rPr lang="en-US" sz="1300" b="1" dirty="0">
                 <a:solidFill>
-                  <a:srgbClr val="0F766E"/>
+                  <a:srgbClr val="4C1D95"/>
                 </a:solidFill>
                 <a:latin typeface="Trebuchet MS" pitchFamily="34" charset="0"/>
                 <a:ea typeface="Trebuchet MS" pitchFamily="34" charset="-122"/>
                 <a:cs typeface="Trebuchet MS" pitchFamily="34" charset="-120"/>
               </a:rPr>
-              <a:t>like</a:t>
+              <a:t>a</a:t>
             </a:r>
             <a:endParaRPr lang="en-US" sz="1300" dirty="0"/>
           </a:p>
@@ -28721,7 +30647,7 @@
                 <a:ea typeface="Calibri" pitchFamily="34" charset="-122"/>
                 <a:cs typeface="Calibri" pitchFamily="34" charset="-120"/>
               </a:rPr>
-              <a:t>resembling, similar to</a:t>
+              <a:t>not; without</a:t>
             </a:r>
             <a:endParaRPr lang="en-US" sz="850" dirty="0"/>
           </a:p>
@@ -28744,11 +30670,11 @@
             </a:avLst>
           </a:prstGeom>
           <a:solidFill>
-            <a:srgbClr val="FCE7F3"/>
+            <a:srgbClr val="CCFBF1"/>
           </a:solidFill>
           <a:ln w="19050">
             <a:solidFill>
-              <a:srgbClr val="DB2777"/>
+              <a:srgbClr val="0D9488"/>
             </a:solidFill>
             <a:prstDash val="solid"/>
           </a:ln>
@@ -28788,13 +30714,13 @@
             <a:r>
               <a:rPr lang="en-US" sz="1300" b="1" dirty="0">
                 <a:solidFill>
-                  <a:srgbClr val="9D174D"/>
+                  <a:srgbClr val="0F766E"/>
                 </a:solidFill>
                 <a:latin typeface="Trebuchet MS" pitchFamily="34" charset="0"/>
                 <a:ea typeface="Trebuchet MS" pitchFamily="34" charset="-122"/>
                 <a:cs typeface="Trebuchet MS" pitchFamily="34" charset="-120"/>
               </a:rPr>
-              <a:t>wise</a:t>
+              <a:t>like</a:t>
             </a:r>
             <a:endParaRPr lang="en-US" sz="1300" dirty="0"/>
           </a:p>
@@ -28833,7 +30759,7 @@
                 <a:ea typeface="Calibri" pitchFamily="34" charset="-122"/>
                 <a:cs typeface="Calibri" pitchFamily="34" charset="-120"/>
               </a:rPr>
-              <a:t>manner, way</a:t>
+              <a:t>to enjoy; to prefer</a:t>
             </a:r>
             <a:endParaRPr lang="en-US" sz="850" dirty="0"/>
           </a:p>
@@ -29389,7 +31315,7 @@
                 <a:ea typeface="Calibri" pitchFamily="34" charset="-122"/>
                 <a:cs typeface="Calibri" pitchFamily="34" charset="-120"/>
               </a:rPr>
-              <a:t>Word Labs  •  wordlabs.app  •  Root: 'like' = similar to, resembling</a:t>
+              <a:t>Word Labs  •  wordlabs.app  •  Root: 'like' = to enjoy; to prefer</a:t>
             </a:r>
             <a:endParaRPr lang="en-US" sz="800" dirty="0"/>
           </a:p>
@@ -29528,7 +31454,7 @@
                 <a:ea typeface="Trebuchet MS" pitchFamily="34" charset="-122"/>
                 <a:cs typeface="Trebuchet MS" pitchFamily="34" charset="-120"/>
               </a:rPr>
-              <a:t>likewise</a:t>
+              <a:t>alike</a:t>
             </a:r>
             <a:endParaRPr lang="en-US" sz="2800" dirty="0"/>
           </a:p>
@@ -29617,11 +31543,11 @@
             </a:avLst>
           </a:prstGeom>
           <a:solidFill>
-            <a:srgbClr val="CCFBF1"/>
+            <a:srgbClr val="DDD6FE"/>
           </a:solidFill>
           <a:ln w="19050">
             <a:solidFill>
-              <a:srgbClr val="0D9488"/>
+              <a:srgbClr val="7C3AED"/>
             </a:solidFill>
             <a:prstDash val="solid"/>
           </a:ln>
@@ -29661,13 +31587,13 @@
             <a:r>
               <a:rPr lang="en-US" sz="1300" b="1" dirty="0">
                 <a:solidFill>
-                  <a:srgbClr val="0F766E"/>
+                  <a:srgbClr val="4C1D95"/>
                 </a:solidFill>
                 <a:latin typeface="Trebuchet MS" pitchFamily="34" charset="0"/>
                 <a:ea typeface="Trebuchet MS" pitchFamily="34" charset="-122"/>
                 <a:cs typeface="Trebuchet MS" pitchFamily="34" charset="-120"/>
               </a:rPr>
-              <a:t>like</a:t>
+              <a:t>a</a:t>
             </a:r>
             <a:endParaRPr lang="en-US" sz="1300" dirty="0"/>
           </a:p>
@@ -29706,7 +31632,7 @@
                 <a:ea typeface="Calibri" pitchFamily="34" charset="-122"/>
                 <a:cs typeface="Calibri" pitchFamily="34" charset="-120"/>
               </a:rPr>
-              <a:t>resembling, similar to</a:t>
+              <a:t>not; without</a:t>
             </a:r>
             <a:endParaRPr lang="en-US" sz="850" dirty="0"/>
           </a:p>
@@ -29729,11 +31655,11 @@
             </a:avLst>
           </a:prstGeom>
           <a:solidFill>
-            <a:srgbClr val="FCE7F3"/>
+            <a:srgbClr val="CCFBF1"/>
           </a:solidFill>
           <a:ln w="19050">
             <a:solidFill>
-              <a:srgbClr val="DB2777"/>
+              <a:srgbClr val="0D9488"/>
             </a:solidFill>
             <a:prstDash val="solid"/>
           </a:ln>
@@ -29773,13 +31699,13 @@
             <a:r>
               <a:rPr lang="en-US" sz="1300" b="1" dirty="0">
                 <a:solidFill>
-                  <a:srgbClr val="9D174D"/>
+                  <a:srgbClr val="0F766E"/>
                 </a:solidFill>
                 <a:latin typeface="Trebuchet MS" pitchFamily="34" charset="0"/>
                 <a:ea typeface="Trebuchet MS" pitchFamily="34" charset="-122"/>
                 <a:cs typeface="Trebuchet MS" pitchFamily="34" charset="-120"/>
               </a:rPr>
-              <a:t>wise</a:t>
+              <a:t>like</a:t>
             </a:r>
             <a:endParaRPr lang="en-US" sz="1300" dirty="0"/>
           </a:p>
@@ -29818,7 +31744,7 @@
                 <a:ea typeface="Calibri" pitchFamily="34" charset="-122"/>
                 <a:cs typeface="Calibri" pitchFamily="34" charset="-120"/>
               </a:rPr>
-              <a:t>manner, way</a:t>
+              <a:t>to enjoy; to prefer</a:t>
             </a:r>
             <a:endParaRPr lang="en-US" sz="850" dirty="0"/>
           </a:p>
@@ -29977,7 +31903,7 @@
                 <a:ea typeface="Trebuchet MS" pitchFamily="34" charset="-122"/>
                 <a:cs typeface="Trebuchet MS" pitchFamily="34" charset="-120"/>
               </a:rPr>
-              <a:t>like</a:t>
+              <a:t>a</a:t>
             </a:r>
             <a:endParaRPr lang="en-US" sz="1400" dirty="0"/>
           </a:p>
@@ -30082,7 +32008,7 @@
                 <a:ea typeface="Trebuchet MS" pitchFamily="34" charset="-122"/>
                 <a:cs typeface="Trebuchet MS" pitchFamily="34" charset="-120"/>
               </a:rPr>
-              <a:t>wise</a:t>
+              <a:t>like</a:t>
             </a:r>
             <a:endParaRPr lang="en-US" sz="1400" dirty="0"/>
           </a:p>
@@ -30506,7 +32432,7 @@
                 <a:ea typeface="Calibri" pitchFamily="34" charset="-122"/>
                 <a:cs typeface="Calibri" pitchFamily="34" charset="-120"/>
               </a:rPr>
-              <a:t>Word Labs  •  wordlabs.app  •  Root: 'like' = similar to, resembling</a:t>
+              <a:t>Word Labs  •  wordlabs.app  •  Root: 'like' = to enjoy; to prefer</a:t>
             </a:r>
             <a:endParaRPr lang="en-US" sz="800" dirty="0"/>
           </a:p>
@@ -30645,7 +32571,7 @@
                 <a:ea typeface="Trebuchet MS" pitchFamily="34" charset="-122"/>
                 <a:cs typeface="Trebuchet MS" pitchFamily="34" charset="-120"/>
               </a:rPr>
-              <a:t>likewise</a:t>
+              <a:t>alike</a:t>
             </a:r>
             <a:endParaRPr lang="en-US" sz="2800" dirty="0"/>
           </a:p>
@@ -30734,11 +32660,11 @@
             </a:avLst>
           </a:prstGeom>
           <a:solidFill>
-            <a:srgbClr val="CCFBF1"/>
+            <a:srgbClr val="DDD6FE"/>
           </a:solidFill>
           <a:ln w="19050">
             <a:solidFill>
-              <a:srgbClr val="0D9488"/>
+              <a:srgbClr val="7C3AED"/>
             </a:solidFill>
             <a:prstDash val="solid"/>
           </a:ln>
@@ -30778,13 +32704,13 @@
             <a:r>
               <a:rPr lang="en-US" sz="1300" b="1" dirty="0">
                 <a:solidFill>
-                  <a:srgbClr val="0F766E"/>
+                  <a:srgbClr val="4C1D95"/>
                 </a:solidFill>
                 <a:latin typeface="Trebuchet MS" pitchFamily="34" charset="0"/>
                 <a:ea typeface="Trebuchet MS" pitchFamily="34" charset="-122"/>
                 <a:cs typeface="Trebuchet MS" pitchFamily="34" charset="-120"/>
               </a:rPr>
-              <a:t>like</a:t>
+              <a:t>a</a:t>
             </a:r>
             <a:endParaRPr lang="en-US" sz="1300" dirty="0"/>
           </a:p>
@@ -30823,7 +32749,7 @@
                 <a:ea typeface="Calibri" pitchFamily="34" charset="-122"/>
                 <a:cs typeface="Calibri" pitchFamily="34" charset="-120"/>
               </a:rPr>
-              <a:t>resembling, similar to</a:t>
+              <a:t>not; without</a:t>
             </a:r>
             <a:endParaRPr lang="en-US" sz="850" dirty="0"/>
           </a:p>
@@ -30846,11 +32772,11 @@
             </a:avLst>
           </a:prstGeom>
           <a:solidFill>
-            <a:srgbClr val="FCE7F3"/>
+            <a:srgbClr val="CCFBF1"/>
           </a:solidFill>
           <a:ln w="19050">
             <a:solidFill>
-              <a:srgbClr val="DB2777"/>
+              <a:srgbClr val="0D9488"/>
             </a:solidFill>
             <a:prstDash val="solid"/>
           </a:ln>
@@ -30890,13 +32816,13 @@
             <a:r>
               <a:rPr lang="en-US" sz="1300" b="1" dirty="0">
                 <a:solidFill>
-                  <a:srgbClr val="9D174D"/>
+                  <a:srgbClr val="0F766E"/>
                 </a:solidFill>
                 <a:latin typeface="Trebuchet MS" pitchFamily="34" charset="0"/>
                 <a:ea typeface="Trebuchet MS" pitchFamily="34" charset="-122"/>
                 <a:cs typeface="Trebuchet MS" pitchFamily="34" charset="-120"/>
               </a:rPr>
-              <a:t>wise</a:t>
+              <a:t>like</a:t>
             </a:r>
             <a:endParaRPr lang="en-US" sz="1300" dirty="0"/>
           </a:p>
@@ -30935,7 +32861,7 @@
                 <a:ea typeface="Calibri" pitchFamily="34" charset="-122"/>
                 <a:cs typeface="Calibri" pitchFamily="34" charset="-120"/>
               </a:rPr>
-              <a:t>manner, way</a:t>
+              <a:t>to enjoy; to prefer</a:t>
             </a:r>
             <a:endParaRPr lang="en-US" sz="850" dirty="0"/>
           </a:p>
@@ -31094,7 +33020,7 @@
                 <a:ea typeface="Trebuchet MS" pitchFamily="34" charset="-122"/>
                 <a:cs typeface="Trebuchet MS" pitchFamily="34" charset="-120"/>
               </a:rPr>
-              <a:t>like</a:t>
+              <a:t>a</a:t>
             </a:r>
             <a:endParaRPr lang="en-US" sz="1400" dirty="0"/>
           </a:p>
@@ -31199,7 +33125,7 @@
                 <a:ea typeface="Trebuchet MS" pitchFamily="34" charset="-122"/>
                 <a:cs typeface="Trebuchet MS" pitchFamily="34" charset="-120"/>
               </a:rPr>
-              <a:t>wise</a:t>
+              <a:t>like</a:t>
             </a:r>
             <a:endParaRPr lang="en-US" sz="1400" dirty="0"/>
           </a:p>
@@ -31306,7 +33232,7 @@
         </p:nvSpPr>
         <p:spPr>
           <a:xfrm>
-            <a:off x="2124837" y="4169664"/>
+            <a:off x="2670048" y="4169664"/>
             <a:ext cx="685800" cy="475488"/>
           </a:xfrm>
           <a:prstGeom prst="rect">
@@ -31333,7 +33259,7 @@
         </p:nvSpPr>
         <p:spPr>
           <a:xfrm>
-            <a:off x="2124837" y="4169664"/>
+            <a:off x="2670048" y="4169664"/>
             <a:ext cx="685800" cy="475488"/>
           </a:xfrm>
           <a:prstGeom prst="rect">
@@ -31358,7 +33284,7 @@
                 <a:ea typeface="Trebuchet MS" pitchFamily="34" charset="-122"/>
                 <a:cs typeface="Trebuchet MS" pitchFamily="34" charset="-120"/>
               </a:rPr>
-              <a:t>l</a:t>
+              <a:t>a</a:t>
             </a:r>
             <a:endParaRPr lang="en-US" sz="900" dirty="0"/>
           </a:p>
@@ -31372,7 +33298,7 @@
         </p:nvSpPr>
         <p:spPr>
           <a:xfrm>
-            <a:off x="3033522" y="4169664"/>
+            <a:off x="4123944" y="4169664"/>
             <a:ext cx="685800" cy="475488"/>
           </a:xfrm>
           <a:prstGeom prst="rect">
@@ -31399,7 +33325,7 @@
         </p:nvSpPr>
         <p:spPr>
           <a:xfrm>
-            <a:off x="3033522" y="4169664"/>
+            <a:off x="4123944" y="4169664"/>
             <a:ext cx="685800" cy="475488"/>
           </a:xfrm>
           <a:prstGeom prst="rect">
@@ -31424,7 +33350,7 @@
                 <a:ea typeface="Trebuchet MS" pitchFamily="34" charset="-122"/>
                 <a:cs typeface="Trebuchet MS" pitchFamily="34" charset="-120"/>
               </a:rPr>
-              <a:t>i</a:t>
+              <a:t>l</a:t>
             </a:r>
             <a:endParaRPr lang="en-US" sz="900" dirty="0"/>
           </a:p>
@@ -31438,7 +33364,7 @@
         </p:nvSpPr>
         <p:spPr>
           <a:xfrm>
-            <a:off x="3942207" y="4169664"/>
+            <a:off x="5577840" y="4169664"/>
             <a:ext cx="685800" cy="475488"/>
           </a:xfrm>
           <a:prstGeom prst="rect">
@@ -31465,7 +33391,7 @@
         </p:nvSpPr>
         <p:spPr>
           <a:xfrm>
-            <a:off x="3942207" y="4169664"/>
+            <a:off x="5577840" y="4169664"/>
             <a:ext cx="685800" cy="475488"/>
           </a:xfrm>
           <a:prstGeom prst="rect">
@@ -31490,7 +33416,7 @@
                 <a:ea typeface="Trebuchet MS" pitchFamily="34" charset="-122"/>
                 <a:cs typeface="Trebuchet MS" pitchFamily="34" charset="-120"/>
               </a:rPr>
-              <a:t>k</a:t>
+              <a:t>i_e</a:t>
             </a:r>
             <a:endParaRPr lang="en-US" sz="900" dirty="0"/>
           </a:p>
@@ -31504,7 +33430,7 @@
         </p:nvSpPr>
         <p:spPr>
           <a:xfrm>
-            <a:off x="4850892" y="4169664"/>
+            <a:off x="7031736" y="4169664"/>
             <a:ext cx="685800" cy="475488"/>
           </a:xfrm>
           <a:prstGeom prst="rect">
@@ -31531,7 +33457,7 @@
         </p:nvSpPr>
         <p:spPr>
           <a:xfrm>
-            <a:off x="4850892" y="4169664"/>
+            <a:off x="7031736" y="4169664"/>
             <a:ext cx="685800" cy="475488"/>
           </a:xfrm>
           <a:prstGeom prst="rect">
@@ -31556,205 +33482,7 @@
                 <a:ea typeface="Trebuchet MS" pitchFamily="34" charset="-122"/>
                 <a:cs typeface="Trebuchet MS" pitchFamily="34" charset="-120"/>
               </a:rPr>
-              <a:t>ew</a:t>
-            </a:r>
-            <a:endParaRPr lang="en-US" sz="900" dirty="0"/>
-          </a:p>
-        </p:txBody>
-      </p:sp>
-      <p:sp>
-        <p:nvSpPr>
-          <p:cNvPr id="41" name="Shape 39"/>
-          <p:cNvSpPr/>
-          <p:nvPr/>
-        </p:nvSpPr>
-        <p:spPr>
-          <a:xfrm>
-            <a:off x="5759577" y="4169664"/>
-            <a:ext cx="685800" cy="475488"/>
-          </a:xfrm>
-          <a:prstGeom prst="rect">
-            <a:avLst>
-              <a:gd name="adj" fmla="val 7692"/>
-            </a:avLst>
-          </a:prstGeom>
-          <a:solidFill>
-            <a:srgbClr val="FFFFFF"/>
-          </a:solidFill>
-          <a:ln w="12700">
-            <a:solidFill>
-              <a:srgbClr val="DB2777"/>
-            </a:solidFill>
-            <a:prstDash val="solid"/>
-          </a:ln>
-        </p:spPr>
-      </p:sp>
-      <p:sp>
-        <p:nvSpPr>
-          <p:cNvPr id="42" name="Text 40"/>
-          <p:cNvSpPr/>
-          <p:nvPr/>
-        </p:nvSpPr>
-        <p:spPr>
-          <a:xfrm>
-            <a:off x="5759577" y="4169664"/>
-            <a:ext cx="685800" cy="475488"/>
-          </a:xfrm>
-          <a:prstGeom prst="rect">
-            <a:avLst/>
-          </a:prstGeom>
-          <a:noFill/>
-          <a:ln/>
-        </p:spPr>
-        <p:txBody>
-          <a:bodyPr wrap="square" lIns="0" tIns="0" rIns="0" bIns="0" rtlCol="0" anchor="ctr"/>
-          <a:lstStyle/>
-          <a:p>
-            <a:pPr algn="ctr" indent="0" marL="0">
-              <a:buNone/>
-            </a:pPr>
-            <a:r>
-              <a:rPr lang="en-US" sz="900" b="1" dirty="0">
-                <a:solidFill>
-                  <a:srgbClr val="9D174D"/>
-                </a:solidFill>
-                <a:latin typeface="Trebuchet MS" pitchFamily="34" charset="0"/>
-                <a:ea typeface="Trebuchet MS" pitchFamily="34" charset="-122"/>
-                <a:cs typeface="Trebuchet MS" pitchFamily="34" charset="-120"/>
-              </a:rPr>
-              <a:t>i</a:t>
-            </a:r>
-            <a:endParaRPr lang="en-US" sz="900" dirty="0"/>
-          </a:p>
-        </p:txBody>
-      </p:sp>
-      <p:sp>
-        <p:nvSpPr>
-          <p:cNvPr id="43" name="Shape 41"/>
-          <p:cNvSpPr/>
-          <p:nvPr/>
-        </p:nvSpPr>
-        <p:spPr>
-          <a:xfrm>
-            <a:off x="6668262" y="4169664"/>
-            <a:ext cx="685800" cy="475488"/>
-          </a:xfrm>
-          <a:prstGeom prst="rect">
-            <a:avLst>
-              <a:gd name="adj" fmla="val 7692"/>
-            </a:avLst>
-          </a:prstGeom>
-          <a:solidFill>
-            <a:srgbClr val="FFFFFF"/>
-          </a:solidFill>
-          <a:ln w="12700">
-            <a:solidFill>
-              <a:srgbClr val="DB2777"/>
-            </a:solidFill>
-            <a:prstDash val="solid"/>
-          </a:ln>
-        </p:spPr>
-      </p:sp>
-      <p:sp>
-        <p:nvSpPr>
-          <p:cNvPr id="44" name="Text 42"/>
-          <p:cNvSpPr/>
-          <p:nvPr/>
-        </p:nvSpPr>
-        <p:spPr>
-          <a:xfrm>
-            <a:off x="6668262" y="4169664"/>
-            <a:ext cx="685800" cy="475488"/>
-          </a:xfrm>
-          <a:prstGeom prst="rect">
-            <a:avLst/>
-          </a:prstGeom>
-          <a:noFill/>
-          <a:ln/>
-        </p:spPr>
-        <p:txBody>
-          <a:bodyPr wrap="square" lIns="0" tIns="0" rIns="0" bIns="0" rtlCol="0" anchor="ctr"/>
-          <a:lstStyle/>
-          <a:p>
-            <a:pPr algn="ctr" indent="0" marL="0">
-              <a:buNone/>
-            </a:pPr>
-            <a:r>
-              <a:rPr lang="en-US" sz="900" b="1" dirty="0">
-                <a:solidFill>
-                  <a:srgbClr val="9D174D"/>
-                </a:solidFill>
-                <a:latin typeface="Trebuchet MS" pitchFamily="34" charset="0"/>
-                <a:ea typeface="Trebuchet MS" pitchFamily="34" charset="-122"/>
-                <a:cs typeface="Trebuchet MS" pitchFamily="34" charset="-120"/>
-              </a:rPr>
-              <a:t>s</a:t>
-            </a:r>
-            <a:endParaRPr lang="en-US" sz="900" dirty="0"/>
-          </a:p>
-        </p:txBody>
-      </p:sp>
-      <p:sp>
-        <p:nvSpPr>
-          <p:cNvPr id="45" name="Shape 43"/>
-          <p:cNvSpPr/>
-          <p:nvPr/>
-        </p:nvSpPr>
-        <p:spPr>
-          <a:xfrm>
-            <a:off x="7576947" y="4169664"/>
-            <a:ext cx="685800" cy="475488"/>
-          </a:xfrm>
-          <a:prstGeom prst="rect">
-            <a:avLst>
-              <a:gd name="adj" fmla="val 7692"/>
-            </a:avLst>
-          </a:prstGeom>
-          <a:solidFill>
-            <a:srgbClr val="FFFFFF"/>
-          </a:solidFill>
-          <a:ln w="12700">
-            <a:solidFill>
-              <a:srgbClr val="DB2777"/>
-            </a:solidFill>
-            <a:prstDash val="solid"/>
-          </a:ln>
-        </p:spPr>
-      </p:sp>
-      <p:sp>
-        <p:nvSpPr>
-          <p:cNvPr id="46" name="Text 44"/>
-          <p:cNvSpPr/>
-          <p:nvPr/>
-        </p:nvSpPr>
-        <p:spPr>
-          <a:xfrm>
-            <a:off x="7576947" y="4169664"/>
-            <a:ext cx="685800" cy="475488"/>
-          </a:xfrm>
-          <a:prstGeom prst="rect">
-            <a:avLst/>
-          </a:prstGeom>
-          <a:noFill/>
-          <a:ln/>
-        </p:spPr>
-        <p:txBody>
-          <a:bodyPr wrap="square" lIns="0" tIns="0" rIns="0" bIns="0" rtlCol="0" anchor="ctr"/>
-          <a:lstStyle/>
-          <a:p>
-            <a:pPr algn="ctr" indent="0" marL="0">
-              <a:buNone/>
-            </a:pPr>
-            <a:r>
-              <a:rPr lang="en-US" sz="900" b="1" dirty="0">
-                <a:solidFill>
-                  <a:srgbClr val="9D174D"/>
-                </a:solidFill>
-                <a:latin typeface="Trebuchet MS" pitchFamily="34" charset="0"/>
-                <a:ea typeface="Trebuchet MS" pitchFamily="34" charset="-122"/>
-                <a:cs typeface="Trebuchet MS" pitchFamily="34" charset="-120"/>
-              </a:rPr>
-              <a:t>e</a:t>
+              <a:t>k</a:t>
             </a:r>
             <a:endParaRPr lang="en-US" sz="900" dirty="0"/>
           </a:p>
@@ -32046,7 +33774,7 @@
                 <a:ea typeface="Calibri" pitchFamily="34" charset="-122"/>
                 <a:cs typeface="Calibri" pitchFamily="34" charset="-120"/>
               </a:rPr>
-              <a:t>Word Labs  •  wordlabs.app  •  Root: 'like' = similar to, resembling</a:t>
+              <a:t>Word Labs  •  wordlabs.app  •  Root: 'like' = to enjoy; to prefer</a:t>
             </a:r>
             <a:endParaRPr lang="en-US" sz="800" dirty="0"/>
           </a:p>
@@ -33215,7 +34943,7 @@
                 <a:ea typeface="Calibri" pitchFamily="34" charset="-122"/>
                 <a:cs typeface="Calibri" pitchFamily="34" charset="-120"/>
               </a:rPr>
-              <a:t>Word Labs  •  wordlabs.app  •  Root: 'like' = similar to, resembling</a:t>
+              <a:t>Word Labs  •  wordlabs.app  •  Root: 'like' = to enjoy; to prefer</a:t>
             </a:r>
             <a:endParaRPr lang="en-US" sz="800" dirty="0"/>
           </a:p>
@@ -33516,7 +35244,7 @@
                 <a:ea typeface="Trebuchet MS" pitchFamily="34" charset="-122"/>
                 <a:cs typeface="Trebuchet MS" pitchFamily="34" charset="-120"/>
               </a:rPr>
-              <a:t>un-</a:t>
+              <a:t>a-</a:t>
             </a:r>
             <a:endParaRPr lang="en-US" sz="1300" dirty="0"/>
           </a:p>
@@ -33644,7 +35372,7 @@
                 <a:ea typeface="Trebuchet MS" pitchFamily="34" charset="-122"/>
                 <a:cs typeface="Trebuchet MS" pitchFamily="34" charset="-120"/>
               </a:rPr>
-              <a:t>-ly</a:t>
+              <a:t>-ed</a:t>
             </a:r>
             <a:endParaRPr lang="en-US" sz="1300" dirty="0"/>
           </a:p>
@@ -33797,7 +35525,7 @@
                 <a:ea typeface="Trebuchet MS" pitchFamily="34" charset="-122"/>
                 <a:cs typeface="Trebuchet MS" pitchFamily="34" charset="-120"/>
               </a:rPr>
-              <a:t>-ness</a:t>
+              <a:t>-ing</a:t>
             </a:r>
             <a:endParaRPr lang="en-US" sz="1300" dirty="0"/>
           </a:p>
@@ -33861,7 +35589,7 @@
                 <a:ea typeface="Trebuchet MS" pitchFamily="34" charset="-122"/>
                 <a:cs typeface="Trebuchet MS" pitchFamily="34" charset="-120"/>
               </a:rPr>
-              <a:t>war-</a:t>
+              <a:t>un-</a:t>
             </a:r>
             <a:endParaRPr lang="en-US" sz="1300" dirty="0"/>
           </a:p>
@@ -33950,7 +35678,7 @@
                 <a:ea typeface="Trebuchet MS" pitchFamily="34" charset="-122"/>
                 <a:cs typeface="Trebuchet MS" pitchFamily="34" charset="-120"/>
               </a:rPr>
-              <a:t>-d</a:t>
+              <a:t>-able</a:t>
             </a:r>
             <a:endParaRPr lang="en-US" sz="1300" dirty="0"/>
           </a:p>
@@ -33971,7 +35699,7 @@
             <a:avLst/>
           </a:prstGeom>
           <a:solidFill>
-            <a:srgbClr val="DDD6FE"/>
+            <a:srgbClr val="F1F5F9"/>
           </a:solidFill>
           <a:ln w="12700">
             <a:solidFill>
@@ -33983,14 +35711,64 @@
       </p:sp>
       <p:sp>
         <p:nvSpPr>
-          <p:cNvPr id="34" name="Text 32"/>
-          <p:cNvSpPr/>
-          <p:nvPr/>
-        </p:nvSpPr>
-        <p:spPr>
-          <a:xfrm>
-            <a:off x="365760" y="2825496"/>
-            <a:ext cx="2468880" cy="402336"/>
+          <p:cNvPr id="34" name="Shape 32"/>
+          <p:cNvSpPr/>
+          <p:nvPr/>
+        </p:nvSpPr>
+        <p:spPr>
+          <a:xfrm>
+            <a:off x="2971800" y="2825496"/>
+            <a:ext cx="2834640" cy="402336"/>
+          </a:xfrm>
+          <a:prstGeom prst="rect">
+            <a:avLst/>
+          </a:prstGeom>
+          <a:solidFill>
+            <a:srgbClr val="F1F5F9"/>
+          </a:solidFill>
+          <a:ln w="12700">
+            <a:solidFill>
+              <a:srgbClr val="E2E8F0"/>
+            </a:solidFill>
+            <a:prstDash val="solid"/>
+          </a:ln>
+        </p:spPr>
+      </p:sp>
+      <p:sp>
+        <p:nvSpPr>
+          <p:cNvPr id="35" name="Shape 33"/>
+          <p:cNvSpPr/>
+          <p:nvPr/>
+        </p:nvSpPr>
+        <p:spPr>
+          <a:xfrm>
+            <a:off x="5943600" y="2825496"/>
+            <a:ext cx="2834640" cy="402336"/>
+          </a:xfrm>
+          <a:prstGeom prst="rect">
+            <a:avLst/>
+          </a:prstGeom>
+          <a:solidFill>
+            <a:srgbClr val="FCE7F3"/>
+          </a:solidFill>
+          <a:ln w="12700">
+            <a:solidFill>
+              <a:srgbClr val="E2E8F0"/>
+            </a:solidFill>
+            <a:prstDash val="solid"/>
+          </a:ln>
+        </p:spPr>
+      </p:sp>
+      <p:sp>
+        <p:nvSpPr>
+          <p:cNvPr id="36" name="Text 34"/>
+          <p:cNvSpPr/>
+          <p:nvPr/>
+        </p:nvSpPr>
+        <p:spPr>
+          <a:xfrm>
+            <a:off x="5943600" y="2825496"/>
+            <a:ext cx="2834640" cy="402336"/>
           </a:xfrm>
           <a:prstGeom prst="rect">
             <a:avLst/>
@@ -34008,13 +35786,13 @@
             <a:r>
               <a:rPr lang="en-US" sz="1300" b="1" dirty="0">
                 <a:solidFill>
-                  <a:srgbClr val="4C1D95"/>
+                  <a:srgbClr val="9D174D"/>
                 </a:solidFill>
                 <a:latin typeface="Trebuchet MS" pitchFamily="34" charset="0"/>
                 <a:ea typeface="Trebuchet MS" pitchFamily="34" charset="-122"/>
                 <a:cs typeface="Trebuchet MS" pitchFamily="34" charset="-120"/>
               </a:rPr>
-              <a:t>child-</a:t>
+              <a:t>-ee</a:t>
             </a:r>
             <a:endParaRPr lang="en-US" sz="1300" dirty="0"/>
           </a:p>
@@ -34022,20 +35800,45 @@
       </p:sp>
       <p:sp>
         <p:nvSpPr>
-          <p:cNvPr id="35" name="Shape 33"/>
-          <p:cNvSpPr/>
-          <p:nvPr/>
-        </p:nvSpPr>
-        <p:spPr>
-          <a:xfrm>
-            <a:off x="2971800" y="2825496"/>
+          <p:cNvPr id="37" name="Shape 35"/>
+          <p:cNvSpPr/>
+          <p:nvPr/>
+        </p:nvSpPr>
+        <p:spPr>
+          <a:xfrm>
+            <a:off x="365760" y="3246120"/>
+            <a:ext cx="2468880" cy="402336"/>
+          </a:xfrm>
+          <a:prstGeom prst="rect">
+            <a:avLst/>
+          </a:prstGeom>
+          <a:solidFill>
+            <a:srgbClr val="F8FAFC"/>
+          </a:solidFill>
+          <a:ln w="12700">
+            <a:solidFill>
+              <a:srgbClr val="E2E8F0"/>
+            </a:solidFill>
+            <a:prstDash val="solid"/>
+          </a:ln>
+        </p:spPr>
+      </p:sp>
+      <p:sp>
+        <p:nvSpPr>
+          <p:cNvPr id="38" name="Shape 36"/>
+          <p:cNvSpPr/>
+          <p:nvPr/>
+        </p:nvSpPr>
+        <p:spPr>
+          <a:xfrm>
+            <a:off x="2971800" y="3246120"/>
             <a:ext cx="2834640" cy="402336"/>
           </a:xfrm>
           <a:prstGeom prst="rect">
             <a:avLst/>
           </a:prstGeom>
           <a:solidFill>
-            <a:srgbClr val="F1F5F9"/>
+            <a:srgbClr val="F8FAFC"/>
           </a:solidFill>
           <a:ln w="12700">
             <a:solidFill>
@@ -34047,13 +35850,13 @@
       </p:sp>
       <p:sp>
         <p:nvSpPr>
-          <p:cNvPr id="36" name="Shape 34"/>
-          <p:cNvSpPr/>
-          <p:nvPr/>
-        </p:nvSpPr>
-        <p:spPr>
-          <a:xfrm>
-            <a:off x="5943600" y="2825496"/>
+          <p:cNvPr id="39" name="Shape 37"/>
+          <p:cNvSpPr/>
+          <p:nvPr/>
+        </p:nvSpPr>
+        <p:spPr>
+          <a:xfrm>
+            <a:off x="5943600" y="3246120"/>
             <a:ext cx="2834640" cy="402336"/>
           </a:xfrm>
           <a:prstGeom prst="rect">
@@ -34072,13 +35875,13 @@
       </p:sp>
       <p:sp>
         <p:nvSpPr>
-          <p:cNvPr id="37" name="Text 35"/>
-          <p:cNvSpPr/>
-          <p:nvPr/>
-        </p:nvSpPr>
-        <p:spPr>
-          <a:xfrm>
-            <a:off x="5943600" y="2825496"/>
+          <p:cNvPr id="40" name="Text 38"/>
+          <p:cNvSpPr/>
+          <p:nvPr/>
+        </p:nvSpPr>
+        <p:spPr>
+          <a:xfrm>
+            <a:off x="5943600" y="3246120"/>
             <a:ext cx="2834640" cy="402336"/>
           </a:xfrm>
           <a:prstGeom prst="rect">
@@ -34103,7 +35906,7 @@
                 <a:ea typeface="Trebuchet MS" pitchFamily="34" charset="-122"/>
                 <a:cs typeface="Trebuchet MS" pitchFamily="34" charset="-120"/>
               </a:rPr>
-              <a:t>-s</a:t>
+              <a:t>-ly</a:t>
             </a:r>
             <a:endParaRPr lang="en-US" sz="1300" dirty="0"/>
           </a:p>
@@ -34111,20 +35914,20 @@
       </p:sp>
       <p:sp>
         <p:nvSpPr>
-          <p:cNvPr id="38" name="Shape 36"/>
-          <p:cNvSpPr/>
-          <p:nvPr/>
-        </p:nvSpPr>
-        <p:spPr>
-          <a:xfrm>
-            <a:off x="365760" y="3246120"/>
+          <p:cNvPr id="41" name="Shape 39"/>
+          <p:cNvSpPr/>
+          <p:nvPr/>
+        </p:nvSpPr>
+        <p:spPr>
+          <a:xfrm>
+            <a:off x="365760" y="3666744"/>
             <a:ext cx="2468880" cy="402336"/>
           </a:xfrm>
           <a:prstGeom prst="rect">
             <a:avLst/>
           </a:prstGeom>
           <a:solidFill>
-            <a:srgbClr val="DDD6FE"/>
+            <a:srgbClr val="F1F5F9"/>
           </a:solidFill>
           <a:ln w="12700">
             <a:solidFill>
@@ -34136,14 +35939,64 @@
       </p:sp>
       <p:sp>
         <p:nvSpPr>
-          <p:cNvPr id="39" name="Text 37"/>
-          <p:cNvSpPr/>
-          <p:nvPr/>
-        </p:nvSpPr>
-        <p:spPr>
-          <a:xfrm>
-            <a:off x="365760" y="3246120"/>
-            <a:ext cx="2468880" cy="402336"/>
+          <p:cNvPr id="42" name="Shape 40"/>
+          <p:cNvSpPr/>
+          <p:nvPr/>
+        </p:nvSpPr>
+        <p:spPr>
+          <a:xfrm>
+            <a:off x="2971800" y="3666744"/>
+            <a:ext cx="2834640" cy="402336"/>
+          </a:xfrm>
+          <a:prstGeom prst="rect">
+            <a:avLst/>
+          </a:prstGeom>
+          <a:solidFill>
+            <a:srgbClr val="F1F5F9"/>
+          </a:solidFill>
+          <a:ln w="12700">
+            <a:solidFill>
+              <a:srgbClr val="E2E8F0"/>
+            </a:solidFill>
+            <a:prstDash val="solid"/>
+          </a:ln>
+        </p:spPr>
+      </p:sp>
+      <p:sp>
+        <p:nvSpPr>
+          <p:cNvPr id="43" name="Shape 41"/>
+          <p:cNvSpPr/>
+          <p:nvPr/>
+        </p:nvSpPr>
+        <p:spPr>
+          <a:xfrm>
+            <a:off x="5943600" y="3666744"/>
+            <a:ext cx="2834640" cy="402336"/>
+          </a:xfrm>
+          <a:prstGeom prst="rect">
+            <a:avLst/>
+          </a:prstGeom>
+          <a:solidFill>
+            <a:srgbClr val="FCE7F3"/>
+          </a:solidFill>
+          <a:ln w="12700">
+            <a:solidFill>
+              <a:srgbClr val="E2E8F0"/>
+            </a:solidFill>
+            <a:prstDash val="solid"/>
+          </a:ln>
+        </p:spPr>
+      </p:sp>
+      <p:sp>
+        <p:nvSpPr>
+          <p:cNvPr id="44" name="Text 42"/>
+          <p:cNvSpPr/>
+          <p:nvPr/>
+        </p:nvSpPr>
+        <p:spPr>
+          <a:xfrm>
+            <a:off x="5943600" y="3666744"/>
+            <a:ext cx="2834640" cy="402336"/>
           </a:xfrm>
           <a:prstGeom prst="rect">
             <a:avLst/>
@@ -34161,13 +36014,13 @@
             <a:r>
               <a:rPr lang="en-US" sz="1300" b="1" dirty="0">
                 <a:solidFill>
-                  <a:srgbClr val="4C1D95"/>
+                  <a:srgbClr val="9D174D"/>
                 </a:solidFill>
                 <a:latin typeface="Trebuchet MS" pitchFamily="34" charset="0"/>
                 <a:ea typeface="Trebuchet MS" pitchFamily="34" charset="-122"/>
                 <a:cs typeface="Trebuchet MS" pitchFamily="34" charset="-120"/>
               </a:rPr>
-              <a:t>life-</a:t>
+              <a:t>-ness</a:t>
             </a:r>
             <a:endParaRPr lang="en-US" sz="1300" dirty="0"/>
           </a:p>
@@ -34175,127 +36028,104 @@
       </p:sp>
       <p:sp>
         <p:nvSpPr>
-          <p:cNvPr id="40" name="Shape 38"/>
-          <p:cNvSpPr/>
-          <p:nvPr/>
-        </p:nvSpPr>
-        <p:spPr>
-          <a:xfrm>
-            <a:off x="2971800" y="3246120"/>
-            <a:ext cx="2834640" cy="402336"/>
-          </a:xfrm>
-          <a:prstGeom prst="rect">
-            <a:avLst/>
-          </a:prstGeom>
-          <a:solidFill>
-            <a:srgbClr val="F8FAFC"/>
-          </a:solidFill>
-          <a:ln w="12700">
-            <a:solidFill>
-              <a:srgbClr val="E2E8F0"/>
-            </a:solidFill>
-            <a:prstDash val="solid"/>
-          </a:ln>
-        </p:spPr>
-      </p:sp>
-      <p:sp>
-        <p:nvSpPr>
-          <p:cNvPr id="41" name="Shape 39"/>
-          <p:cNvSpPr/>
-          <p:nvPr/>
-        </p:nvSpPr>
-        <p:spPr>
-          <a:xfrm>
-            <a:off x="5943600" y="3246120"/>
-            <a:ext cx="2834640" cy="402336"/>
-          </a:xfrm>
-          <a:prstGeom prst="rect">
-            <a:avLst/>
-          </a:prstGeom>
-          <a:solidFill>
-            <a:srgbClr val="FCE7F3"/>
-          </a:solidFill>
-          <a:ln w="12700">
-            <a:solidFill>
-              <a:srgbClr val="E2E8F0"/>
-            </a:solidFill>
-            <a:prstDash val="solid"/>
-          </a:ln>
-        </p:spPr>
-      </p:sp>
-      <p:sp>
-        <p:nvSpPr>
-          <p:cNvPr id="42" name="Text 40"/>
-          <p:cNvSpPr/>
-          <p:nvPr/>
-        </p:nvSpPr>
-        <p:spPr>
-          <a:xfrm>
-            <a:off x="5943600" y="3246120"/>
-            <a:ext cx="2834640" cy="402336"/>
-          </a:xfrm>
-          <a:prstGeom prst="rect">
-            <a:avLst/>
-          </a:prstGeom>
-          <a:noFill/>
-          <a:ln/>
-        </p:spPr>
-        <p:txBody>
-          <a:bodyPr wrap="square" lIns="0" tIns="0" rIns="0" bIns="0" rtlCol="0" anchor="ctr"/>
-          <a:lstStyle/>
-          <a:p>
-            <a:pPr algn="ctr" indent="0" marL="0">
-              <a:buNone/>
-            </a:pPr>
-            <a:r>
-              <a:rPr lang="en-US" sz="1300" b="1" dirty="0">
-                <a:solidFill>
-                  <a:srgbClr val="9D174D"/>
+          <p:cNvPr id="45" name="Text 43"/>
+          <p:cNvSpPr/>
+          <p:nvPr/>
+        </p:nvSpPr>
+        <p:spPr>
+          <a:xfrm>
+            <a:off x="365760" y="3611880"/>
+            <a:ext cx="1828800" cy="347472"/>
+          </a:xfrm>
+          <a:prstGeom prst="rect">
+            <a:avLst/>
+          </a:prstGeom>
+          <a:noFill/>
+          <a:ln/>
+        </p:spPr>
+        <p:txBody>
+          <a:bodyPr wrap="square" lIns="0" tIns="0" rIns="0" bIns="0" rtlCol="0" anchor="ctr"/>
+          <a:lstStyle/>
+          <a:p>
+            <a:pPr algn="l" indent="0" marL="0">
+              <a:buNone/>
+            </a:pPr>
+            <a:r>
+              <a:rPr lang="en-US" sz="1200" b="1" dirty="0">
+                <a:solidFill>
+                  <a:srgbClr val="0F172A"/>
                 </a:solidFill>
                 <a:latin typeface="Trebuchet MS" pitchFamily="34" charset="0"/>
                 <a:ea typeface="Trebuchet MS" pitchFamily="34" charset="-122"/>
                 <a:cs typeface="Trebuchet MS" pitchFamily="34" charset="-120"/>
               </a:rPr>
-              <a:t>-able</a:t>
-            </a:r>
-            <a:endParaRPr lang="en-US" sz="1300" dirty="0"/>
-          </a:p>
-        </p:txBody>
-      </p:sp>
-      <p:sp>
-        <p:nvSpPr>
-          <p:cNvPr id="43" name="Text 41"/>
-          <p:cNvSpPr/>
-          <p:nvPr/>
-        </p:nvSpPr>
-        <p:spPr>
-          <a:xfrm>
-            <a:off x="365760" y="3611880"/>
-            <a:ext cx="1828800" cy="347472"/>
-          </a:xfrm>
-          <a:prstGeom prst="rect">
-            <a:avLst/>
-          </a:prstGeom>
-          <a:noFill/>
-          <a:ln/>
-        </p:spPr>
-        <p:txBody>
-          <a:bodyPr wrap="square" lIns="0" tIns="0" rIns="0" bIns="0" rtlCol="0" anchor="ctr"/>
-          <a:lstStyle/>
-          <a:p>
-            <a:pPr algn="l" indent="0" marL="0">
+              <a:t>Sample words:</a:t>
+            </a:r>
+            <a:endParaRPr lang="en-US" sz="1200" dirty="0"/>
+          </a:p>
+        </p:txBody>
+      </p:sp>
+      <p:sp>
+        <p:nvSpPr>
+          <p:cNvPr id="46" name="Shape 44"/>
+          <p:cNvSpPr/>
+          <p:nvPr/>
+        </p:nvSpPr>
+        <p:spPr>
+          <a:xfrm>
+            <a:off x="365760" y="4023360"/>
+            <a:ext cx="2011680" cy="402336"/>
+          </a:xfrm>
+          <a:prstGeom prst="rect">
+            <a:avLst>
+              <a:gd name="adj" fmla="val 13636"/>
+            </a:avLst>
+          </a:prstGeom>
+          <a:solidFill>
+            <a:srgbClr val="EEF2FF"/>
+          </a:solidFill>
+          <a:ln w="12700">
+            <a:solidFill>
+              <a:srgbClr val="6366F1"/>
+            </a:solidFill>
+            <a:prstDash val="solid"/>
+          </a:ln>
+        </p:spPr>
+      </p:sp>
+      <p:sp>
+        <p:nvSpPr>
+          <p:cNvPr id="47" name="Text 45"/>
+          <p:cNvSpPr/>
+          <p:nvPr/>
+        </p:nvSpPr>
+        <p:spPr>
+          <a:xfrm>
+            <a:off x="365760" y="4023360"/>
+            <a:ext cx="2011680" cy="402336"/>
+          </a:xfrm>
+          <a:prstGeom prst="rect">
+            <a:avLst/>
+          </a:prstGeom>
+          <a:noFill/>
+          <a:ln/>
+        </p:spPr>
+        <p:txBody>
+          <a:bodyPr wrap="square" lIns="0" tIns="0" rIns="0" bIns="0" rtlCol="0" anchor="ctr"/>
+          <a:lstStyle/>
+          <a:p>
+            <a:pPr algn="ctr" indent="0" marL="0">
               <a:buNone/>
             </a:pPr>
             <a:r>
               <a:rPr lang="en-US" sz="1200" b="1" dirty="0">
                 <a:solidFill>
-                  <a:srgbClr val="0F172A"/>
+                  <a:srgbClr val="4338CA"/>
                 </a:solidFill>
                 <a:latin typeface="Trebuchet MS" pitchFamily="34" charset="0"/>
                 <a:ea typeface="Trebuchet MS" pitchFamily="34" charset="-122"/>
                 <a:cs typeface="Trebuchet MS" pitchFamily="34" charset="-120"/>
               </a:rPr>
-              <a:t>Sample words:</a:t>
+              <a:t>like</a:t>
             </a:r>
             <a:endParaRPr lang="en-US" sz="1200" dirty="0"/>
           </a:p>
@@ -34303,13 +36133,13 @@
       </p:sp>
       <p:sp>
         <p:nvSpPr>
-          <p:cNvPr id="44" name="Shape 42"/>
-          <p:cNvSpPr/>
-          <p:nvPr/>
-        </p:nvSpPr>
-        <p:spPr>
-          <a:xfrm>
-            <a:off x="365760" y="4023360"/>
+          <p:cNvPr id="48" name="Shape 46"/>
+          <p:cNvSpPr/>
+          <p:nvPr/>
+        </p:nvSpPr>
+        <p:spPr>
+          <a:xfrm>
+            <a:off x="2542032" y="4023360"/>
             <a:ext cx="2011680" cy="402336"/>
           </a:xfrm>
           <a:prstGeom prst="rect">
@@ -34330,13 +36160,13 @@
       </p:sp>
       <p:sp>
         <p:nvSpPr>
-          <p:cNvPr id="45" name="Text 43"/>
-          <p:cNvSpPr/>
-          <p:nvPr/>
-        </p:nvSpPr>
-        <p:spPr>
-          <a:xfrm>
-            <a:off x="365760" y="4023360"/>
+          <p:cNvPr id="49" name="Text 47"/>
+          <p:cNvSpPr/>
+          <p:nvPr/>
+        </p:nvSpPr>
+        <p:spPr>
+          <a:xfrm>
+            <a:off x="2542032" y="4023360"/>
             <a:ext cx="2011680" cy="402336"/>
           </a:xfrm>
           <a:prstGeom prst="rect">
@@ -34361,7 +36191,7 @@
                 <a:ea typeface="Trebuchet MS" pitchFamily="34" charset="-122"/>
                 <a:cs typeface="Trebuchet MS" pitchFamily="34" charset="-120"/>
               </a:rPr>
-              <a:t>likewise</a:t>
+              <a:t>liked</a:t>
             </a:r>
             <a:endParaRPr lang="en-US" sz="1200" dirty="0"/>
           </a:p>
@@ -34369,13 +36199,13 @@
       </p:sp>
       <p:sp>
         <p:nvSpPr>
-          <p:cNvPr id="46" name="Shape 44"/>
-          <p:cNvSpPr/>
-          <p:nvPr/>
-        </p:nvSpPr>
-        <p:spPr>
-          <a:xfrm>
-            <a:off x="2542032" y="4023360"/>
+          <p:cNvPr id="50" name="Shape 48"/>
+          <p:cNvSpPr/>
+          <p:nvPr/>
+        </p:nvSpPr>
+        <p:spPr>
+          <a:xfrm>
+            <a:off x="4718304" y="4023360"/>
             <a:ext cx="2011680" cy="402336"/>
           </a:xfrm>
           <a:prstGeom prst="rect">
@@ -34396,13 +36226,13 @@
       </p:sp>
       <p:sp>
         <p:nvSpPr>
-          <p:cNvPr id="47" name="Text 45"/>
-          <p:cNvSpPr/>
-          <p:nvPr/>
-        </p:nvSpPr>
-        <p:spPr>
-          <a:xfrm>
-            <a:off x="2542032" y="4023360"/>
+          <p:cNvPr id="51" name="Text 49"/>
+          <p:cNvSpPr/>
+          <p:nvPr/>
+        </p:nvSpPr>
+        <p:spPr>
+          <a:xfrm>
+            <a:off x="4718304" y="4023360"/>
             <a:ext cx="2011680" cy="402336"/>
           </a:xfrm>
           <a:prstGeom prst="rect">
@@ -34427,7 +36257,7 @@
                 <a:ea typeface="Trebuchet MS" pitchFamily="34" charset="-122"/>
                 <a:cs typeface="Trebuchet MS" pitchFamily="34" charset="-120"/>
               </a:rPr>
-              <a:t>lifelike</a:t>
+              <a:t>likes</a:t>
             </a:r>
             <a:endParaRPr lang="en-US" sz="1200" dirty="0"/>
           </a:p>
@@ -34435,13 +36265,13 @@
       </p:sp>
       <p:sp>
         <p:nvSpPr>
-          <p:cNvPr id="48" name="Shape 46"/>
-          <p:cNvSpPr/>
-          <p:nvPr/>
-        </p:nvSpPr>
-        <p:spPr>
-          <a:xfrm>
-            <a:off x="4718304" y="4023360"/>
+          <p:cNvPr id="52" name="Shape 50"/>
+          <p:cNvSpPr/>
+          <p:nvPr/>
+        </p:nvSpPr>
+        <p:spPr>
+          <a:xfrm>
+            <a:off x="6894576" y="4023360"/>
             <a:ext cx="2011680" cy="402336"/>
           </a:xfrm>
           <a:prstGeom prst="rect">
@@ -34462,13 +36292,13 @@
       </p:sp>
       <p:sp>
         <p:nvSpPr>
-          <p:cNvPr id="49" name="Text 47"/>
-          <p:cNvSpPr/>
-          <p:nvPr/>
-        </p:nvSpPr>
-        <p:spPr>
-          <a:xfrm>
-            <a:off x="4718304" y="4023360"/>
+          <p:cNvPr id="53" name="Text 51"/>
+          <p:cNvSpPr/>
+          <p:nvPr/>
+        </p:nvSpPr>
+        <p:spPr>
+          <a:xfrm>
+            <a:off x="6894576" y="4023360"/>
             <a:ext cx="2011680" cy="402336"/>
           </a:xfrm>
           <a:prstGeom prst="rect">
@@ -34493,7 +36323,7 @@
                 <a:ea typeface="Trebuchet MS" pitchFamily="34" charset="-122"/>
                 <a:cs typeface="Trebuchet MS" pitchFamily="34" charset="-120"/>
               </a:rPr>
-              <a:t>childlike</a:t>
+              <a:t>likely</a:t>
             </a:r>
             <a:endParaRPr lang="en-US" sz="1200" dirty="0"/>
           </a:p>
@@ -34501,13 +36331,13 @@
       </p:sp>
       <p:sp>
         <p:nvSpPr>
-          <p:cNvPr id="50" name="Shape 48"/>
-          <p:cNvSpPr/>
-          <p:nvPr/>
-        </p:nvSpPr>
-        <p:spPr>
-          <a:xfrm>
-            <a:off x="6894576" y="4023360"/>
+          <p:cNvPr id="54" name="Shape 52"/>
+          <p:cNvSpPr/>
+          <p:nvPr/>
+        </p:nvSpPr>
+        <p:spPr>
+          <a:xfrm>
+            <a:off x="365760" y="4498848"/>
             <a:ext cx="2011680" cy="402336"/>
           </a:xfrm>
           <a:prstGeom prst="rect">
@@ -34528,13 +36358,13 @@
       </p:sp>
       <p:sp>
         <p:nvSpPr>
-          <p:cNvPr id="51" name="Text 49"/>
-          <p:cNvSpPr/>
-          <p:nvPr/>
-        </p:nvSpPr>
-        <p:spPr>
-          <a:xfrm>
-            <a:off x="6894576" y="4023360"/>
+          <p:cNvPr id="55" name="Text 53"/>
+          <p:cNvSpPr/>
+          <p:nvPr/>
+        </p:nvSpPr>
+        <p:spPr>
+          <a:xfrm>
+            <a:off x="365760" y="4498848"/>
             <a:ext cx="2011680" cy="402336"/>
           </a:xfrm>
           <a:prstGeom prst="rect">
@@ -34559,7 +36389,7 @@
                 <a:ea typeface="Trebuchet MS" pitchFamily="34" charset="-122"/>
                 <a:cs typeface="Trebuchet MS" pitchFamily="34" charset="-120"/>
               </a:rPr>
-              <a:t>dislike</a:t>
+              <a:t>liking</a:t>
             </a:r>
             <a:endParaRPr lang="en-US" sz="1200" dirty="0"/>
           </a:p>
@@ -34567,13 +36397,13 @@
       </p:sp>
       <p:sp>
         <p:nvSpPr>
-          <p:cNvPr id="52" name="Shape 50"/>
-          <p:cNvSpPr/>
-          <p:nvPr/>
-        </p:nvSpPr>
-        <p:spPr>
-          <a:xfrm>
-            <a:off x="365760" y="4498848"/>
+          <p:cNvPr id="56" name="Shape 54"/>
+          <p:cNvSpPr/>
+          <p:nvPr/>
+        </p:nvSpPr>
+        <p:spPr>
+          <a:xfrm>
+            <a:off x="2542032" y="4498848"/>
             <a:ext cx="2011680" cy="402336"/>
           </a:xfrm>
           <a:prstGeom prst="rect">
@@ -34594,13 +36424,13 @@
       </p:sp>
       <p:sp>
         <p:nvSpPr>
-          <p:cNvPr id="53" name="Text 51"/>
-          <p:cNvSpPr/>
-          <p:nvPr/>
-        </p:nvSpPr>
-        <p:spPr>
-          <a:xfrm>
-            <a:off x="365760" y="4498848"/>
+          <p:cNvPr id="57" name="Text 55"/>
+          <p:cNvSpPr/>
+          <p:nvPr/>
+        </p:nvSpPr>
+        <p:spPr>
+          <a:xfrm>
+            <a:off x="2542032" y="4498848"/>
             <a:ext cx="2011680" cy="402336"/>
           </a:xfrm>
           <a:prstGeom prst="rect">
@@ -34625,7 +36455,7 @@
                 <a:ea typeface="Trebuchet MS" pitchFamily="34" charset="-122"/>
                 <a:cs typeface="Trebuchet MS" pitchFamily="34" charset="-120"/>
               </a:rPr>
-              <a:t>unlikely</a:t>
+              <a:t>unlike</a:t>
             </a:r>
             <a:endParaRPr lang="en-US" sz="1200" dirty="0"/>
           </a:p>
@@ -34633,13 +36463,13 @@
       </p:sp>
       <p:sp>
         <p:nvSpPr>
-          <p:cNvPr id="54" name="Shape 52"/>
-          <p:cNvSpPr/>
-          <p:nvPr/>
-        </p:nvSpPr>
-        <p:spPr>
-          <a:xfrm>
-            <a:off x="2542032" y="4498848"/>
+          <p:cNvPr id="58" name="Shape 56"/>
+          <p:cNvSpPr/>
+          <p:nvPr/>
+        </p:nvSpPr>
+        <p:spPr>
+          <a:xfrm>
+            <a:off x="4718304" y="4498848"/>
             <a:ext cx="2011680" cy="402336"/>
           </a:xfrm>
           <a:prstGeom prst="rect">
@@ -34660,13 +36490,13 @@
       </p:sp>
       <p:sp>
         <p:nvSpPr>
-          <p:cNvPr id="55" name="Text 53"/>
-          <p:cNvSpPr/>
-          <p:nvPr/>
-        </p:nvSpPr>
-        <p:spPr>
-          <a:xfrm>
-            <a:off x="2542032" y="4498848"/>
+          <p:cNvPr id="59" name="Text 57"/>
+          <p:cNvSpPr/>
+          <p:nvPr/>
+        </p:nvSpPr>
+        <p:spPr>
+          <a:xfrm>
+            <a:off x="4718304" y="4498848"/>
             <a:ext cx="2011680" cy="402336"/>
           </a:xfrm>
           <a:prstGeom prst="rect">
@@ -34691,139 +36521,7 @@
                 <a:ea typeface="Trebuchet MS" pitchFamily="34" charset="-122"/>
                 <a:cs typeface="Trebuchet MS" pitchFamily="34" charset="-120"/>
               </a:rPr>
-              <a:t>warlike</a:t>
-            </a:r>
-            <a:endParaRPr lang="en-US" sz="1200" dirty="0"/>
-          </a:p>
-        </p:txBody>
-      </p:sp>
-      <p:sp>
-        <p:nvSpPr>
-          <p:cNvPr id="56" name="Shape 54"/>
-          <p:cNvSpPr/>
-          <p:nvPr/>
-        </p:nvSpPr>
-        <p:spPr>
-          <a:xfrm>
-            <a:off x="4718304" y="4498848"/>
-            <a:ext cx="2011680" cy="402336"/>
-          </a:xfrm>
-          <a:prstGeom prst="rect">
-            <a:avLst>
-              <a:gd name="adj" fmla="val 13636"/>
-            </a:avLst>
-          </a:prstGeom>
-          <a:solidFill>
-            <a:srgbClr val="EEF2FF"/>
-          </a:solidFill>
-          <a:ln w="12700">
-            <a:solidFill>
-              <a:srgbClr val="6366F1"/>
-            </a:solidFill>
-            <a:prstDash val="solid"/>
-          </a:ln>
-        </p:spPr>
-      </p:sp>
-      <p:sp>
-        <p:nvSpPr>
-          <p:cNvPr id="57" name="Text 55"/>
-          <p:cNvSpPr/>
-          <p:nvPr/>
-        </p:nvSpPr>
-        <p:spPr>
-          <a:xfrm>
-            <a:off x="4718304" y="4498848"/>
-            <a:ext cx="2011680" cy="402336"/>
-          </a:xfrm>
-          <a:prstGeom prst="rect">
-            <a:avLst/>
-          </a:prstGeom>
-          <a:noFill/>
-          <a:ln/>
-        </p:spPr>
-        <p:txBody>
-          <a:bodyPr wrap="square" lIns="0" tIns="0" rIns="0" bIns="0" rtlCol="0" anchor="ctr"/>
-          <a:lstStyle/>
-          <a:p>
-            <a:pPr algn="ctr" indent="0" marL="0">
-              <a:buNone/>
-            </a:pPr>
-            <a:r>
-              <a:rPr lang="en-US" sz="1200" b="1" dirty="0">
-                <a:solidFill>
-                  <a:srgbClr val="4338CA"/>
-                </a:solidFill>
-                <a:latin typeface="Trebuchet MS" pitchFamily="34" charset="0"/>
-                <a:ea typeface="Trebuchet MS" pitchFamily="34" charset="-122"/>
-                <a:cs typeface="Trebuchet MS" pitchFamily="34" charset="-120"/>
-              </a:rPr>
-              <a:t>godlike</a:t>
-            </a:r>
-            <a:endParaRPr lang="en-US" sz="1200" dirty="0"/>
-          </a:p>
-        </p:txBody>
-      </p:sp>
-      <p:sp>
-        <p:nvSpPr>
-          <p:cNvPr id="58" name="Shape 56"/>
-          <p:cNvSpPr/>
-          <p:nvPr/>
-        </p:nvSpPr>
-        <p:spPr>
-          <a:xfrm>
-            <a:off x="6894576" y="4498848"/>
-            <a:ext cx="2011680" cy="402336"/>
-          </a:xfrm>
-          <a:prstGeom prst="rect">
-            <a:avLst>
-              <a:gd name="adj" fmla="val 13636"/>
-            </a:avLst>
-          </a:prstGeom>
-          <a:solidFill>
-            <a:srgbClr val="EEF2FF"/>
-          </a:solidFill>
-          <a:ln w="12700">
-            <a:solidFill>
-              <a:srgbClr val="6366F1"/>
-            </a:solidFill>
-            <a:prstDash val="solid"/>
-          </a:ln>
-        </p:spPr>
-      </p:sp>
-      <p:sp>
-        <p:nvSpPr>
-          <p:cNvPr id="59" name="Text 57"/>
-          <p:cNvSpPr/>
-          <p:nvPr/>
-        </p:nvSpPr>
-        <p:spPr>
-          <a:xfrm>
-            <a:off x="6894576" y="4498848"/>
-            <a:ext cx="2011680" cy="402336"/>
-          </a:xfrm>
-          <a:prstGeom prst="rect">
-            <a:avLst/>
-          </a:prstGeom>
-          <a:noFill/>
-          <a:ln/>
-        </p:spPr>
-        <p:txBody>
-          <a:bodyPr wrap="square" lIns="0" tIns="0" rIns="0" bIns="0" rtlCol="0" anchor="ctr"/>
-          <a:lstStyle/>
-          <a:p>
-            <a:pPr algn="ctr" indent="0" marL="0">
-              <a:buNone/>
-            </a:pPr>
-            <a:r>
-              <a:rPr lang="en-US" sz="1200" b="1" dirty="0">
-                <a:solidFill>
-                  <a:srgbClr val="4338CA"/>
-                </a:solidFill>
-                <a:latin typeface="Trebuchet MS" pitchFamily="34" charset="0"/>
-                <a:ea typeface="Trebuchet MS" pitchFamily="34" charset="-122"/>
-                <a:cs typeface="Trebuchet MS" pitchFamily="34" charset="-120"/>
-              </a:rPr>
-              <a:t>likeness</a:t>
+              <a:t>dislike</a:t>
             </a:r>
             <a:endParaRPr lang="en-US" sz="1200" dirty="0"/>
           </a:p>
@@ -35115,7 +36813,7 @@
                 <a:ea typeface="Calibri" pitchFamily="34" charset="-122"/>
                 <a:cs typeface="Calibri" pitchFamily="34" charset="-120"/>
               </a:rPr>
-              <a:t>Word Labs  •  wordlabs.app  •  Root: 'like' = similar to, resembling</a:t>
+              <a:t>Word Labs  •  wordlabs.app  •  Root: 'like' = to enjoy; to prefer</a:t>
             </a:r>
             <a:endParaRPr lang="en-US" sz="800" dirty="0"/>
           </a:p>
@@ -35279,7 +36977,7 @@
                 <a:ea typeface="Calibri" pitchFamily="34" charset="-122"/>
                 <a:cs typeface="Calibri" pitchFamily="34" charset="-120"/>
               </a:rPr>
-              <a:t>The core part of a word carrying its basic meaning. For example, 'like' means 'similar to, resembling'.</a:t>
+              <a:t>The core part of a word carrying its basic meaning. For example, 'like' means 'to enjoy; to prefer'.</a:t>
             </a:r>
             <a:endParaRPr lang="en-US" sz="1350" dirty="0"/>
           </a:p>
@@ -35899,7 +37597,7 @@
                 <a:ea typeface="Calibri" pitchFamily="34" charset="-122"/>
                 <a:cs typeface="Calibri" pitchFamily="34" charset="-120"/>
               </a:rPr>
-              <a:t>Word Labs  •  wordlabs.app  •  Root: 'like' = similar to, resembling</a:t>
+              <a:t>Word Labs  •  wordlabs.app  •  Root: 'like' = to enjoy; to prefer</a:t>
             </a:r>
             <a:endParaRPr lang="en-US" sz="800" dirty="0"/>
           </a:p>
@@ -36011,7 +37709,7 @@
                 <a:ea typeface="Calibri" pitchFamily="34" charset="-122"/>
                 <a:cs typeface="Calibri" pitchFamily="34" charset="-120"/>
               </a:rPr>
-              <a:t>1.  The morpheme 'like' means resembling or similar to something.</a:t>
+              <a:t>1.  'like' means 'to enjoy or feel fond of something'.</a:t>
             </a:r>
             <a:endParaRPr lang="en-US" sz="1300" dirty="0"/>
           </a:p>
@@ -36150,7 +37848,7 @@
                 <a:ea typeface="Calibri" pitchFamily="34" charset="-122"/>
                 <a:cs typeface="Calibri" pitchFamily="34" charset="-120"/>
               </a:rPr>
-              <a:t>2.  The word 'lifelike' contains the morpheme 'like'.</a:t>
+              <a:t>2.  'liked' means 'enjoyed or felt fond of something in the past'.</a:t>
             </a:r>
             <a:endParaRPr lang="en-US" sz="1300" dirty="0"/>
           </a:p>
@@ -36289,7 +37987,7 @@
                 <a:ea typeface="Calibri" pitchFamily="34" charset="-122"/>
                 <a:cs typeface="Calibri" pitchFamily="34" charset="-120"/>
               </a:rPr>
-              <a:t>3.  Adding 'un-' before 'likely' changes its meaning to 'not likely'.</a:t>
+              <a:t>3.  'like' means 'to enjoy; to prefer'.</a:t>
             </a:r>
             <a:endParaRPr lang="en-US" sz="1300" dirty="0"/>
           </a:p>
@@ -36428,7 +38126,7 @@
                 <a:ea typeface="Calibri" pitchFamily="34" charset="-122"/>
                 <a:cs typeface="Calibri" pitchFamily="34" charset="-120"/>
               </a:rPr>
-              <a:t>4.  The word 'dislike' means to enjoy something very much.</a:t>
+              <a:t>4.  'liked' means 'strongly disliked something in the past'.</a:t>
             </a:r>
             <a:endParaRPr lang="en-US" sz="1300" dirty="0"/>
           </a:p>
@@ -36567,7 +38265,7 @@
                 <a:ea typeface="Calibri" pitchFamily="34" charset="-122"/>
                 <a:cs typeface="Calibri" pitchFamily="34" charset="-120"/>
               </a:rPr>
-              <a:t>5.  The morpheme 'like' comes from a French word.</a:t>
+              <a:t>5.  'like' means 'to strongly dislike something'.</a:t>
             </a:r>
             <a:endParaRPr lang="en-US" sz="1300" dirty="0"/>
           </a:p>
@@ -36925,7 +38623,7 @@
                 <a:ea typeface="Calibri" pitchFamily="34" charset="-122"/>
                 <a:cs typeface="Calibri" pitchFamily="34" charset="-120"/>
               </a:rPr>
-              <a:t>Word Labs  •  wordlabs.app  •  Root: 'like' = similar to, resembling</a:t>
+              <a:t>Word Labs  •  wordlabs.app  •  Root: 'like' = to enjoy; to prefer</a:t>
             </a:r>
             <a:endParaRPr lang="en-US" sz="800" dirty="0"/>
           </a:p>
@@ -37062,7 +38760,7 @@
                 <a:ea typeface="Trebuchet MS" pitchFamily="34" charset="-122"/>
                 <a:cs typeface="Trebuchet MS" pitchFamily="34" charset="-120"/>
               </a:rPr>
-              <a:t>similar to, resembling</a:t>
+              <a:t>to enjoy; to prefer</a:t>
             </a:r>
             <a:endParaRPr lang="en-US" sz="2000" dirty="0"/>
           </a:p>
@@ -37101,7 +38799,7 @@
                 <a:ea typeface="Calibri" pitchFamily="34" charset="-122"/>
                 <a:cs typeface="Calibri" pitchFamily="34" charset="-120"/>
               </a:rPr>
-              <a:t>Origin: Latin: similis</a:t>
+              <a:t>Origin: Anglo-Saxon (Old English) root</a:t>
             </a:r>
             <a:endParaRPr lang="en-US" sz="1100" dirty="0"/>
           </a:p>
@@ -37206,7 +38904,7 @@
                 <a:ea typeface="Trebuchet MS" pitchFamily="34" charset="-122"/>
                 <a:cs typeface="Trebuchet MS" pitchFamily="34" charset="-120"/>
               </a:rPr>
-              <a:t>likewise</a:t>
+              <a:t>like</a:t>
             </a:r>
             <a:endParaRPr lang="en-US" sz="1300" dirty="0"/>
           </a:p>
@@ -37272,7 +38970,7 @@
                 <a:ea typeface="Trebuchet MS" pitchFamily="34" charset="-122"/>
                 <a:cs typeface="Trebuchet MS" pitchFamily="34" charset="-120"/>
               </a:rPr>
-              <a:t>lifelike</a:t>
+              <a:t>liked</a:t>
             </a:r>
             <a:endParaRPr lang="en-US" sz="1300" dirty="0"/>
           </a:p>
@@ -37338,7 +39036,7 @@
                 <a:ea typeface="Trebuchet MS" pitchFamily="34" charset="-122"/>
                 <a:cs typeface="Trebuchet MS" pitchFamily="34" charset="-120"/>
               </a:rPr>
-              <a:t>childlike</a:t>
+              <a:t>likes</a:t>
             </a:r>
             <a:endParaRPr lang="en-US" sz="1300" dirty="0"/>
           </a:p>
@@ -37404,7 +39102,7 @@
                 <a:ea typeface="Trebuchet MS" pitchFamily="34" charset="-122"/>
                 <a:cs typeface="Trebuchet MS" pitchFamily="34" charset="-120"/>
               </a:rPr>
-              <a:t>dislike</a:t>
+              <a:t>likely</a:t>
             </a:r>
             <a:endParaRPr lang="en-US" sz="1300" dirty="0"/>
           </a:p>
@@ -37470,7 +39168,7 @@
                 <a:ea typeface="Trebuchet MS" pitchFamily="34" charset="-122"/>
                 <a:cs typeface="Trebuchet MS" pitchFamily="34" charset="-120"/>
               </a:rPr>
-              <a:t>unlikely</a:t>
+              <a:t>liking</a:t>
             </a:r>
             <a:endParaRPr lang="en-US" sz="1300" dirty="0"/>
           </a:p>
@@ -37536,7 +39234,7 @@
                 <a:ea typeface="Trebuchet MS" pitchFamily="34" charset="-122"/>
                 <a:cs typeface="Trebuchet MS" pitchFamily="34" charset="-120"/>
               </a:rPr>
-              <a:t>warlike</a:t>
+              <a:t>unlike</a:t>
             </a:r>
             <a:endParaRPr lang="en-US" sz="1300" dirty="0"/>
           </a:p>
@@ -37602,7 +39300,7 @@
                 <a:ea typeface="Trebuchet MS" pitchFamily="34" charset="-122"/>
                 <a:cs typeface="Trebuchet MS" pitchFamily="34" charset="-120"/>
               </a:rPr>
-              <a:t>godlike</a:t>
+              <a:t>dislike</a:t>
             </a:r>
             <a:endParaRPr lang="en-US" sz="1300" dirty="0"/>
           </a:p>
@@ -37894,7 +39592,7 @@
                 <a:ea typeface="Calibri" pitchFamily="34" charset="-122"/>
                 <a:cs typeface="Calibri" pitchFamily="34" charset="-120"/>
               </a:rPr>
-              <a:t>Word Labs  •  wordlabs.app  •  Root: 'like' = similar to, resembling</a:t>
+              <a:t>Word Labs  •  wordlabs.app  •  Root: 'like' = to enjoy; to prefer</a:t>
             </a:r>
             <a:endParaRPr lang="en-US" sz="800" dirty="0"/>
           </a:p>
@@ -38195,7 +39893,7 @@
                 <a:ea typeface="Trebuchet MS" pitchFamily="34" charset="-122"/>
                 <a:cs typeface="Trebuchet MS" pitchFamily="34" charset="-120"/>
               </a:rPr>
-              <a:t>un-</a:t>
+              <a:t>a-</a:t>
             </a:r>
             <a:endParaRPr lang="en-US" sz="1300" dirty="0"/>
           </a:p>
@@ -38323,7 +40021,7 @@
                 <a:ea typeface="Trebuchet MS" pitchFamily="34" charset="-122"/>
                 <a:cs typeface="Trebuchet MS" pitchFamily="34" charset="-120"/>
               </a:rPr>
-              <a:t>-ly</a:t>
+              <a:t>-ed</a:t>
             </a:r>
             <a:endParaRPr lang="en-US" sz="1300" dirty="0"/>
           </a:p>
@@ -38476,7 +40174,7 @@
                 <a:ea typeface="Trebuchet MS" pitchFamily="34" charset="-122"/>
                 <a:cs typeface="Trebuchet MS" pitchFamily="34" charset="-120"/>
               </a:rPr>
-              <a:t>-ness</a:t>
+              <a:t>-ing</a:t>
             </a:r>
             <a:endParaRPr lang="en-US" sz="1300" dirty="0"/>
           </a:p>
@@ -38540,7 +40238,7 @@
                 <a:ea typeface="Trebuchet MS" pitchFamily="34" charset="-122"/>
                 <a:cs typeface="Trebuchet MS" pitchFamily="34" charset="-120"/>
               </a:rPr>
-              <a:t>war-</a:t>
+              <a:t>un-</a:t>
             </a:r>
             <a:endParaRPr lang="en-US" sz="1300" dirty="0"/>
           </a:p>
@@ -38629,7 +40327,7 @@
                 <a:ea typeface="Trebuchet MS" pitchFamily="34" charset="-122"/>
                 <a:cs typeface="Trebuchet MS" pitchFamily="34" charset="-120"/>
               </a:rPr>
-              <a:t>-d</a:t>
+              <a:t>-able</a:t>
             </a:r>
             <a:endParaRPr lang="en-US" sz="1300" dirty="0"/>
           </a:p>
@@ -38650,7 +40348,7 @@
             <a:avLst/>
           </a:prstGeom>
           <a:solidFill>
-            <a:srgbClr val="DDD6FE"/>
+            <a:srgbClr val="F1F5F9"/>
           </a:solidFill>
           <a:ln w="12700">
             <a:solidFill>
@@ -38662,18 +40360,68 @@
       </p:sp>
       <p:sp>
         <p:nvSpPr>
-          <p:cNvPr id="34" name="Text 32"/>
-          <p:cNvSpPr/>
-          <p:nvPr/>
-        </p:nvSpPr>
-        <p:spPr>
-          <a:xfrm>
-            <a:off x="640080" y="3127248"/>
+          <p:cNvPr id="34" name="Shape 32"/>
+          <p:cNvSpPr/>
+          <p:nvPr/>
+        </p:nvSpPr>
+        <p:spPr>
+          <a:xfrm>
+            <a:off x="3291840" y="3127248"/>
+            <a:ext cx="1645920" cy="420624"/>
+          </a:xfrm>
+          <a:prstGeom prst="rect">
+            <a:avLst/>
+          </a:prstGeom>
+          <a:solidFill>
+            <a:srgbClr val="F1F5F9"/>
+          </a:solidFill>
+          <a:ln w="12700">
+            <a:solidFill>
+              <a:srgbClr val="E5E7EB"/>
+            </a:solidFill>
+            <a:prstDash val="solid"/>
+          </a:ln>
+        </p:spPr>
+      </p:sp>
+      <p:sp>
+        <p:nvSpPr>
+          <p:cNvPr id="35" name="Shape 33"/>
+          <p:cNvSpPr/>
+          <p:nvPr/>
+        </p:nvSpPr>
+        <p:spPr>
+          <a:xfrm>
+            <a:off x="5943600" y="3127248"/>
             <a:ext cx="1463040" cy="420624"/>
           </a:xfrm>
           <a:prstGeom prst="rect">
             <a:avLst/>
           </a:prstGeom>
+          <a:solidFill>
+            <a:srgbClr val="FCE7F3"/>
+          </a:solidFill>
+          <a:ln w="12700">
+            <a:solidFill>
+              <a:srgbClr val="E5E7EB"/>
+            </a:solidFill>
+            <a:prstDash val="solid"/>
+          </a:ln>
+        </p:spPr>
+      </p:sp>
+      <p:sp>
+        <p:nvSpPr>
+          <p:cNvPr id="36" name="Text 34"/>
+          <p:cNvSpPr/>
+          <p:nvPr/>
+        </p:nvSpPr>
+        <p:spPr>
+          <a:xfrm>
+            <a:off x="5943600" y="3127248"/>
+            <a:ext cx="1463040" cy="420624"/>
+          </a:xfrm>
+          <a:prstGeom prst="rect">
+            <a:avLst/>
+          </a:prstGeom>
           <a:noFill/>
           <a:ln/>
         </p:spPr>
@@ -38687,13 +40435,13 @@
             <a:r>
               <a:rPr lang="en-US" sz="1300" b="1" dirty="0">
                 <a:solidFill>
-                  <a:srgbClr val="4C1D95"/>
+                  <a:srgbClr val="9D174D"/>
                 </a:solidFill>
                 <a:latin typeface="Trebuchet MS" pitchFamily="34" charset="0"/>
                 <a:ea typeface="Trebuchet MS" pitchFamily="34" charset="-122"/>
                 <a:cs typeface="Trebuchet MS" pitchFamily="34" charset="-120"/>
               </a:rPr>
-              <a:t>child-</a:t>
+              <a:t>-ee</a:t>
             </a:r>
             <a:endParaRPr lang="en-US" sz="1300" dirty="0"/>
           </a:p>
@@ -38701,20 +40449,45 @@
       </p:sp>
       <p:sp>
         <p:nvSpPr>
-          <p:cNvPr id="35" name="Shape 33"/>
-          <p:cNvSpPr/>
-          <p:nvPr/>
-        </p:nvSpPr>
-        <p:spPr>
-          <a:xfrm>
-            <a:off x="3291840" y="3127248"/>
+          <p:cNvPr id="37" name="Shape 35"/>
+          <p:cNvSpPr/>
+          <p:nvPr/>
+        </p:nvSpPr>
+        <p:spPr>
+          <a:xfrm>
+            <a:off x="640080" y="3584448"/>
+            <a:ext cx="1463040" cy="420624"/>
+          </a:xfrm>
+          <a:prstGeom prst="rect">
+            <a:avLst/>
+          </a:prstGeom>
+          <a:solidFill>
+            <a:srgbClr val="F8FAFC"/>
+          </a:solidFill>
+          <a:ln w="12700">
+            <a:solidFill>
+              <a:srgbClr val="E5E7EB"/>
+            </a:solidFill>
+            <a:prstDash val="solid"/>
+          </a:ln>
+        </p:spPr>
+      </p:sp>
+      <p:sp>
+        <p:nvSpPr>
+          <p:cNvPr id="38" name="Shape 36"/>
+          <p:cNvSpPr/>
+          <p:nvPr/>
+        </p:nvSpPr>
+        <p:spPr>
+          <a:xfrm>
+            <a:off x="3291840" y="3584448"/>
             <a:ext cx="1645920" cy="420624"/>
           </a:xfrm>
           <a:prstGeom prst="rect">
             <a:avLst/>
           </a:prstGeom>
           <a:solidFill>
-            <a:srgbClr val="F1F5F9"/>
+            <a:srgbClr val="F8FAFC"/>
           </a:solidFill>
           <a:ln w="12700">
             <a:solidFill>
@@ -38726,13 +40499,13 @@
       </p:sp>
       <p:sp>
         <p:nvSpPr>
-          <p:cNvPr id="36" name="Shape 34"/>
-          <p:cNvSpPr/>
-          <p:nvPr/>
-        </p:nvSpPr>
-        <p:spPr>
-          <a:xfrm>
-            <a:off x="5943600" y="3127248"/>
+          <p:cNvPr id="39" name="Shape 37"/>
+          <p:cNvSpPr/>
+          <p:nvPr/>
+        </p:nvSpPr>
+        <p:spPr>
+          <a:xfrm>
+            <a:off x="5943600" y="3584448"/>
             <a:ext cx="1463040" cy="420624"/>
           </a:xfrm>
           <a:prstGeom prst="rect">
@@ -38751,13 +40524,13 @@
       </p:sp>
       <p:sp>
         <p:nvSpPr>
-          <p:cNvPr id="37" name="Text 35"/>
-          <p:cNvSpPr/>
-          <p:nvPr/>
-        </p:nvSpPr>
-        <p:spPr>
-          <a:xfrm>
-            <a:off x="5943600" y="3127248"/>
+          <p:cNvPr id="40" name="Text 38"/>
+          <p:cNvSpPr/>
+          <p:nvPr/>
+        </p:nvSpPr>
+        <p:spPr>
+          <a:xfrm>
+            <a:off x="5943600" y="3584448"/>
             <a:ext cx="1463040" cy="420624"/>
           </a:xfrm>
           <a:prstGeom prst="rect">
@@ -38782,7 +40555,7 @@
                 <a:ea typeface="Trebuchet MS" pitchFamily="34" charset="-122"/>
                 <a:cs typeface="Trebuchet MS" pitchFamily="34" charset="-120"/>
               </a:rPr>
-              <a:t>-s</a:t>
+              <a:t>-ly</a:t>
             </a:r>
             <a:endParaRPr lang="en-US" sz="1300" dirty="0"/>
           </a:p>
@@ -38790,20 +40563,20 @@
       </p:sp>
       <p:sp>
         <p:nvSpPr>
-          <p:cNvPr id="38" name="Shape 36"/>
-          <p:cNvSpPr/>
-          <p:nvPr/>
-        </p:nvSpPr>
-        <p:spPr>
-          <a:xfrm>
-            <a:off x="640080" y="3584448"/>
+          <p:cNvPr id="41" name="Shape 39"/>
+          <p:cNvSpPr/>
+          <p:nvPr/>
+        </p:nvSpPr>
+        <p:spPr>
+          <a:xfrm>
+            <a:off x="640080" y="4041648"/>
             <a:ext cx="1463040" cy="420624"/>
           </a:xfrm>
           <a:prstGeom prst="rect">
             <a:avLst/>
           </a:prstGeom>
           <a:solidFill>
-            <a:srgbClr val="DDD6FE"/>
+            <a:srgbClr val="F1F5F9"/>
           </a:solidFill>
           <a:ln w="12700">
             <a:solidFill>
@@ -38815,18 +40588,68 @@
       </p:sp>
       <p:sp>
         <p:nvSpPr>
-          <p:cNvPr id="39" name="Text 37"/>
-          <p:cNvSpPr/>
-          <p:nvPr/>
-        </p:nvSpPr>
-        <p:spPr>
-          <a:xfrm>
-            <a:off x="640080" y="3584448"/>
+          <p:cNvPr id="42" name="Shape 40"/>
+          <p:cNvSpPr/>
+          <p:nvPr/>
+        </p:nvSpPr>
+        <p:spPr>
+          <a:xfrm>
+            <a:off x="3291840" y="4041648"/>
+            <a:ext cx="1645920" cy="420624"/>
+          </a:xfrm>
+          <a:prstGeom prst="rect">
+            <a:avLst/>
+          </a:prstGeom>
+          <a:solidFill>
+            <a:srgbClr val="F1F5F9"/>
+          </a:solidFill>
+          <a:ln w="12700">
+            <a:solidFill>
+              <a:srgbClr val="E5E7EB"/>
+            </a:solidFill>
+            <a:prstDash val="solid"/>
+          </a:ln>
+        </p:spPr>
+      </p:sp>
+      <p:sp>
+        <p:nvSpPr>
+          <p:cNvPr id="43" name="Shape 41"/>
+          <p:cNvSpPr/>
+          <p:nvPr/>
+        </p:nvSpPr>
+        <p:spPr>
+          <a:xfrm>
+            <a:off x="5943600" y="4041648"/>
             <a:ext cx="1463040" cy="420624"/>
           </a:xfrm>
           <a:prstGeom prst="rect">
             <a:avLst/>
           </a:prstGeom>
+          <a:solidFill>
+            <a:srgbClr val="FCE7F3"/>
+          </a:solidFill>
+          <a:ln w="12700">
+            <a:solidFill>
+              <a:srgbClr val="E5E7EB"/>
+            </a:solidFill>
+            <a:prstDash val="solid"/>
+          </a:ln>
+        </p:spPr>
+      </p:sp>
+      <p:sp>
+        <p:nvSpPr>
+          <p:cNvPr id="44" name="Text 42"/>
+          <p:cNvSpPr/>
+          <p:nvPr/>
+        </p:nvSpPr>
+        <p:spPr>
+          <a:xfrm>
+            <a:off x="5943600" y="4041648"/>
+            <a:ext cx="1463040" cy="420624"/>
+          </a:xfrm>
+          <a:prstGeom prst="rect">
+            <a:avLst/>
+          </a:prstGeom>
           <a:noFill/>
           <a:ln/>
         </p:spPr>
@@ -38840,13 +40663,13 @@
             <a:r>
               <a:rPr lang="en-US" sz="1300" b="1" dirty="0">
                 <a:solidFill>
-                  <a:srgbClr val="4C1D95"/>
+                  <a:srgbClr val="9D174D"/>
                 </a:solidFill>
                 <a:latin typeface="Trebuchet MS" pitchFamily="34" charset="0"/>
                 <a:ea typeface="Trebuchet MS" pitchFamily="34" charset="-122"/>
                 <a:cs typeface="Trebuchet MS" pitchFamily="34" charset="-120"/>
               </a:rPr>
-              <a:t>life-</a:t>
+              <a:t>-ness</a:t>
             </a:r>
             <a:endParaRPr lang="en-US" sz="1300" dirty="0"/>
           </a:p>
@@ -38854,102 +40677,13 @@
       </p:sp>
       <p:sp>
         <p:nvSpPr>
-          <p:cNvPr id="40" name="Shape 38"/>
-          <p:cNvSpPr/>
-          <p:nvPr/>
-        </p:nvSpPr>
-        <p:spPr>
-          <a:xfrm>
-            <a:off x="3291840" y="3584448"/>
-            <a:ext cx="1645920" cy="420624"/>
-          </a:xfrm>
-          <a:prstGeom prst="rect">
-            <a:avLst/>
-          </a:prstGeom>
-          <a:solidFill>
-            <a:srgbClr val="F8FAFC"/>
-          </a:solidFill>
-          <a:ln w="12700">
-            <a:solidFill>
-              <a:srgbClr val="E5E7EB"/>
-            </a:solidFill>
-            <a:prstDash val="solid"/>
-          </a:ln>
-        </p:spPr>
-      </p:sp>
-      <p:sp>
-        <p:nvSpPr>
-          <p:cNvPr id="41" name="Shape 39"/>
-          <p:cNvSpPr/>
-          <p:nvPr/>
-        </p:nvSpPr>
-        <p:spPr>
-          <a:xfrm>
-            <a:off x="5943600" y="3584448"/>
-            <a:ext cx="1463040" cy="420624"/>
-          </a:xfrm>
-          <a:prstGeom prst="rect">
-            <a:avLst/>
-          </a:prstGeom>
-          <a:solidFill>
-            <a:srgbClr val="FCE7F3"/>
-          </a:solidFill>
-          <a:ln w="12700">
-            <a:solidFill>
-              <a:srgbClr val="E5E7EB"/>
-            </a:solidFill>
-            <a:prstDash val="solid"/>
-          </a:ln>
-        </p:spPr>
-      </p:sp>
-      <p:sp>
-        <p:nvSpPr>
-          <p:cNvPr id="42" name="Text 40"/>
-          <p:cNvSpPr/>
-          <p:nvPr/>
-        </p:nvSpPr>
-        <p:spPr>
-          <a:xfrm>
-            <a:off x="5943600" y="3584448"/>
-            <a:ext cx="1463040" cy="420624"/>
-          </a:xfrm>
-          <a:prstGeom prst="rect">
-            <a:avLst/>
-          </a:prstGeom>
-          <a:noFill/>
-          <a:ln/>
-        </p:spPr>
-        <p:txBody>
-          <a:bodyPr wrap="square" lIns="0" tIns="0" rIns="0" bIns="0" rtlCol="0" anchor="ctr"/>
-          <a:lstStyle/>
-          <a:p>
-            <a:pPr algn="ctr" indent="0" marL="0">
-              <a:buNone/>
-            </a:pPr>
-            <a:r>
-              <a:rPr lang="en-US" sz="1300" b="1" dirty="0">
-                <a:solidFill>
-                  <a:srgbClr val="9D174D"/>
-                </a:solidFill>
-                <a:latin typeface="Trebuchet MS" pitchFamily="34" charset="0"/>
-                <a:ea typeface="Trebuchet MS" pitchFamily="34" charset="-122"/>
-                <a:cs typeface="Trebuchet MS" pitchFamily="34" charset="-120"/>
-              </a:rPr>
-              <a:t>-able</a:t>
-            </a:r>
-            <a:endParaRPr lang="en-US" sz="1300" dirty="0"/>
-          </a:p>
-        </p:txBody>
-      </p:sp>
-      <p:sp>
-        <p:nvSpPr>
-          <p:cNvPr id="43" name="Text 41"/>
-          <p:cNvSpPr/>
-          <p:nvPr/>
-        </p:nvSpPr>
-        <p:spPr>
-          <a:xfrm>
-            <a:off x="365760" y="4178808"/>
+          <p:cNvPr id="45" name="Text 43"/>
+          <p:cNvSpPr/>
+          <p:nvPr/>
+        </p:nvSpPr>
+        <p:spPr>
+          <a:xfrm>
+            <a:off x="365760" y="4636008"/>
             <a:ext cx="1097280" cy="420624"/>
           </a:xfrm>
           <a:prstGeom prst="rect">
@@ -38982,13 +40716,13 @@
       </p:sp>
       <p:sp>
         <p:nvSpPr>
-          <p:cNvPr id="44" name="Shape 42"/>
-          <p:cNvSpPr/>
-          <p:nvPr/>
-        </p:nvSpPr>
-        <p:spPr>
-          <a:xfrm>
-            <a:off x="1508760" y="4178808"/>
+          <p:cNvPr id="46" name="Shape 44"/>
+          <p:cNvSpPr/>
+          <p:nvPr/>
+        </p:nvSpPr>
+        <p:spPr>
+          <a:xfrm>
+            <a:off x="1508760" y="4636008"/>
             <a:ext cx="822960" cy="420624"/>
           </a:xfrm>
           <a:prstGeom prst="rect">
@@ -39016,13 +40750,13 @@
       </p:sp>
       <p:sp>
         <p:nvSpPr>
-          <p:cNvPr id="45" name="Text 43"/>
-          <p:cNvSpPr/>
-          <p:nvPr/>
-        </p:nvSpPr>
-        <p:spPr>
-          <a:xfrm>
-            <a:off x="1508760" y="4178808"/>
+          <p:cNvPr id="47" name="Text 45"/>
+          <p:cNvSpPr/>
+          <p:nvPr/>
+        </p:nvSpPr>
+        <p:spPr>
+          <a:xfrm>
+            <a:off x="1508760" y="4636008"/>
             <a:ext cx="822960" cy="420624"/>
           </a:xfrm>
           <a:prstGeom prst="rect">
@@ -39047,7 +40781,7 @@
                 <a:ea typeface="Trebuchet MS" pitchFamily="34" charset="-122"/>
                 <a:cs typeface="Trebuchet MS" pitchFamily="34" charset="-120"/>
               </a:rPr>
-              <a:t>un-</a:t>
+              <a:t>a-</a:t>
             </a:r>
             <a:endParaRPr lang="en-US" sz="1300" dirty="0"/>
           </a:p>
@@ -39055,13 +40789,13 @@
       </p:sp>
       <p:sp>
         <p:nvSpPr>
-          <p:cNvPr id="46" name="Text 44"/>
-          <p:cNvSpPr/>
-          <p:nvPr/>
-        </p:nvSpPr>
-        <p:spPr>
-          <a:xfrm>
-            <a:off x="2359152" y="4178808"/>
+          <p:cNvPr id="48" name="Text 46"/>
+          <p:cNvSpPr/>
+          <p:nvPr/>
+        </p:nvSpPr>
+        <p:spPr>
+          <a:xfrm>
+            <a:off x="2359152" y="4636008"/>
             <a:ext cx="320040" cy="420624"/>
           </a:xfrm>
           <a:prstGeom prst="rect">
@@ -39094,13 +40828,13 @@
       </p:sp>
       <p:sp>
         <p:nvSpPr>
-          <p:cNvPr id="47" name="Shape 45"/>
-          <p:cNvSpPr/>
-          <p:nvPr/>
-        </p:nvSpPr>
-        <p:spPr>
-          <a:xfrm>
-            <a:off x="2706624" y="4178808"/>
+          <p:cNvPr id="49" name="Shape 47"/>
+          <p:cNvSpPr/>
+          <p:nvPr/>
+        </p:nvSpPr>
+        <p:spPr>
+          <a:xfrm>
+            <a:off x="2706624" y="4636008"/>
             <a:ext cx="1243584" cy="420624"/>
           </a:xfrm>
           <a:prstGeom prst="rect">
@@ -39128,13 +40862,13 @@
       </p:sp>
       <p:sp>
         <p:nvSpPr>
-          <p:cNvPr id="48" name="Text 46"/>
-          <p:cNvSpPr/>
-          <p:nvPr/>
-        </p:nvSpPr>
-        <p:spPr>
-          <a:xfrm>
-            <a:off x="2706624" y="4178808"/>
+          <p:cNvPr id="50" name="Text 48"/>
+          <p:cNvSpPr/>
+          <p:nvPr/>
+        </p:nvSpPr>
+        <p:spPr>
+          <a:xfrm>
+            <a:off x="2706624" y="4636008"/>
             <a:ext cx="1243584" cy="420624"/>
           </a:xfrm>
           <a:prstGeom prst="rect">
@@ -39167,13 +40901,13 @@
       </p:sp>
       <p:sp>
         <p:nvSpPr>
-          <p:cNvPr id="49" name="Text 47"/>
-          <p:cNvSpPr/>
-          <p:nvPr/>
-        </p:nvSpPr>
-        <p:spPr>
-          <a:xfrm>
-            <a:off x="3977640" y="4178808"/>
+          <p:cNvPr id="51" name="Text 49"/>
+          <p:cNvSpPr/>
+          <p:nvPr/>
+        </p:nvSpPr>
+        <p:spPr>
+          <a:xfrm>
+            <a:off x="3977640" y="4636008"/>
             <a:ext cx="320040" cy="420624"/>
           </a:xfrm>
           <a:prstGeom prst="rect">
@@ -39206,13 +40940,13 @@
       </p:sp>
       <p:sp>
         <p:nvSpPr>
-          <p:cNvPr id="50" name="Shape 48"/>
-          <p:cNvSpPr/>
-          <p:nvPr/>
-        </p:nvSpPr>
-        <p:spPr>
-          <a:xfrm>
-            <a:off x="4325112" y="4178808"/>
+          <p:cNvPr id="52" name="Shape 50"/>
+          <p:cNvSpPr/>
+          <p:nvPr/>
+        </p:nvSpPr>
+        <p:spPr>
+          <a:xfrm>
+            <a:off x="4325112" y="4636008"/>
             <a:ext cx="822960" cy="420624"/>
           </a:xfrm>
           <a:prstGeom prst="rect">
@@ -39240,13 +40974,13 @@
       </p:sp>
       <p:sp>
         <p:nvSpPr>
-          <p:cNvPr id="51" name="Text 49"/>
-          <p:cNvSpPr/>
-          <p:nvPr/>
-        </p:nvSpPr>
-        <p:spPr>
-          <a:xfrm>
-            <a:off x="4325112" y="4178808"/>
+          <p:cNvPr id="53" name="Text 51"/>
+          <p:cNvSpPr/>
+          <p:nvPr/>
+        </p:nvSpPr>
+        <p:spPr>
+          <a:xfrm>
+            <a:off x="4325112" y="4636008"/>
             <a:ext cx="822960" cy="420624"/>
           </a:xfrm>
           <a:prstGeom prst="rect">
@@ -39271,7 +41005,7 @@
                 <a:ea typeface="Trebuchet MS" pitchFamily="34" charset="-122"/>
                 <a:cs typeface="Trebuchet MS" pitchFamily="34" charset="-120"/>
               </a:rPr>
-              <a:t>-ly</a:t>
+              <a:t>-ed</a:t>
             </a:r>
             <a:endParaRPr lang="en-US" sz="1300" dirty="0"/>
           </a:p>
@@ -39279,13 +41013,13 @@
       </p:sp>
       <p:sp>
         <p:nvSpPr>
-          <p:cNvPr id="52" name="Text 50"/>
-          <p:cNvSpPr/>
-          <p:nvPr/>
-        </p:nvSpPr>
-        <p:spPr>
-          <a:xfrm>
-            <a:off x="5221224" y="4178808"/>
+          <p:cNvPr id="54" name="Text 52"/>
+          <p:cNvSpPr/>
+          <p:nvPr/>
+        </p:nvSpPr>
+        <p:spPr>
+          <a:xfrm>
+            <a:off x="5221224" y="4636008"/>
             <a:ext cx="365760" cy="420624"/>
           </a:xfrm>
           <a:prstGeom prst="rect">
@@ -39318,13 +41052,13 @@
       </p:sp>
       <p:sp>
         <p:nvSpPr>
-          <p:cNvPr id="53" name="Shape 51"/>
-          <p:cNvSpPr/>
-          <p:nvPr/>
-        </p:nvSpPr>
-        <p:spPr>
-          <a:xfrm>
-            <a:off x="5632704" y="4178808"/>
+          <p:cNvPr id="55" name="Shape 53"/>
+          <p:cNvSpPr/>
+          <p:nvPr/>
+        </p:nvSpPr>
+        <p:spPr>
+          <a:xfrm>
+            <a:off x="5632704" y="4636008"/>
             <a:ext cx="2194560" cy="420624"/>
           </a:xfrm>
           <a:prstGeom prst="rect">
@@ -39345,13 +41079,13 @@
       </p:sp>
       <p:sp>
         <p:nvSpPr>
-          <p:cNvPr id="54" name="Text 52"/>
-          <p:cNvSpPr/>
-          <p:nvPr/>
-        </p:nvSpPr>
-        <p:spPr>
-          <a:xfrm>
-            <a:off x="5632704" y="4178808"/>
+          <p:cNvPr id="56" name="Text 54"/>
+          <p:cNvSpPr/>
+          <p:nvPr/>
+        </p:nvSpPr>
+        <p:spPr>
+          <a:xfrm>
+            <a:off x="5632704" y="4636008"/>
             <a:ext cx="2194560" cy="420624"/>
           </a:xfrm>
           <a:prstGeom prst="rect">
@@ -39376,7 +41110,7 @@
                 <a:ea typeface="Trebuchet MS" pitchFamily="34" charset="-122"/>
                 <a:cs typeface="Trebuchet MS" pitchFamily="34" charset="-120"/>
               </a:rPr>
-              <a:t>likewise</a:t>
+              <a:t>like</a:t>
             </a:r>
             <a:endParaRPr lang="en-US" sz="1400" dirty="0"/>
           </a:p>
@@ -39668,7 +41402,7 @@
                 <a:ea typeface="Calibri" pitchFamily="34" charset="-122"/>
                 <a:cs typeface="Calibri" pitchFamily="34" charset="-120"/>
               </a:rPr>
-              <a:t>Word Labs  •  wordlabs.app  •  Root: 'like' = similar to, resembling</a:t>
+              <a:t>Word Labs  •  wordlabs.app  •  Root: 'like' = to enjoy; to prefer</a:t>
             </a:r>
             <a:endParaRPr lang="en-US" sz="800" dirty="0"/>
           </a:p>
@@ -39780,7 +41514,7 @@
                 <a:ea typeface="Trebuchet MS" pitchFamily="34" charset="-122"/>
                 <a:cs typeface="Trebuchet MS" pitchFamily="34" charset="-120"/>
               </a:rPr>
-              <a:t>likewise</a:t>
+              <a:t>like</a:t>
             </a:r>
             <a:endParaRPr lang="en-US" sz="1200" dirty="0"/>
           </a:p>
@@ -39846,7 +41580,7 @@
                 <a:ea typeface="Calibri" pitchFamily="34" charset="-122"/>
                 <a:cs typeface="Calibri" pitchFamily="34" charset="-120"/>
               </a:rPr>
-              <a:t>In the same way; doing something similar to what someone else did.</a:t>
+              <a:t>to enjoy or feel fond of something</a:t>
             </a:r>
             <a:endParaRPr lang="en-US" sz="1200" dirty="0"/>
           </a:p>
@@ -39919,7 +41653,7 @@
                 <a:ea typeface="Trebuchet MS" pitchFamily="34" charset="-122"/>
                 <a:cs typeface="Trebuchet MS" pitchFamily="34" charset="-120"/>
               </a:rPr>
-              <a:t>lifelike</a:t>
+              <a:t>liked</a:t>
             </a:r>
             <a:endParaRPr lang="en-US" sz="1200" dirty="0"/>
           </a:p>
@@ -39985,7 +41719,7 @@
                 <a:ea typeface="Calibri" pitchFamily="34" charset="-122"/>
                 <a:cs typeface="Calibri" pitchFamily="34" charset="-120"/>
               </a:rPr>
-              <a:t>Having qualities that seem as powerful or amazing as a god.</a:t>
+              <a:t>a feeling of not liking something or someone</a:t>
             </a:r>
             <a:endParaRPr lang="en-US" sz="1200" dirty="0"/>
           </a:p>
@@ -40058,7 +41792,7 @@
                 <a:ea typeface="Trebuchet MS" pitchFamily="34" charset="-122"/>
                 <a:cs typeface="Trebuchet MS" pitchFamily="34" charset="-120"/>
               </a:rPr>
-              <a:t>childlike</a:t>
+              <a:t>likes</a:t>
             </a:r>
             <a:endParaRPr lang="en-US" sz="1200" dirty="0"/>
           </a:p>
@@ -40124,7 +41858,7 @@
                 <a:ea typeface="Calibri" pitchFamily="34" charset="-122"/>
                 <a:cs typeface="Calibri" pitchFamily="34" charset="-120"/>
               </a:rPr>
-              <a:t>Having the innocent, simple qualities of a young child.</a:t>
+              <a:t>enjoys or feels fond of (used with he, she, or it)</a:t>
             </a:r>
             <a:endParaRPr lang="en-US" sz="1200" dirty="0"/>
           </a:p>
@@ -40197,7 +41931,7 @@
                 <a:ea typeface="Trebuchet MS" pitchFamily="34" charset="-122"/>
                 <a:cs typeface="Trebuchet MS" pitchFamily="34" charset="-120"/>
               </a:rPr>
-              <a:t>dislike</a:t>
+              <a:t>likely</a:t>
             </a:r>
             <a:endParaRPr lang="en-US" sz="1200" dirty="0"/>
           </a:p>
@@ -40263,7 +41997,7 @@
                 <a:ea typeface="Calibri" pitchFamily="34" charset="-122"/>
                 <a:cs typeface="Calibri" pitchFamily="34" charset="-120"/>
               </a:rPr>
-              <a:t>Not likely to happen; probably not going to occur.</a:t>
+              <a:t>a feeling of enjoying or being fond of something</a:t>
             </a:r>
             <a:endParaRPr lang="en-US" sz="1200" dirty="0"/>
           </a:p>
@@ -40336,7 +42070,7 @@
                 <a:ea typeface="Trebuchet MS" pitchFamily="34" charset="-122"/>
                 <a:cs typeface="Trebuchet MS" pitchFamily="34" charset="-120"/>
               </a:rPr>
-              <a:t>unlikely</a:t>
+              <a:t>liking</a:t>
             </a:r>
             <a:endParaRPr lang="en-US" sz="1200" dirty="0"/>
           </a:p>
@@ -40402,7 +42136,7 @@
                 <a:ea typeface="Calibri" pitchFamily="34" charset="-122"/>
                 <a:cs typeface="Calibri" pitchFamily="34" charset="-120"/>
               </a:rPr>
-              <a:t>To not enjoy or have a bad feeling about something.</a:t>
+              <a:t>probably going to happen</a:t>
             </a:r>
             <a:endParaRPr lang="en-US" sz="1200" dirty="0"/>
           </a:p>
@@ -40475,7 +42209,7 @@
                 <a:ea typeface="Trebuchet MS" pitchFamily="34" charset="-122"/>
                 <a:cs typeface="Trebuchet MS" pitchFamily="34" charset="-120"/>
               </a:rPr>
-              <a:t>warlike</a:t>
+              <a:t>unlike</a:t>
             </a:r>
             <a:endParaRPr lang="en-US" sz="1200" dirty="0"/>
           </a:p>
@@ -40541,7 +42275,7 @@
                 <a:ea typeface="Calibri" pitchFamily="34" charset="-122"/>
                 <a:cs typeface="Calibri" pitchFamily="34" charset="-120"/>
               </a:rPr>
-              <a:t>Ready and eager to fight; acting in an aggressive, fighting way.</a:t>
+              <a:t>different from; not similar to</a:t>
             </a:r>
             <a:endParaRPr lang="en-US" sz="1200" dirty="0"/>
           </a:p>
@@ -40614,7 +42348,7 @@
                 <a:ea typeface="Trebuchet MS" pitchFamily="34" charset="-122"/>
                 <a:cs typeface="Trebuchet MS" pitchFamily="34" charset="-120"/>
               </a:rPr>
-              <a:t>godlike</a:t>
+              <a:t>dislike</a:t>
             </a:r>
             <a:endParaRPr lang="en-US" sz="1200" dirty="0"/>
           </a:p>
@@ -40680,7 +42414,7 @@
                 <a:ea typeface="Calibri" pitchFamily="34" charset="-122"/>
                 <a:cs typeface="Calibri" pitchFamily="34" charset="-120"/>
               </a:rPr>
-              <a:t>Looking so real it seems alive, like a very realistic painting or statue.</a:t>
+              <a:t>enjoyed or felt fond of something in the past</a:t>
             </a:r>
             <a:endParaRPr lang="en-US" sz="1200" dirty="0"/>
           </a:p>
@@ -40972,7 +42706,7 @@
                 <a:ea typeface="Calibri" pitchFamily="34" charset="-122"/>
                 <a:cs typeface="Calibri" pitchFamily="34" charset="-120"/>
               </a:rPr>
-              <a:t>Word Labs  •  wordlabs.app  •  Root: 'like' = similar to, resembling</a:t>
+              <a:t>Word Labs  •  wordlabs.app  •  Root: 'like' = to enjoy; to prefer</a:t>
             </a:r>
             <a:endParaRPr lang="en-US" sz="800" dirty="0"/>
           </a:p>
@@ -41175,7 +42909,7 @@
                 <a:ea typeface="Calibri" pitchFamily="34" charset="-122"/>
                 <a:cs typeface="Calibri" pitchFamily="34" charset="-120"/>
               </a:rPr>
-              <a:t>The sculptor created a lifelike statue of a horse that looked as though it might gallop away.</a:t>
+              <a:t>I like reading books on rainy days.</a:t>
             </a:r>
             <a:endParaRPr lang="en-US" sz="1500" dirty="0"/>
           </a:p>
@@ -41339,7 +43073,7 @@
                 <a:ea typeface="Calibri" pitchFamily="34" charset="-122"/>
                 <a:cs typeface="Calibri" pitchFamily="34" charset="-120"/>
               </a:rPr>
-              <a:t>Sarah felt a childlike excitement when she arrived at the zoo for the very first time.</a:t>
+              <a:t>She liked the movie so much that she watched it twice.</a:t>
             </a:r>
             <a:endParaRPr lang="en-US" sz="1500" dirty="0"/>
           </a:p>
@@ -41503,7 +43237,7 @@
                 <a:ea typeface="Calibri" pitchFamily="34" charset="-122"/>
                 <a:cs typeface="Calibri" pitchFamily="34" charset="-120"/>
               </a:rPr>
-              <a:t>It is unlikely that we will have school on a Saturday, so enjoy your weekend!</a:t>
+              <a:t>She likes chocolate ice cream more than vanilla.</a:t>
             </a:r>
             <a:endParaRPr lang="en-US" sz="1500" dirty="0"/>
           </a:p>
